--- a/lecons/LSA/Meteorology/11_LSA_MET_L11_Forms_of_Condensation_and_Precipitation.pptx
+++ b/lecons/LSA/Meteorology/11_LSA_MET_L11_Forms_of_Condensation_and_Precipitation.pptx
@@ -66,9 +66,17 @@
     <p:sldId id="314" r:id="rId60"/>
     <p:sldId id="315" r:id="rId61"/>
     <p:sldId id="316" r:id="rId62"/>
+    <p:sldId id="317" r:id="rId63"/>
+    <p:sldId id="318" r:id="rId64"/>
+    <p:sldId id="319" r:id="rId65"/>
+    <p:sldId id="320" r:id="rId66"/>
+    <p:sldId id="321" r:id="rId67"/>
+    <p:sldId id="322" r:id="rId68"/>
+    <p:sldId id="323" r:id="rId69"/>
+    <p:sldId id="324" r:id="rId70"/>
   </p:sldIdLst>
   <p:notesMasterIdLst>
-    <p:notesMasterId r:id="rId63"/>
+    <p:notesMasterId r:id="rId71"/>
   </p:notesMasterIdLst>
   <p:sldSz cx="12192000" cy="6858000"/>
   <p:notesSz cx="6858000" cy="12192000"/>
@@ -3378,7 +3386,7 @@
           <a:p>
             <a:r>
               <a:rPr lang="en-US" dirty="0"/>
-              <a:t>Let us copy Forms of Condensation. Condensation takes the following forms. Copy the point on Clouds on the left, then draw the diagram on the right: the main types of clouds. Give it a title and label it clearly.</a:t>
+              <a:t>Let us copy How Clouds Form. Clouds form in the following way. Copy the point on Cooling of rising air on the left, then draw the diagram on the right: the types of clouds. Give it a title and label it clearly.</a:t>
             </a:r>
             <a:endParaRPr lang="en-US" dirty="0"/>
           </a:p>
@@ -3554,7 +3562,7 @@
           <a:p>
             <a:r>
               <a:rPr lang="en-US" dirty="0"/>
-              <a:t>Copy the point on Cumulus on the left, then draw the diagram on the right: cumulus clouds. Give it a title and label it clearly.</a:t>
+              <a:t>We continue with How Clouds Form. Copy the point on Condensation on nuclei: write the key term first, then its explanation.</a:t>
             </a:r>
             <a:endParaRPr lang="en-US" dirty="0"/>
           </a:p>
@@ -3642,7 +3650,7 @@
           <a:p>
             <a:r>
               <a:rPr lang="en-US" dirty="0"/>
-              <a:t>Copy the point on Cumulonimbus on the left, then draw the diagram on the right: a cumulonimbus. Give it a title and label it clearly.</a:t>
+              <a:t>Let us copy Classification and Associated Weather. Clouds are classified by height and shape, and each type announces the following weather. Copy the point on High clouds (above 6,000 m): write the key term first, then its explanation.</a:t>
             </a:r>
             <a:endParaRPr lang="en-US" dirty="0"/>
           </a:p>
@@ -3730,7 +3738,7 @@
           <a:p>
             <a:r>
               <a:rPr lang="en-US" dirty="0"/>
-              <a:t>We continue with Forms of Condensation. On this slide we have Stratus, Cirrus and Fog and mist. Write each point on a new line, with the key term first, and explain it in your own words when we revise.</a:t>
+              <a:t>We continue with Classification and Associated Weather. Copy the point on Middle clouds (2,000 to 6,000 m): write the key term first, then its explanation.</a:t>
             </a:r>
             <a:endParaRPr lang="en-US" dirty="0"/>
           </a:p>
@@ -3818,7 +3826,7 @@
           <a:p>
             <a:r>
               <a:rPr lang="en-US" dirty="0"/>
-              <a:t>Let us copy Forms of Precipitation. Precipitation takes the following forms. Copy the point on Dew on the left, then draw the diagram on the right: dew. Give it a title and label it clearly.</a:t>
+              <a:t>We continue with Classification and Associated Weather. Copy the point on Low clouds (below 2,000 m): write the key term first, then its explanation.</a:t>
             </a:r>
             <a:endParaRPr lang="en-US" dirty="0"/>
           </a:p>
@@ -3906,7 +3914,7 @@
           <a:p>
             <a:r>
               <a:rPr lang="en-US" dirty="0"/>
-              <a:t>We continue with Forms of Precipitation. On this slide we have Drizzle and Rain. Write each point on a new line, with the key term first, and explain it in your own words when we revise.</a:t>
+              <a:t>Copy the point on Clouds of vertical development on the left, then draw the diagram on the right: a cumulonimbus cloud. Give it a title and label it clearly.</a:t>
             </a:r>
             <a:endParaRPr lang="en-US" dirty="0"/>
           </a:p>
@@ -3994,7 +4002,7 @@
           <a:p>
             <a:r>
               <a:rPr lang="en-US" dirty="0"/>
-              <a:t>Copy the point on Hail on the left, then draw the diagram on the right: hailstones. Give it a title and label it clearly.</a:t>
+              <a:t>Let us copy Fog and Mist. Fog and mist are distinguished as follows. Copy the point on Fog on the left, then draw the diagram on the right: fog. Give it a title and label it clearly.</a:t>
             </a:r>
             <a:endParaRPr lang="en-US" dirty="0"/>
           </a:p>
@@ -4082,7 +4090,7 @@
           <a:p>
             <a:r>
               <a:rPr lang="en-US" dirty="0"/>
-              <a:t>We continue with Forms of Precipitation. On this slide we have Snow and frost. Write each point on a new line, with the key term first, and explain it in your own words when we revise.</a:t>
+              <a:t>We continue with Fog and Mist. Copy the point on Mist: write the key term first, then its explanation.</a:t>
             </a:r>
             <a:endParaRPr lang="en-US" dirty="0"/>
           </a:p>
@@ -4170,7 +4178,7 @@
           <a:p>
             <a:r>
               <a:rPr lang="en-US" dirty="0"/>
-              <a:t>Copy the point on Summary on the left, then draw the diagram on the right: forms of precipitation. Give it a title and label it clearly.</a:t>
+              <a:t>Let us copy Solid Forms. The solid forms of precipitation are the following. Copy the point on Snow on the left, then draw the diagram on the right: snow. Give it a title and label it clearly.</a:t>
             </a:r>
             <a:endParaRPr lang="en-US" dirty="0"/>
           </a:p>
@@ -4258,7 +4266,7 @@
           <a:p>
             <a:r>
               <a:rPr lang="en-US" dirty="0"/>
-              <a:t>Let us copy Types of Rainfall. The main types of rainfall are the following. Copy the point on Convectional rainfall on the left, then draw the diagram on the right: three types of rainfall. Give it a title and label it clearly.</a:t>
+              <a:t>We continue with Solid Forms. Copy the point on Sleet: write the key term first, then its explanation.</a:t>
             </a:r>
             <a:endParaRPr lang="en-US" dirty="0"/>
           </a:p>
@@ -4346,7 +4354,7 @@
           <a:p>
             <a:r>
               <a:rPr lang="en-US" dirty="0"/>
-              <a:t>We continue with Types of Rainfall. On this slide we have Orographic (relief) rainfall and Frontal (cyclonic) rainfall. Write each point on a new line, with the key term first, and explain it in your own words when we revise.</a:t>
+              <a:t>Copy the point on Hail on the left, then draw the diagram on the right: hailstones. Give it a title and label it clearly.</a:t>
             </a:r>
             <a:endParaRPr lang="en-US" dirty="0"/>
           </a:p>
@@ -4522,7 +4530,7 @@
           <a:p>
             <a:r>
               <a:rPr lang="en-US" dirty="0"/>
-              <a:t>Now let us check what you have understood. Question 1: Explain how a hot sunny day in Garoua can lead to a heavy afternoon storm. Answer in your exercise book.</a:t>
+              <a:t>Copy the point on Frost and rime on the left, then draw the diagram on the right: frost. Give it a title and label it clearly.</a:t>
             </a:r>
             <a:endParaRPr lang="en-US" dirty="0"/>
           </a:p>
@@ -4610,7 +4618,7 @@
           <a:p>
             <a:r>
               <a:rPr lang="en-US" dirty="0"/>
-              <a:t>The expected answer is: the ground heats the air, which rises quickly, cools and condenses into a cumulonimbus that gives convectional rain. If you got it right, well done.</a:t>
+              <a:t>Let us copy Liquid Forms. The liquid forms of precipitation are the following. Copy the point on Dew on the left, then draw the diagram on the right: dew. Give it a title and label it clearly.</a:t>
             </a:r>
             <a:endParaRPr lang="en-US" dirty="0"/>
           </a:p>
@@ -4698,7 +4706,7 @@
           <a:p>
             <a:r>
               <a:rPr lang="en-US" dirty="0"/>
-              <a:t>Now let us check what you have understood. Question 2: Distinguish dew from drizzle. Answer in your exercise book.</a:t>
+              <a:t>We continue with Liquid Forms. Copy the point on Drizzle: write the key term first, then its explanation.</a:t>
             </a:r>
             <a:endParaRPr lang="en-US" dirty="0"/>
           </a:p>
@@ -4786,7 +4794,7 @@
           <a:p>
             <a:r>
               <a:rPr lang="en-US" dirty="0"/>
-              <a:t>The expected answer is: dew is condensation on cool surfaces; drizzle is fine rain falling from clouds. If you got it right, well done.</a:t>
+              <a:t>Copy the point on Rainfall (formation process) on the left, then draw the diagram on the right: heavy rain. Give it a title and label it clearly.</a:t>
             </a:r>
             <a:endParaRPr lang="en-US" dirty="0"/>
           </a:p>
@@ -4874,7 +4882,7 @@
           <a:p>
             <a:r>
               <a:rPr lang="en-US" dirty="0"/>
-              <a:t>For those who need more practice, fill in the blanks in your exercise book. The answers are: number 1, cumulonimbus; number 2, shadow; number 3, frontal (cyclonic).</a:t>
+              <a:t>Let us copy Types of Rainfall. Rainfall is classified into the following three types according to how the air is made to rise. Copy the point on Convectional rainfall on the left, then draw the diagram on the right: the three types of rainfall. Give it a title and label it clearly.</a:t>
             </a:r>
             <a:endParaRPr lang="en-US" dirty="0"/>
           </a:p>
@@ -4962,7 +4970,7 @@
           <a:p>
             <a:r>
               <a:rPr lang="en-US" dirty="0"/>
-              <a:t>For your homework: Name the world's wettest belt of latitude. We shall correct it at the beginning of our next lesson.</a:t>
+              <a:t>We continue with Types of Rainfall. Copy the point on Orographic (relief) rainfall: write the key term first, then its explanation.</a:t>
             </a:r>
             <a:endParaRPr lang="en-US" dirty="0"/>
           </a:p>
@@ -5050,7 +5058,7 @@
           <a:p>
             <a:r>
               <a:rPr lang="en-US" dirty="0"/>
-              <a:t>Our next lesson will be on Lesson 12: Global Distribution of Precipitation. Thank you for your attention, and see you next time.</a:t>
+              <a:t>We continue with Types of Rainfall. Copy the point on Cyclonic (frontal) rainfall: write the key term first, then its explanation.</a:t>
             </a:r>
             <a:endParaRPr lang="en-US" dirty="0"/>
           </a:p>
@@ -5138,7 +5146,7 @@
           <a:p>
             <a:r>
               <a:rPr lang="en-US" dirty="0"/>
-              <a:t>Let us play the bilingual game. I say a word in English, and you give me the French word. Then we do the reverse.</a:t>
+              <a:t>Now let us check what you have understood. Question 1: Explain how a hot sunny day in Garoua can lead to a heavy afternoon storm. Answer in your exercise book.</a:t>
             </a:r>
             <a:endParaRPr lang="en-US" dirty="0"/>
           </a:p>
@@ -5226,7 +5234,7 @@
           <a:p>
             <a:r>
               <a:rPr lang="en-US" dirty="0"/>
-              <a:t>I record this information in the official logbook of the class after the lesson.</a:t>
+              <a:t>The expected answer is: the ground heats the air, which rises quickly, cools and condenses into a cumulonimbus that gives convectional rain. If you got it right, well done.</a:t>
             </a:r>
             <a:endParaRPr lang="en-US" dirty="0"/>
           </a:p>
@@ -5314,7 +5322,7 @@
           <a:p>
             <a:r>
               <a:rPr lang="en-US" dirty="0"/>
-              <a:t>I complete the second page of the logbook: the matter taught, the evaluation, the homework and the attendance.</a:t>
+              <a:t>Now let us check what you have understood. Question 2: Distinguish dew from drizzle. Answer in your exercise book.</a:t>
             </a:r>
             <a:endParaRPr lang="en-US" dirty="0"/>
           </a:p>
@@ -5490,7 +5498,7 @@
           <a:p>
             <a:r>
               <a:rPr lang="en-US" dirty="0"/>
-              <a:t>This slide is for me, the teacher: it gives the timing of the lesson and what to do if the projector is not available.</a:t>
+              <a:t>The expected answer is: dew is condensation on cool surfaces; drizzle is fine rain falling from clouds. If you got it right, well done.</a:t>
             </a:r>
             <a:endParaRPr lang="en-US" dirty="0"/>
           </a:p>
@@ -5578,7 +5586,7 @@
           <a:p>
             <a:r>
               <a:rPr lang="en-US" dirty="0"/>
-              <a:t>These are the references and picture credits used to prepare this lesson.</a:t>
+              <a:t>For those who need more practice, fill in the blanks in your exercise book. The answers are: number 1, cumulonimbus; number 2, shadow; number 3, frontal (cyclonic).</a:t>
             </a:r>
             <a:endParaRPr lang="en-US" dirty="0"/>
           </a:p>
@@ -5602,6 +5610,710 @@
             <a:fld id="{F7021451-1387-4CA6-816F-3879F97B5CBC}" type="slidenum">
               <a:rPr lang="en-US"/>
               <a:t>61</a:t>
+            </a:fld>
+            <a:endParaRPr lang="en-US"/>
+          </a:p>
+        </p:txBody>
+      </p:sp>
+    </p:spTree>
+    <p:extLst>
+      <p:ext uri="{BB962C8B-B14F-4D97-AF65-F5344CB8AC3E}">
+        <p14:creationId xmlns:p14="http://schemas.microsoft.com/office/powerpoint/2010/main" val="1024086991"/>
+      </p:ext>
+    </p:extLst>
+  </p:cSld>
+  <p:clrMapOvr>
+    <a:masterClrMapping/>
+  </p:clrMapOvr>
+</p:notes>
+</file>
+
+<file path=ppt/notesSlides/notesSlide62.xml><?xml version="1.0" encoding="utf-8"?>
+<p:notes xmlns:a="http://schemas.openxmlformats.org/drawingml/2006/main" xmlns:r="http://schemas.openxmlformats.org/officeDocument/2006/relationships" xmlns:p="http://schemas.openxmlformats.org/presentationml/2006/main">
+  <p:cSld>
+    <p:spTree>
+      <p:nvGrpSpPr>
+        <p:cNvPr id="1" name=""/>
+        <p:cNvGrpSpPr/>
+        <p:nvPr/>
+      </p:nvGrpSpPr>
+      <p:grpSpPr>
+        <a:xfrm>
+          <a:off x="0" y="0"/>
+          <a:ext cx="0" cy="0"/>
+          <a:chOff x="0" y="0"/>
+          <a:chExt cx="0" cy="0"/>
+        </a:xfrm>
+      </p:grpSpPr>
+      <p:sp>
+        <p:nvSpPr>
+          <p:cNvPr id="2" name="Slide Image Placeholder 1"/>
+          <p:cNvSpPr>
+            <a:spLocks noGrp="1" noRot="1" noChangeAspect="1"/>
+          </p:cNvSpPr>
+          <p:nvPr>
+            <p:ph type="sldImg"/>
+          </p:nvPr>
+        </p:nvSpPr>
+        <p:spPr/>
+      </p:sp>
+      <p:sp>
+        <p:nvSpPr>
+          <p:cNvPr id="3" name="Notes Placeholder 2"/>
+          <p:cNvSpPr>
+            <a:spLocks noGrp="1"/>
+          </p:cNvSpPr>
+          <p:nvPr>
+            <p:ph type="body" idx="1"/>
+          </p:nvPr>
+        </p:nvSpPr>
+        <p:spPr/>
+        <p:txBody>
+          <a:bodyPr/>
+          <a:lstStyle/>
+          <a:p>
+            <a:r>
+              <a:rPr lang="en-US" dirty="0"/>
+              <a:t>For your homework: Name the world's wettest belt of latitude. We shall correct it at the beginning of our next lesson.</a:t>
+            </a:r>
+            <a:endParaRPr lang="en-US" dirty="0"/>
+          </a:p>
+        </p:txBody>
+      </p:sp>
+      <p:sp>
+        <p:nvSpPr>
+          <p:cNvPr id="4" name="Slide Number Placeholder 3"/>
+          <p:cNvSpPr>
+            <a:spLocks noGrp="1"/>
+          </p:cNvSpPr>
+          <p:nvPr>
+            <p:ph type="sldNum" sz="quarter" idx="10"/>
+          </p:nvPr>
+        </p:nvSpPr>
+        <p:spPr/>
+        <p:txBody>
+          <a:bodyPr/>
+          <a:lstStyle/>
+          <a:p>
+            <a:fld id="{F7021451-1387-4CA6-816F-3879F97B5CBC}" type="slidenum">
+              <a:rPr lang="en-US"/>
+              <a:t>62</a:t>
+            </a:fld>
+            <a:endParaRPr lang="en-US"/>
+          </a:p>
+        </p:txBody>
+      </p:sp>
+    </p:spTree>
+    <p:extLst>
+      <p:ext uri="{BB962C8B-B14F-4D97-AF65-F5344CB8AC3E}">
+        <p14:creationId xmlns:p14="http://schemas.microsoft.com/office/powerpoint/2010/main" val="1024086991"/>
+      </p:ext>
+    </p:extLst>
+  </p:cSld>
+  <p:clrMapOvr>
+    <a:masterClrMapping/>
+  </p:clrMapOvr>
+</p:notes>
+</file>
+
+<file path=ppt/notesSlides/notesSlide63.xml><?xml version="1.0" encoding="utf-8"?>
+<p:notes xmlns:a="http://schemas.openxmlformats.org/drawingml/2006/main" xmlns:r="http://schemas.openxmlformats.org/officeDocument/2006/relationships" xmlns:p="http://schemas.openxmlformats.org/presentationml/2006/main">
+  <p:cSld>
+    <p:spTree>
+      <p:nvGrpSpPr>
+        <p:cNvPr id="1" name=""/>
+        <p:cNvGrpSpPr/>
+        <p:nvPr/>
+      </p:nvGrpSpPr>
+      <p:grpSpPr>
+        <a:xfrm>
+          <a:off x="0" y="0"/>
+          <a:ext cx="0" cy="0"/>
+          <a:chOff x="0" y="0"/>
+          <a:chExt cx="0" cy="0"/>
+        </a:xfrm>
+      </p:grpSpPr>
+      <p:sp>
+        <p:nvSpPr>
+          <p:cNvPr id="2" name="Slide Image Placeholder 1"/>
+          <p:cNvSpPr>
+            <a:spLocks noGrp="1" noRot="1" noChangeAspect="1"/>
+          </p:cNvSpPr>
+          <p:nvPr>
+            <p:ph type="sldImg"/>
+          </p:nvPr>
+        </p:nvSpPr>
+        <p:spPr/>
+      </p:sp>
+      <p:sp>
+        <p:nvSpPr>
+          <p:cNvPr id="3" name="Notes Placeholder 2"/>
+          <p:cNvSpPr>
+            <a:spLocks noGrp="1"/>
+          </p:cNvSpPr>
+          <p:nvPr>
+            <p:ph type="body" idx="1"/>
+          </p:nvPr>
+        </p:nvSpPr>
+        <p:spPr/>
+        <p:txBody>
+          <a:bodyPr/>
+          <a:lstStyle/>
+          <a:p>
+            <a:r>
+              <a:rPr lang="en-US" dirty="0"/>
+              <a:t>Our next lesson will be on Lesson 12: Global Distribution of Precipitation. Thank you for your attention, and see you next time.</a:t>
+            </a:r>
+            <a:endParaRPr lang="en-US" dirty="0"/>
+          </a:p>
+        </p:txBody>
+      </p:sp>
+      <p:sp>
+        <p:nvSpPr>
+          <p:cNvPr id="4" name="Slide Number Placeholder 3"/>
+          <p:cNvSpPr>
+            <a:spLocks noGrp="1"/>
+          </p:cNvSpPr>
+          <p:nvPr>
+            <p:ph type="sldNum" sz="quarter" idx="10"/>
+          </p:nvPr>
+        </p:nvSpPr>
+        <p:spPr/>
+        <p:txBody>
+          <a:bodyPr/>
+          <a:lstStyle/>
+          <a:p>
+            <a:fld id="{F7021451-1387-4CA6-816F-3879F97B5CBC}" type="slidenum">
+              <a:rPr lang="en-US"/>
+              <a:t>63</a:t>
+            </a:fld>
+            <a:endParaRPr lang="en-US"/>
+          </a:p>
+        </p:txBody>
+      </p:sp>
+    </p:spTree>
+    <p:extLst>
+      <p:ext uri="{BB962C8B-B14F-4D97-AF65-F5344CB8AC3E}">
+        <p14:creationId xmlns:p14="http://schemas.microsoft.com/office/powerpoint/2010/main" val="1024086991"/>
+      </p:ext>
+    </p:extLst>
+  </p:cSld>
+  <p:clrMapOvr>
+    <a:masterClrMapping/>
+  </p:clrMapOvr>
+</p:notes>
+</file>
+
+<file path=ppt/notesSlides/notesSlide64.xml><?xml version="1.0" encoding="utf-8"?>
+<p:notes xmlns:a="http://schemas.openxmlformats.org/drawingml/2006/main" xmlns:r="http://schemas.openxmlformats.org/officeDocument/2006/relationships" xmlns:p="http://schemas.openxmlformats.org/presentationml/2006/main">
+  <p:cSld>
+    <p:spTree>
+      <p:nvGrpSpPr>
+        <p:cNvPr id="1" name=""/>
+        <p:cNvGrpSpPr/>
+        <p:nvPr/>
+      </p:nvGrpSpPr>
+      <p:grpSpPr>
+        <a:xfrm>
+          <a:off x="0" y="0"/>
+          <a:ext cx="0" cy="0"/>
+          <a:chOff x="0" y="0"/>
+          <a:chExt cx="0" cy="0"/>
+        </a:xfrm>
+      </p:grpSpPr>
+      <p:sp>
+        <p:nvSpPr>
+          <p:cNvPr id="2" name="Slide Image Placeholder 1"/>
+          <p:cNvSpPr>
+            <a:spLocks noGrp="1" noRot="1" noChangeAspect="1"/>
+          </p:cNvSpPr>
+          <p:nvPr>
+            <p:ph type="sldImg"/>
+          </p:nvPr>
+        </p:nvSpPr>
+        <p:spPr/>
+      </p:sp>
+      <p:sp>
+        <p:nvSpPr>
+          <p:cNvPr id="3" name="Notes Placeholder 2"/>
+          <p:cNvSpPr>
+            <a:spLocks noGrp="1"/>
+          </p:cNvSpPr>
+          <p:nvPr>
+            <p:ph type="body" idx="1"/>
+          </p:nvPr>
+        </p:nvSpPr>
+        <p:spPr/>
+        <p:txBody>
+          <a:bodyPr/>
+          <a:lstStyle/>
+          <a:p>
+            <a:r>
+              <a:rPr lang="en-US" dirty="0"/>
+              <a:t>Let us play the bilingual game. I say a word in English, and you give me the French word. Then we do the reverse.</a:t>
+            </a:r>
+            <a:endParaRPr lang="en-US" dirty="0"/>
+          </a:p>
+        </p:txBody>
+      </p:sp>
+      <p:sp>
+        <p:nvSpPr>
+          <p:cNvPr id="4" name="Slide Number Placeholder 3"/>
+          <p:cNvSpPr>
+            <a:spLocks noGrp="1"/>
+          </p:cNvSpPr>
+          <p:nvPr>
+            <p:ph type="sldNum" sz="quarter" idx="10"/>
+          </p:nvPr>
+        </p:nvSpPr>
+        <p:spPr/>
+        <p:txBody>
+          <a:bodyPr/>
+          <a:lstStyle/>
+          <a:p>
+            <a:fld id="{F7021451-1387-4CA6-816F-3879F97B5CBC}" type="slidenum">
+              <a:rPr lang="en-US"/>
+              <a:t>64</a:t>
+            </a:fld>
+            <a:endParaRPr lang="en-US"/>
+          </a:p>
+        </p:txBody>
+      </p:sp>
+    </p:spTree>
+    <p:extLst>
+      <p:ext uri="{BB962C8B-B14F-4D97-AF65-F5344CB8AC3E}">
+        <p14:creationId xmlns:p14="http://schemas.microsoft.com/office/powerpoint/2010/main" val="1024086991"/>
+      </p:ext>
+    </p:extLst>
+  </p:cSld>
+  <p:clrMapOvr>
+    <a:masterClrMapping/>
+  </p:clrMapOvr>
+</p:notes>
+</file>
+
+<file path=ppt/notesSlides/notesSlide65.xml><?xml version="1.0" encoding="utf-8"?>
+<p:notes xmlns:a="http://schemas.openxmlformats.org/drawingml/2006/main" xmlns:r="http://schemas.openxmlformats.org/officeDocument/2006/relationships" xmlns:p="http://schemas.openxmlformats.org/presentationml/2006/main">
+  <p:cSld>
+    <p:spTree>
+      <p:nvGrpSpPr>
+        <p:cNvPr id="1" name=""/>
+        <p:cNvGrpSpPr/>
+        <p:nvPr/>
+      </p:nvGrpSpPr>
+      <p:grpSpPr>
+        <a:xfrm>
+          <a:off x="0" y="0"/>
+          <a:ext cx="0" cy="0"/>
+          <a:chOff x="0" y="0"/>
+          <a:chExt cx="0" cy="0"/>
+        </a:xfrm>
+      </p:grpSpPr>
+      <p:sp>
+        <p:nvSpPr>
+          <p:cNvPr id="2" name="Slide Image Placeholder 1"/>
+          <p:cNvSpPr>
+            <a:spLocks noGrp="1" noRot="1" noChangeAspect="1"/>
+          </p:cNvSpPr>
+          <p:nvPr>
+            <p:ph type="sldImg"/>
+          </p:nvPr>
+        </p:nvSpPr>
+        <p:spPr/>
+      </p:sp>
+      <p:sp>
+        <p:nvSpPr>
+          <p:cNvPr id="3" name="Notes Placeholder 2"/>
+          <p:cNvSpPr>
+            <a:spLocks noGrp="1"/>
+          </p:cNvSpPr>
+          <p:nvPr>
+            <p:ph type="body" idx="1"/>
+          </p:nvPr>
+        </p:nvSpPr>
+        <p:spPr/>
+        <p:txBody>
+          <a:bodyPr/>
+          <a:lstStyle/>
+          <a:p>
+            <a:r>
+              <a:rPr lang="en-US" dirty="0"/>
+              <a:t>I record this information in the official logbook of the class after the lesson.</a:t>
+            </a:r>
+            <a:endParaRPr lang="en-US" dirty="0"/>
+          </a:p>
+        </p:txBody>
+      </p:sp>
+      <p:sp>
+        <p:nvSpPr>
+          <p:cNvPr id="4" name="Slide Number Placeholder 3"/>
+          <p:cNvSpPr>
+            <a:spLocks noGrp="1"/>
+          </p:cNvSpPr>
+          <p:nvPr>
+            <p:ph type="sldNum" sz="quarter" idx="10"/>
+          </p:nvPr>
+        </p:nvSpPr>
+        <p:spPr/>
+        <p:txBody>
+          <a:bodyPr/>
+          <a:lstStyle/>
+          <a:p>
+            <a:fld id="{F7021451-1387-4CA6-816F-3879F97B5CBC}" type="slidenum">
+              <a:rPr lang="en-US"/>
+              <a:t>65</a:t>
+            </a:fld>
+            <a:endParaRPr lang="en-US"/>
+          </a:p>
+        </p:txBody>
+      </p:sp>
+    </p:spTree>
+    <p:extLst>
+      <p:ext uri="{BB962C8B-B14F-4D97-AF65-F5344CB8AC3E}">
+        <p14:creationId xmlns:p14="http://schemas.microsoft.com/office/powerpoint/2010/main" val="1024086991"/>
+      </p:ext>
+    </p:extLst>
+  </p:cSld>
+  <p:clrMapOvr>
+    <a:masterClrMapping/>
+  </p:clrMapOvr>
+</p:notes>
+</file>
+
+<file path=ppt/notesSlides/notesSlide66.xml><?xml version="1.0" encoding="utf-8"?>
+<p:notes xmlns:a="http://schemas.openxmlformats.org/drawingml/2006/main" xmlns:r="http://schemas.openxmlformats.org/officeDocument/2006/relationships" xmlns:p="http://schemas.openxmlformats.org/presentationml/2006/main">
+  <p:cSld>
+    <p:spTree>
+      <p:nvGrpSpPr>
+        <p:cNvPr id="1" name=""/>
+        <p:cNvGrpSpPr/>
+        <p:nvPr/>
+      </p:nvGrpSpPr>
+      <p:grpSpPr>
+        <a:xfrm>
+          <a:off x="0" y="0"/>
+          <a:ext cx="0" cy="0"/>
+          <a:chOff x="0" y="0"/>
+          <a:chExt cx="0" cy="0"/>
+        </a:xfrm>
+      </p:grpSpPr>
+      <p:sp>
+        <p:nvSpPr>
+          <p:cNvPr id="2" name="Slide Image Placeholder 1"/>
+          <p:cNvSpPr>
+            <a:spLocks noGrp="1" noRot="1" noChangeAspect="1"/>
+          </p:cNvSpPr>
+          <p:nvPr>
+            <p:ph type="sldImg"/>
+          </p:nvPr>
+        </p:nvSpPr>
+        <p:spPr/>
+      </p:sp>
+      <p:sp>
+        <p:nvSpPr>
+          <p:cNvPr id="3" name="Notes Placeholder 2"/>
+          <p:cNvSpPr>
+            <a:spLocks noGrp="1"/>
+          </p:cNvSpPr>
+          <p:nvPr>
+            <p:ph type="body" idx="1"/>
+          </p:nvPr>
+        </p:nvSpPr>
+        <p:spPr/>
+        <p:txBody>
+          <a:bodyPr/>
+          <a:lstStyle/>
+          <a:p>
+            <a:r>
+              <a:rPr lang="en-US" dirty="0"/>
+              <a:t>I complete the second page of the logbook: the matter taught, the evaluation, the homework and the attendance.</a:t>
+            </a:r>
+            <a:endParaRPr lang="en-US" dirty="0"/>
+          </a:p>
+        </p:txBody>
+      </p:sp>
+      <p:sp>
+        <p:nvSpPr>
+          <p:cNvPr id="4" name="Slide Number Placeholder 3"/>
+          <p:cNvSpPr>
+            <a:spLocks noGrp="1"/>
+          </p:cNvSpPr>
+          <p:nvPr>
+            <p:ph type="sldNum" sz="quarter" idx="10"/>
+          </p:nvPr>
+        </p:nvSpPr>
+        <p:spPr/>
+        <p:txBody>
+          <a:bodyPr/>
+          <a:lstStyle/>
+          <a:p>
+            <a:fld id="{F7021451-1387-4CA6-816F-3879F97B5CBC}" type="slidenum">
+              <a:rPr lang="en-US"/>
+              <a:t>66</a:t>
+            </a:fld>
+            <a:endParaRPr lang="en-US"/>
+          </a:p>
+        </p:txBody>
+      </p:sp>
+    </p:spTree>
+    <p:extLst>
+      <p:ext uri="{BB962C8B-B14F-4D97-AF65-F5344CB8AC3E}">
+        <p14:creationId xmlns:p14="http://schemas.microsoft.com/office/powerpoint/2010/main" val="1024086991"/>
+      </p:ext>
+    </p:extLst>
+  </p:cSld>
+  <p:clrMapOvr>
+    <a:masterClrMapping/>
+  </p:clrMapOvr>
+</p:notes>
+</file>
+
+<file path=ppt/notesSlides/notesSlide67.xml><?xml version="1.0" encoding="utf-8"?>
+<p:notes xmlns:a="http://schemas.openxmlformats.org/drawingml/2006/main" xmlns:r="http://schemas.openxmlformats.org/officeDocument/2006/relationships" xmlns:p="http://schemas.openxmlformats.org/presentationml/2006/main">
+  <p:cSld>
+    <p:spTree>
+      <p:nvGrpSpPr>
+        <p:cNvPr id="1" name=""/>
+        <p:cNvGrpSpPr/>
+        <p:nvPr/>
+      </p:nvGrpSpPr>
+      <p:grpSpPr>
+        <a:xfrm>
+          <a:off x="0" y="0"/>
+          <a:ext cx="0" cy="0"/>
+          <a:chOff x="0" y="0"/>
+          <a:chExt cx="0" cy="0"/>
+        </a:xfrm>
+      </p:grpSpPr>
+      <p:sp>
+        <p:nvSpPr>
+          <p:cNvPr id="2" name="Slide Image Placeholder 1"/>
+          <p:cNvSpPr>
+            <a:spLocks noGrp="1" noRot="1" noChangeAspect="1"/>
+          </p:cNvSpPr>
+          <p:nvPr>
+            <p:ph type="sldImg"/>
+          </p:nvPr>
+        </p:nvSpPr>
+        <p:spPr/>
+      </p:sp>
+      <p:sp>
+        <p:nvSpPr>
+          <p:cNvPr id="3" name="Notes Placeholder 2"/>
+          <p:cNvSpPr>
+            <a:spLocks noGrp="1"/>
+          </p:cNvSpPr>
+          <p:nvPr>
+            <p:ph type="body" idx="1"/>
+          </p:nvPr>
+        </p:nvSpPr>
+        <p:spPr/>
+        <p:txBody>
+          <a:bodyPr/>
+          <a:lstStyle/>
+          <a:p>
+            <a:r>
+              <a:rPr lang="en-US" dirty="0"/>
+              <a:t>This slide is for me, the teacher: it gives the timing of the lesson and what to do if the projector is not available.</a:t>
+            </a:r>
+            <a:endParaRPr lang="en-US" dirty="0"/>
+          </a:p>
+        </p:txBody>
+      </p:sp>
+      <p:sp>
+        <p:nvSpPr>
+          <p:cNvPr id="4" name="Slide Number Placeholder 3"/>
+          <p:cNvSpPr>
+            <a:spLocks noGrp="1"/>
+          </p:cNvSpPr>
+          <p:nvPr>
+            <p:ph type="sldNum" sz="quarter" idx="10"/>
+          </p:nvPr>
+        </p:nvSpPr>
+        <p:spPr/>
+        <p:txBody>
+          <a:bodyPr/>
+          <a:lstStyle/>
+          <a:p>
+            <a:fld id="{F7021451-1387-4CA6-816F-3879F97B5CBC}" type="slidenum">
+              <a:rPr lang="en-US"/>
+              <a:t>67</a:t>
+            </a:fld>
+            <a:endParaRPr lang="en-US"/>
+          </a:p>
+        </p:txBody>
+      </p:sp>
+    </p:spTree>
+    <p:extLst>
+      <p:ext uri="{BB962C8B-B14F-4D97-AF65-F5344CB8AC3E}">
+        <p14:creationId xmlns:p14="http://schemas.microsoft.com/office/powerpoint/2010/main" val="1024086991"/>
+      </p:ext>
+    </p:extLst>
+  </p:cSld>
+  <p:clrMapOvr>
+    <a:masterClrMapping/>
+  </p:clrMapOvr>
+</p:notes>
+</file>
+
+<file path=ppt/notesSlides/notesSlide68.xml><?xml version="1.0" encoding="utf-8"?>
+<p:notes xmlns:a="http://schemas.openxmlformats.org/drawingml/2006/main" xmlns:r="http://schemas.openxmlformats.org/officeDocument/2006/relationships" xmlns:p="http://schemas.openxmlformats.org/presentationml/2006/main">
+  <p:cSld>
+    <p:spTree>
+      <p:nvGrpSpPr>
+        <p:cNvPr id="1" name=""/>
+        <p:cNvGrpSpPr/>
+        <p:nvPr/>
+      </p:nvGrpSpPr>
+      <p:grpSpPr>
+        <a:xfrm>
+          <a:off x="0" y="0"/>
+          <a:ext cx="0" cy="0"/>
+          <a:chOff x="0" y="0"/>
+          <a:chExt cx="0" cy="0"/>
+        </a:xfrm>
+      </p:grpSpPr>
+      <p:sp>
+        <p:nvSpPr>
+          <p:cNvPr id="2" name="Slide Image Placeholder 1"/>
+          <p:cNvSpPr>
+            <a:spLocks noGrp="1" noRot="1" noChangeAspect="1"/>
+          </p:cNvSpPr>
+          <p:nvPr>
+            <p:ph type="sldImg"/>
+          </p:nvPr>
+        </p:nvSpPr>
+        <p:spPr/>
+      </p:sp>
+      <p:sp>
+        <p:nvSpPr>
+          <p:cNvPr id="3" name="Notes Placeholder 2"/>
+          <p:cNvSpPr>
+            <a:spLocks noGrp="1"/>
+          </p:cNvSpPr>
+          <p:nvPr>
+            <p:ph type="body" idx="1"/>
+          </p:nvPr>
+        </p:nvSpPr>
+        <p:spPr/>
+        <p:txBody>
+          <a:bodyPr/>
+          <a:lstStyle/>
+          <a:p>
+            <a:r>
+              <a:rPr lang="en-US" dirty="0"/>
+              <a:t>Take your time to copy this part; we will continue together.</a:t>
+            </a:r>
+            <a:endParaRPr lang="en-US" dirty="0"/>
+          </a:p>
+        </p:txBody>
+      </p:sp>
+      <p:sp>
+        <p:nvSpPr>
+          <p:cNvPr id="4" name="Slide Number Placeholder 3"/>
+          <p:cNvSpPr>
+            <a:spLocks noGrp="1"/>
+          </p:cNvSpPr>
+          <p:nvPr>
+            <p:ph type="sldNum" sz="quarter" idx="10"/>
+          </p:nvPr>
+        </p:nvSpPr>
+        <p:spPr/>
+        <p:txBody>
+          <a:bodyPr/>
+          <a:lstStyle/>
+          <a:p>
+            <a:fld id="{F7021451-1387-4CA6-816F-3879F97B5CBC}" type="slidenum">
+              <a:rPr lang="en-US"/>
+              <a:t>68</a:t>
+            </a:fld>
+            <a:endParaRPr lang="en-US"/>
+          </a:p>
+        </p:txBody>
+      </p:sp>
+    </p:spTree>
+    <p:extLst>
+      <p:ext uri="{BB962C8B-B14F-4D97-AF65-F5344CB8AC3E}">
+        <p14:creationId xmlns:p14="http://schemas.microsoft.com/office/powerpoint/2010/main" val="1024086991"/>
+      </p:ext>
+    </p:extLst>
+  </p:cSld>
+  <p:clrMapOvr>
+    <a:masterClrMapping/>
+  </p:clrMapOvr>
+</p:notes>
+</file>
+
+<file path=ppt/notesSlides/notesSlide69.xml><?xml version="1.0" encoding="utf-8"?>
+<p:notes xmlns:a="http://schemas.openxmlformats.org/drawingml/2006/main" xmlns:r="http://schemas.openxmlformats.org/officeDocument/2006/relationships" xmlns:p="http://schemas.openxmlformats.org/presentationml/2006/main">
+  <p:cSld>
+    <p:spTree>
+      <p:nvGrpSpPr>
+        <p:cNvPr id="1" name=""/>
+        <p:cNvGrpSpPr/>
+        <p:nvPr/>
+      </p:nvGrpSpPr>
+      <p:grpSpPr>
+        <a:xfrm>
+          <a:off x="0" y="0"/>
+          <a:ext cx="0" cy="0"/>
+          <a:chOff x="0" y="0"/>
+          <a:chExt cx="0" cy="0"/>
+        </a:xfrm>
+      </p:grpSpPr>
+      <p:sp>
+        <p:nvSpPr>
+          <p:cNvPr id="2" name="Slide Image Placeholder 1"/>
+          <p:cNvSpPr>
+            <a:spLocks noGrp="1" noRot="1" noChangeAspect="1"/>
+          </p:cNvSpPr>
+          <p:nvPr>
+            <p:ph type="sldImg"/>
+          </p:nvPr>
+        </p:nvSpPr>
+        <p:spPr/>
+      </p:sp>
+      <p:sp>
+        <p:nvSpPr>
+          <p:cNvPr id="3" name="Notes Placeholder 2"/>
+          <p:cNvSpPr>
+            <a:spLocks noGrp="1"/>
+          </p:cNvSpPr>
+          <p:nvPr>
+            <p:ph type="body" idx="1"/>
+          </p:nvPr>
+        </p:nvSpPr>
+        <p:spPr/>
+        <p:txBody>
+          <a:bodyPr/>
+          <a:lstStyle/>
+          <a:p>
+            <a:r>
+              <a:rPr lang="en-US" dirty="0"/>
+              <a:t>These are the references and picture credits used to prepare this lesson.</a:t>
+            </a:r>
+            <a:endParaRPr lang="en-US" dirty="0"/>
+          </a:p>
+        </p:txBody>
+      </p:sp>
+      <p:sp>
+        <p:nvSpPr>
+          <p:cNvPr id="4" name="Slide Number Placeholder 3"/>
+          <p:cNvSpPr>
+            <a:spLocks noGrp="1"/>
+          </p:cNvSpPr>
+          <p:nvPr>
+            <p:ph type="sldNum" sz="quarter" idx="10"/>
+          </p:nvPr>
+        </p:nvSpPr>
+        <p:spPr/>
+        <p:txBody>
+          <a:bodyPr/>
+          <a:lstStyle/>
+          <a:p>
+            <a:fld id="{F7021451-1387-4CA6-816F-3879F97B5CBC}" type="slidenum">
+              <a:rPr lang="en-US"/>
+              <a:t>69</a:t>
             </a:fld>
             <a:endParaRPr lang="en-US"/>
           </a:p>
@@ -15358,7 +16070,7 @@
                 <a:ea typeface="Times New Roman" pitchFamily="34" charset="-122"/>
                 <a:cs typeface="Times New Roman" pitchFamily="34" charset="-120"/>
               </a:rPr>
-              <a:t>1. Forms of Condensation</a:t>
+              <a:t>1. Cloud Formation</a:t>
             </a:r>
             <a:endParaRPr lang="en-US" sz="3600" dirty="0"/>
           </a:p>
@@ -15372,8 +16084,49 @@
         </p:nvSpPr>
         <p:spPr>
           <a:xfrm>
-            <a:off x="365760" y="1783080"/>
-            <a:ext cx="4846320" cy="4617720"/>
+            <a:off x="365760" y="1737360"/>
+            <a:ext cx="6035040" cy="457200"/>
+          </a:xfrm>
+          <a:prstGeom prst="rect">
+            <a:avLst/>
+          </a:prstGeom>
+          <a:noFill/>
+          <a:ln/>
+        </p:spPr>
+        <p:txBody>
+          <a:bodyPr wrap="square" lIns="0" tIns="0" rIns="0" bIns="0" rtlCol="0" anchor="ctr">
+            <a:normAutofit/>
+          </a:bodyPr>
+          <a:lstStyle/>
+          <a:p>
+            <a:pPr algn="l" indent="0" marL="0">
+              <a:buNone/>
+            </a:pPr>
+            <a:r>
+              <a:rPr lang="en-US" sz="3000" b="1" dirty="0">
+                <a:solidFill>
+                  <a:srgbClr val="990011"/>
+                </a:solidFill>
+                <a:latin typeface="Times New Roman" pitchFamily="34" charset="0"/>
+                <a:ea typeface="Times New Roman" pitchFamily="34" charset="-122"/>
+                <a:cs typeface="Times New Roman" pitchFamily="34" charset="-120"/>
+              </a:rPr>
+              <a:t>A) How Clouds Form</a:t>
+            </a:r>
+            <a:endParaRPr lang="en-US" sz="3000" dirty="0"/>
+          </a:p>
+        </p:txBody>
+      </p:sp>
+      <p:sp>
+        <p:nvSpPr>
+          <p:cNvPr id="5" name="Text 3"/>
+          <p:cNvSpPr/>
+          <p:nvPr/>
+        </p:nvSpPr>
+        <p:spPr>
+          <a:xfrm>
+            <a:off x="365760" y="2240280"/>
+            <a:ext cx="6035040" cy="4160520"/>
           </a:xfrm>
           <a:prstGeom prst="rect">
             <a:avLst/>
@@ -15392,7 +16145,7 @@
               <a:buNone/>
             </a:pPr>
             <a:r>
-              <a:rPr lang="en-US" sz="3600" i="1" dirty="0">
+              <a:rPr lang="en-US" sz="3200" i="1" dirty="0">
                 <a:solidFill>
                   <a:srgbClr val="111111"/>
                 </a:solidFill>
@@ -15400,9 +16153,9 @@
                 <a:ea typeface="Times New Roman" pitchFamily="34" charset="-122"/>
                 <a:cs typeface="Times New Roman" pitchFamily="34" charset="-120"/>
               </a:rPr>
-              <a:t>Condensation takes the following forms:</a:t>
-            </a:r>
-            <a:endParaRPr lang="en-US" sz="3600" dirty="0"/>
+              <a:t>Clouds form in the following way:</a:t>
+            </a:r>
+            <a:endParaRPr lang="en-US" sz="3200" dirty="0"/>
           </a:p>
           <a:p>
             <a:pPr algn="l" indent="0" marL="0">
@@ -15412,7 +16165,7 @@
               <a:buNone/>
             </a:pPr>
             <a:r>
-              <a:rPr lang="en-US" sz="3600" b="1" dirty="0">
+              <a:rPr lang="en-US" sz="3200" b="1" dirty="0">
                 <a:solidFill>
                   <a:srgbClr val="111111"/>
                 </a:solidFill>
@@ -15420,7 +16173,7 @@
                 <a:ea typeface="Times New Roman" pitchFamily="34" charset="-122"/>
                 <a:cs typeface="Times New Roman" pitchFamily="34" charset="-120"/>
               </a:rPr>
-              <a:t>Clouds: </a:t>
+              <a:t>Cooling of rising air: </a:t>
             </a:r>
             <a:pPr algn="l" indent="0" marL="0">
               <a:spcAft>
@@ -15429,7 +16182,7 @@
               <a:buNone/>
             </a:pPr>
             <a:r>
-              <a:rPr lang="en-US" sz="3600" dirty="0">
+              <a:rPr lang="en-US" sz="3200" dirty="0">
                 <a:solidFill>
                   <a:srgbClr val="111111"/>
                 </a:solidFill>
@@ -15437,15 +16190,15 @@
                 <a:ea typeface="Times New Roman" pitchFamily="34" charset="-122"/>
                 <a:cs typeface="Times New Roman" pitchFamily="34" charset="-120"/>
               </a:rPr>
-              <a:t>Rising moist air expands and cools, and vapour condenses on nuclei into tiny droplets or ice crystals.</a:t>
-            </a:r>
-            <a:endParaRPr lang="en-US" sz="3600" dirty="0"/>
+              <a:t>When moist air rises, it meets lower pressure, expands and cools by about 10 °C per 1,000 m. When it reaches its dew point, it becomes saturated and its vapour starts to condense.</a:t>
+            </a:r>
+            <a:endParaRPr lang="en-US" sz="3200" dirty="0"/>
           </a:p>
         </p:txBody>
       </p:sp>
       <p:pic>
         <p:nvPicPr>
-          <p:cNvPr id="5" name="Image 0" descr="/home/claude/f4/img/v2/cloud_types_big.png">    </p:cNvPr>
+          <p:cNvPr id="6" name="Image 0" descr="/home/claude/f4/img/v2/cloud_types_big.png">    </p:cNvPr>
           <p:cNvPicPr>
             <a:picLocks noChangeAspect="1"/>
           </p:cNvPicPr>
@@ -15459,8 +16212,8 @@
         </p:blipFill>
         <p:spPr>
           <a:xfrm>
-            <a:off x="5349240" y="2617506"/>
-            <a:ext cx="6659575" cy="2601397"/>
+            <a:off x="6537960" y="2849678"/>
+            <a:ext cx="5470855" cy="2137053"/>
           </a:xfrm>
           <a:prstGeom prst="rect">
             <a:avLst/>
@@ -15469,14 +16222,14 @@
       </p:pic>
       <p:sp>
         <p:nvSpPr>
-          <p:cNvPr id="6" name="Text 3"/>
+          <p:cNvPr id="7" name="Text 4"/>
           <p:cNvSpPr/>
           <p:nvPr/>
         </p:nvSpPr>
         <p:spPr>
           <a:xfrm>
-            <a:off x="5349240" y="6089904"/>
-            <a:ext cx="6659575" cy="347472"/>
+            <a:off x="6537960" y="6089904"/>
+            <a:ext cx="5470855" cy="347472"/>
           </a:xfrm>
           <a:prstGeom prst="rect">
             <a:avLst/>
@@ -15500,7 +16253,7 @@
                 <a:ea typeface="Times New Roman" pitchFamily="34" charset="-122"/>
                 <a:cs typeface="Times New Roman" pitchFamily="34" charset="-120"/>
               </a:rPr>
-              <a:t>Illustration: the main types of clouds</a:t>
+              <a:t>Illustration: the types of clouds</a:t>
             </a:r>
             <a:endParaRPr lang="en-US" sz="1600" dirty="0"/>
           </a:p>
@@ -15857,109 +16610,9 @@
           </a:p>
         </p:txBody>
       </p:sp>
-      <p:sp>
-        <p:nvSpPr>
-          <p:cNvPr id="3" name="Text 1"/>
-          <p:cNvSpPr/>
-          <p:nvPr/>
-        </p:nvSpPr>
-        <p:spPr>
-          <a:xfrm>
-            <a:off x="365760" y="1005840"/>
-            <a:ext cx="11460175" cy="731520"/>
-          </a:xfrm>
-          <a:prstGeom prst="rect">
-            <a:avLst/>
-          </a:prstGeom>
-          <a:noFill/>
-          <a:ln/>
-        </p:spPr>
-        <p:txBody>
-          <a:bodyPr wrap="square" lIns="0" tIns="0" rIns="0" bIns="0" rtlCol="0" anchor="ctr">
-            <a:normAutofit/>
-          </a:bodyPr>
-          <a:lstStyle/>
-          <a:p>
-            <a:pPr algn="ctr" indent="0" marL="0">
-              <a:buNone/>
-            </a:pPr>
-            <a:r>
-              <a:rPr lang="en-US" sz="3600" b="1" dirty="0">
-                <a:solidFill>
-                  <a:srgbClr val="990011"/>
-                </a:solidFill>
-                <a:latin typeface="Times New Roman" pitchFamily="34" charset="0"/>
-                <a:ea typeface="Times New Roman" pitchFamily="34" charset="-122"/>
-                <a:cs typeface="Times New Roman" pitchFamily="34" charset="-120"/>
-              </a:rPr>
-              <a:t>1. Forms of Condensation</a:t>
-            </a:r>
-            <a:endParaRPr lang="en-US" sz="3600" dirty="0"/>
-          </a:p>
-        </p:txBody>
-      </p:sp>
-      <p:sp>
-        <p:nvSpPr>
-          <p:cNvPr id="4" name="Text 2"/>
-          <p:cNvSpPr/>
-          <p:nvPr/>
-        </p:nvSpPr>
-        <p:spPr>
-          <a:xfrm>
-            <a:off x="365760" y="1783080"/>
-            <a:ext cx="4846320" cy="4617720"/>
-          </a:xfrm>
-          <a:prstGeom prst="rect">
-            <a:avLst/>
-          </a:prstGeom>
-          <a:noFill/>
-          <a:ln/>
-        </p:spPr>
-        <p:txBody>
-          <a:bodyPr wrap="square" lIns="0" tIns="0" rIns="0" bIns="0" rtlCol="0" anchor="t"/>
-          <a:lstStyle/>
-          <a:p>
-            <a:pPr algn="l" indent="0" marL="0">
-              <a:spcAft>
-                <a:spcPts val="800"/>
-              </a:spcAft>
-              <a:buNone/>
-            </a:pPr>
-            <a:r>
-              <a:rPr lang="en-US" sz="3600" b="1" dirty="0">
-                <a:solidFill>
-                  <a:srgbClr val="111111"/>
-                </a:solidFill>
-                <a:latin typeface="Times New Roman" pitchFamily="34" charset="0"/>
-                <a:ea typeface="Times New Roman" pitchFamily="34" charset="-122"/>
-                <a:cs typeface="Times New Roman" pitchFamily="34" charset="-120"/>
-              </a:rPr>
-              <a:t>Cumulus: </a:t>
-            </a:r>
-            <a:pPr algn="l" indent="0" marL="0">
-              <a:spcAft>
-                <a:spcPts val="800"/>
-              </a:spcAft>
-              <a:buNone/>
-            </a:pPr>
-            <a:r>
-              <a:rPr lang="en-US" sz="3600" dirty="0">
-                <a:solidFill>
-                  <a:srgbClr val="111111"/>
-                </a:solidFill>
-                <a:latin typeface="Times New Roman" pitchFamily="34" charset="0"/>
-                <a:ea typeface="Times New Roman" pitchFamily="34" charset="-122"/>
-                <a:cs typeface="Times New Roman" pitchFamily="34" charset="-120"/>
-              </a:rPr>
-              <a:t>Puffy clouds with flat bases, usually with fair weather.</a:t>
-            </a:r>
-            <a:endParaRPr lang="en-US" sz="3600" dirty="0"/>
-          </a:p>
-        </p:txBody>
-      </p:sp>
       <p:pic>
         <p:nvPicPr>
-          <p:cNvPr id="5" name="Image 0" descr="/home/claude/f4/img/v2/lsa_cumulus.jpg">    </p:cNvPr>
+          <p:cNvPr id="3" name="Image 0" descr="/home/claude/f4/img/minesec_sheet.png">    </p:cNvPr>
           <p:cNvPicPr>
             <a:picLocks noChangeAspect="1"/>
           </p:cNvPicPr>
@@ -15973,8 +16626,8 @@
         </p:blipFill>
         <p:spPr>
           <a:xfrm>
-            <a:off x="5349240" y="2071212"/>
-            <a:ext cx="6659575" cy="3693983"/>
+            <a:off x="0" y="658368"/>
+            <a:ext cx="2468880" cy="5833872"/>
           </a:xfrm>
           <a:prstGeom prst="rect">
             <a:avLst/>
@@ -15983,14 +16636,14 @@
       </p:pic>
       <p:sp>
         <p:nvSpPr>
-          <p:cNvPr id="6" name="Text 3"/>
+          <p:cNvPr id="4" name="Text 1"/>
           <p:cNvSpPr/>
           <p:nvPr/>
         </p:nvSpPr>
         <p:spPr>
           <a:xfrm>
-            <a:off x="5349240" y="6089904"/>
-            <a:ext cx="6659575" cy="347472"/>
+            <a:off x="2697480" y="1005840"/>
+            <a:ext cx="9174175" cy="731520"/>
           </a:xfrm>
           <a:prstGeom prst="rect">
             <a:avLst/>
@@ -15999,24 +16652,124 @@
           <a:ln/>
         </p:spPr>
         <p:txBody>
-          <a:bodyPr wrap="square" lIns="0" tIns="0" rIns="0" bIns="0" rtlCol="0" anchor="ctr"/>
+          <a:bodyPr wrap="square" lIns="0" tIns="0" rIns="0" bIns="0" rtlCol="0" anchor="ctr">
+            <a:normAutofit/>
+          </a:bodyPr>
           <a:lstStyle/>
           <a:p>
             <a:pPr algn="ctr" indent="0" marL="0">
               <a:buNone/>
             </a:pPr>
             <a:r>
-              <a:rPr lang="en-US" sz="1600" i="1" dirty="0">
-                <a:solidFill>
-                  <a:srgbClr val="555555"/>
+              <a:rPr lang="en-US" sz="3600" b="1" dirty="0">
+                <a:solidFill>
+                  <a:srgbClr val="990011"/>
                 </a:solidFill>
                 <a:latin typeface="Times New Roman" pitchFamily="34" charset="0"/>
                 <a:ea typeface="Times New Roman" pitchFamily="34" charset="-122"/>
                 <a:cs typeface="Times New Roman" pitchFamily="34" charset="-120"/>
               </a:rPr>
-              <a:t>Illustration: cumulus clouds</a:t>
-            </a:r>
-            <a:endParaRPr lang="en-US" sz="1600" dirty="0"/>
+              <a:t>1. Cloud Formation</a:t>
+            </a:r>
+            <a:endParaRPr lang="en-US" sz="3600" dirty="0"/>
+          </a:p>
+        </p:txBody>
+      </p:sp>
+      <p:sp>
+        <p:nvSpPr>
+          <p:cNvPr id="5" name="Text 2"/>
+          <p:cNvSpPr/>
+          <p:nvPr/>
+        </p:nvSpPr>
+        <p:spPr>
+          <a:xfrm>
+            <a:off x="2697480" y="1737360"/>
+            <a:ext cx="9174175" cy="457200"/>
+          </a:xfrm>
+          <a:prstGeom prst="rect">
+            <a:avLst/>
+          </a:prstGeom>
+          <a:noFill/>
+          <a:ln/>
+        </p:spPr>
+        <p:txBody>
+          <a:bodyPr wrap="square" lIns="0" tIns="0" rIns="0" bIns="0" rtlCol="0" anchor="ctr"/>
+          <a:lstStyle/>
+          <a:p>
+            <a:pPr algn="l" indent="0" marL="0">
+              <a:buNone/>
+            </a:pPr>
+            <a:r>
+              <a:rPr lang="en-US" sz="3200" b="1" dirty="0">
+                <a:solidFill>
+                  <a:srgbClr val="990011"/>
+                </a:solidFill>
+                <a:latin typeface="Times New Roman" pitchFamily="34" charset="0"/>
+                <a:ea typeface="Times New Roman" pitchFamily="34" charset="-122"/>
+                <a:cs typeface="Times New Roman" pitchFamily="34" charset="-120"/>
+              </a:rPr>
+              <a:t>A) How Clouds Form</a:t>
+            </a:r>
+            <a:endParaRPr lang="en-US" sz="3200" dirty="0"/>
+          </a:p>
+        </p:txBody>
+      </p:sp>
+      <p:sp>
+        <p:nvSpPr>
+          <p:cNvPr id="6" name="Text 3"/>
+          <p:cNvSpPr/>
+          <p:nvPr/>
+        </p:nvSpPr>
+        <p:spPr>
+          <a:xfrm>
+            <a:off x="2697480" y="2240280"/>
+            <a:ext cx="9174175" cy="4206240"/>
+          </a:xfrm>
+          <a:prstGeom prst="rect">
+            <a:avLst/>
+          </a:prstGeom>
+          <a:noFill/>
+          <a:ln/>
+        </p:spPr>
+        <p:txBody>
+          <a:bodyPr wrap="square" lIns="0" tIns="0" rIns="0" bIns="0" rtlCol="0" anchor="t"/>
+          <a:lstStyle/>
+          <a:p>
+            <a:pPr algn="l" indent="0" marL="0">
+              <a:spcAft>
+                <a:spcPts val="800"/>
+              </a:spcAft>
+              <a:buNone/>
+            </a:pPr>
+            <a:r>
+              <a:rPr lang="en-US" sz="4000" b="1" dirty="0">
+                <a:solidFill>
+                  <a:srgbClr val="111111"/>
+                </a:solidFill>
+                <a:latin typeface="Times New Roman" pitchFamily="34" charset="0"/>
+                <a:ea typeface="Times New Roman" pitchFamily="34" charset="-122"/>
+                <a:cs typeface="Times New Roman" pitchFamily="34" charset="-120"/>
+              </a:rPr>
+              <a:t>Condensation on nuclei: </a:t>
+            </a:r>
+            <a:pPr algn="l" indent="0" marL="0">
+              <a:spcAft>
+                <a:spcPts val="800"/>
+              </a:spcAft>
+              <a:buNone/>
+            </a:pPr>
+            <a:r>
+              <a:rPr lang="en-US" sz="4000" dirty="0">
+                <a:solidFill>
+                  <a:srgbClr val="111111"/>
+                </a:solidFill>
+                <a:latin typeface="Times New Roman" pitchFamily="34" charset="0"/>
+                <a:ea typeface="Times New Roman" pitchFamily="34" charset="-122"/>
+                <a:cs typeface="Times New Roman" pitchFamily="34" charset="-120"/>
+              </a:rPr>
+              <a:t>The vapour condenses on tiny particles of dust, salt or smoke and forms droplets about 0.02 mm wide. Billions of these droplets, or ice crystals where it is very cold, make up a cloud.</a:t>
+            </a:r>
+            <a:endParaRPr lang="en-US" sz="4000" dirty="0"/>
           </a:p>
         </p:txBody>
       </p:sp>
@@ -16132,109 +16885,9 @@
           </a:p>
         </p:txBody>
       </p:sp>
-      <p:sp>
-        <p:nvSpPr>
-          <p:cNvPr id="3" name="Text 1"/>
-          <p:cNvSpPr/>
-          <p:nvPr/>
-        </p:nvSpPr>
-        <p:spPr>
-          <a:xfrm>
-            <a:off x="365760" y="1005840"/>
-            <a:ext cx="11460175" cy="731520"/>
-          </a:xfrm>
-          <a:prstGeom prst="rect">
-            <a:avLst/>
-          </a:prstGeom>
-          <a:noFill/>
-          <a:ln/>
-        </p:spPr>
-        <p:txBody>
-          <a:bodyPr wrap="square" lIns="0" tIns="0" rIns="0" bIns="0" rtlCol="0" anchor="ctr">
-            <a:normAutofit/>
-          </a:bodyPr>
-          <a:lstStyle/>
-          <a:p>
-            <a:pPr algn="ctr" indent="0" marL="0">
-              <a:buNone/>
-            </a:pPr>
-            <a:r>
-              <a:rPr lang="en-US" sz="3600" b="1" dirty="0">
-                <a:solidFill>
-                  <a:srgbClr val="990011"/>
-                </a:solidFill>
-                <a:latin typeface="Times New Roman" pitchFamily="34" charset="0"/>
-                <a:ea typeface="Times New Roman" pitchFamily="34" charset="-122"/>
-                <a:cs typeface="Times New Roman" pitchFamily="34" charset="-120"/>
-              </a:rPr>
-              <a:t>1. Forms of Condensation</a:t>
-            </a:r>
-            <a:endParaRPr lang="en-US" sz="3600" dirty="0"/>
-          </a:p>
-        </p:txBody>
-      </p:sp>
-      <p:sp>
-        <p:nvSpPr>
-          <p:cNvPr id="4" name="Text 2"/>
-          <p:cNvSpPr/>
-          <p:nvPr/>
-        </p:nvSpPr>
-        <p:spPr>
-          <a:xfrm>
-            <a:off x="365760" y="1783080"/>
-            <a:ext cx="4846320" cy="4617720"/>
-          </a:xfrm>
-          <a:prstGeom prst="rect">
-            <a:avLst/>
-          </a:prstGeom>
-          <a:noFill/>
-          <a:ln/>
-        </p:spPr>
-        <p:txBody>
-          <a:bodyPr wrap="square" lIns="0" tIns="0" rIns="0" bIns="0" rtlCol="0" anchor="t"/>
-          <a:lstStyle/>
-          <a:p>
-            <a:pPr algn="l" indent="0" marL="0">
-              <a:spcAft>
-                <a:spcPts val="800"/>
-              </a:spcAft>
-              <a:buNone/>
-            </a:pPr>
-            <a:r>
-              <a:rPr lang="en-US" sz="3600" b="1" dirty="0">
-                <a:solidFill>
-                  <a:srgbClr val="111111"/>
-                </a:solidFill>
-                <a:latin typeface="Times New Roman" pitchFamily="34" charset="0"/>
-                <a:ea typeface="Times New Roman" pitchFamily="34" charset="-122"/>
-                <a:cs typeface="Times New Roman" pitchFamily="34" charset="-120"/>
-              </a:rPr>
-              <a:t>Cumulonimbus: </a:t>
-            </a:r>
-            <a:pPr algn="l" indent="0" marL="0">
-              <a:spcAft>
-                <a:spcPts val="800"/>
-              </a:spcAft>
-              <a:buNone/>
-            </a:pPr>
-            <a:r>
-              <a:rPr lang="en-US" sz="3600" dirty="0">
-                <a:solidFill>
-                  <a:srgbClr val="111111"/>
-                </a:solidFill>
-                <a:latin typeface="Times New Roman" pitchFamily="34" charset="0"/>
-                <a:ea typeface="Times New Roman" pitchFamily="34" charset="-122"/>
-                <a:cs typeface="Times New Roman" pitchFamily="34" charset="-120"/>
-              </a:rPr>
-              <a:t>Huge, tall, dark clouds with heavy rain, thunder, lightning and sometimes hail, very common in Garoua in the rainy season.</a:t>
-            </a:r>
-            <a:endParaRPr lang="en-US" sz="3600" dirty="0"/>
-          </a:p>
-        </p:txBody>
-      </p:sp>
       <p:pic>
         <p:nvPicPr>
-          <p:cNvPr id="5" name="Image 0" descr="/home/claude/f4/img/v2/f4_cumulonimbus.jpg">    </p:cNvPr>
+          <p:cNvPr id="3" name="Image 0" descr="/home/claude/f4/img/minesec_sheet.png">    </p:cNvPr>
           <p:cNvPicPr>
             <a:picLocks noChangeAspect="1"/>
           </p:cNvPicPr>
@@ -16248,8 +16901,8 @@
         </p:blipFill>
         <p:spPr>
           <a:xfrm>
-            <a:off x="5349240" y="2070172"/>
-            <a:ext cx="6659575" cy="3696064"/>
+            <a:off x="0" y="658368"/>
+            <a:ext cx="1463040" cy="5833872"/>
           </a:xfrm>
           <a:prstGeom prst="rect">
             <a:avLst/>
@@ -16258,14 +16911,14 @@
       </p:pic>
       <p:sp>
         <p:nvSpPr>
-          <p:cNvPr id="6" name="Text 3"/>
+          <p:cNvPr id="4" name="Text 1"/>
           <p:cNvSpPr/>
           <p:nvPr/>
         </p:nvSpPr>
         <p:spPr>
           <a:xfrm>
-            <a:off x="5349240" y="6089904"/>
-            <a:ext cx="6659575" cy="347472"/>
+            <a:off x="1691640" y="1005840"/>
+            <a:ext cx="10180015" cy="731520"/>
           </a:xfrm>
           <a:prstGeom prst="rect">
             <a:avLst/>
@@ -16274,24 +16927,144 @@
           <a:ln/>
         </p:spPr>
         <p:txBody>
-          <a:bodyPr wrap="square" lIns="0" tIns="0" rIns="0" bIns="0" rtlCol="0" anchor="ctr"/>
+          <a:bodyPr wrap="square" lIns="0" tIns="0" rIns="0" bIns="0" rtlCol="0" anchor="ctr">
+            <a:normAutofit/>
+          </a:bodyPr>
           <a:lstStyle/>
           <a:p>
             <a:pPr algn="ctr" indent="0" marL="0">
               <a:buNone/>
             </a:pPr>
             <a:r>
-              <a:rPr lang="en-US" sz="1600" i="1" dirty="0">
-                <a:solidFill>
-                  <a:srgbClr val="555555"/>
+              <a:rPr lang="en-US" sz="3600" b="1" dirty="0">
+                <a:solidFill>
+                  <a:srgbClr val="990011"/>
                 </a:solidFill>
                 <a:latin typeface="Times New Roman" pitchFamily="34" charset="0"/>
                 <a:ea typeface="Times New Roman" pitchFamily="34" charset="-122"/>
                 <a:cs typeface="Times New Roman" pitchFamily="34" charset="-120"/>
               </a:rPr>
-              <a:t>Illustration: a cumulonimbus</a:t>
-            </a:r>
-            <a:endParaRPr lang="en-US" sz="1600" dirty="0"/>
+              <a:t>1. Cloud Formation</a:t>
+            </a:r>
+            <a:endParaRPr lang="en-US" sz="3600" dirty="0"/>
+          </a:p>
+        </p:txBody>
+      </p:sp>
+      <p:sp>
+        <p:nvSpPr>
+          <p:cNvPr id="5" name="Text 2"/>
+          <p:cNvSpPr/>
+          <p:nvPr/>
+        </p:nvSpPr>
+        <p:spPr>
+          <a:xfrm>
+            <a:off x="1691640" y="1737360"/>
+            <a:ext cx="10180015" cy="457200"/>
+          </a:xfrm>
+          <a:prstGeom prst="rect">
+            <a:avLst/>
+          </a:prstGeom>
+          <a:noFill/>
+          <a:ln/>
+        </p:spPr>
+        <p:txBody>
+          <a:bodyPr wrap="square" lIns="0" tIns="0" rIns="0" bIns="0" rtlCol="0" anchor="ctr"/>
+          <a:lstStyle/>
+          <a:p>
+            <a:pPr algn="l" indent="0" marL="0">
+              <a:buNone/>
+            </a:pPr>
+            <a:r>
+              <a:rPr lang="en-US" sz="3200" b="1" dirty="0">
+                <a:solidFill>
+                  <a:srgbClr val="990011"/>
+                </a:solidFill>
+                <a:latin typeface="Times New Roman" pitchFamily="34" charset="0"/>
+                <a:ea typeface="Times New Roman" pitchFamily="34" charset="-122"/>
+                <a:cs typeface="Times New Roman" pitchFamily="34" charset="-120"/>
+              </a:rPr>
+              <a:t>B) Classification and Associated Weather</a:t>
+            </a:r>
+            <a:endParaRPr lang="en-US" sz="3200" dirty="0"/>
+          </a:p>
+        </p:txBody>
+      </p:sp>
+      <p:sp>
+        <p:nvSpPr>
+          <p:cNvPr id="6" name="Text 3"/>
+          <p:cNvSpPr/>
+          <p:nvPr/>
+        </p:nvSpPr>
+        <p:spPr>
+          <a:xfrm>
+            <a:off x="1691640" y="2240280"/>
+            <a:ext cx="10180015" cy="4206240"/>
+          </a:xfrm>
+          <a:prstGeom prst="rect">
+            <a:avLst/>
+          </a:prstGeom>
+          <a:noFill/>
+          <a:ln/>
+        </p:spPr>
+        <p:txBody>
+          <a:bodyPr wrap="square" lIns="0" tIns="0" rIns="0" bIns="0" rtlCol="0" anchor="t"/>
+          <a:lstStyle/>
+          <a:p>
+            <a:pPr algn="l" indent="0" marL="0">
+              <a:spcAft>
+                <a:spcPts val="800"/>
+              </a:spcAft>
+              <a:buNone/>
+            </a:pPr>
+            <a:r>
+              <a:rPr lang="en-US" sz="3600" i="1" dirty="0">
+                <a:solidFill>
+                  <a:srgbClr val="111111"/>
+                </a:solidFill>
+                <a:latin typeface="Times New Roman" pitchFamily="34" charset="0"/>
+                <a:ea typeface="Times New Roman" pitchFamily="34" charset="-122"/>
+                <a:cs typeface="Times New Roman" pitchFamily="34" charset="-120"/>
+              </a:rPr>
+              <a:t>Clouds are classified by height and shape, and each type announces the following weather:</a:t>
+            </a:r>
+            <a:endParaRPr lang="en-US" sz="3600" dirty="0"/>
+          </a:p>
+          <a:p>
+            <a:pPr algn="l" indent="0" marL="0">
+              <a:spcAft>
+                <a:spcPts val="800"/>
+              </a:spcAft>
+              <a:buNone/>
+            </a:pPr>
+            <a:r>
+              <a:rPr lang="en-US" sz="3600" b="1" dirty="0">
+                <a:solidFill>
+                  <a:srgbClr val="111111"/>
+                </a:solidFill>
+                <a:latin typeface="Times New Roman" pitchFamily="34" charset="0"/>
+                <a:ea typeface="Times New Roman" pitchFamily="34" charset="-122"/>
+                <a:cs typeface="Times New Roman" pitchFamily="34" charset="-120"/>
+              </a:rPr>
+              <a:t>High clouds (above 6,000 m): </a:t>
+            </a:r>
+            <a:pPr algn="l" indent="0" marL="0">
+              <a:spcAft>
+                <a:spcPts val="800"/>
+              </a:spcAft>
+              <a:buNone/>
+            </a:pPr>
+            <a:r>
+              <a:rPr lang="en-US" sz="3600" dirty="0">
+                <a:solidFill>
+                  <a:srgbClr val="111111"/>
+                </a:solidFill>
+                <a:latin typeface="Times New Roman" pitchFamily="34" charset="0"/>
+                <a:ea typeface="Times New Roman" pitchFamily="34" charset="-122"/>
+                <a:cs typeface="Times New Roman" pitchFamily="34" charset="-120"/>
+              </a:rPr>
+              <a:t>Cirrus, cirrostratus and cirrocumulus are thin, white clouds made of ice crystals. Cirrus alone indicates fair weather, but cirrostratus spreading over the sky often announces rain within a day.</a:t>
+            </a:r>
+            <a:endParaRPr lang="en-US" sz="3600" dirty="0"/>
           </a:p>
         </p:txBody>
       </p:sp>
@@ -16466,7 +17239,7 @@
                 <a:ea typeface="Times New Roman" pitchFamily="34" charset="-122"/>
                 <a:cs typeface="Times New Roman" pitchFamily="34" charset="-120"/>
               </a:rPr>
-              <a:t>1. Forms of Condensation</a:t>
+              <a:t>1. Cloud Formation</a:t>
             </a:r>
             <a:endParaRPr lang="en-US" sz="3600" dirty="0"/>
           </a:p>
@@ -16480,8 +17253,47 @@
         </p:nvSpPr>
         <p:spPr>
           <a:xfrm>
-            <a:off x="1691640" y="1783080"/>
-            <a:ext cx="10180015" cy="4663440"/>
+            <a:off x="1691640" y="1737360"/>
+            <a:ext cx="10180015" cy="457200"/>
+          </a:xfrm>
+          <a:prstGeom prst="rect">
+            <a:avLst/>
+          </a:prstGeom>
+          <a:noFill/>
+          <a:ln/>
+        </p:spPr>
+        <p:txBody>
+          <a:bodyPr wrap="square" lIns="0" tIns="0" rIns="0" bIns="0" rtlCol="0" anchor="ctr"/>
+          <a:lstStyle/>
+          <a:p>
+            <a:pPr algn="l" indent="0" marL="0">
+              <a:buNone/>
+            </a:pPr>
+            <a:r>
+              <a:rPr lang="en-US" sz="3200" b="1" dirty="0">
+                <a:solidFill>
+                  <a:srgbClr val="990011"/>
+                </a:solidFill>
+                <a:latin typeface="Times New Roman" pitchFamily="34" charset="0"/>
+                <a:ea typeface="Times New Roman" pitchFamily="34" charset="-122"/>
+                <a:cs typeface="Times New Roman" pitchFamily="34" charset="-120"/>
+              </a:rPr>
+              <a:t>B) Classification and Associated Weather</a:t>
+            </a:r>
+            <a:endParaRPr lang="en-US" sz="3200" dirty="0"/>
+          </a:p>
+        </p:txBody>
+      </p:sp>
+      <p:sp>
+        <p:nvSpPr>
+          <p:cNvPr id="6" name="Text 3"/>
+          <p:cNvSpPr/>
+          <p:nvPr/>
+        </p:nvSpPr>
+        <p:spPr>
+          <a:xfrm>
+            <a:off x="1691640" y="2240280"/>
+            <a:ext cx="10180015" cy="4206240"/>
           </a:xfrm>
           <a:prstGeom prst="rect">
             <a:avLst/>
@@ -16508,7 +17320,7 @@
                 <a:ea typeface="Times New Roman" pitchFamily="34" charset="-122"/>
                 <a:cs typeface="Times New Roman" pitchFamily="34" charset="-120"/>
               </a:rPr>
-              <a:t>Stratus: </a:t>
+              <a:t>Middle clouds (2,000 to 6,000 m): </a:t>
             </a:r>
             <a:pPr algn="l" indent="0" marL="0">
               <a:spcAft>
@@ -16525,81 +17337,7 @@
                 <a:ea typeface="Times New Roman" pitchFamily="34" charset="-122"/>
                 <a:cs typeface="Times New Roman" pitchFamily="34" charset="-120"/>
               </a:rPr>
-              <a:t>Grey layers covering the sky, with drizzle or light, steady rain.</a:t>
-            </a:r>
-            <a:endParaRPr lang="en-US" sz="4000" dirty="0"/>
-          </a:p>
-          <a:p>
-            <a:pPr algn="l" indent="0" marL="0">
-              <a:spcAft>
-                <a:spcPts val="800"/>
-              </a:spcAft>
-              <a:buNone/>
-            </a:pPr>
-            <a:r>
-              <a:rPr lang="en-US" sz="4000" b="1" dirty="0">
-                <a:solidFill>
-                  <a:srgbClr val="111111"/>
-                </a:solidFill>
-                <a:latin typeface="Times New Roman" pitchFamily="34" charset="0"/>
-                <a:ea typeface="Times New Roman" pitchFamily="34" charset="-122"/>
-                <a:cs typeface="Times New Roman" pitchFamily="34" charset="-120"/>
-              </a:rPr>
-              <a:t>Cirrus: </a:t>
-            </a:r>
-            <a:pPr algn="l" indent="0" marL="0">
-              <a:spcAft>
-                <a:spcPts val="800"/>
-              </a:spcAft>
-              <a:buNone/>
-            </a:pPr>
-            <a:r>
-              <a:rPr lang="en-US" sz="4000" dirty="0">
-                <a:solidFill>
-                  <a:srgbClr val="111111"/>
-                </a:solidFill>
-                <a:latin typeface="Times New Roman" pitchFamily="34" charset="0"/>
-                <a:ea typeface="Times New Roman" pitchFamily="34" charset="-122"/>
-                <a:cs typeface="Times New Roman" pitchFamily="34" charset="-120"/>
-              </a:rPr>
-              <a:t>Thin, feathery clouds of ice crystals very high in the sky, a sign of fair weather.</a:t>
-            </a:r>
-            <a:endParaRPr lang="en-US" sz="4000" dirty="0"/>
-          </a:p>
-          <a:p>
-            <a:pPr algn="l" indent="0" marL="0">
-              <a:spcAft>
-                <a:spcPts val="800"/>
-              </a:spcAft>
-              <a:buNone/>
-            </a:pPr>
-            <a:r>
-              <a:rPr lang="en-US" sz="4000" b="1" dirty="0">
-                <a:solidFill>
-                  <a:srgbClr val="111111"/>
-                </a:solidFill>
-                <a:latin typeface="Times New Roman" pitchFamily="34" charset="0"/>
-                <a:ea typeface="Times New Roman" pitchFamily="34" charset="-122"/>
-                <a:cs typeface="Times New Roman" pitchFamily="34" charset="-120"/>
-              </a:rPr>
-              <a:t>Fog and mist: </a:t>
-            </a:r>
-            <a:pPr algn="l" indent="0" marL="0">
-              <a:spcAft>
-                <a:spcPts val="800"/>
-              </a:spcAft>
-              <a:buNone/>
-            </a:pPr>
-            <a:r>
-              <a:rPr lang="en-US" sz="4000" dirty="0">
-                <a:solidFill>
-                  <a:srgbClr val="111111"/>
-                </a:solidFill>
-                <a:latin typeface="Times New Roman" pitchFamily="34" charset="0"/>
-                <a:ea typeface="Times New Roman" pitchFamily="34" charset="-122"/>
-                <a:cs typeface="Times New Roman" pitchFamily="34" charset="-120"/>
-              </a:rPr>
-              <a:t>Clouds at ground level; fog reduces visibility below 1 km, mist less.</a:t>
+              <a:t>Altostratus and altocumulus are grey or white sheets or patches. When altostratus thickens and the sun disappears behind it, a front is approaching and steady rain will soon follow.</a:t>
             </a:r>
             <a:endParaRPr lang="en-US" sz="4000" dirty="0"/>
           </a:p>
@@ -16717,129 +17455,9 @@
           </a:p>
         </p:txBody>
       </p:sp>
-      <p:sp>
-        <p:nvSpPr>
-          <p:cNvPr id="3" name="Text 1"/>
-          <p:cNvSpPr/>
-          <p:nvPr/>
-        </p:nvSpPr>
-        <p:spPr>
-          <a:xfrm>
-            <a:off x="365760" y="1005840"/>
-            <a:ext cx="11460175" cy="731520"/>
-          </a:xfrm>
-          <a:prstGeom prst="rect">
-            <a:avLst/>
-          </a:prstGeom>
-          <a:noFill/>
-          <a:ln/>
-        </p:spPr>
-        <p:txBody>
-          <a:bodyPr wrap="square" lIns="0" tIns="0" rIns="0" bIns="0" rtlCol="0" anchor="ctr">
-            <a:normAutofit/>
-          </a:bodyPr>
-          <a:lstStyle/>
-          <a:p>
-            <a:pPr algn="ctr" indent="0" marL="0">
-              <a:buNone/>
-            </a:pPr>
-            <a:r>
-              <a:rPr lang="en-US" sz="3600" b="1" dirty="0">
-                <a:solidFill>
-                  <a:srgbClr val="990011"/>
-                </a:solidFill>
-                <a:latin typeface="Times New Roman" pitchFamily="34" charset="0"/>
-                <a:ea typeface="Times New Roman" pitchFamily="34" charset="-122"/>
-                <a:cs typeface="Times New Roman" pitchFamily="34" charset="-120"/>
-              </a:rPr>
-              <a:t>2. Forms of Precipitation</a:t>
-            </a:r>
-            <a:endParaRPr lang="en-US" sz="3600" dirty="0"/>
-          </a:p>
-        </p:txBody>
-      </p:sp>
-      <p:sp>
-        <p:nvSpPr>
-          <p:cNvPr id="4" name="Text 2"/>
-          <p:cNvSpPr/>
-          <p:nvPr/>
-        </p:nvSpPr>
-        <p:spPr>
-          <a:xfrm>
-            <a:off x="365760" y="1783080"/>
-            <a:ext cx="4846320" cy="4617720"/>
-          </a:xfrm>
-          <a:prstGeom prst="rect">
-            <a:avLst/>
-          </a:prstGeom>
-          <a:noFill/>
-          <a:ln/>
-        </p:spPr>
-        <p:txBody>
-          <a:bodyPr wrap="square" lIns="0" tIns="0" rIns="0" bIns="0" rtlCol="0" anchor="t"/>
-          <a:lstStyle/>
-          <a:p>
-            <a:pPr algn="l" indent="0" marL="0">
-              <a:spcAft>
-                <a:spcPts val="800"/>
-              </a:spcAft>
-              <a:buNone/>
-            </a:pPr>
-            <a:r>
-              <a:rPr lang="en-US" sz="3600" i="1" dirty="0">
-                <a:solidFill>
-                  <a:srgbClr val="111111"/>
-                </a:solidFill>
-                <a:latin typeface="Times New Roman" pitchFamily="34" charset="0"/>
-                <a:ea typeface="Times New Roman" pitchFamily="34" charset="-122"/>
-                <a:cs typeface="Times New Roman" pitchFamily="34" charset="-120"/>
-              </a:rPr>
-              <a:t>Precipitation takes the following forms:</a:t>
-            </a:r>
-            <a:endParaRPr lang="en-US" sz="3600" dirty="0"/>
-          </a:p>
-          <a:p>
-            <a:pPr algn="l" indent="0" marL="0">
-              <a:spcAft>
-                <a:spcPts val="800"/>
-              </a:spcAft>
-              <a:buNone/>
-            </a:pPr>
-            <a:r>
-              <a:rPr lang="en-US" sz="3600" b="1" dirty="0">
-                <a:solidFill>
-                  <a:srgbClr val="111111"/>
-                </a:solidFill>
-                <a:latin typeface="Times New Roman" pitchFamily="34" charset="0"/>
-                <a:ea typeface="Times New Roman" pitchFamily="34" charset="-122"/>
-                <a:cs typeface="Times New Roman" pitchFamily="34" charset="-120"/>
-              </a:rPr>
-              <a:t>Dew: </a:t>
-            </a:r>
-            <a:pPr algn="l" indent="0" marL="0">
-              <a:spcAft>
-                <a:spcPts val="800"/>
-              </a:spcAft>
-              <a:buNone/>
-            </a:pPr>
-            <a:r>
-              <a:rPr lang="en-US" sz="3600" dirty="0">
-                <a:solidFill>
-                  <a:srgbClr val="111111"/>
-                </a:solidFill>
-                <a:latin typeface="Times New Roman" pitchFamily="34" charset="0"/>
-                <a:ea typeface="Times New Roman" pitchFamily="34" charset="-122"/>
-                <a:cs typeface="Times New Roman" pitchFamily="34" charset="-120"/>
-              </a:rPr>
-              <a:t>Droplets on cool surfaces at night; it is condensation, not precipitation.</a:t>
-            </a:r>
-            <a:endParaRPr lang="en-US" sz="3600" dirty="0"/>
-          </a:p>
-        </p:txBody>
-      </p:sp>
       <p:pic>
         <p:nvPicPr>
-          <p:cNvPr id="5" name="Image 0" descr="/home/claude/f4/img/v2/lsa_dew.jpg">    </p:cNvPr>
+          <p:cNvPr id="3" name="Image 0" descr="/home/claude/f4/img/minesec_sheet.png">    </p:cNvPr>
           <p:cNvPicPr>
             <a:picLocks noChangeAspect="1"/>
           </p:cNvPicPr>
@@ -16853,8 +17471,8 @@
         </p:blipFill>
         <p:spPr>
           <a:xfrm>
-            <a:off x="5349240" y="2071212"/>
-            <a:ext cx="6659575" cy="3693983"/>
+            <a:off x="0" y="658368"/>
+            <a:ext cx="3840480" cy="5833872"/>
           </a:xfrm>
           <a:prstGeom prst="rect">
             <a:avLst/>
@@ -16863,14 +17481,14 @@
       </p:pic>
       <p:sp>
         <p:nvSpPr>
-          <p:cNvPr id="6" name="Text 3"/>
+          <p:cNvPr id="4" name="Text 1"/>
           <p:cNvSpPr/>
           <p:nvPr/>
         </p:nvSpPr>
         <p:spPr>
           <a:xfrm>
-            <a:off x="5349240" y="6089904"/>
-            <a:ext cx="6659575" cy="347472"/>
+            <a:off x="4069080" y="1005840"/>
+            <a:ext cx="7802575" cy="731520"/>
           </a:xfrm>
           <a:prstGeom prst="rect">
             <a:avLst/>
@@ -16879,24 +17497,124 @@
           <a:ln/>
         </p:spPr>
         <p:txBody>
-          <a:bodyPr wrap="square" lIns="0" tIns="0" rIns="0" bIns="0" rtlCol="0" anchor="ctr"/>
+          <a:bodyPr wrap="square" lIns="0" tIns="0" rIns="0" bIns="0" rtlCol="0" anchor="ctr">
+            <a:normAutofit/>
+          </a:bodyPr>
           <a:lstStyle/>
           <a:p>
             <a:pPr algn="ctr" indent="0" marL="0">
               <a:buNone/>
             </a:pPr>
             <a:r>
-              <a:rPr lang="en-US" sz="1600" i="1" dirty="0">
-                <a:solidFill>
-                  <a:srgbClr val="555555"/>
+              <a:rPr lang="en-US" sz="3600" b="1" dirty="0">
+                <a:solidFill>
+                  <a:srgbClr val="990011"/>
                 </a:solidFill>
                 <a:latin typeface="Times New Roman" pitchFamily="34" charset="0"/>
                 <a:ea typeface="Times New Roman" pitchFamily="34" charset="-122"/>
                 <a:cs typeface="Times New Roman" pitchFamily="34" charset="-120"/>
               </a:rPr>
-              <a:t>Illustration: dew</a:t>
-            </a:r>
-            <a:endParaRPr lang="en-US" sz="1600" dirty="0"/>
+              <a:t>1. Cloud Formation</a:t>
+            </a:r>
+            <a:endParaRPr lang="en-US" sz="3600" dirty="0"/>
+          </a:p>
+        </p:txBody>
+      </p:sp>
+      <p:sp>
+        <p:nvSpPr>
+          <p:cNvPr id="5" name="Text 2"/>
+          <p:cNvSpPr/>
+          <p:nvPr/>
+        </p:nvSpPr>
+        <p:spPr>
+          <a:xfrm>
+            <a:off x="4069080" y="1737360"/>
+            <a:ext cx="7802575" cy="457200"/>
+          </a:xfrm>
+          <a:prstGeom prst="rect">
+            <a:avLst/>
+          </a:prstGeom>
+          <a:noFill/>
+          <a:ln/>
+        </p:spPr>
+        <p:txBody>
+          <a:bodyPr wrap="square" lIns="0" tIns="0" rIns="0" bIns="0" rtlCol="0" anchor="ctr"/>
+          <a:lstStyle/>
+          <a:p>
+            <a:pPr algn="l" indent="0" marL="0">
+              <a:buNone/>
+            </a:pPr>
+            <a:r>
+              <a:rPr lang="en-US" sz="3000" b="1" dirty="0">
+                <a:solidFill>
+                  <a:srgbClr val="990011"/>
+                </a:solidFill>
+                <a:latin typeface="Times New Roman" pitchFamily="34" charset="0"/>
+                <a:ea typeface="Times New Roman" pitchFamily="34" charset="-122"/>
+                <a:cs typeface="Times New Roman" pitchFamily="34" charset="-120"/>
+              </a:rPr>
+              <a:t>B) Classification and Associated Weather</a:t>
+            </a:r>
+            <a:endParaRPr lang="en-US" sz="3000" dirty="0"/>
+          </a:p>
+        </p:txBody>
+      </p:sp>
+      <p:sp>
+        <p:nvSpPr>
+          <p:cNvPr id="6" name="Text 3"/>
+          <p:cNvSpPr/>
+          <p:nvPr/>
+        </p:nvSpPr>
+        <p:spPr>
+          <a:xfrm>
+            <a:off x="4069080" y="2240280"/>
+            <a:ext cx="7802575" cy="4206240"/>
+          </a:xfrm>
+          <a:prstGeom prst="rect">
+            <a:avLst/>
+          </a:prstGeom>
+          <a:noFill/>
+          <a:ln/>
+        </p:spPr>
+        <p:txBody>
+          <a:bodyPr wrap="square" lIns="0" tIns="0" rIns="0" bIns="0" rtlCol="0" anchor="t"/>
+          <a:lstStyle/>
+          <a:p>
+            <a:pPr algn="l" indent="0" marL="0">
+              <a:spcAft>
+                <a:spcPts val="800"/>
+              </a:spcAft>
+              <a:buNone/>
+            </a:pPr>
+            <a:r>
+              <a:rPr lang="en-US" sz="4000" b="1" dirty="0">
+                <a:solidFill>
+                  <a:srgbClr val="111111"/>
+                </a:solidFill>
+                <a:latin typeface="Times New Roman" pitchFamily="34" charset="0"/>
+                <a:ea typeface="Times New Roman" pitchFamily="34" charset="-122"/>
+                <a:cs typeface="Times New Roman" pitchFamily="34" charset="-120"/>
+              </a:rPr>
+              <a:t>Low clouds (below 2,000 m): </a:t>
+            </a:r>
+            <a:pPr algn="l" indent="0" marL="0">
+              <a:spcAft>
+                <a:spcPts val="800"/>
+              </a:spcAft>
+              <a:buNone/>
+            </a:pPr>
+            <a:r>
+              <a:rPr lang="en-US" sz="4000" dirty="0">
+                <a:solidFill>
+                  <a:srgbClr val="111111"/>
+                </a:solidFill>
+                <a:latin typeface="Times New Roman" pitchFamily="34" charset="0"/>
+                <a:ea typeface="Times New Roman" pitchFamily="34" charset="-122"/>
+                <a:cs typeface="Times New Roman" pitchFamily="34" charset="-120"/>
+              </a:rPr>
+              <a:t>Stratus and nimbostratus are grey layers that cover the whole sky. Stratus gives dull weather with drizzle, while nimbostratus gives long periods of steady rain.</a:t>
+            </a:r>
+            <a:endParaRPr lang="en-US" sz="4000" dirty="0"/>
           </a:p>
         </p:txBody>
       </p:sp>
@@ -17012,9 +17730,150 @@
           </a:p>
         </p:txBody>
       </p:sp>
+      <p:sp>
+        <p:nvSpPr>
+          <p:cNvPr id="3" name="Text 1"/>
+          <p:cNvSpPr/>
+          <p:nvPr/>
+        </p:nvSpPr>
+        <p:spPr>
+          <a:xfrm>
+            <a:off x="365760" y="1005840"/>
+            <a:ext cx="11460175" cy="731520"/>
+          </a:xfrm>
+          <a:prstGeom prst="rect">
+            <a:avLst/>
+          </a:prstGeom>
+          <a:noFill/>
+          <a:ln/>
+        </p:spPr>
+        <p:txBody>
+          <a:bodyPr wrap="square" lIns="0" tIns="0" rIns="0" bIns="0" rtlCol="0" anchor="ctr">
+            <a:normAutofit/>
+          </a:bodyPr>
+          <a:lstStyle/>
+          <a:p>
+            <a:pPr algn="ctr" indent="0" marL="0">
+              <a:buNone/>
+            </a:pPr>
+            <a:r>
+              <a:rPr lang="en-US" sz="3600" b="1" dirty="0">
+                <a:solidFill>
+                  <a:srgbClr val="990011"/>
+                </a:solidFill>
+                <a:latin typeface="Times New Roman" pitchFamily="34" charset="0"/>
+                <a:ea typeface="Times New Roman" pitchFamily="34" charset="-122"/>
+                <a:cs typeface="Times New Roman" pitchFamily="34" charset="-120"/>
+              </a:rPr>
+              <a:t>1. Cloud Formation</a:t>
+            </a:r>
+            <a:endParaRPr lang="en-US" sz="3600" dirty="0"/>
+          </a:p>
+        </p:txBody>
+      </p:sp>
+      <p:sp>
+        <p:nvSpPr>
+          <p:cNvPr id="4" name="Text 2"/>
+          <p:cNvSpPr/>
+          <p:nvPr/>
+        </p:nvSpPr>
+        <p:spPr>
+          <a:xfrm>
+            <a:off x="365760" y="1737360"/>
+            <a:ext cx="6035040" cy="457200"/>
+          </a:xfrm>
+          <a:prstGeom prst="rect">
+            <a:avLst/>
+          </a:prstGeom>
+          <a:noFill/>
+          <a:ln/>
+        </p:spPr>
+        <p:txBody>
+          <a:bodyPr wrap="square" lIns="0" tIns="0" rIns="0" bIns="0" rtlCol="0" anchor="ctr">
+            <a:normAutofit/>
+          </a:bodyPr>
+          <a:lstStyle/>
+          <a:p>
+            <a:pPr algn="l" indent="0" marL="0">
+              <a:buNone/>
+            </a:pPr>
+            <a:r>
+              <a:rPr lang="en-US" sz="3000" b="1" dirty="0">
+                <a:solidFill>
+                  <a:srgbClr val="990011"/>
+                </a:solidFill>
+                <a:latin typeface="Times New Roman" pitchFamily="34" charset="0"/>
+                <a:ea typeface="Times New Roman" pitchFamily="34" charset="-122"/>
+                <a:cs typeface="Times New Roman" pitchFamily="34" charset="-120"/>
+              </a:rPr>
+              <a:t>B) Classification and Associated Weather</a:t>
+            </a:r>
+            <a:endParaRPr lang="en-US" sz="3000" dirty="0"/>
+          </a:p>
+        </p:txBody>
+      </p:sp>
+      <p:sp>
+        <p:nvSpPr>
+          <p:cNvPr id="5" name="Text 3"/>
+          <p:cNvSpPr/>
+          <p:nvPr/>
+        </p:nvSpPr>
+        <p:spPr>
+          <a:xfrm>
+            <a:off x="365760" y="2240280"/>
+            <a:ext cx="6035040" cy="4160520"/>
+          </a:xfrm>
+          <a:prstGeom prst="rect">
+            <a:avLst/>
+          </a:prstGeom>
+          <a:noFill/>
+          <a:ln/>
+        </p:spPr>
+        <p:txBody>
+          <a:bodyPr wrap="square" lIns="0" tIns="0" rIns="0" bIns="0" rtlCol="0" anchor="t"/>
+          <a:lstStyle/>
+          <a:p>
+            <a:pPr algn="l" indent="0" marL="0">
+              <a:spcAft>
+                <a:spcPts val="800"/>
+              </a:spcAft>
+              <a:buNone/>
+            </a:pPr>
+            <a:r>
+              <a:rPr lang="en-US" sz="3200" b="1" dirty="0">
+                <a:solidFill>
+                  <a:srgbClr val="111111"/>
+                </a:solidFill>
+                <a:latin typeface="Times New Roman" pitchFamily="34" charset="0"/>
+                <a:ea typeface="Times New Roman" pitchFamily="34" charset="-122"/>
+                <a:cs typeface="Times New Roman" pitchFamily="34" charset="-120"/>
+              </a:rPr>
+              <a:t>Clouds of vertical development: </a:t>
+            </a:r>
+            <a:pPr algn="l" indent="0" marL="0">
+              <a:spcAft>
+                <a:spcPts val="800"/>
+              </a:spcAft>
+              <a:buNone/>
+            </a:pPr>
+            <a:r>
+              <a:rPr lang="en-US" sz="3200" dirty="0">
+                <a:solidFill>
+                  <a:srgbClr val="111111"/>
+                </a:solidFill>
+                <a:latin typeface="Times New Roman" pitchFamily="34" charset="0"/>
+                <a:ea typeface="Times New Roman" pitchFamily="34" charset="-122"/>
+                <a:cs typeface="Times New Roman" pitchFamily="34" charset="-120"/>
+              </a:rPr>
+              <a:t>Cumulus are puffy clouds with flat bases that show fair weather when they stay small. When they grow into huge cumulonimbus, they bring heavy showers, thunder, lightning and sometimes hail, as in Garoua in the rainy season.</a:t>
+            </a:r>
+            <a:endParaRPr lang="en-US" sz="3200" dirty="0"/>
+          </a:p>
+        </p:txBody>
+      </p:sp>
       <p:pic>
         <p:nvPicPr>
-          <p:cNvPr id="3" name="Image 0" descr="/home/claude/f4/img/minesec_sheet.png">    </p:cNvPr>
+          <p:cNvPr id="6" name="Image 0" descr="/home/claude/f4/img/v2/f4_cumulonimbus.jpg">    </p:cNvPr>
           <p:cNvPicPr>
             <a:picLocks noChangeAspect="1"/>
           </p:cNvPicPr>
@@ -17028,8 +17887,8 @@
         </p:blipFill>
         <p:spPr>
           <a:xfrm>
-            <a:off x="0" y="658368"/>
-            <a:ext cx="5120640" cy="5833872"/>
+            <a:off x="6537960" y="2400042"/>
+            <a:ext cx="5470855" cy="3036325"/>
           </a:xfrm>
           <a:prstGeom prst="rect">
             <a:avLst/>
@@ -17038,14 +17897,14 @@
       </p:pic>
       <p:sp>
         <p:nvSpPr>
-          <p:cNvPr id="4" name="Text 1"/>
+          <p:cNvPr id="7" name="Text 4"/>
           <p:cNvSpPr/>
           <p:nvPr/>
         </p:nvSpPr>
         <p:spPr>
           <a:xfrm>
-            <a:off x="5349240" y="1005840"/>
-            <a:ext cx="6522415" cy="731520"/>
+            <a:off x="6537960" y="6089904"/>
+            <a:ext cx="5470855" cy="347472"/>
           </a:xfrm>
           <a:prstGeom prst="rect">
             <a:avLst/>
@@ -17054,122 +17913,24 @@
           <a:ln/>
         </p:spPr>
         <p:txBody>
-          <a:bodyPr wrap="square" lIns="0" tIns="0" rIns="0" bIns="0" rtlCol="0" anchor="ctr">
-            <a:normAutofit/>
-          </a:bodyPr>
+          <a:bodyPr wrap="square" lIns="0" tIns="0" rIns="0" bIns="0" rtlCol="0" anchor="ctr"/>
           <a:lstStyle/>
           <a:p>
             <a:pPr algn="ctr" indent="0" marL="0">
               <a:buNone/>
             </a:pPr>
             <a:r>
-              <a:rPr lang="en-US" sz="3600" b="1" dirty="0">
-                <a:solidFill>
-                  <a:srgbClr val="990011"/>
+              <a:rPr lang="en-US" sz="1600" i="1" dirty="0">
+                <a:solidFill>
+                  <a:srgbClr val="555555"/>
                 </a:solidFill>
                 <a:latin typeface="Times New Roman" pitchFamily="34" charset="0"/>
                 <a:ea typeface="Times New Roman" pitchFamily="34" charset="-122"/>
                 <a:cs typeface="Times New Roman" pitchFamily="34" charset="-120"/>
               </a:rPr>
-              <a:t>2. Forms of Precipitation</a:t>
-            </a:r>
-            <a:endParaRPr lang="en-US" sz="3600" dirty="0"/>
-          </a:p>
-        </p:txBody>
-      </p:sp>
-      <p:sp>
-        <p:nvSpPr>
-          <p:cNvPr id="5" name="Text 2"/>
-          <p:cNvSpPr/>
-          <p:nvPr/>
-        </p:nvSpPr>
-        <p:spPr>
-          <a:xfrm>
-            <a:off x="5349240" y="1783080"/>
-            <a:ext cx="6522415" cy="4663440"/>
-          </a:xfrm>
-          <a:prstGeom prst="rect">
-            <a:avLst/>
-          </a:prstGeom>
-          <a:noFill/>
-          <a:ln/>
-        </p:spPr>
-        <p:txBody>
-          <a:bodyPr wrap="square" lIns="0" tIns="0" rIns="0" bIns="0" rtlCol="0" anchor="t"/>
-          <a:lstStyle/>
-          <a:p>
-            <a:pPr algn="l" indent="0" marL="0">
-              <a:spcAft>
-                <a:spcPts val="800"/>
-              </a:spcAft>
-              <a:buNone/>
-            </a:pPr>
-            <a:r>
-              <a:rPr lang="en-US" sz="4000" b="1" dirty="0">
-                <a:solidFill>
-                  <a:srgbClr val="111111"/>
-                </a:solidFill>
-                <a:latin typeface="Times New Roman" pitchFamily="34" charset="0"/>
-                <a:ea typeface="Times New Roman" pitchFamily="34" charset="-122"/>
-                <a:cs typeface="Times New Roman" pitchFamily="34" charset="-120"/>
-              </a:rPr>
-              <a:t>Drizzle: </a:t>
-            </a:r>
-            <a:pPr algn="l" indent="0" marL="0">
-              <a:spcAft>
-                <a:spcPts val="800"/>
-              </a:spcAft>
-              <a:buNone/>
-            </a:pPr>
-            <a:r>
-              <a:rPr lang="en-US" sz="4000" dirty="0">
-                <a:solidFill>
-                  <a:srgbClr val="111111"/>
-                </a:solidFill>
-                <a:latin typeface="Times New Roman" pitchFamily="34" charset="0"/>
-                <a:ea typeface="Times New Roman" pitchFamily="34" charset="-122"/>
-                <a:cs typeface="Times New Roman" pitchFamily="34" charset="-120"/>
-              </a:rPr>
-              <a:t>Very small drops, less than 0.5 mm.</a:t>
-            </a:r>
-            <a:endParaRPr lang="en-US" sz="4000" dirty="0"/>
-          </a:p>
-          <a:p>
-            <a:pPr algn="l" indent="0" marL="0">
-              <a:spcAft>
-                <a:spcPts val="800"/>
-              </a:spcAft>
-              <a:buNone/>
-            </a:pPr>
-            <a:r>
-              <a:rPr lang="en-US" sz="4000" b="1" dirty="0">
-                <a:solidFill>
-                  <a:srgbClr val="111111"/>
-                </a:solidFill>
-                <a:latin typeface="Times New Roman" pitchFamily="34" charset="0"/>
-                <a:ea typeface="Times New Roman" pitchFamily="34" charset="-122"/>
-                <a:cs typeface="Times New Roman" pitchFamily="34" charset="-120"/>
-              </a:rPr>
-              <a:t>Rain: </a:t>
-            </a:r>
-            <a:pPr algn="l" indent="0" marL="0">
-              <a:spcAft>
-                <a:spcPts val="800"/>
-              </a:spcAft>
-              <a:buNone/>
-            </a:pPr>
-            <a:r>
-              <a:rPr lang="en-US" sz="4000" dirty="0">
-                <a:solidFill>
-                  <a:srgbClr val="111111"/>
-                </a:solidFill>
-                <a:latin typeface="Times New Roman" pitchFamily="34" charset="0"/>
-                <a:ea typeface="Times New Roman" pitchFamily="34" charset="-122"/>
-                <a:cs typeface="Times New Roman" pitchFamily="34" charset="-120"/>
-              </a:rPr>
-              <a:t>Drops larger than 0.5 mm, formed when cloud droplets grow heavy enough to fall.</a:t>
-            </a:r>
-            <a:endParaRPr lang="en-US" sz="4000" dirty="0"/>
+              <a:t>Illustration: a cumulonimbus cloud</a:t>
+            </a:r>
+            <a:endParaRPr lang="en-US" sz="1600" dirty="0"/>
           </a:p>
         </p:txBody>
       </p:sp>
@@ -17320,7 +18081,7 @@
                 <a:ea typeface="Times New Roman" pitchFamily="34" charset="-122"/>
                 <a:cs typeface="Times New Roman" pitchFamily="34" charset="-120"/>
               </a:rPr>
-              <a:t>2. Forms of Precipitation</a:t>
+              <a:t>2. Fog and Mist</a:t>
             </a:r>
             <a:endParaRPr lang="en-US" sz="3600" dirty="0"/>
           </a:p>
@@ -17335,7 +18096,7 @@
         <p:spPr>
           <a:xfrm>
             <a:off x="365760" y="1783080"/>
-            <a:ext cx="4846320" cy="4617720"/>
+            <a:ext cx="6035040" cy="4617720"/>
           </a:xfrm>
           <a:prstGeom prst="rect">
             <a:avLst/>
@@ -17354,7 +18115,7 @@
               <a:buNone/>
             </a:pPr>
             <a:r>
-              <a:rPr lang="en-US" sz="3600" b="1" dirty="0">
+              <a:rPr lang="en-US" sz="3200" i="1" dirty="0">
                 <a:solidFill>
                   <a:srgbClr val="111111"/>
                 </a:solidFill>
@@ -17362,8 +18123,11 @@
                 <a:ea typeface="Times New Roman" pitchFamily="34" charset="-122"/>
                 <a:cs typeface="Times New Roman" pitchFamily="34" charset="-120"/>
               </a:rPr>
-              <a:t>Hail: </a:t>
-            </a:r>
+              <a:t>Fog and mist are distinguished as follows:</a:t>
+            </a:r>
+            <a:endParaRPr lang="en-US" sz="3200" dirty="0"/>
+          </a:p>
+          <a:p>
             <a:pPr algn="l" indent="0" marL="0">
               <a:spcAft>
                 <a:spcPts val="800"/>
@@ -17371,7 +18135,7 @@
               <a:buNone/>
             </a:pPr>
             <a:r>
-              <a:rPr lang="en-US" sz="3600" dirty="0">
+              <a:rPr lang="en-US" sz="3200" b="1" dirty="0">
                 <a:solidFill>
                   <a:srgbClr val="111111"/>
                 </a:solidFill>
@@ -17379,15 +18143,32 @@
                 <a:ea typeface="Times New Roman" pitchFamily="34" charset="-122"/>
                 <a:cs typeface="Times New Roman" pitchFamily="34" charset="-120"/>
               </a:rPr>
-              <a:t>Balls of ice formed in cumulonimbus clouds during violent storms.</a:t>
-            </a:r>
-            <a:endParaRPr lang="en-US" sz="3600" dirty="0"/>
+              <a:t>Fog: </a:t>
+            </a:r>
+            <a:pPr algn="l" indent="0" marL="0">
+              <a:spcAft>
+                <a:spcPts val="800"/>
+              </a:spcAft>
+              <a:buNone/>
+            </a:pPr>
+            <a:r>
+              <a:rPr lang="en-US" sz="3200" dirty="0">
+                <a:solidFill>
+                  <a:srgbClr val="111111"/>
+                </a:solidFill>
+                <a:latin typeface="Times New Roman" pitchFamily="34" charset="0"/>
+                <a:ea typeface="Times New Roman" pitchFamily="34" charset="-122"/>
+                <a:cs typeface="Times New Roman" pitchFamily="34" charset="-120"/>
+              </a:rPr>
+              <a:t>Fog is a cloud at ground level formed when the air near the surface is cooled to its dew point. It reduces visibility to less than 1 km and is dangerous for road and air transport.</a:t>
+            </a:r>
+            <a:endParaRPr lang="en-US" sz="3200" dirty="0"/>
           </a:p>
         </p:txBody>
       </p:sp>
       <p:pic>
         <p:nvPicPr>
-          <p:cNvPr id="5" name="Image 0" descr="/home/claude/f4/img/v2/lsa_hail.jpg">    </p:cNvPr>
+          <p:cNvPr id="5" name="Image 0" descr="/home/claude/f4/img/v2/f4_fog.jpg">    </p:cNvPr>
           <p:cNvPicPr>
             <a:picLocks noChangeAspect="1"/>
           </p:cNvPicPr>
@@ -17401,8 +18182,8 @@
         </p:blipFill>
         <p:spPr>
           <a:xfrm>
-            <a:off x="5349240" y="2071212"/>
-            <a:ext cx="6659575" cy="3693983"/>
+            <a:off x="6537960" y="2903104"/>
+            <a:ext cx="5470855" cy="2030200"/>
           </a:xfrm>
           <a:prstGeom prst="rect">
             <a:avLst/>
@@ -17417,8 +18198,8 @@
         </p:nvSpPr>
         <p:spPr>
           <a:xfrm>
-            <a:off x="5349240" y="6089904"/>
-            <a:ext cx="6659575" cy="347472"/>
+            <a:off x="6537960" y="6089904"/>
+            <a:ext cx="5470855" cy="347472"/>
           </a:xfrm>
           <a:prstGeom prst="rect">
             <a:avLst/>
@@ -17442,7 +18223,7 @@
                 <a:ea typeface="Times New Roman" pitchFamily="34" charset="-122"/>
                 <a:cs typeface="Times New Roman" pitchFamily="34" charset="-120"/>
               </a:rPr>
-              <a:t>Illustration: hailstones</a:t>
+              <a:t>Illustration: fog</a:t>
             </a:r>
             <a:endParaRPr lang="en-US" sz="1600" dirty="0"/>
           </a:p>
@@ -17577,7 +18358,7 @@
         <p:spPr>
           <a:xfrm>
             <a:off x="0" y="658368"/>
-            <a:ext cx="5120640" cy="5833872"/>
+            <a:ext cx="2468880" cy="5833872"/>
           </a:xfrm>
           <a:prstGeom prst="rect">
             <a:avLst/>
@@ -17592,8 +18373,8 @@
         </p:nvSpPr>
         <p:spPr>
           <a:xfrm>
-            <a:off x="5349240" y="1005840"/>
-            <a:ext cx="6522415" cy="731520"/>
+            <a:off x="2697480" y="1005840"/>
+            <a:ext cx="9174175" cy="731520"/>
           </a:xfrm>
           <a:prstGeom prst="rect">
             <a:avLst/>
@@ -17619,7 +18400,7 @@
                 <a:ea typeface="Times New Roman" pitchFamily="34" charset="-122"/>
                 <a:cs typeface="Times New Roman" pitchFamily="34" charset="-120"/>
               </a:rPr>
-              <a:t>2. Forms of Precipitation</a:t>
+              <a:t>2. Fog and Mist</a:t>
             </a:r>
             <a:endParaRPr lang="en-US" sz="3600" dirty="0"/>
           </a:p>
@@ -17633,8 +18414,8 @@
         </p:nvSpPr>
         <p:spPr>
           <a:xfrm>
-            <a:off x="5349240" y="1783080"/>
-            <a:ext cx="6522415" cy="4663440"/>
+            <a:off x="2697480" y="1783080"/>
+            <a:ext cx="9174175" cy="4663440"/>
           </a:xfrm>
           <a:prstGeom prst="rect">
             <a:avLst/>
@@ -17661,7 +18442,7 @@
                 <a:ea typeface="Times New Roman" pitchFamily="34" charset="-122"/>
                 <a:cs typeface="Times New Roman" pitchFamily="34" charset="-120"/>
               </a:rPr>
-              <a:t>Snow and frost: </a:t>
+              <a:t>Mist: </a:t>
             </a:r>
             <a:pPr algn="l" indent="0" marL="0">
               <a:spcAft>
@@ -17678,7 +18459,7 @@
                 <a:ea typeface="Times New Roman" pitchFamily="34" charset="-122"/>
                 <a:cs typeface="Times New Roman" pitchFamily="34" charset="-120"/>
               </a:rPr>
-              <a:t>Snow is ice crystals falling in cold climates; frost is ice crystals formed on cold surfaces.</a:t>
+              <a:t>Mist is a thinner cloud of droplets at ground level, with visibility between 1 and 2 km. It forms in the same way as fog, often in the early morning over rivers and valleys, and disappears quickly when the sun heats the ground.</a:t>
             </a:r>
             <a:endParaRPr lang="en-US" sz="4000" dirty="0"/>
           </a:p>
@@ -17831,7 +18612,7 @@
                 <a:ea typeface="Times New Roman" pitchFamily="34" charset="-122"/>
                 <a:cs typeface="Times New Roman" pitchFamily="34" charset="-120"/>
               </a:rPr>
-              <a:t>2. Forms of Precipitation</a:t>
+              <a:t>3. Forms of Precipitation</a:t>
             </a:r>
             <a:endParaRPr lang="en-US" sz="3600" dirty="0"/>
           </a:p>
@@ -17845,8 +18626,49 @@
         </p:nvSpPr>
         <p:spPr>
           <a:xfrm>
-            <a:off x="365760" y="1783080"/>
-            <a:ext cx="4846320" cy="4617720"/>
+            <a:off x="365760" y="1737360"/>
+            <a:ext cx="6035040" cy="457200"/>
+          </a:xfrm>
+          <a:prstGeom prst="rect">
+            <a:avLst/>
+          </a:prstGeom>
+          <a:noFill/>
+          <a:ln/>
+        </p:spPr>
+        <p:txBody>
+          <a:bodyPr wrap="square" lIns="0" tIns="0" rIns="0" bIns="0" rtlCol="0" anchor="ctr">
+            <a:normAutofit/>
+          </a:bodyPr>
+          <a:lstStyle/>
+          <a:p>
+            <a:pPr algn="l" indent="0" marL="0">
+              <a:buNone/>
+            </a:pPr>
+            <a:r>
+              <a:rPr lang="en-US" sz="3000" b="1" dirty="0">
+                <a:solidFill>
+                  <a:srgbClr val="990011"/>
+                </a:solidFill>
+                <a:latin typeface="Times New Roman" pitchFamily="34" charset="0"/>
+                <a:ea typeface="Times New Roman" pitchFamily="34" charset="-122"/>
+                <a:cs typeface="Times New Roman" pitchFamily="34" charset="-120"/>
+              </a:rPr>
+              <a:t>A) Solid Forms</a:t>
+            </a:r>
+            <a:endParaRPr lang="en-US" sz="3000" dirty="0"/>
+          </a:p>
+        </p:txBody>
+      </p:sp>
+      <p:sp>
+        <p:nvSpPr>
+          <p:cNvPr id="5" name="Text 3"/>
+          <p:cNvSpPr/>
+          <p:nvPr/>
+        </p:nvSpPr>
+        <p:spPr>
+          <a:xfrm>
+            <a:off x="365760" y="2240280"/>
+            <a:ext cx="6035040" cy="4160520"/>
           </a:xfrm>
           <a:prstGeom prst="rect">
             <a:avLst/>
@@ -17865,7 +18687,7 @@
               <a:buNone/>
             </a:pPr>
             <a:r>
-              <a:rPr lang="en-US" sz="3600" b="1" dirty="0">
+              <a:rPr lang="en-US" sz="3000" i="1" dirty="0">
                 <a:solidFill>
                   <a:srgbClr val="111111"/>
                 </a:solidFill>
@@ -17873,8 +18695,11 @@
                 <a:ea typeface="Times New Roman" pitchFamily="34" charset="-122"/>
                 <a:cs typeface="Times New Roman" pitchFamily="34" charset="-120"/>
               </a:rPr>
-              <a:t>Summary: </a:t>
-            </a:r>
+              <a:t>The solid forms of precipitation are the following:</a:t>
+            </a:r>
+            <a:endParaRPr lang="en-US" sz="3000" dirty="0"/>
+          </a:p>
+          <a:p>
             <a:pPr algn="l" indent="0" marL="0">
               <a:spcAft>
                 <a:spcPts val="800"/>
@@ -17882,7 +18707,7 @@
               <a:buNone/>
             </a:pPr>
             <a:r>
-              <a:rPr lang="en-US" sz="3600" dirty="0">
+              <a:rPr lang="en-US" sz="3000" b="1" dirty="0">
                 <a:solidFill>
                   <a:srgbClr val="111111"/>
                 </a:solidFill>
@@ -17890,15 +18715,32 @@
                 <a:ea typeface="Times New Roman" pitchFamily="34" charset="-122"/>
                 <a:cs typeface="Times New Roman" pitchFamily="34" charset="-120"/>
               </a:rPr>
-              <a:t>The forms of condensation and precipitation can be compared in a table.</a:t>
-            </a:r>
-            <a:endParaRPr lang="en-US" sz="3600" dirty="0"/>
+              <a:t>Snow: </a:t>
+            </a:r>
+            <a:pPr algn="l" indent="0" marL="0">
+              <a:spcAft>
+                <a:spcPts val="800"/>
+              </a:spcAft>
+              <a:buNone/>
+            </a:pPr>
+            <a:r>
+              <a:rPr lang="en-US" sz="3000" dirty="0">
+                <a:solidFill>
+                  <a:srgbClr val="111111"/>
+                </a:solidFill>
+                <a:latin typeface="Times New Roman" pitchFamily="34" charset="0"/>
+                <a:ea typeface="Times New Roman" pitchFamily="34" charset="-122"/>
+                <a:cs typeface="Times New Roman" pitchFamily="34" charset="-120"/>
+              </a:rPr>
+              <a:t>Snow is made of ice crystals that grow in very cold clouds and join to form flakes. It falls when the air is below 0 °C down to the ground, in temperate and polar regions and on high mountains.</a:t>
+            </a:r>
+            <a:endParaRPr lang="en-US" sz="3000" dirty="0"/>
           </a:p>
         </p:txBody>
       </p:sp>
       <p:pic>
         <p:nvPicPr>
-          <p:cNvPr id="5" name="Image 0" descr="/home/claude/f4/img/v2/met2_precip.png">    </p:cNvPr>
+          <p:cNvPr id="6" name="Image 0" descr="/home/claude/f4/img/v2/lsa_snow.jpg">    </p:cNvPr>
           <p:cNvPicPr>
             <a:picLocks noChangeAspect="1"/>
           </p:cNvPicPr>
@@ -17912,8 +18754,8 @@
         </p:blipFill>
         <p:spPr>
           <a:xfrm>
-            <a:off x="5349240" y="2617506"/>
-            <a:ext cx="6659575" cy="2601397"/>
+            <a:off x="6537960" y="2400897"/>
+            <a:ext cx="5470855" cy="3034615"/>
           </a:xfrm>
           <a:prstGeom prst="rect">
             <a:avLst/>
@@ -17922,14 +18764,14 @@
       </p:pic>
       <p:sp>
         <p:nvSpPr>
-          <p:cNvPr id="6" name="Text 3"/>
+          <p:cNvPr id="7" name="Text 4"/>
           <p:cNvSpPr/>
           <p:nvPr/>
         </p:nvSpPr>
         <p:spPr>
           <a:xfrm>
-            <a:off x="5349240" y="6089904"/>
-            <a:ext cx="6659575" cy="347472"/>
+            <a:off x="6537960" y="6089904"/>
+            <a:ext cx="5470855" cy="347472"/>
           </a:xfrm>
           <a:prstGeom prst="rect">
             <a:avLst/>
@@ -17953,7 +18795,7 @@
                 <a:ea typeface="Times New Roman" pitchFamily="34" charset="-122"/>
                 <a:cs typeface="Times New Roman" pitchFamily="34" charset="-120"/>
               </a:rPr>
-              <a:t>Illustration: forms of precipitation</a:t>
+              <a:t>Illustration: snow</a:t>
             </a:r>
             <a:endParaRPr lang="en-US" sz="1600" dirty="0"/>
           </a:p>
@@ -18071,129 +18913,9 @@
           </a:p>
         </p:txBody>
       </p:sp>
-      <p:sp>
-        <p:nvSpPr>
-          <p:cNvPr id="3" name="Text 1"/>
-          <p:cNvSpPr/>
-          <p:nvPr/>
-        </p:nvSpPr>
-        <p:spPr>
-          <a:xfrm>
-            <a:off x="365760" y="1005840"/>
-            <a:ext cx="11460175" cy="731520"/>
-          </a:xfrm>
-          <a:prstGeom prst="rect">
-            <a:avLst/>
-          </a:prstGeom>
-          <a:noFill/>
-          <a:ln/>
-        </p:spPr>
-        <p:txBody>
-          <a:bodyPr wrap="square" lIns="0" tIns="0" rIns="0" bIns="0" rtlCol="0" anchor="ctr">
-            <a:normAutofit/>
-          </a:bodyPr>
-          <a:lstStyle/>
-          <a:p>
-            <a:pPr algn="ctr" indent="0" marL="0">
-              <a:buNone/>
-            </a:pPr>
-            <a:r>
-              <a:rPr lang="en-US" sz="3600" b="1" dirty="0">
-                <a:solidFill>
-                  <a:srgbClr val="990011"/>
-                </a:solidFill>
-                <a:latin typeface="Times New Roman" pitchFamily="34" charset="0"/>
-                <a:ea typeface="Times New Roman" pitchFamily="34" charset="-122"/>
-                <a:cs typeface="Times New Roman" pitchFamily="34" charset="-120"/>
-              </a:rPr>
-              <a:t>3. Types of Rainfall</a:t>
-            </a:r>
-            <a:endParaRPr lang="en-US" sz="3600" dirty="0"/>
-          </a:p>
-        </p:txBody>
-      </p:sp>
-      <p:sp>
-        <p:nvSpPr>
-          <p:cNvPr id="4" name="Text 2"/>
-          <p:cNvSpPr/>
-          <p:nvPr/>
-        </p:nvSpPr>
-        <p:spPr>
-          <a:xfrm>
-            <a:off x="365760" y="1783080"/>
-            <a:ext cx="4846320" cy="4617720"/>
-          </a:xfrm>
-          <a:prstGeom prst="rect">
-            <a:avLst/>
-          </a:prstGeom>
-          <a:noFill/>
-          <a:ln/>
-        </p:spPr>
-        <p:txBody>
-          <a:bodyPr wrap="square" lIns="0" tIns="0" rIns="0" bIns="0" rtlCol="0" anchor="t"/>
-          <a:lstStyle/>
-          <a:p>
-            <a:pPr algn="l" indent="0" marL="0">
-              <a:spcAft>
-                <a:spcPts val="800"/>
-              </a:spcAft>
-              <a:buNone/>
-            </a:pPr>
-            <a:r>
-              <a:rPr lang="en-US" sz="3000" i="1" dirty="0">
-                <a:solidFill>
-                  <a:srgbClr val="111111"/>
-                </a:solidFill>
-                <a:latin typeface="Times New Roman" pitchFamily="34" charset="0"/>
-                <a:ea typeface="Times New Roman" pitchFamily="34" charset="-122"/>
-                <a:cs typeface="Times New Roman" pitchFamily="34" charset="-120"/>
-              </a:rPr>
-              <a:t>The main types of rainfall are the following:</a:t>
-            </a:r>
-            <a:endParaRPr lang="en-US" sz="3000" dirty="0"/>
-          </a:p>
-          <a:p>
-            <a:pPr algn="l" indent="0" marL="0">
-              <a:spcAft>
-                <a:spcPts val="800"/>
-              </a:spcAft>
-              <a:buNone/>
-            </a:pPr>
-            <a:r>
-              <a:rPr lang="en-US" sz="3000" b="1" dirty="0">
-                <a:solidFill>
-                  <a:srgbClr val="111111"/>
-                </a:solidFill>
-                <a:latin typeface="Times New Roman" pitchFamily="34" charset="0"/>
-                <a:ea typeface="Times New Roman" pitchFamily="34" charset="-122"/>
-                <a:cs typeface="Times New Roman" pitchFamily="34" charset="-120"/>
-              </a:rPr>
-              <a:t>Convectional rainfall: </a:t>
-            </a:r>
-            <a:pPr algn="l" indent="0" marL="0">
-              <a:spcAft>
-                <a:spcPts val="800"/>
-              </a:spcAft>
-              <a:buNone/>
-            </a:pPr>
-            <a:r>
-              <a:rPr lang="en-US" sz="3000" dirty="0">
-                <a:solidFill>
-                  <a:srgbClr val="111111"/>
-                </a:solidFill>
-                <a:latin typeface="Times New Roman" pitchFamily="34" charset="0"/>
-                <a:ea typeface="Times New Roman" pitchFamily="34" charset="-122"/>
-                <a:cs typeface="Times New Roman" pitchFamily="34" charset="-120"/>
-              </a:rPr>
-              <a:t>Intense heating makes moist air rise quickly and form cumulonimbus clouds, giving short, heavy afternoon storms, as in Garoua and equatorial regions.</a:t>
-            </a:r>
-            <a:endParaRPr lang="en-US" sz="3000" dirty="0"/>
-          </a:p>
-        </p:txBody>
-      </p:sp>
       <p:pic>
         <p:nvPicPr>
-          <p:cNvPr id="5" name="Image 0" descr="/home/claude/f4/img/v2/rainfall_types_big.png">    </p:cNvPr>
+          <p:cNvPr id="3" name="Image 0" descr="/home/claude/f4/img/minesec_sheet.png">    </p:cNvPr>
           <p:cNvPicPr>
             <a:picLocks noChangeAspect="1"/>
           </p:cNvPicPr>
@@ -18207,8 +18929,8 @@
         </p:blipFill>
         <p:spPr>
           <a:xfrm>
-            <a:off x="5349240" y="2617506"/>
-            <a:ext cx="6659575" cy="2601397"/>
+            <a:off x="0" y="658368"/>
+            <a:ext cx="2468880" cy="5833872"/>
           </a:xfrm>
           <a:prstGeom prst="rect">
             <a:avLst/>
@@ -18217,14 +18939,14 @@
       </p:pic>
       <p:sp>
         <p:nvSpPr>
-          <p:cNvPr id="6" name="Text 3"/>
+          <p:cNvPr id="4" name="Text 1"/>
           <p:cNvSpPr/>
           <p:nvPr/>
         </p:nvSpPr>
         <p:spPr>
           <a:xfrm>
-            <a:off x="5349240" y="6089904"/>
-            <a:ext cx="6659575" cy="347472"/>
+            <a:off x="2697480" y="1005840"/>
+            <a:ext cx="9174175" cy="731520"/>
           </a:xfrm>
           <a:prstGeom prst="rect">
             <a:avLst/>
@@ -18233,24 +18955,124 @@
           <a:ln/>
         </p:spPr>
         <p:txBody>
-          <a:bodyPr wrap="square" lIns="0" tIns="0" rIns="0" bIns="0" rtlCol="0" anchor="ctr"/>
+          <a:bodyPr wrap="square" lIns="0" tIns="0" rIns="0" bIns="0" rtlCol="0" anchor="ctr">
+            <a:normAutofit/>
+          </a:bodyPr>
           <a:lstStyle/>
           <a:p>
             <a:pPr algn="ctr" indent="0" marL="0">
               <a:buNone/>
             </a:pPr>
             <a:r>
-              <a:rPr lang="en-US" sz="1600" i="1" dirty="0">
-                <a:solidFill>
-                  <a:srgbClr val="555555"/>
+              <a:rPr lang="en-US" sz="3600" b="1" dirty="0">
+                <a:solidFill>
+                  <a:srgbClr val="990011"/>
                 </a:solidFill>
                 <a:latin typeface="Times New Roman" pitchFamily="34" charset="0"/>
                 <a:ea typeface="Times New Roman" pitchFamily="34" charset="-122"/>
                 <a:cs typeface="Times New Roman" pitchFamily="34" charset="-120"/>
               </a:rPr>
-              <a:t>Illustration: three types of rainfall</a:t>
-            </a:r>
-            <a:endParaRPr lang="en-US" sz="1600" dirty="0"/>
+              <a:t>3. Forms of Precipitation</a:t>
+            </a:r>
+            <a:endParaRPr lang="en-US" sz="3600" dirty="0"/>
+          </a:p>
+        </p:txBody>
+      </p:sp>
+      <p:sp>
+        <p:nvSpPr>
+          <p:cNvPr id="5" name="Text 2"/>
+          <p:cNvSpPr/>
+          <p:nvPr/>
+        </p:nvSpPr>
+        <p:spPr>
+          <a:xfrm>
+            <a:off x="2697480" y="1737360"/>
+            <a:ext cx="9174175" cy="457200"/>
+          </a:xfrm>
+          <a:prstGeom prst="rect">
+            <a:avLst/>
+          </a:prstGeom>
+          <a:noFill/>
+          <a:ln/>
+        </p:spPr>
+        <p:txBody>
+          <a:bodyPr wrap="square" lIns="0" tIns="0" rIns="0" bIns="0" rtlCol="0" anchor="ctr"/>
+          <a:lstStyle/>
+          <a:p>
+            <a:pPr algn="l" indent="0" marL="0">
+              <a:buNone/>
+            </a:pPr>
+            <a:r>
+              <a:rPr lang="en-US" sz="3200" b="1" dirty="0">
+                <a:solidFill>
+                  <a:srgbClr val="990011"/>
+                </a:solidFill>
+                <a:latin typeface="Times New Roman" pitchFamily="34" charset="0"/>
+                <a:ea typeface="Times New Roman" pitchFamily="34" charset="-122"/>
+                <a:cs typeface="Times New Roman" pitchFamily="34" charset="-120"/>
+              </a:rPr>
+              <a:t>A) Solid Forms</a:t>
+            </a:r>
+            <a:endParaRPr lang="en-US" sz="3200" dirty="0"/>
+          </a:p>
+        </p:txBody>
+      </p:sp>
+      <p:sp>
+        <p:nvSpPr>
+          <p:cNvPr id="6" name="Text 3"/>
+          <p:cNvSpPr/>
+          <p:nvPr/>
+        </p:nvSpPr>
+        <p:spPr>
+          <a:xfrm>
+            <a:off x="2697480" y="2240280"/>
+            <a:ext cx="9174175" cy="4206240"/>
+          </a:xfrm>
+          <a:prstGeom prst="rect">
+            <a:avLst/>
+          </a:prstGeom>
+          <a:noFill/>
+          <a:ln/>
+        </p:spPr>
+        <p:txBody>
+          <a:bodyPr wrap="square" lIns="0" tIns="0" rIns="0" bIns="0" rtlCol="0" anchor="t"/>
+          <a:lstStyle/>
+          <a:p>
+            <a:pPr algn="l" indent="0" marL="0">
+              <a:spcAft>
+                <a:spcPts val="800"/>
+              </a:spcAft>
+              <a:buNone/>
+            </a:pPr>
+            <a:r>
+              <a:rPr lang="en-US" sz="4000" b="1" dirty="0">
+                <a:solidFill>
+                  <a:srgbClr val="111111"/>
+                </a:solidFill>
+                <a:latin typeface="Times New Roman" pitchFamily="34" charset="0"/>
+                <a:ea typeface="Times New Roman" pitchFamily="34" charset="-122"/>
+                <a:cs typeface="Times New Roman" pitchFamily="34" charset="-120"/>
+              </a:rPr>
+              <a:t>Sleet: </a:t>
+            </a:r>
+            <a:pPr algn="l" indent="0" marL="0">
+              <a:spcAft>
+                <a:spcPts val="800"/>
+              </a:spcAft>
+              <a:buNone/>
+            </a:pPr>
+            <a:r>
+              <a:rPr lang="en-US" sz="4000" dirty="0">
+                <a:solidFill>
+                  <a:srgbClr val="111111"/>
+                </a:solidFill>
+                <a:latin typeface="Times New Roman" pitchFamily="34" charset="0"/>
+                <a:ea typeface="Times New Roman" pitchFamily="34" charset="-122"/>
+                <a:cs typeface="Times New Roman" pitchFamily="34" charset="-120"/>
+              </a:rPr>
+              <a:t>Sleet is made of small pellets of ice formed when raindrops freeze as they fall through a cold layer of air near the ground. In Britain, the word also means a mixture of rain and snow.</a:t>
+            </a:r>
+            <a:endParaRPr lang="en-US" sz="4000" dirty="0"/>
           </a:p>
         </p:txBody>
       </p:sp>
@@ -18366,9 +19188,150 @@
           </a:p>
         </p:txBody>
       </p:sp>
+      <p:sp>
+        <p:nvSpPr>
+          <p:cNvPr id="3" name="Text 1"/>
+          <p:cNvSpPr/>
+          <p:nvPr/>
+        </p:nvSpPr>
+        <p:spPr>
+          <a:xfrm>
+            <a:off x="365760" y="1005840"/>
+            <a:ext cx="11460175" cy="731520"/>
+          </a:xfrm>
+          <a:prstGeom prst="rect">
+            <a:avLst/>
+          </a:prstGeom>
+          <a:noFill/>
+          <a:ln/>
+        </p:spPr>
+        <p:txBody>
+          <a:bodyPr wrap="square" lIns="0" tIns="0" rIns="0" bIns="0" rtlCol="0" anchor="ctr">
+            <a:normAutofit/>
+          </a:bodyPr>
+          <a:lstStyle/>
+          <a:p>
+            <a:pPr algn="ctr" indent="0" marL="0">
+              <a:buNone/>
+            </a:pPr>
+            <a:r>
+              <a:rPr lang="en-US" sz="3600" b="1" dirty="0">
+                <a:solidFill>
+                  <a:srgbClr val="990011"/>
+                </a:solidFill>
+                <a:latin typeface="Times New Roman" pitchFamily="34" charset="0"/>
+                <a:ea typeface="Times New Roman" pitchFamily="34" charset="-122"/>
+                <a:cs typeface="Times New Roman" pitchFamily="34" charset="-120"/>
+              </a:rPr>
+              <a:t>3. Forms of Precipitation</a:t>
+            </a:r>
+            <a:endParaRPr lang="en-US" sz="3600" dirty="0"/>
+          </a:p>
+        </p:txBody>
+      </p:sp>
+      <p:sp>
+        <p:nvSpPr>
+          <p:cNvPr id="4" name="Text 2"/>
+          <p:cNvSpPr/>
+          <p:nvPr/>
+        </p:nvSpPr>
+        <p:spPr>
+          <a:xfrm>
+            <a:off x="365760" y="1737360"/>
+            <a:ext cx="6035040" cy="457200"/>
+          </a:xfrm>
+          <a:prstGeom prst="rect">
+            <a:avLst/>
+          </a:prstGeom>
+          <a:noFill/>
+          <a:ln/>
+        </p:spPr>
+        <p:txBody>
+          <a:bodyPr wrap="square" lIns="0" tIns="0" rIns="0" bIns="0" rtlCol="0" anchor="ctr">
+            <a:normAutofit/>
+          </a:bodyPr>
+          <a:lstStyle/>
+          <a:p>
+            <a:pPr algn="l" indent="0" marL="0">
+              <a:buNone/>
+            </a:pPr>
+            <a:r>
+              <a:rPr lang="en-US" sz="3000" b="1" dirty="0">
+                <a:solidFill>
+                  <a:srgbClr val="990011"/>
+                </a:solidFill>
+                <a:latin typeface="Times New Roman" pitchFamily="34" charset="0"/>
+                <a:ea typeface="Times New Roman" pitchFamily="34" charset="-122"/>
+                <a:cs typeface="Times New Roman" pitchFamily="34" charset="-120"/>
+              </a:rPr>
+              <a:t>A) Solid Forms</a:t>
+            </a:r>
+            <a:endParaRPr lang="en-US" sz="3000" dirty="0"/>
+          </a:p>
+        </p:txBody>
+      </p:sp>
+      <p:sp>
+        <p:nvSpPr>
+          <p:cNvPr id="5" name="Text 3"/>
+          <p:cNvSpPr/>
+          <p:nvPr/>
+        </p:nvSpPr>
+        <p:spPr>
+          <a:xfrm>
+            <a:off x="365760" y="2240280"/>
+            <a:ext cx="6035040" cy="4160520"/>
+          </a:xfrm>
+          <a:prstGeom prst="rect">
+            <a:avLst/>
+          </a:prstGeom>
+          <a:noFill/>
+          <a:ln/>
+        </p:spPr>
+        <p:txBody>
+          <a:bodyPr wrap="square" lIns="0" tIns="0" rIns="0" bIns="0" rtlCol="0" anchor="t"/>
+          <a:lstStyle/>
+          <a:p>
+            <a:pPr algn="l" indent="0" marL="0">
+              <a:spcAft>
+                <a:spcPts val="800"/>
+              </a:spcAft>
+              <a:buNone/>
+            </a:pPr>
+            <a:r>
+              <a:rPr lang="en-US" sz="3200" b="1" dirty="0">
+                <a:solidFill>
+                  <a:srgbClr val="111111"/>
+                </a:solidFill>
+                <a:latin typeface="Times New Roman" pitchFamily="34" charset="0"/>
+                <a:ea typeface="Times New Roman" pitchFamily="34" charset="-122"/>
+                <a:cs typeface="Times New Roman" pitchFamily="34" charset="-120"/>
+              </a:rPr>
+              <a:t>Hail: </a:t>
+            </a:r>
+            <a:pPr algn="l" indent="0" marL="0">
+              <a:spcAft>
+                <a:spcPts val="800"/>
+              </a:spcAft>
+              <a:buNone/>
+            </a:pPr>
+            <a:r>
+              <a:rPr lang="en-US" sz="3200" dirty="0">
+                <a:solidFill>
+                  <a:srgbClr val="111111"/>
+                </a:solidFill>
+                <a:latin typeface="Times New Roman" pitchFamily="34" charset="0"/>
+                <a:ea typeface="Times New Roman" pitchFamily="34" charset="-122"/>
+                <a:cs typeface="Times New Roman" pitchFamily="34" charset="-120"/>
+              </a:rPr>
+              <a:t>Hailstones are balls of ice formed in cumulonimbus clouds, where strong up-currents carry drops up and down through freezing air. Each trip adds a layer of ice until the stone is too heavy and falls, damaging crops and roofs.</a:t>
+            </a:r>
+            <a:endParaRPr lang="en-US" sz="3200" dirty="0"/>
+          </a:p>
+        </p:txBody>
+      </p:sp>
       <p:pic>
         <p:nvPicPr>
-          <p:cNvPr id="3" name="Image 0" descr="/home/claude/f4/img/minesec_sheet.png">    </p:cNvPr>
+          <p:cNvPr id="6" name="Image 0" descr="/home/claude/f4/img/v2/lsa_hail.jpg">    </p:cNvPr>
           <p:cNvPicPr>
             <a:picLocks noChangeAspect="1"/>
           </p:cNvPicPr>
@@ -18382,8 +19345,8 @@
         </p:blipFill>
         <p:spPr>
           <a:xfrm>
-            <a:off x="0" y="658368"/>
-            <a:ext cx="1463040" cy="5833872"/>
+            <a:off x="6537960" y="2400897"/>
+            <a:ext cx="5470855" cy="3034615"/>
           </a:xfrm>
           <a:prstGeom prst="rect">
             <a:avLst/>
@@ -18392,14 +19355,14 @@
       </p:pic>
       <p:sp>
         <p:nvSpPr>
-          <p:cNvPr id="4" name="Text 1"/>
+          <p:cNvPr id="7" name="Text 4"/>
           <p:cNvSpPr/>
           <p:nvPr/>
         </p:nvSpPr>
         <p:spPr>
           <a:xfrm>
-            <a:off x="1691640" y="1005840"/>
-            <a:ext cx="10180015" cy="731520"/>
+            <a:off x="6537960" y="6089904"/>
+            <a:ext cx="5470855" cy="347472"/>
           </a:xfrm>
           <a:prstGeom prst="rect">
             <a:avLst/>
@@ -18408,122 +19371,24 @@
           <a:ln/>
         </p:spPr>
         <p:txBody>
-          <a:bodyPr wrap="square" lIns="0" tIns="0" rIns="0" bIns="0" rtlCol="0" anchor="ctr">
-            <a:normAutofit/>
-          </a:bodyPr>
+          <a:bodyPr wrap="square" lIns="0" tIns="0" rIns="0" bIns="0" rtlCol="0" anchor="ctr"/>
           <a:lstStyle/>
           <a:p>
             <a:pPr algn="ctr" indent="0" marL="0">
               <a:buNone/>
             </a:pPr>
             <a:r>
-              <a:rPr lang="en-US" sz="3600" b="1" dirty="0">
-                <a:solidFill>
-                  <a:srgbClr val="990011"/>
+              <a:rPr lang="en-US" sz="1600" i="1" dirty="0">
+                <a:solidFill>
+                  <a:srgbClr val="555555"/>
                 </a:solidFill>
                 <a:latin typeface="Times New Roman" pitchFamily="34" charset="0"/>
                 <a:ea typeface="Times New Roman" pitchFamily="34" charset="-122"/>
                 <a:cs typeface="Times New Roman" pitchFamily="34" charset="-120"/>
               </a:rPr>
-              <a:t>3. Types of Rainfall</a:t>
-            </a:r>
-            <a:endParaRPr lang="en-US" sz="3600" dirty="0"/>
-          </a:p>
-        </p:txBody>
-      </p:sp>
-      <p:sp>
-        <p:nvSpPr>
-          <p:cNvPr id="5" name="Text 2"/>
-          <p:cNvSpPr/>
-          <p:nvPr/>
-        </p:nvSpPr>
-        <p:spPr>
-          <a:xfrm>
-            <a:off x="1691640" y="1783080"/>
-            <a:ext cx="10180015" cy="4663440"/>
-          </a:xfrm>
-          <a:prstGeom prst="rect">
-            <a:avLst/>
-          </a:prstGeom>
-          <a:noFill/>
-          <a:ln/>
-        </p:spPr>
-        <p:txBody>
-          <a:bodyPr wrap="square" lIns="0" tIns="0" rIns="0" bIns="0" rtlCol="0" anchor="t"/>
-          <a:lstStyle/>
-          <a:p>
-            <a:pPr algn="l" indent="0" marL="0">
-              <a:spcAft>
-                <a:spcPts val="800"/>
-              </a:spcAft>
-              <a:buNone/>
-            </a:pPr>
-            <a:r>
-              <a:rPr lang="en-US" sz="4000" b="1" dirty="0">
-                <a:solidFill>
-                  <a:srgbClr val="111111"/>
-                </a:solidFill>
-                <a:latin typeface="Times New Roman" pitchFamily="34" charset="0"/>
-                <a:ea typeface="Times New Roman" pitchFamily="34" charset="-122"/>
-                <a:cs typeface="Times New Roman" pitchFamily="34" charset="-120"/>
-              </a:rPr>
-              <a:t>Orographic (relief) rainfall: </a:t>
-            </a:r>
-            <a:pPr algn="l" indent="0" marL="0">
-              <a:spcAft>
-                <a:spcPts val="800"/>
-              </a:spcAft>
-              <a:buNone/>
-            </a:pPr>
-            <a:r>
-              <a:rPr lang="en-US" sz="4000" dirty="0">
-                <a:solidFill>
-                  <a:srgbClr val="111111"/>
-                </a:solidFill>
-                <a:latin typeface="Times New Roman" pitchFamily="34" charset="0"/>
-                <a:ea typeface="Times New Roman" pitchFamily="34" charset="-122"/>
-                <a:cs typeface="Times New Roman" pitchFamily="34" charset="-120"/>
-              </a:rPr>
-              <a:t>Moist winds rise over mountains and give rain on the windward side, while the leeward side is a rain shadow, as around Mount Cameroon.</a:t>
-            </a:r>
-            <a:endParaRPr lang="en-US" sz="4000" dirty="0"/>
-          </a:p>
-          <a:p>
-            <a:pPr algn="l" indent="0" marL="0">
-              <a:spcAft>
-                <a:spcPts val="800"/>
-              </a:spcAft>
-              <a:buNone/>
-            </a:pPr>
-            <a:r>
-              <a:rPr lang="en-US" sz="4000" b="1" dirty="0">
-                <a:solidFill>
-                  <a:srgbClr val="111111"/>
-                </a:solidFill>
-                <a:latin typeface="Times New Roman" pitchFamily="34" charset="0"/>
-                <a:ea typeface="Times New Roman" pitchFamily="34" charset="-122"/>
-                <a:cs typeface="Times New Roman" pitchFamily="34" charset="-120"/>
-              </a:rPr>
-              <a:t>Frontal (cyclonic) rainfall: </a:t>
-            </a:r>
-            <a:pPr algn="l" indent="0" marL="0">
-              <a:spcAft>
-                <a:spcPts val="800"/>
-              </a:spcAft>
-              <a:buNone/>
-            </a:pPr>
-            <a:r>
-              <a:rPr lang="en-US" sz="4000" dirty="0">
-                <a:solidFill>
-                  <a:srgbClr val="111111"/>
-                </a:solidFill>
-                <a:latin typeface="Times New Roman" pitchFamily="34" charset="0"/>
-                <a:ea typeface="Times New Roman" pitchFamily="34" charset="-122"/>
-                <a:cs typeface="Times New Roman" pitchFamily="34" charset="-120"/>
-              </a:rPr>
-              <a:t>Warm air rises slowly over cold air where two air masses meet, giving long, steady rain.</a:t>
-            </a:r>
-            <a:endParaRPr lang="en-US" sz="4000" dirty="0"/>
+              <a:t>Illustration: hailstones</a:t>
+            </a:r>
+            <a:endParaRPr lang="en-US" sz="1600" dirty="0"/>
           </a:p>
         </p:txBody>
       </p:sp>
@@ -18852,15 +19717,156 @@
                 <a:ea typeface="Calibri" pitchFamily="34" charset="-122"/>
                 <a:cs typeface="Calibri" pitchFamily="34" charset="-120"/>
               </a:rPr>
-              <a:t>FORMATIVE EVALUATION</a:t>
+              <a:t>BOARD SUMMARY</a:t>
             </a:r>
             <a:endParaRPr lang="en-US" sz="1400" dirty="0"/>
+          </a:p>
+        </p:txBody>
+      </p:sp>
+      <p:sp>
+        <p:nvSpPr>
+          <p:cNvPr id="3" name="Text 1"/>
+          <p:cNvSpPr/>
+          <p:nvPr/>
+        </p:nvSpPr>
+        <p:spPr>
+          <a:xfrm>
+            <a:off x="365760" y="1005840"/>
+            <a:ext cx="11460175" cy="731520"/>
+          </a:xfrm>
+          <a:prstGeom prst="rect">
+            <a:avLst/>
+          </a:prstGeom>
+          <a:noFill/>
+          <a:ln/>
+        </p:spPr>
+        <p:txBody>
+          <a:bodyPr wrap="square" lIns="0" tIns="0" rIns="0" bIns="0" rtlCol="0" anchor="ctr">
+            <a:normAutofit/>
+          </a:bodyPr>
+          <a:lstStyle/>
+          <a:p>
+            <a:pPr algn="ctr" indent="0" marL="0">
+              <a:buNone/>
+            </a:pPr>
+            <a:r>
+              <a:rPr lang="en-US" sz="3600" b="1" dirty="0">
+                <a:solidFill>
+                  <a:srgbClr val="990011"/>
+                </a:solidFill>
+                <a:latin typeface="Times New Roman" pitchFamily="34" charset="0"/>
+                <a:ea typeface="Times New Roman" pitchFamily="34" charset="-122"/>
+                <a:cs typeface="Times New Roman" pitchFamily="34" charset="-120"/>
+              </a:rPr>
+              <a:t>3. Forms of Precipitation</a:t>
+            </a:r>
+            <a:endParaRPr lang="en-US" sz="3600" dirty="0"/>
+          </a:p>
+        </p:txBody>
+      </p:sp>
+      <p:sp>
+        <p:nvSpPr>
+          <p:cNvPr id="4" name="Text 2"/>
+          <p:cNvSpPr/>
+          <p:nvPr/>
+        </p:nvSpPr>
+        <p:spPr>
+          <a:xfrm>
+            <a:off x="365760" y="1737360"/>
+            <a:ext cx="6035040" cy="457200"/>
+          </a:xfrm>
+          <a:prstGeom prst="rect">
+            <a:avLst/>
+          </a:prstGeom>
+          <a:noFill/>
+          <a:ln/>
+        </p:spPr>
+        <p:txBody>
+          <a:bodyPr wrap="square" lIns="0" tIns="0" rIns="0" bIns="0" rtlCol="0" anchor="ctr">
+            <a:normAutofit/>
+          </a:bodyPr>
+          <a:lstStyle/>
+          <a:p>
+            <a:pPr algn="l" indent="0" marL="0">
+              <a:buNone/>
+            </a:pPr>
+            <a:r>
+              <a:rPr lang="en-US" sz="3000" b="1" dirty="0">
+                <a:solidFill>
+                  <a:srgbClr val="990011"/>
+                </a:solidFill>
+                <a:latin typeface="Times New Roman" pitchFamily="34" charset="0"/>
+                <a:ea typeface="Times New Roman" pitchFamily="34" charset="-122"/>
+                <a:cs typeface="Times New Roman" pitchFamily="34" charset="-120"/>
+              </a:rPr>
+              <a:t>A) Solid Forms</a:t>
+            </a:r>
+            <a:endParaRPr lang="en-US" sz="3000" dirty="0"/>
+          </a:p>
+        </p:txBody>
+      </p:sp>
+      <p:sp>
+        <p:nvSpPr>
+          <p:cNvPr id="5" name="Text 3"/>
+          <p:cNvSpPr/>
+          <p:nvPr/>
+        </p:nvSpPr>
+        <p:spPr>
+          <a:xfrm>
+            <a:off x="365760" y="2240280"/>
+            <a:ext cx="6035040" cy="4160520"/>
+          </a:xfrm>
+          <a:prstGeom prst="rect">
+            <a:avLst/>
+          </a:prstGeom>
+          <a:noFill/>
+          <a:ln/>
+        </p:spPr>
+        <p:txBody>
+          <a:bodyPr wrap="square" lIns="0" tIns="0" rIns="0" bIns="0" rtlCol="0" anchor="t"/>
+          <a:lstStyle/>
+          <a:p>
+            <a:pPr algn="l" indent="0" marL="0">
+              <a:spcAft>
+                <a:spcPts val="800"/>
+              </a:spcAft>
+              <a:buNone/>
+            </a:pPr>
+            <a:r>
+              <a:rPr lang="en-US" sz="3200" b="1" dirty="0">
+                <a:solidFill>
+                  <a:srgbClr val="111111"/>
+                </a:solidFill>
+                <a:latin typeface="Times New Roman" pitchFamily="34" charset="0"/>
+                <a:ea typeface="Times New Roman" pitchFamily="34" charset="-122"/>
+                <a:cs typeface="Times New Roman" pitchFamily="34" charset="-120"/>
+              </a:rPr>
+              <a:t>Frost and rime: </a:t>
+            </a:r>
+            <a:pPr algn="l" indent="0" marL="0">
+              <a:spcAft>
+                <a:spcPts val="800"/>
+              </a:spcAft>
+              <a:buNone/>
+            </a:pPr>
+            <a:r>
+              <a:rPr lang="en-US" sz="3200" dirty="0">
+                <a:solidFill>
+                  <a:srgbClr val="111111"/>
+                </a:solidFill>
+                <a:latin typeface="Times New Roman" pitchFamily="34" charset="0"/>
+                <a:ea typeface="Times New Roman" pitchFamily="34" charset="-122"/>
+                <a:cs typeface="Times New Roman" pitchFamily="34" charset="-120"/>
+              </a:rPr>
+              <a:t>Frost is a white layer of ice crystals formed when water vapour changes directly into ice on surfaces below 0 °C. Rime forms when fog droplets freeze on contact with cold trees, wires and rocks.</a:t>
+            </a:r>
+            <a:endParaRPr lang="en-US" sz="3200" dirty="0"/>
           </a:p>
         </p:txBody>
       </p:sp>
       <p:pic>
         <p:nvPicPr>
-          <p:cNvPr id="3" name="Image 0" descr="/home/claude/f4/img/minesec_sheet.png">    </p:cNvPr>
+          <p:cNvPr id="6" name="Image 0" descr="/home/claude/f4/img/v2/lsa_frost.jpg">    </p:cNvPr>
           <p:cNvPicPr>
             <a:picLocks noChangeAspect="1"/>
           </p:cNvPicPr>
@@ -18874,8 +19880,8 @@
         </p:blipFill>
         <p:spPr>
           <a:xfrm>
-            <a:off x="0" y="658368"/>
-            <a:ext cx="5120640" cy="5833872"/>
+            <a:off x="6537960" y="2400897"/>
+            <a:ext cx="5470855" cy="3034615"/>
           </a:xfrm>
           <a:prstGeom prst="rect">
             <a:avLst/>
@@ -18884,14 +19890,14 @@
       </p:pic>
       <p:sp>
         <p:nvSpPr>
-          <p:cNvPr id="4" name="Text 1"/>
+          <p:cNvPr id="7" name="Text 4"/>
           <p:cNvSpPr/>
           <p:nvPr/>
         </p:nvSpPr>
         <p:spPr>
           <a:xfrm>
-            <a:off x="5349240" y="1005840"/>
-            <a:ext cx="6522415" cy="731520"/>
+            <a:off x="6537960" y="6089904"/>
+            <a:ext cx="5470855" cy="347472"/>
           </a:xfrm>
           <a:prstGeom prst="rect">
             <a:avLst/>
@@ -18900,68 +19906,24 @@
           <a:ln/>
         </p:spPr>
         <p:txBody>
-          <a:bodyPr wrap="square" lIns="0" tIns="0" rIns="0" bIns="0" rtlCol="0" anchor="ctr">
-            <a:normAutofit/>
-          </a:bodyPr>
+          <a:bodyPr wrap="square" lIns="0" tIns="0" rIns="0" bIns="0" rtlCol="0" anchor="ctr"/>
           <a:lstStyle/>
           <a:p>
             <a:pPr algn="ctr" indent="0" marL="0">
               <a:buNone/>
             </a:pPr>
             <a:r>
-              <a:rPr lang="en-US" sz="3600" b="1" dirty="0">
-                <a:solidFill>
-                  <a:srgbClr val="990011"/>
+              <a:rPr lang="en-US" sz="1600" i="1" dirty="0">
+                <a:solidFill>
+                  <a:srgbClr val="555555"/>
                 </a:solidFill>
                 <a:latin typeface="Times New Roman" pitchFamily="34" charset="0"/>
                 <a:ea typeface="Times New Roman" pitchFamily="34" charset="-122"/>
                 <a:cs typeface="Times New Roman" pitchFamily="34" charset="-120"/>
               </a:rPr>
-              <a:t>Evaluation 1</a:t>
-            </a:r>
-            <a:endParaRPr lang="en-US" sz="3600" dirty="0"/>
-          </a:p>
-        </p:txBody>
-      </p:sp>
-      <p:sp>
-        <p:nvSpPr>
-          <p:cNvPr id="5" name="Text 2"/>
-          <p:cNvSpPr/>
-          <p:nvPr/>
-        </p:nvSpPr>
-        <p:spPr>
-          <a:xfrm>
-            <a:off x="5349240" y="1783080"/>
-            <a:ext cx="6522415" cy="4663440"/>
-          </a:xfrm>
-          <a:prstGeom prst="rect">
-            <a:avLst/>
-          </a:prstGeom>
-          <a:noFill/>
-          <a:ln/>
-        </p:spPr>
-        <p:txBody>
-          <a:bodyPr wrap="square" lIns="0" tIns="0" rIns="0" bIns="0" rtlCol="0" anchor="t"/>
-          <a:lstStyle/>
-          <a:p>
-            <a:pPr algn="l" indent="0" marL="0">
-              <a:spcAft>
-                <a:spcPts val="800"/>
-              </a:spcAft>
-              <a:buNone/>
-            </a:pPr>
-            <a:r>
-              <a:rPr lang="en-US" sz="4000" dirty="0">
-                <a:solidFill>
-                  <a:srgbClr val="111111"/>
-                </a:solidFill>
-                <a:latin typeface="Times New Roman" pitchFamily="34" charset="0"/>
-                <a:ea typeface="Times New Roman" pitchFamily="34" charset="-122"/>
-                <a:cs typeface="Times New Roman" pitchFamily="34" charset="-120"/>
-              </a:rPr>
-              <a:t>Explain how a hot sunny day in Garoua can lead to a heavy afternoon storm.</a:t>
-            </a:r>
-            <a:endParaRPr lang="en-US" sz="4000" dirty="0"/>
+              <a:t>Illustration: frost</a:t>
+            </a:r>
+            <a:endParaRPr lang="en-US" sz="1600" dirty="0"/>
           </a:p>
         </p:txBody>
       </p:sp>
@@ -19071,15 +20033,176 @@
                 <a:ea typeface="Calibri" pitchFamily="34" charset="-122"/>
                 <a:cs typeface="Calibri" pitchFamily="34" charset="-120"/>
               </a:rPr>
-              <a:t>FORMATIVE EVALUATION</a:t>
+              <a:t>BOARD SUMMARY</a:t>
             </a:r>
             <a:endParaRPr lang="en-US" sz="1400" dirty="0"/>
+          </a:p>
+        </p:txBody>
+      </p:sp>
+      <p:sp>
+        <p:nvSpPr>
+          <p:cNvPr id="3" name="Text 1"/>
+          <p:cNvSpPr/>
+          <p:nvPr/>
+        </p:nvSpPr>
+        <p:spPr>
+          <a:xfrm>
+            <a:off x="365760" y="1005840"/>
+            <a:ext cx="11460175" cy="731520"/>
+          </a:xfrm>
+          <a:prstGeom prst="rect">
+            <a:avLst/>
+          </a:prstGeom>
+          <a:noFill/>
+          <a:ln/>
+        </p:spPr>
+        <p:txBody>
+          <a:bodyPr wrap="square" lIns="0" tIns="0" rIns="0" bIns="0" rtlCol="0" anchor="ctr">
+            <a:normAutofit/>
+          </a:bodyPr>
+          <a:lstStyle/>
+          <a:p>
+            <a:pPr algn="ctr" indent="0" marL="0">
+              <a:buNone/>
+            </a:pPr>
+            <a:r>
+              <a:rPr lang="en-US" sz="3600" b="1" dirty="0">
+                <a:solidFill>
+                  <a:srgbClr val="990011"/>
+                </a:solidFill>
+                <a:latin typeface="Times New Roman" pitchFamily="34" charset="0"/>
+                <a:ea typeface="Times New Roman" pitchFamily="34" charset="-122"/>
+                <a:cs typeface="Times New Roman" pitchFamily="34" charset="-120"/>
+              </a:rPr>
+              <a:t>3. Forms of Precipitation</a:t>
+            </a:r>
+            <a:endParaRPr lang="en-US" sz="3600" dirty="0"/>
+          </a:p>
+        </p:txBody>
+      </p:sp>
+      <p:sp>
+        <p:nvSpPr>
+          <p:cNvPr id="4" name="Text 2"/>
+          <p:cNvSpPr/>
+          <p:nvPr/>
+        </p:nvSpPr>
+        <p:spPr>
+          <a:xfrm>
+            <a:off x="365760" y="1737360"/>
+            <a:ext cx="6035040" cy="457200"/>
+          </a:xfrm>
+          <a:prstGeom prst="rect">
+            <a:avLst/>
+          </a:prstGeom>
+          <a:noFill/>
+          <a:ln/>
+        </p:spPr>
+        <p:txBody>
+          <a:bodyPr wrap="square" lIns="0" tIns="0" rIns="0" bIns="0" rtlCol="0" anchor="ctr">
+            <a:normAutofit/>
+          </a:bodyPr>
+          <a:lstStyle/>
+          <a:p>
+            <a:pPr algn="l" indent="0" marL="0">
+              <a:buNone/>
+            </a:pPr>
+            <a:r>
+              <a:rPr lang="en-US" sz="3000" b="1" dirty="0">
+                <a:solidFill>
+                  <a:srgbClr val="990011"/>
+                </a:solidFill>
+                <a:latin typeface="Times New Roman" pitchFamily="34" charset="0"/>
+                <a:ea typeface="Times New Roman" pitchFamily="34" charset="-122"/>
+                <a:cs typeface="Times New Roman" pitchFamily="34" charset="-120"/>
+              </a:rPr>
+              <a:t>B) Liquid Forms</a:t>
+            </a:r>
+            <a:endParaRPr lang="en-US" sz="3000" dirty="0"/>
+          </a:p>
+        </p:txBody>
+      </p:sp>
+      <p:sp>
+        <p:nvSpPr>
+          <p:cNvPr id="5" name="Text 3"/>
+          <p:cNvSpPr/>
+          <p:nvPr/>
+        </p:nvSpPr>
+        <p:spPr>
+          <a:xfrm>
+            <a:off x="365760" y="2240280"/>
+            <a:ext cx="6035040" cy="4160520"/>
+          </a:xfrm>
+          <a:prstGeom prst="rect">
+            <a:avLst/>
+          </a:prstGeom>
+          <a:noFill/>
+          <a:ln/>
+        </p:spPr>
+        <p:txBody>
+          <a:bodyPr wrap="square" lIns="0" tIns="0" rIns="0" bIns="0" rtlCol="0" anchor="t"/>
+          <a:lstStyle/>
+          <a:p>
+            <a:pPr algn="l" indent="0" marL="0">
+              <a:spcAft>
+                <a:spcPts val="800"/>
+              </a:spcAft>
+              <a:buNone/>
+            </a:pPr>
+            <a:r>
+              <a:rPr lang="en-US" sz="2800" i="1" dirty="0">
+                <a:solidFill>
+                  <a:srgbClr val="111111"/>
+                </a:solidFill>
+                <a:latin typeface="Times New Roman" pitchFamily="34" charset="0"/>
+                <a:ea typeface="Times New Roman" pitchFamily="34" charset="-122"/>
+                <a:cs typeface="Times New Roman" pitchFamily="34" charset="-120"/>
+              </a:rPr>
+              <a:t>The liquid forms of precipitation are the following:</a:t>
+            </a:r>
+            <a:endParaRPr lang="en-US" sz="2800" dirty="0"/>
+          </a:p>
+          <a:p>
+            <a:pPr algn="l" indent="0" marL="0">
+              <a:spcAft>
+                <a:spcPts val="800"/>
+              </a:spcAft>
+              <a:buNone/>
+            </a:pPr>
+            <a:r>
+              <a:rPr lang="en-US" sz="2800" b="1" dirty="0">
+                <a:solidFill>
+                  <a:srgbClr val="111111"/>
+                </a:solidFill>
+                <a:latin typeface="Times New Roman" pitchFamily="34" charset="0"/>
+                <a:ea typeface="Times New Roman" pitchFamily="34" charset="-122"/>
+                <a:cs typeface="Times New Roman" pitchFamily="34" charset="-120"/>
+              </a:rPr>
+              <a:t>Dew: </a:t>
+            </a:r>
+            <a:pPr algn="l" indent="0" marL="0">
+              <a:spcAft>
+                <a:spcPts val="800"/>
+              </a:spcAft>
+              <a:buNone/>
+            </a:pPr>
+            <a:r>
+              <a:rPr lang="en-US" sz="2800" dirty="0">
+                <a:solidFill>
+                  <a:srgbClr val="111111"/>
+                </a:solidFill>
+                <a:latin typeface="Times New Roman" pitchFamily="34" charset="0"/>
+                <a:ea typeface="Times New Roman" pitchFamily="34" charset="-122"/>
+                <a:cs typeface="Times New Roman" pitchFamily="34" charset="-120"/>
+              </a:rPr>
+              <a:t>Dew is made of droplets that form on cool surfaces such as grass and leaves on clear, calm nights. The air touching them is cooled to its dew point, so strictly speaking dew is condensation and not falling precipitation.</a:t>
+            </a:r>
+            <a:endParaRPr lang="en-US" sz="2800" dirty="0"/>
           </a:p>
         </p:txBody>
       </p:sp>
       <p:pic>
         <p:nvPicPr>
-          <p:cNvPr id="3" name="Image 0" descr="/home/claude/f4/img/minesec_sheet.png">    </p:cNvPr>
+          <p:cNvPr id="6" name="Image 0" descr="/home/claude/f4/img/v2/lsa_dew.jpg">    </p:cNvPr>
           <p:cNvPicPr>
             <a:picLocks noChangeAspect="1"/>
           </p:cNvPicPr>
@@ -19093,8 +20216,8 @@
         </p:blipFill>
         <p:spPr>
           <a:xfrm>
-            <a:off x="0" y="658368"/>
-            <a:ext cx="5120640" cy="5833872"/>
+            <a:off x="6537960" y="2400897"/>
+            <a:ext cx="5470855" cy="3034615"/>
           </a:xfrm>
           <a:prstGeom prst="rect">
             <a:avLst/>
@@ -19103,14 +20226,14 @@
       </p:pic>
       <p:sp>
         <p:nvSpPr>
-          <p:cNvPr id="4" name="Text 1"/>
+          <p:cNvPr id="7" name="Text 4"/>
           <p:cNvSpPr/>
           <p:nvPr/>
         </p:nvSpPr>
         <p:spPr>
           <a:xfrm>
-            <a:off x="5349240" y="1005840"/>
-            <a:ext cx="6522415" cy="731520"/>
+            <a:off x="6537960" y="6089904"/>
+            <a:ext cx="5470855" cy="347472"/>
           </a:xfrm>
           <a:prstGeom prst="rect">
             <a:avLst/>
@@ -19119,68 +20242,24 @@
           <a:ln/>
         </p:spPr>
         <p:txBody>
-          <a:bodyPr wrap="square" lIns="0" tIns="0" rIns="0" bIns="0" rtlCol="0" anchor="ctr">
-            <a:normAutofit/>
-          </a:bodyPr>
+          <a:bodyPr wrap="square" lIns="0" tIns="0" rIns="0" bIns="0" rtlCol="0" anchor="ctr"/>
           <a:lstStyle/>
           <a:p>
             <a:pPr algn="ctr" indent="0" marL="0">
               <a:buNone/>
             </a:pPr>
             <a:r>
-              <a:rPr lang="en-US" sz="3600" b="1" dirty="0">
-                <a:solidFill>
-                  <a:srgbClr val="990011"/>
+              <a:rPr lang="en-US" sz="1600" i="1" dirty="0">
+                <a:solidFill>
+                  <a:srgbClr val="555555"/>
                 </a:solidFill>
                 <a:latin typeface="Times New Roman" pitchFamily="34" charset="0"/>
                 <a:ea typeface="Times New Roman" pitchFamily="34" charset="-122"/>
                 <a:cs typeface="Times New Roman" pitchFamily="34" charset="-120"/>
               </a:rPr>
-              <a:t>Expected Answer</a:t>
-            </a:r>
-            <a:endParaRPr lang="en-US" sz="3600" dirty="0"/>
-          </a:p>
-        </p:txBody>
-      </p:sp>
-      <p:sp>
-        <p:nvSpPr>
-          <p:cNvPr id="5" name="Text 2"/>
-          <p:cNvSpPr/>
-          <p:nvPr/>
-        </p:nvSpPr>
-        <p:spPr>
-          <a:xfrm>
-            <a:off x="5349240" y="1783080"/>
-            <a:ext cx="6522415" cy="4663440"/>
-          </a:xfrm>
-          <a:prstGeom prst="rect">
-            <a:avLst/>
-          </a:prstGeom>
-          <a:noFill/>
-          <a:ln/>
-        </p:spPr>
-        <p:txBody>
-          <a:bodyPr wrap="square" lIns="0" tIns="0" rIns="0" bIns="0" rtlCol="0" anchor="t"/>
-          <a:lstStyle/>
-          <a:p>
-            <a:pPr algn="l" indent="0" marL="0">
-              <a:spcAft>
-                <a:spcPts val="800"/>
-              </a:spcAft>
-              <a:buNone/>
-            </a:pPr>
-            <a:r>
-              <a:rPr lang="en-US" sz="4000" dirty="0">
-                <a:solidFill>
-                  <a:srgbClr val="111111"/>
-                </a:solidFill>
-                <a:latin typeface="Times New Roman" pitchFamily="34" charset="0"/>
-                <a:ea typeface="Times New Roman" pitchFamily="34" charset="-122"/>
-                <a:cs typeface="Times New Roman" pitchFamily="34" charset="-120"/>
-              </a:rPr>
-              <a:t>The ground heats the air, which rises quickly, cools and condenses into a cumulonimbus that gives convectional rain.</a:t>
-            </a:r>
-            <a:endParaRPr lang="en-US" sz="4000" dirty="0"/>
+              <a:t>Illustration: dew</a:t>
+            </a:r>
+            <a:endParaRPr lang="en-US" sz="1600" dirty="0"/>
           </a:p>
         </p:txBody>
       </p:sp>
@@ -19290,7 +20369,7 @@
                 <a:ea typeface="Calibri" pitchFamily="34" charset="-122"/>
                 <a:cs typeface="Calibri" pitchFamily="34" charset="-120"/>
               </a:rPr>
-              <a:t>FORMATIVE EVALUATION</a:t>
+              <a:t>BOARD SUMMARY</a:t>
             </a:r>
             <a:endParaRPr lang="en-US" sz="1400" dirty="0"/>
           </a:p>
@@ -19313,7 +20392,7 @@
         <p:spPr>
           <a:xfrm>
             <a:off x="0" y="658368"/>
-            <a:ext cx="5120640" cy="5833872"/>
+            <a:ext cx="3840480" cy="5833872"/>
           </a:xfrm>
           <a:prstGeom prst="rect">
             <a:avLst/>
@@ -19328,8 +20407,8 @@
         </p:nvSpPr>
         <p:spPr>
           <a:xfrm>
-            <a:off x="5349240" y="1005840"/>
-            <a:ext cx="6522415" cy="731520"/>
+            <a:off x="4069080" y="1005840"/>
+            <a:ext cx="7802575" cy="731520"/>
           </a:xfrm>
           <a:prstGeom prst="rect">
             <a:avLst/>
@@ -19355,7 +20434,7 @@
                 <a:ea typeface="Times New Roman" pitchFamily="34" charset="-122"/>
                 <a:cs typeface="Times New Roman" pitchFamily="34" charset="-120"/>
               </a:rPr>
-              <a:t>Evaluation 2</a:t>
+              <a:t>3. Forms of Precipitation</a:t>
             </a:r>
             <a:endParaRPr lang="en-US" sz="3600" dirty="0"/>
           </a:p>
@@ -19369,8 +20448,47 @@
         </p:nvSpPr>
         <p:spPr>
           <a:xfrm>
-            <a:off x="5349240" y="1783080"/>
-            <a:ext cx="6522415" cy="4663440"/>
+            <a:off x="4069080" y="1737360"/>
+            <a:ext cx="7802575" cy="457200"/>
+          </a:xfrm>
+          <a:prstGeom prst="rect">
+            <a:avLst/>
+          </a:prstGeom>
+          <a:noFill/>
+          <a:ln/>
+        </p:spPr>
+        <p:txBody>
+          <a:bodyPr wrap="square" lIns="0" tIns="0" rIns="0" bIns="0" rtlCol="0" anchor="ctr"/>
+          <a:lstStyle/>
+          <a:p>
+            <a:pPr algn="l" indent="0" marL="0">
+              <a:buNone/>
+            </a:pPr>
+            <a:r>
+              <a:rPr lang="en-US" sz="3200" b="1" dirty="0">
+                <a:solidFill>
+                  <a:srgbClr val="990011"/>
+                </a:solidFill>
+                <a:latin typeface="Times New Roman" pitchFamily="34" charset="0"/>
+                <a:ea typeface="Times New Roman" pitchFamily="34" charset="-122"/>
+                <a:cs typeface="Times New Roman" pitchFamily="34" charset="-120"/>
+              </a:rPr>
+              <a:t>B) Liquid Forms</a:t>
+            </a:r>
+            <a:endParaRPr lang="en-US" sz="3200" dirty="0"/>
+          </a:p>
+        </p:txBody>
+      </p:sp>
+      <p:sp>
+        <p:nvSpPr>
+          <p:cNvPr id="6" name="Text 3"/>
+          <p:cNvSpPr/>
+          <p:nvPr/>
+        </p:nvSpPr>
+        <p:spPr>
+          <a:xfrm>
+            <a:off x="4069080" y="2240280"/>
+            <a:ext cx="7802575" cy="4206240"/>
           </a:xfrm>
           <a:prstGeom prst="rect">
             <a:avLst/>
@@ -19389,7 +20507,7 @@
               <a:buNone/>
             </a:pPr>
             <a:r>
-              <a:rPr lang="en-US" sz="4000" dirty="0">
+              <a:rPr lang="en-US" sz="4000" b="1" dirty="0">
                 <a:solidFill>
                   <a:srgbClr val="111111"/>
                 </a:solidFill>
@@ -19397,7 +20515,24 @@
                 <a:ea typeface="Times New Roman" pitchFamily="34" charset="-122"/>
                 <a:cs typeface="Times New Roman" pitchFamily="34" charset="-120"/>
               </a:rPr>
-              <a:t>Distinguish dew from drizzle.</a:t>
+              <a:t>Drizzle: </a:t>
+            </a:r>
+            <a:pPr algn="l" indent="0" marL="0">
+              <a:spcAft>
+                <a:spcPts val="800"/>
+              </a:spcAft>
+              <a:buNone/>
+            </a:pPr>
+            <a:r>
+              <a:rPr lang="en-US" sz="4000" dirty="0">
+                <a:solidFill>
+                  <a:srgbClr val="111111"/>
+                </a:solidFill>
+                <a:latin typeface="Times New Roman" pitchFamily="34" charset="0"/>
+                <a:ea typeface="Times New Roman" pitchFamily="34" charset="-122"/>
+                <a:cs typeface="Times New Roman" pitchFamily="34" charset="-120"/>
+              </a:rPr>
+              <a:t>Drizzle is made of very small drops, less than 0.5 mm wide, that fall slowly from low stratus clouds. It gives only small amounts of water but can last for hours.</a:t>
             </a:r>
             <a:endParaRPr lang="en-US" sz="4000" dirty="0"/>
           </a:p>
@@ -19509,15 +20644,156 @@
                 <a:ea typeface="Calibri" pitchFamily="34" charset="-122"/>
                 <a:cs typeface="Calibri" pitchFamily="34" charset="-120"/>
               </a:rPr>
-              <a:t>FORMATIVE EVALUATION</a:t>
+              <a:t>BOARD SUMMARY</a:t>
             </a:r>
             <a:endParaRPr lang="en-US" sz="1400" dirty="0"/>
+          </a:p>
+        </p:txBody>
+      </p:sp>
+      <p:sp>
+        <p:nvSpPr>
+          <p:cNvPr id="3" name="Text 1"/>
+          <p:cNvSpPr/>
+          <p:nvPr/>
+        </p:nvSpPr>
+        <p:spPr>
+          <a:xfrm>
+            <a:off x="365760" y="1005840"/>
+            <a:ext cx="11460175" cy="731520"/>
+          </a:xfrm>
+          <a:prstGeom prst="rect">
+            <a:avLst/>
+          </a:prstGeom>
+          <a:noFill/>
+          <a:ln/>
+        </p:spPr>
+        <p:txBody>
+          <a:bodyPr wrap="square" lIns="0" tIns="0" rIns="0" bIns="0" rtlCol="0" anchor="ctr">
+            <a:normAutofit/>
+          </a:bodyPr>
+          <a:lstStyle/>
+          <a:p>
+            <a:pPr algn="ctr" indent="0" marL="0">
+              <a:buNone/>
+            </a:pPr>
+            <a:r>
+              <a:rPr lang="en-US" sz="3600" b="1" dirty="0">
+                <a:solidFill>
+                  <a:srgbClr val="990011"/>
+                </a:solidFill>
+                <a:latin typeface="Times New Roman" pitchFamily="34" charset="0"/>
+                <a:ea typeface="Times New Roman" pitchFamily="34" charset="-122"/>
+                <a:cs typeface="Times New Roman" pitchFamily="34" charset="-120"/>
+              </a:rPr>
+              <a:t>3. Forms of Precipitation</a:t>
+            </a:r>
+            <a:endParaRPr lang="en-US" sz="3600" dirty="0"/>
+          </a:p>
+        </p:txBody>
+      </p:sp>
+      <p:sp>
+        <p:nvSpPr>
+          <p:cNvPr id="4" name="Text 2"/>
+          <p:cNvSpPr/>
+          <p:nvPr/>
+        </p:nvSpPr>
+        <p:spPr>
+          <a:xfrm>
+            <a:off x="365760" y="1737360"/>
+            <a:ext cx="6035040" cy="457200"/>
+          </a:xfrm>
+          <a:prstGeom prst="rect">
+            <a:avLst/>
+          </a:prstGeom>
+          <a:noFill/>
+          <a:ln/>
+        </p:spPr>
+        <p:txBody>
+          <a:bodyPr wrap="square" lIns="0" tIns="0" rIns="0" bIns="0" rtlCol="0" anchor="ctr">
+            <a:normAutofit/>
+          </a:bodyPr>
+          <a:lstStyle/>
+          <a:p>
+            <a:pPr algn="l" indent="0" marL="0">
+              <a:buNone/>
+            </a:pPr>
+            <a:r>
+              <a:rPr lang="en-US" sz="3000" b="1" dirty="0">
+                <a:solidFill>
+                  <a:srgbClr val="990011"/>
+                </a:solidFill>
+                <a:latin typeface="Times New Roman" pitchFamily="34" charset="0"/>
+                <a:ea typeface="Times New Roman" pitchFamily="34" charset="-122"/>
+                <a:cs typeface="Times New Roman" pitchFamily="34" charset="-120"/>
+              </a:rPr>
+              <a:t>B) Liquid Forms</a:t>
+            </a:r>
+            <a:endParaRPr lang="en-US" sz="3000" dirty="0"/>
+          </a:p>
+        </p:txBody>
+      </p:sp>
+      <p:sp>
+        <p:nvSpPr>
+          <p:cNvPr id="5" name="Text 3"/>
+          <p:cNvSpPr/>
+          <p:nvPr/>
+        </p:nvSpPr>
+        <p:spPr>
+          <a:xfrm>
+            <a:off x="365760" y="2240280"/>
+            <a:ext cx="6035040" cy="4160520"/>
+          </a:xfrm>
+          <a:prstGeom prst="rect">
+            <a:avLst/>
+          </a:prstGeom>
+          <a:noFill/>
+          <a:ln/>
+        </p:spPr>
+        <p:txBody>
+          <a:bodyPr wrap="square" lIns="0" tIns="0" rIns="0" bIns="0" rtlCol="0" anchor="t"/>
+          <a:lstStyle/>
+          <a:p>
+            <a:pPr algn="l" indent="0" marL="0">
+              <a:spcAft>
+                <a:spcPts val="800"/>
+              </a:spcAft>
+              <a:buNone/>
+            </a:pPr>
+            <a:r>
+              <a:rPr lang="en-US" sz="3000" b="1" dirty="0">
+                <a:solidFill>
+                  <a:srgbClr val="111111"/>
+                </a:solidFill>
+                <a:latin typeface="Times New Roman" pitchFamily="34" charset="0"/>
+                <a:ea typeface="Times New Roman" pitchFamily="34" charset="-122"/>
+                <a:cs typeface="Times New Roman" pitchFamily="34" charset="-120"/>
+              </a:rPr>
+              <a:t>Rainfall (formation process): </a:t>
+            </a:r>
+            <a:pPr algn="l" indent="0" marL="0">
+              <a:spcAft>
+                <a:spcPts val="800"/>
+              </a:spcAft>
+              <a:buNone/>
+            </a:pPr>
+            <a:r>
+              <a:rPr lang="en-US" sz="3000" dirty="0">
+                <a:solidFill>
+                  <a:srgbClr val="111111"/>
+                </a:solidFill>
+                <a:latin typeface="Times New Roman" pitchFamily="34" charset="0"/>
+                <a:ea typeface="Times New Roman" pitchFamily="34" charset="-122"/>
+                <a:cs typeface="Times New Roman" pitchFamily="34" charset="-120"/>
+              </a:rPr>
+              <a:t>Rain forms when cloud droplets grow large enough to fall, either by colliding and joining together in warm clouds, or by the growth of ice crystals that melt as they fall. Raindrops are larger than 0.5 mm and fall faster than drizzle.</a:t>
+            </a:r>
+            <a:endParaRPr lang="en-US" sz="3000" dirty="0"/>
           </a:p>
         </p:txBody>
       </p:sp>
       <p:pic>
         <p:nvPicPr>
-          <p:cNvPr id="3" name="Image 0" descr="/home/claude/f4/img/minesec_sheet.png">    </p:cNvPr>
+          <p:cNvPr id="6" name="Image 0" descr="/home/claude/f4/img/v2/f4_heavyrain.jpg">    </p:cNvPr>
           <p:cNvPicPr>
             <a:picLocks noChangeAspect="1"/>
           </p:cNvPicPr>
@@ -19531,8 +20807,8 @@
         </p:blipFill>
         <p:spPr>
           <a:xfrm>
-            <a:off x="0" y="658368"/>
-            <a:ext cx="5120640" cy="5833872"/>
+            <a:off x="6537960" y="2400897"/>
+            <a:ext cx="5470855" cy="3034615"/>
           </a:xfrm>
           <a:prstGeom prst="rect">
             <a:avLst/>
@@ -19541,14 +20817,14 @@
       </p:pic>
       <p:sp>
         <p:nvSpPr>
-          <p:cNvPr id="4" name="Text 1"/>
+          <p:cNvPr id="7" name="Text 4"/>
           <p:cNvSpPr/>
           <p:nvPr/>
         </p:nvSpPr>
         <p:spPr>
           <a:xfrm>
-            <a:off x="5349240" y="1005840"/>
-            <a:ext cx="6522415" cy="731520"/>
+            <a:off x="6537960" y="6089904"/>
+            <a:ext cx="5470855" cy="347472"/>
           </a:xfrm>
           <a:prstGeom prst="rect">
             <a:avLst/>
@@ -19557,68 +20833,24 @@
           <a:ln/>
         </p:spPr>
         <p:txBody>
-          <a:bodyPr wrap="square" lIns="0" tIns="0" rIns="0" bIns="0" rtlCol="0" anchor="ctr">
-            <a:normAutofit/>
-          </a:bodyPr>
+          <a:bodyPr wrap="square" lIns="0" tIns="0" rIns="0" bIns="0" rtlCol="0" anchor="ctr"/>
           <a:lstStyle/>
           <a:p>
             <a:pPr algn="ctr" indent="0" marL="0">
               <a:buNone/>
             </a:pPr>
             <a:r>
-              <a:rPr lang="en-US" sz="3600" b="1" dirty="0">
-                <a:solidFill>
-                  <a:srgbClr val="990011"/>
+              <a:rPr lang="en-US" sz="1600" i="1" dirty="0">
+                <a:solidFill>
+                  <a:srgbClr val="555555"/>
                 </a:solidFill>
                 <a:latin typeface="Times New Roman" pitchFamily="34" charset="0"/>
                 <a:ea typeface="Times New Roman" pitchFamily="34" charset="-122"/>
                 <a:cs typeface="Times New Roman" pitchFamily="34" charset="-120"/>
               </a:rPr>
-              <a:t>Expected Answer</a:t>
-            </a:r>
-            <a:endParaRPr lang="en-US" sz="3600" dirty="0"/>
-          </a:p>
-        </p:txBody>
-      </p:sp>
-      <p:sp>
-        <p:nvSpPr>
-          <p:cNvPr id="5" name="Text 2"/>
-          <p:cNvSpPr/>
-          <p:nvPr/>
-        </p:nvSpPr>
-        <p:spPr>
-          <a:xfrm>
-            <a:off x="5349240" y="1783080"/>
-            <a:ext cx="6522415" cy="4663440"/>
-          </a:xfrm>
-          <a:prstGeom prst="rect">
-            <a:avLst/>
-          </a:prstGeom>
-          <a:noFill/>
-          <a:ln/>
-        </p:spPr>
-        <p:txBody>
-          <a:bodyPr wrap="square" lIns="0" tIns="0" rIns="0" bIns="0" rtlCol="0" anchor="t"/>
-          <a:lstStyle/>
-          <a:p>
-            <a:pPr algn="l" indent="0" marL="0">
-              <a:spcAft>
-                <a:spcPts val="800"/>
-              </a:spcAft>
-              <a:buNone/>
-            </a:pPr>
-            <a:r>
-              <a:rPr lang="en-US" sz="4000" dirty="0">
-                <a:solidFill>
-                  <a:srgbClr val="111111"/>
-                </a:solidFill>
-                <a:latin typeface="Times New Roman" pitchFamily="34" charset="0"/>
-                <a:ea typeface="Times New Roman" pitchFamily="34" charset="-122"/>
-                <a:cs typeface="Times New Roman" pitchFamily="34" charset="-120"/>
-              </a:rPr>
-              <a:t>Dew is condensation on cool surfaces; drizzle is fine rain falling from clouds.</a:t>
-            </a:r>
-            <a:endParaRPr lang="en-US" sz="4000" dirty="0"/>
+              <a:t>Illustration: heavy rain</a:t>
+            </a:r>
+            <a:endParaRPr lang="en-US" sz="1600" dirty="0"/>
           </a:p>
         </p:txBody>
       </p:sp>
@@ -19728,15 +20960,135 @@
                 <a:ea typeface="Calibri" pitchFamily="34" charset="-122"/>
                 <a:cs typeface="Calibri" pitchFamily="34" charset="-120"/>
               </a:rPr>
-              <a:t>REMEDIATION</a:t>
+              <a:t>BOARD SUMMARY</a:t>
             </a:r>
             <a:endParaRPr lang="en-US" sz="1400" dirty="0"/>
+          </a:p>
+        </p:txBody>
+      </p:sp>
+      <p:sp>
+        <p:nvSpPr>
+          <p:cNvPr id="3" name="Text 1"/>
+          <p:cNvSpPr/>
+          <p:nvPr/>
+        </p:nvSpPr>
+        <p:spPr>
+          <a:xfrm>
+            <a:off x="365760" y="1005840"/>
+            <a:ext cx="11460175" cy="731520"/>
+          </a:xfrm>
+          <a:prstGeom prst="rect">
+            <a:avLst/>
+          </a:prstGeom>
+          <a:noFill/>
+          <a:ln/>
+        </p:spPr>
+        <p:txBody>
+          <a:bodyPr wrap="square" lIns="0" tIns="0" rIns="0" bIns="0" rtlCol="0" anchor="ctr">
+            <a:normAutofit/>
+          </a:bodyPr>
+          <a:lstStyle/>
+          <a:p>
+            <a:pPr algn="ctr" indent="0" marL="0">
+              <a:buNone/>
+            </a:pPr>
+            <a:r>
+              <a:rPr lang="en-US" sz="3600" b="1" dirty="0">
+                <a:solidFill>
+                  <a:srgbClr val="990011"/>
+                </a:solidFill>
+                <a:latin typeface="Times New Roman" pitchFamily="34" charset="0"/>
+                <a:ea typeface="Times New Roman" pitchFamily="34" charset="-122"/>
+                <a:cs typeface="Times New Roman" pitchFamily="34" charset="-120"/>
+              </a:rPr>
+              <a:t>4. Types of Rainfall</a:t>
+            </a:r>
+            <a:endParaRPr lang="en-US" sz="3600" dirty="0"/>
+          </a:p>
+        </p:txBody>
+      </p:sp>
+      <p:sp>
+        <p:nvSpPr>
+          <p:cNvPr id="4" name="Text 2"/>
+          <p:cNvSpPr/>
+          <p:nvPr/>
+        </p:nvSpPr>
+        <p:spPr>
+          <a:xfrm>
+            <a:off x="365760" y="1783080"/>
+            <a:ext cx="6035040" cy="4617720"/>
+          </a:xfrm>
+          <a:prstGeom prst="rect">
+            <a:avLst/>
+          </a:prstGeom>
+          <a:noFill/>
+          <a:ln/>
+        </p:spPr>
+        <p:txBody>
+          <a:bodyPr wrap="square" lIns="0" tIns="0" rIns="0" bIns="0" rtlCol="0" anchor="t"/>
+          <a:lstStyle/>
+          <a:p>
+            <a:pPr algn="l" indent="0" marL="0">
+              <a:spcAft>
+                <a:spcPts val="800"/>
+              </a:spcAft>
+              <a:buNone/>
+            </a:pPr>
+            <a:r>
+              <a:rPr lang="en-US" sz="2800" i="1" dirty="0">
+                <a:solidFill>
+                  <a:srgbClr val="111111"/>
+                </a:solidFill>
+                <a:latin typeface="Times New Roman" pitchFamily="34" charset="0"/>
+                <a:ea typeface="Times New Roman" pitchFamily="34" charset="-122"/>
+                <a:cs typeface="Times New Roman" pitchFamily="34" charset="-120"/>
+              </a:rPr>
+              <a:t>Rainfall is classified into the following three types according to how the air is made to rise:</a:t>
+            </a:r>
+            <a:endParaRPr lang="en-US" sz="2800" dirty="0"/>
+          </a:p>
+          <a:p>
+            <a:pPr algn="l" indent="0" marL="0">
+              <a:spcAft>
+                <a:spcPts val="800"/>
+              </a:spcAft>
+              <a:buNone/>
+            </a:pPr>
+            <a:r>
+              <a:rPr lang="en-US" sz="2800" b="1" dirty="0">
+                <a:solidFill>
+                  <a:srgbClr val="111111"/>
+                </a:solidFill>
+                <a:latin typeface="Times New Roman" pitchFamily="34" charset="0"/>
+                <a:ea typeface="Times New Roman" pitchFamily="34" charset="-122"/>
+                <a:cs typeface="Times New Roman" pitchFamily="34" charset="-120"/>
+              </a:rPr>
+              <a:t>Convectional rainfall: </a:t>
+            </a:r>
+            <a:pPr algn="l" indent="0" marL="0">
+              <a:spcAft>
+                <a:spcPts val="800"/>
+              </a:spcAft>
+              <a:buNone/>
+            </a:pPr>
+            <a:r>
+              <a:rPr lang="en-US" sz="2800" dirty="0">
+                <a:solidFill>
+                  <a:srgbClr val="111111"/>
+                </a:solidFill>
+                <a:latin typeface="Times New Roman" pitchFamily="34" charset="0"/>
+                <a:ea typeface="Times New Roman" pitchFamily="34" charset="-122"/>
+                <a:cs typeface="Times New Roman" pitchFamily="34" charset="-120"/>
+              </a:rPr>
+              <a:t>Strong heating of the ground makes moist air rise quickly and form cumulonimbus clouds. It gives short, heavy afternoon storms with thunder, as in the equatorial regions and in Garoua in the rainy season.</a:t>
+            </a:r>
+            <a:endParaRPr lang="en-US" sz="2800" dirty="0"/>
           </a:p>
         </p:txBody>
       </p:sp>
       <p:pic>
         <p:nvPicPr>
-          <p:cNvPr id="3" name="Image 0" descr="/home/claude/f4/img/minesec_sheet.png">    </p:cNvPr>
+          <p:cNvPr id="5" name="Image 0" descr="/home/claude/f4/img/v2/rainfall_types_big.png">    </p:cNvPr>
           <p:cNvPicPr>
             <a:picLocks noChangeAspect="1"/>
           </p:cNvPicPr>
@@ -19750,8 +21102,8 @@
         </p:blipFill>
         <p:spPr>
           <a:xfrm>
-            <a:off x="0" y="658368"/>
-            <a:ext cx="3840480" cy="5833872"/>
+            <a:off x="6537960" y="2849678"/>
+            <a:ext cx="5470855" cy="2137053"/>
           </a:xfrm>
           <a:prstGeom prst="rect">
             <a:avLst/>
@@ -19760,14 +21112,14 @@
       </p:pic>
       <p:sp>
         <p:nvSpPr>
-          <p:cNvPr id="4" name="Text 1"/>
+          <p:cNvPr id="6" name="Text 3"/>
           <p:cNvSpPr/>
           <p:nvPr/>
         </p:nvSpPr>
         <p:spPr>
           <a:xfrm>
-            <a:off x="4069080" y="1005840"/>
-            <a:ext cx="7802575" cy="731520"/>
+            <a:off x="6537960" y="6089904"/>
+            <a:ext cx="5470855" cy="347472"/>
           </a:xfrm>
           <a:prstGeom prst="rect">
             <a:avLst/>
@@ -19776,134 +21128,24 @@
           <a:ln/>
         </p:spPr>
         <p:txBody>
-          <a:bodyPr wrap="square" lIns="0" tIns="0" rIns="0" bIns="0" rtlCol="0" anchor="ctr">
-            <a:normAutofit/>
-          </a:bodyPr>
+          <a:bodyPr wrap="square" lIns="0" tIns="0" rIns="0" bIns="0" rtlCol="0" anchor="ctr"/>
           <a:lstStyle/>
           <a:p>
             <a:pPr algn="ctr" indent="0" marL="0">
               <a:buNone/>
             </a:pPr>
             <a:r>
-              <a:rPr lang="en-US" sz="3600" b="1" dirty="0">
-                <a:solidFill>
-                  <a:srgbClr val="990011"/>
+              <a:rPr lang="en-US" sz="1600" i="1" dirty="0">
+                <a:solidFill>
+                  <a:srgbClr val="555555"/>
                 </a:solidFill>
                 <a:latin typeface="Times New Roman" pitchFamily="34" charset="0"/>
                 <a:ea typeface="Times New Roman" pitchFamily="34" charset="-122"/>
                 <a:cs typeface="Times New Roman" pitchFamily="34" charset="-120"/>
               </a:rPr>
-              <a:t>Remediation</a:t>
-            </a:r>
-            <a:endParaRPr lang="en-US" sz="3600" dirty="0"/>
-          </a:p>
-        </p:txBody>
-      </p:sp>
-      <p:sp>
-        <p:nvSpPr>
-          <p:cNvPr id="5" name="Text 2"/>
-          <p:cNvSpPr/>
-          <p:nvPr/>
-        </p:nvSpPr>
-        <p:spPr>
-          <a:xfrm>
-            <a:off x="4069080" y="1783080"/>
-            <a:ext cx="7802575" cy="4663440"/>
-          </a:xfrm>
-          <a:prstGeom prst="rect">
-            <a:avLst/>
-          </a:prstGeom>
-          <a:noFill/>
-          <a:ln/>
-        </p:spPr>
-        <p:txBody>
-          <a:bodyPr wrap="square" lIns="0" tIns="0" rIns="0" bIns="0" rtlCol="0" anchor="t"/>
-          <a:lstStyle/>
-          <a:p>
-            <a:pPr algn="l" indent="0" marL="0">
-              <a:spcAft>
-                <a:spcPts val="800"/>
-              </a:spcAft>
-              <a:buNone/>
-            </a:pPr>
-            <a:r>
-              <a:rPr lang="en-US" sz="4000" b="1" dirty="0">
-                <a:solidFill>
-                  <a:srgbClr val="111111"/>
-                </a:solidFill>
-                <a:latin typeface="Times New Roman" pitchFamily="34" charset="0"/>
-                <a:ea typeface="Times New Roman" pitchFamily="34" charset="-122"/>
-                <a:cs typeface="Times New Roman" pitchFamily="34" charset="-120"/>
-              </a:rPr>
-              <a:t>Fill in the blanks:</a:t>
-            </a:r>
-            <a:endParaRPr lang="en-US" sz="4000" dirty="0"/>
-          </a:p>
-          <a:p>
-            <a:pPr algn="l" marL="342900" indent="-342900">
-              <a:spcAft>
-                <a:spcPts val="800"/>
-              </a:spcAft>
-              <a:buSzPct val="100000"/>
-              <a:buFont typeface="+mj-lt"/>
-              <a:buAutoNum type="arabicPeriod" startAt="1"/>
-            </a:pPr>
-            <a:r>
-              <a:rPr lang="en-US" sz="4000" dirty="0">
-                <a:solidFill>
-                  <a:srgbClr val="111111"/>
-                </a:solidFill>
-                <a:latin typeface="Times New Roman" pitchFamily="34" charset="0"/>
-                <a:ea typeface="Times New Roman" pitchFamily="34" charset="-122"/>
-                <a:cs typeface="Times New Roman" pitchFamily="34" charset="-120"/>
-              </a:rPr>
-              <a:t>Thunderstorm clouds are ______.</a:t>
-            </a:r>
-            <a:endParaRPr lang="en-US" sz="4000" dirty="0"/>
-          </a:p>
-          <a:p>
-            <a:pPr algn="l" marL="342900" indent="-342900">
-              <a:spcAft>
-                <a:spcPts val="800"/>
-              </a:spcAft>
-              <a:buSzPct val="100000"/>
-              <a:buFont typeface="+mj-lt"/>
-              <a:buAutoNum type="arabicPeriod" startAt="1"/>
-            </a:pPr>
-            <a:r>
-              <a:rPr lang="en-US" sz="4000" dirty="0">
-                <a:solidFill>
-                  <a:srgbClr val="111111"/>
-                </a:solidFill>
-                <a:latin typeface="Times New Roman" pitchFamily="34" charset="0"/>
-                <a:ea typeface="Times New Roman" pitchFamily="34" charset="-122"/>
-                <a:cs typeface="Times New Roman" pitchFamily="34" charset="-120"/>
-              </a:rPr>
-              <a:t>The dry side of a mountain is the rain ______.</a:t>
-            </a:r>
-            <a:endParaRPr lang="en-US" sz="4000" dirty="0"/>
-          </a:p>
-          <a:p>
-            <a:pPr algn="l" marL="342900" indent="-342900">
-              <a:spcAft>
-                <a:spcPts val="800"/>
-              </a:spcAft>
-              <a:buSzPct val="100000"/>
-              <a:buFont typeface="+mj-lt"/>
-              <a:buAutoNum type="arabicPeriod" startAt="1"/>
-            </a:pPr>
-            <a:r>
-              <a:rPr lang="en-US" sz="4000" dirty="0">
-                <a:solidFill>
-                  <a:srgbClr val="111111"/>
-                </a:solidFill>
-                <a:latin typeface="Times New Roman" pitchFamily="34" charset="0"/>
-                <a:ea typeface="Times New Roman" pitchFamily="34" charset="-122"/>
-                <a:cs typeface="Times New Roman" pitchFamily="34" charset="-120"/>
-              </a:rPr>
-              <a:t>Rain from warm air rising over cold air is ______ rain.</a:t>
-            </a:r>
-            <a:endParaRPr lang="en-US" sz="4000" dirty="0"/>
+              <a:t>Illustration: the three types of rainfall</a:t>
+            </a:r>
+            <a:endParaRPr lang="en-US" sz="1600" dirty="0"/>
           </a:p>
         </p:txBody>
       </p:sp>
@@ -20013,7 +21255,7 @@
                 <a:ea typeface="Calibri" pitchFamily="34" charset="-122"/>
                 <a:cs typeface="Calibri" pitchFamily="34" charset="-120"/>
               </a:rPr>
-              <a:t>HOMEWORK</a:t>
+              <a:t>BOARD SUMMARY</a:t>
             </a:r>
             <a:endParaRPr lang="en-US" sz="1400" dirty="0"/>
           </a:p>
@@ -20036,7 +21278,7 @@
         <p:spPr>
           <a:xfrm>
             <a:off x="0" y="658368"/>
-            <a:ext cx="5120640" cy="5833872"/>
+            <a:ext cx="2468880" cy="5833872"/>
           </a:xfrm>
           <a:prstGeom prst="rect">
             <a:avLst/>
@@ -20051,8 +21293,8 @@
         </p:nvSpPr>
         <p:spPr>
           <a:xfrm>
-            <a:off x="5349240" y="1005840"/>
-            <a:ext cx="6522415" cy="731520"/>
+            <a:off x="2697480" y="1005840"/>
+            <a:ext cx="9174175" cy="731520"/>
           </a:xfrm>
           <a:prstGeom prst="rect">
             <a:avLst/>
@@ -20078,7 +21320,7 @@
                 <a:ea typeface="Times New Roman" pitchFamily="34" charset="-122"/>
                 <a:cs typeface="Times New Roman" pitchFamily="34" charset="-120"/>
               </a:rPr>
-              <a:t>Homework</a:t>
+              <a:t>4. Types of Rainfall</a:t>
             </a:r>
             <a:endParaRPr lang="en-US" sz="3600" dirty="0"/>
           </a:p>
@@ -20092,8 +21334,8 @@
         </p:nvSpPr>
         <p:spPr>
           <a:xfrm>
-            <a:off x="5349240" y="1783080"/>
-            <a:ext cx="6522415" cy="4663440"/>
+            <a:off x="2697480" y="1783080"/>
+            <a:ext cx="9174175" cy="4663440"/>
           </a:xfrm>
           <a:prstGeom prst="rect">
             <a:avLst/>
@@ -20112,7 +21354,7 @@
               <a:buNone/>
             </a:pPr>
             <a:r>
-              <a:rPr lang="en-US" sz="4000" dirty="0">
+              <a:rPr lang="en-US" sz="4000" b="1" dirty="0">
                 <a:solidFill>
                   <a:srgbClr val="111111"/>
                 </a:solidFill>
@@ -20120,7 +21362,24 @@
                 <a:ea typeface="Times New Roman" pitchFamily="34" charset="-122"/>
                 <a:cs typeface="Times New Roman" pitchFamily="34" charset="-120"/>
               </a:rPr>
-              <a:t>Name the world's wettest belt of latitude.</a:t>
+              <a:t>Orographic (relief) rainfall: </a:t>
+            </a:r>
+            <a:pPr algn="l" indent="0" marL="0">
+              <a:spcAft>
+                <a:spcPts val="800"/>
+              </a:spcAft>
+              <a:buNone/>
+            </a:pPr>
+            <a:r>
+              <a:rPr lang="en-US" sz="4000" dirty="0">
+                <a:solidFill>
+                  <a:srgbClr val="111111"/>
+                </a:solidFill>
+                <a:latin typeface="Times New Roman" pitchFamily="34" charset="0"/>
+                <a:ea typeface="Times New Roman" pitchFamily="34" charset="-122"/>
+                <a:cs typeface="Times New Roman" pitchFamily="34" charset="-120"/>
+              </a:rPr>
+              <a:t>Moist winds from the sea are forced to rise over mountains, cool and give heavy rain on the windward side. The leeward side receives little rain and is called a rain shadow, as on the eastern side of Mount Cameroon.</a:t>
             </a:r>
             <a:endParaRPr lang="en-US" sz="4000" dirty="0"/>
           </a:p>
@@ -20232,7 +21491,7 @@
                 <a:ea typeface="Calibri" pitchFamily="34" charset="-122"/>
                 <a:cs typeface="Calibri" pitchFamily="34" charset="-120"/>
               </a:rPr>
-              <a:t>NEXT LESSON</a:t>
+              <a:t>BOARD SUMMARY</a:t>
             </a:r>
             <a:endParaRPr lang="en-US" sz="1400" dirty="0"/>
           </a:p>
@@ -20255,7 +21514,7 @@
         <p:spPr>
           <a:xfrm>
             <a:off x="0" y="658368"/>
-            <a:ext cx="5120640" cy="5833872"/>
+            <a:ext cx="3840480" cy="5833872"/>
           </a:xfrm>
           <a:prstGeom prst="rect">
             <a:avLst/>
@@ -20270,8 +21529,8 @@
         </p:nvSpPr>
         <p:spPr>
           <a:xfrm>
-            <a:off x="5349240" y="1005840"/>
-            <a:ext cx="6522415" cy="731520"/>
+            <a:off x="4069080" y="1005840"/>
+            <a:ext cx="7802575" cy="731520"/>
           </a:xfrm>
           <a:prstGeom prst="rect">
             <a:avLst/>
@@ -20297,7 +21556,7 @@
                 <a:ea typeface="Times New Roman" pitchFamily="34" charset="-122"/>
                 <a:cs typeface="Times New Roman" pitchFamily="34" charset="-120"/>
               </a:rPr>
-              <a:t>Next Lesson</a:t>
+              <a:t>4. Types of Rainfall</a:t>
             </a:r>
             <a:endParaRPr lang="en-US" sz="3600" dirty="0"/>
           </a:p>
@@ -20311,8 +21570,8 @@
         </p:nvSpPr>
         <p:spPr>
           <a:xfrm>
-            <a:off x="5349240" y="1783080"/>
-            <a:ext cx="6522415" cy="4663440"/>
+            <a:off x="4069080" y="1783080"/>
+            <a:ext cx="7802575" cy="4663440"/>
           </a:xfrm>
           <a:prstGeom prst="rect">
             <a:avLst/>
@@ -20321,10 +21580,10 @@
           <a:ln/>
         </p:spPr>
         <p:txBody>
-          <a:bodyPr wrap="square" lIns="0" tIns="0" rIns="0" bIns="0" rtlCol="0" anchor="ctr"/>
-          <a:lstStyle/>
-          <a:p>
-            <a:pPr algn="ctr" indent="0" marL="0">
+          <a:bodyPr wrap="square" lIns="0" tIns="0" rIns="0" bIns="0" rtlCol="0" anchor="t"/>
+          <a:lstStyle/>
+          <a:p>
+            <a:pPr algn="l" indent="0" marL="0">
               <a:spcAft>
                 <a:spcPts val="800"/>
               </a:spcAft>
@@ -20339,27 +21598,24 @@
                 <a:ea typeface="Times New Roman" pitchFamily="34" charset="-122"/>
                 <a:cs typeface="Times New Roman" pitchFamily="34" charset="-120"/>
               </a:rPr>
-              <a:t>Our next lesson will be on:</a:t>
-            </a:r>
-            <a:endParaRPr lang="en-US" sz="4000" dirty="0"/>
-          </a:p>
-          <a:p>
-            <a:pPr algn="ctr" indent="0" marL="0">
+              <a:t>Cyclonic (frontal) rainfall: </a:t>
+            </a:r>
+            <a:pPr algn="l" indent="0" marL="0">
               <a:spcAft>
                 <a:spcPts val="800"/>
               </a:spcAft>
               <a:buNone/>
             </a:pPr>
             <a:r>
-              <a:rPr lang="en-US" sz="4000" b="1" dirty="0">
-                <a:solidFill>
-                  <a:srgbClr val="990011"/>
+              <a:rPr lang="en-US" sz="4000" dirty="0">
+                <a:solidFill>
+                  <a:srgbClr val="111111"/>
                 </a:solidFill>
                 <a:latin typeface="Times New Roman" pitchFamily="34" charset="0"/>
                 <a:ea typeface="Times New Roman" pitchFamily="34" charset="-122"/>
                 <a:cs typeface="Times New Roman" pitchFamily="34" charset="-120"/>
               </a:rPr>
-              <a:t>Lesson 12: Global Distribution of Precipitation</a:t>
+              <a:t>Where a warm air mass meets a cold one, the lighter warm air rises slowly over the cold air along a front. It gives long periods of steady rain, as in the temperate regions of Europe.</a:t>
             </a:r>
             <a:endParaRPr lang="en-US" sz="4000" dirty="0"/>
           </a:p>
@@ -20471,22 +21727,46 @@
                 <a:ea typeface="Calibri" pitchFamily="34" charset="-122"/>
                 <a:cs typeface="Calibri" pitchFamily="34" charset="-120"/>
               </a:rPr>
-              <a:t>BILINGUAL GAME</a:t>
+              <a:t>FORMATIVE EVALUATION</a:t>
             </a:r>
             <a:endParaRPr lang="en-US" sz="1400" dirty="0"/>
           </a:p>
         </p:txBody>
       </p:sp>
-      <p:sp>
-        <p:nvSpPr>
-          <p:cNvPr id="3" name="Text 1"/>
+      <p:pic>
+        <p:nvPicPr>
+          <p:cNvPr id="3" name="Image 0" descr="/home/claude/f4/img/minesec_sheet.png">    </p:cNvPr>
+          <p:cNvPicPr>
+            <a:picLocks noChangeAspect="1"/>
+          </p:cNvPicPr>
+          <p:nvPr/>
+        </p:nvPicPr>
+        <p:blipFill>
+          <a:blip r:embed="rId1"/>
+          <a:stretch>
+            <a:fillRect/>
+          </a:stretch>
+        </p:blipFill>
+        <p:spPr>
+          <a:xfrm>
+            <a:off x="0" y="658368"/>
+            <a:ext cx="5120640" cy="5833872"/>
+          </a:xfrm>
+          <a:prstGeom prst="rect">
+            <a:avLst/>
+          </a:prstGeom>
+        </p:spPr>
+      </p:pic>
+      <p:sp>
+        <p:nvSpPr>
+          <p:cNvPr id="4" name="Text 1"/>
           <p:cNvSpPr/>
           <p:nvPr/>
         </p:nvSpPr>
         <p:spPr>
           <a:xfrm>
-            <a:off x="457200" y="1005840"/>
-            <a:ext cx="11277295" cy="731520"/>
+            <a:off x="5349240" y="1005840"/>
+            <a:ext cx="6522415" cy="731520"/>
           </a:xfrm>
           <a:prstGeom prst="rect">
             <a:avLst/>
@@ -20495,7 +21775,9 @@
           <a:ln/>
         </p:spPr>
         <p:txBody>
-          <a:bodyPr wrap="square" lIns="0" tIns="0" rIns="0" bIns="0" rtlCol="0" anchor="ctr"/>
+          <a:bodyPr wrap="square" lIns="0" tIns="0" rIns="0" bIns="0" rtlCol="0" anchor="ctr">
+            <a:normAutofit/>
+          </a:bodyPr>
           <a:lstStyle/>
           <a:p>
             <a:pPr algn="ctr" indent="0" marL="0">
@@ -20510,6 +21792,1930 @@
                 <a:ea typeface="Times New Roman" pitchFamily="34" charset="-122"/>
                 <a:cs typeface="Times New Roman" pitchFamily="34" charset="-120"/>
               </a:rPr>
+              <a:t>Evaluation 1</a:t>
+            </a:r>
+            <a:endParaRPr lang="en-US" sz="3600" dirty="0"/>
+          </a:p>
+        </p:txBody>
+      </p:sp>
+      <p:sp>
+        <p:nvSpPr>
+          <p:cNvPr id="5" name="Text 2"/>
+          <p:cNvSpPr/>
+          <p:nvPr/>
+        </p:nvSpPr>
+        <p:spPr>
+          <a:xfrm>
+            <a:off x="5349240" y="1783080"/>
+            <a:ext cx="6522415" cy="4663440"/>
+          </a:xfrm>
+          <a:prstGeom prst="rect">
+            <a:avLst/>
+          </a:prstGeom>
+          <a:noFill/>
+          <a:ln/>
+        </p:spPr>
+        <p:txBody>
+          <a:bodyPr wrap="square" lIns="0" tIns="0" rIns="0" bIns="0" rtlCol="0" anchor="t"/>
+          <a:lstStyle/>
+          <a:p>
+            <a:pPr algn="l" indent="0" marL="0">
+              <a:spcAft>
+                <a:spcPts val="800"/>
+              </a:spcAft>
+              <a:buNone/>
+            </a:pPr>
+            <a:r>
+              <a:rPr lang="en-US" sz="4000" dirty="0">
+                <a:solidFill>
+                  <a:srgbClr val="111111"/>
+                </a:solidFill>
+                <a:latin typeface="Times New Roman" pitchFamily="34" charset="0"/>
+                <a:ea typeface="Times New Roman" pitchFamily="34" charset="-122"/>
+                <a:cs typeface="Times New Roman" pitchFamily="34" charset="-120"/>
+              </a:rPr>
+              <a:t>Explain how a hot sunny day in Garoua can lead to a heavy afternoon storm.</a:t>
+            </a:r>
+            <a:endParaRPr lang="en-US" sz="4000" dirty="0"/>
+          </a:p>
+        </p:txBody>
+      </p:sp>
+      <p:sp>
+        <p:nvSpPr>
+          <p:cNvPr id="25" name="Slide Number Placeholder 0"/>
+          <p:cNvSpPr>
+            <a:spLocks noGrp="1"/>
+          </p:cNvSpPr>
+          <p:nvPr>
+            <p:ph type="sldNum" sz="quarter" idx="4294967295"/>
+          </p:nvPr>
+        </p:nvSpPr>
+        <p:spPr>
+          <a:xfrm>
+            <a:off x="27432" y="91440"/>
+            <a:ext cx="585216" cy="475488"/>
+          </a:xfrm>
+          <a:prstGeom prst="rect">
+            <a:avLst/>
+          </a:prstGeom>
+          <a:extLst>
+            <a:ext uri="{C572A759-6A51-4108-AA02-DFA0A04FC94B}">
+              <ma14:wrappingTextBoxFlag xmlns:ma14="http://schemas.microsoft.com/office/mac/drawingml/2011/main" val="0"/>
+            </a:ext>
+          </a:extLst>
+        </p:spPr>
+        <p:txBody>
+          <a:bodyPr/>
+          <a:lstStyle>
+            <a:lvl1pPr>
+              <a:defRPr sz="2000">
+                <a:solidFill>
+                  <a:srgbClr val="FFFFFF"/>
+                </a:solidFill>
+                <a:latin typeface="Calibri"/>
+                <a:ea typeface="Calibri"/>
+                <a:cs typeface="Calibri"/>
+              </a:defRPr>
+            </a:lvl1pPr>
+          </a:lstStyle>
+          <a:p>
+            <a:pPr algn="ctr"/>
+            <a:fld id="{F7021451-1387-4CA6-816F-3879F97B5CBC}" type="slidenum">
+              <a:rPr b="1" lang="en-US"/>
+              <a:t>57</a:t>
+            </a:fld>
+            <a:endParaRPr lang="en-US"/>
+          </a:p>
+        </p:txBody>
+      </p:sp>
+    </p:spTree>
+  </p:cSld>
+  <p:clrMapOvr>
+    <a:masterClrMapping/>
+  </p:clrMapOvr>
+</p:sld>
+</file>
+
+<file path=ppt/slides/slide58.xml><?xml version="1.0" encoding="utf-8"?>
+<p:sld xmlns:a="http://schemas.openxmlformats.org/drawingml/2006/main" xmlns:r="http://schemas.openxmlformats.org/officeDocument/2006/relationships" xmlns:p="http://schemas.openxmlformats.org/presentationml/2006/main">
+  <p:cSld name="Slide 58">
+    <p:spTree>
+      <p:nvGrpSpPr>
+        <p:cNvPr id="1" name=""/>
+        <p:cNvGrpSpPr/>
+        <p:nvPr/>
+      </p:nvGrpSpPr>
+      <p:grpSpPr>
+        <a:xfrm>
+          <a:off x="0" y="0"/>
+          <a:ext cx="0" cy="0"/>
+          <a:chOff x="0" y="0"/>
+          <a:chExt cx="0" cy="0"/>
+        </a:xfrm>
+      </p:grpSpPr>
+      <p:sp>
+        <p:nvSpPr>
+          <p:cNvPr id="2" name="Text 0"/>
+          <p:cNvSpPr/>
+          <p:nvPr/>
+        </p:nvSpPr>
+        <p:spPr>
+          <a:xfrm>
+            <a:off x="457200" y="713232"/>
+            <a:ext cx="11368735" cy="274320"/>
+          </a:xfrm>
+          <a:prstGeom prst="rect">
+            <a:avLst/>
+          </a:prstGeom>
+          <a:noFill/>
+          <a:ln/>
+        </p:spPr>
+        <p:txBody>
+          <a:bodyPr wrap="square" lIns="0" tIns="0" rIns="0" bIns="0" rtlCol="0" anchor="ctr"/>
+          <a:lstStyle/>
+          <a:p>
+            <a:pPr algn="r" indent="0" marL="0">
+              <a:buNone/>
+            </a:pPr>
+            <a:r>
+              <a:rPr lang="en-US" sz="1400" b="1" dirty="0">
+                <a:solidFill>
+                  <a:srgbClr val="1C3F6E"/>
+                </a:solidFill>
+                <a:latin typeface="Calibri" pitchFamily="34" charset="0"/>
+                <a:ea typeface="Calibri" pitchFamily="34" charset="-122"/>
+                <a:cs typeface="Calibri" pitchFamily="34" charset="-120"/>
+              </a:rPr>
+              <a:t>FORMATIVE EVALUATION</a:t>
+            </a:r>
+            <a:endParaRPr lang="en-US" sz="1400" dirty="0"/>
+          </a:p>
+        </p:txBody>
+      </p:sp>
+      <p:pic>
+        <p:nvPicPr>
+          <p:cNvPr id="3" name="Image 0" descr="/home/claude/f4/img/minesec_sheet.png">    </p:cNvPr>
+          <p:cNvPicPr>
+            <a:picLocks noChangeAspect="1"/>
+          </p:cNvPicPr>
+          <p:nvPr/>
+        </p:nvPicPr>
+        <p:blipFill>
+          <a:blip r:embed="rId1"/>
+          <a:stretch>
+            <a:fillRect/>
+          </a:stretch>
+        </p:blipFill>
+        <p:spPr>
+          <a:xfrm>
+            <a:off x="0" y="658368"/>
+            <a:ext cx="5120640" cy="5833872"/>
+          </a:xfrm>
+          <a:prstGeom prst="rect">
+            <a:avLst/>
+          </a:prstGeom>
+        </p:spPr>
+      </p:pic>
+      <p:sp>
+        <p:nvSpPr>
+          <p:cNvPr id="4" name="Text 1"/>
+          <p:cNvSpPr/>
+          <p:nvPr/>
+        </p:nvSpPr>
+        <p:spPr>
+          <a:xfrm>
+            <a:off x="5349240" y="1005840"/>
+            <a:ext cx="6522415" cy="731520"/>
+          </a:xfrm>
+          <a:prstGeom prst="rect">
+            <a:avLst/>
+          </a:prstGeom>
+          <a:noFill/>
+          <a:ln/>
+        </p:spPr>
+        <p:txBody>
+          <a:bodyPr wrap="square" lIns="0" tIns="0" rIns="0" bIns="0" rtlCol="0" anchor="ctr">
+            <a:normAutofit/>
+          </a:bodyPr>
+          <a:lstStyle/>
+          <a:p>
+            <a:pPr algn="ctr" indent="0" marL="0">
+              <a:buNone/>
+            </a:pPr>
+            <a:r>
+              <a:rPr lang="en-US" sz="3600" b="1" dirty="0">
+                <a:solidFill>
+                  <a:srgbClr val="990011"/>
+                </a:solidFill>
+                <a:latin typeface="Times New Roman" pitchFamily="34" charset="0"/>
+                <a:ea typeface="Times New Roman" pitchFamily="34" charset="-122"/>
+                <a:cs typeface="Times New Roman" pitchFamily="34" charset="-120"/>
+              </a:rPr>
+              <a:t>Expected Answer</a:t>
+            </a:r>
+            <a:endParaRPr lang="en-US" sz="3600" dirty="0"/>
+          </a:p>
+        </p:txBody>
+      </p:sp>
+      <p:sp>
+        <p:nvSpPr>
+          <p:cNvPr id="5" name="Text 2"/>
+          <p:cNvSpPr/>
+          <p:nvPr/>
+        </p:nvSpPr>
+        <p:spPr>
+          <a:xfrm>
+            <a:off x="5349240" y="1783080"/>
+            <a:ext cx="6522415" cy="4663440"/>
+          </a:xfrm>
+          <a:prstGeom prst="rect">
+            <a:avLst/>
+          </a:prstGeom>
+          <a:noFill/>
+          <a:ln/>
+        </p:spPr>
+        <p:txBody>
+          <a:bodyPr wrap="square" lIns="0" tIns="0" rIns="0" bIns="0" rtlCol="0" anchor="t"/>
+          <a:lstStyle/>
+          <a:p>
+            <a:pPr algn="l" indent="0" marL="0">
+              <a:spcAft>
+                <a:spcPts val="800"/>
+              </a:spcAft>
+              <a:buNone/>
+            </a:pPr>
+            <a:r>
+              <a:rPr lang="en-US" sz="4000" dirty="0">
+                <a:solidFill>
+                  <a:srgbClr val="111111"/>
+                </a:solidFill>
+                <a:latin typeface="Times New Roman" pitchFamily="34" charset="0"/>
+                <a:ea typeface="Times New Roman" pitchFamily="34" charset="-122"/>
+                <a:cs typeface="Times New Roman" pitchFamily="34" charset="-120"/>
+              </a:rPr>
+              <a:t>The ground heats the air, which rises quickly, cools and condenses into a cumulonimbus that gives convectional rain.</a:t>
+            </a:r>
+            <a:endParaRPr lang="en-US" sz="4000" dirty="0"/>
+          </a:p>
+        </p:txBody>
+      </p:sp>
+      <p:sp>
+        <p:nvSpPr>
+          <p:cNvPr id="25" name="Slide Number Placeholder 0"/>
+          <p:cNvSpPr>
+            <a:spLocks noGrp="1"/>
+          </p:cNvSpPr>
+          <p:nvPr>
+            <p:ph type="sldNum" sz="quarter" idx="4294967295"/>
+          </p:nvPr>
+        </p:nvSpPr>
+        <p:spPr>
+          <a:xfrm>
+            <a:off x="27432" y="91440"/>
+            <a:ext cx="585216" cy="475488"/>
+          </a:xfrm>
+          <a:prstGeom prst="rect">
+            <a:avLst/>
+          </a:prstGeom>
+          <a:extLst>
+            <a:ext uri="{C572A759-6A51-4108-AA02-DFA0A04FC94B}">
+              <ma14:wrappingTextBoxFlag xmlns:ma14="http://schemas.microsoft.com/office/mac/drawingml/2011/main" val="0"/>
+            </a:ext>
+          </a:extLst>
+        </p:spPr>
+        <p:txBody>
+          <a:bodyPr/>
+          <a:lstStyle>
+            <a:lvl1pPr>
+              <a:defRPr sz="2000">
+                <a:solidFill>
+                  <a:srgbClr val="FFFFFF"/>
+                </a:solidFill>
+                <a:latin typeface="Calibri"/>
+                <a:ea typeface="Calibri"/>
+                <a:cs typeface="Calibri"/>
+              </a:defRPr>
+            </a:lvl1pPr>
+          </a:lstStyle>
+          <a:p>
+            <a:pPr algn="ctr"/>
+            <a:fld id="{F7021451-1387-4CA6-816F-3879F97B5CBC}" type="slidenum">
+              <a:rPr b="1" lang="en-US"/>
+              <a:t>58</a:t>
+            </a:fld>
+            <a:endParaRPr lang="en-US"/>
+          </a:p>
+        </p:txBody>
+      </p:sp>
+    </p:spTree>
+  </p:cSld>
+  <p:clrMapOvr>
+    <a:masterClrMapping/>
+  </p:clrMapOvr>
+</p:sld>
+</file>
+
+<file path=ppt/slides/slide59.xml><?xml version="1.0" encoding="utf-8"?>
+<p:sld xmlns:a="http://schemas.openxmlformats.org/drawingml/2006/main" xmlns:r="http://schemas.openxmlformats.org/officeDocument/2006/relationships" xmlns:p="http://schemas.openxmlformats.org/presentationml/2006/main">
+  <p:cSld name="Slide 59">
+    <p:spTree>
+      <p:nvGrpSpPr>
+        <p:cNvPr id="1" name=""/>
+        <p:cNvGrpSpPr/>
+        <p:nvPr/>
+      </p:nvGrpSpPr>
+      <p:grpSpPr>
+        <a:xfrm>
+          <a:off x="0" y="0"/>
+          <a:ext cx="0" cy="0"/>
+          <a:chOff x="0" y="0"/>
+          <a:chExt cx="0" cy="0"/>
+        </a:xfrm>
+      </p:grpSpPr>
+      <p:sp>
+        <p:nvSpPr>
+          <p:cNvPr id="2" name="Text 0"/>
+          <p:cNvSpPr/>
+          <p:nvPr/>
+        </p:nvSpPr>
+        <p:spPr>
+          <a:xfrm>
+            <a:off x="457200" y="713232"/>
+            <a:ext cx="11368735" cy="274320"/>
+          </a:xfrm>
+          <a:prstGeom prst="rect">
+            <a:avLst/>
+          </a:prstGeom>
+          <a:noFill/>
+          <a:ln/>
+        </p:spPr>
+        <p:txBody>
+          <a:bodyPr wrap="square" lIns="0" tIns="0" rIns="0" bIns="0" rtlCol="0" anchor="ctr"/>
+          <a:lstStyle/>
+          <a:p>
+            <a:pPr algn="r" indent="0" marL="0">
+              <a:buNone/>
+            </a:pPr>
+            <a:r>
+              <a:rPr lang="en-US" sz="1400" b="1" dirty="0">
+                <a:solidFill>
+                  <a:srgbClr val="1C3F6E"/>
+                </a:solidFill>
+                <a:latin typeface="Calibri" pitchFamily="34" charset="0"/>
+                <a:ea typeface="Calibri" pitchFamily="34" charset="-122"/>
+                <a:cs typeface="Calibri" pitchFamily="34" charset="-120"/>
+              </a:rPr>
+              <a:t>FORMATIVE EVALUATION</a:t>
+            </a:r>
+            <a:endParaRPr lang="en-US" sz="1400" dirty="0"/>
+          </a:p>
+        </p:txBody>
+      </p:sp>
+      <p:pic>
+        <p:nvPicPr>
+          <p:cNvPr id="3" name="Image 0" descr="/home/claude/f4/img/minesec_sheet.png">    </p:cNvPr>
+          <p:cNvPicPr>
+            <a:picLocks noChangeAspect="1"/>
+          </p:cNvPicPr>
+          <p:nvPr/>
+        </p:nvPicPr>
+        <p:blipFill>
+          <a:blip r:embed="rId1"/>
+          <a:stretch>
+            <a:fillRect/>
+          </a:stretch>
+        </p:blipFill>
+        <p:spPr>
+          <a:xfrm>
+            <a:off x="0" y="658368"/>
+            <a:ext cx="5120640" cy="5833872"/>
+          </a:xfrm>
+          <a:prstGeom prst="rect">
+            <a:avLst/>
+          </a:prstGeom>
+        </p:spPr>
+      </p:pic>
+      <p:sp>
+        <p:nvSpPr>
+          <p:cNvPr id="4" name="Text 1"/>
+          <p:cNvSpPr/>
+          <p:nvPr/>
+        </p:nvSpPr>
+        <p:spPr>
+          <a:xfrm>
+            <a:off x="5349240" y="1005840"/>
+            <a:ext cx="6522415" cy="731520"/>
+          </a:xfrm>
+          <a:prstGeom prst="rect">
+            <a:avLst/>
+          </a:prstGeom>
+          <a:noFill/>
+          <a:ln/>
+        </p:spPr>
+        <p:txBody>
+          <a:bodyPr wrap="square" lIns="0" tIns="0" rIns="0" bIns="0" rtlCol="0" anchor="ctr">
+            <a:normAutofit/>
+          </a:bodyPr>
+          <a:lstStyle/>
+          <a:p>
+            <a:pPr algn="ctr" indent="0" marL="0">
+              <a:buNone/>
+            </a:pPr>
+            <a:r>
+              <a:rPr lang="en-US" sz="3600" b="1" dirty="0">
+                <a:solidFill>
+                  <a:srgbClr val="990011"/>
+                </a:solidFill>
+                <a:latin typeface="Times New Roman" pitchFamily="34" charset="0"/>
+                <a:ea typeface="Times New Roman" pitchFamily="34" charset="-122"/>
+                <a:cs typeface="Times New Roman" pitchFamily="34" charset="-120"/>
+              </a:rPr>
+              <a:t>Evaluation 2</a:t>
+            </a:r>
+            <a:endParaRPr lang="en-US" sz="3600" dirty="0"/>
+          </a:p>
+        </p:txBody>
+      </p:sp>
+      <p:sp>
+        <p:nvSpPr>
+          <p:cNvPr id="5" name="Text 2"/>
+          <p:cNvSpPr/>
+          <p:nvPr/>
+        </p:nvSpPr>
+        <p:spPr>
+          <a:xfrm>
+            <a:off x="5349240" y="1783080"/>
+            <a:ext cx="6522415" cy="4663440"/>
+          </a:xfrm>
+          <a:prstGeom prst="rect">
+            <a:avLst/>
+          </a:prstGeom>
+          <a:noFill/>
+          <a:ln/>
+        </p:spPr>
+        <p:txBody>
+          <a:bodyPr wrap="square" lIns="0" tIns="0" rIns="0" bIns="0" rtlCol="0" anchor="t"/>
+          <a:lstStyle/>
+          <a:p>
+            <a:pPr algn="l" indent="0" marL="0">
+              <a:spcAft>
+                <a:spcPts val="800"/>
+              </a:spcAft>
+              <a:buNone/>
+            </a:pPr>
+            <a:r>
+              <a:rPr lang="en-US" sz="4000" dirty="0">
+                <a:solidFill>
+                  <a:srgbClr val="111111"/>
+                </a:solidFill>
+                <a:latin typeface="Times New Roman" pitchFamily="34" charset="0"/>
+                <a:ea typeface="Times New Roman" pitchFamily="34" charset="-122"/>
+                <a:cs typeface="Times New Roman" pitchFamily="34" charset="-120"/>
+              </a:rPr>
+              <a:t>Distinguish dew from drizzle.</a:t>
+            </a:r>
+            <a:endParaRPr lang="en-US" sz="4000" dirty="0"/>
+          </a:p>
+        </p:txBody>
+      </p:sp>
+      <p:sp>
+        <p:nvSpPr>
+          <p:cNvPr id="25" name="Slide Number Placeholder 0"/>
+          <p:cNvSpPr>
+            <a:spLocks noGrp="1"/>
+          </p:cNvSpPr>
+          <p:nvPr>
+            <p:ph type="sldNum" sz="quarter" idx="4294967295"/>
+          </p:nvPr>
+        </p:nvSpPr>
+        <p:spPr>
+          <a:xfrm>
+            <a:off x="27432" y="91440"/>
+            <a:ext cx="585216" cy="475488"/>
+          </a:xfrm>
+          <a:prstGeom prst="rect">
+            <a:avLst/>
+          </a:prstGeom>
+          <a:extLst>
+            <a:ext uri="{C572A759-6A51-4108-AA02-DFA0A04FC94B}">
+              <ma14:wrappingTextBoxFlag xmlns:ma14="http://schemas.microsoft.com/office/mac/drawingml/2011/main" val="0"/>
+            </a:ext>
+          </a:extLst>
+        </p:spPr>
+        <p:txBody>
+          <a:bodyPr/>
+          <a:lstStyle>
+            <a:lvl1pPr>
+              <a:defRPr sz="2000">
+                <a:solidFill>
+                  <a:srgbClr val="FFFFFF"/>
+                </a:solidFill>
+                <a:latin typeface="Calibri"/>
+                <a:ea typeface="Calibri"/>
+                <a:cs typeface="Calibri"/>
+              </a:defRPr>
+            </a:lvl1pPr>
+          </a:lstStyle>
+          <a:p>
+            <a:pPr algn="ctr"/>
+            <a:fld id="{F7021451-1387-4CA6-816F-3879F97B5CBC}" type="slidenum">
+              <a:rPr b="1" lang="en-US"/>
+              <a:t>59</a:t>
+            </a:fld>
+            <a:endParaRPr lang="en-US"/>
+          </a:p>
+        </p:txBody>
+      </p:sp>
+    </p:spTree>
+  </p:cSld>
+  <p:clrMapOvr>
+    <a:masterClrMapping/>
+  </p:clrMapOvr>
+</p:sld>
+</file>
+
+<file path=ppt/slides/slide6.xml><?xml version="1.0" encoding="utf-8"?>
+<p:sld xmlns:a="http://schemas.openxmlformats.org/drawingml/2006/main" xmlns:r="http://schemas.openxmlformats.org/officeDocument/2006/relationships" xmlns:p="http://schemas.openxmlformats.org/presentationml/2006/main">
+  <p:cSld name="Slide 6">
+    <p:spTree>
+      <p:nvGrpSpPr>
+        <p:cNvPr id="1" name=""/>
+        <p:cNvGrpSpPr/>
+        <p:nvPr/>
+      </p:nvGrpSpPr>
+      <p:grpSpPr>
+        <a:xfrm>
+          <a:off x="0" y="0"/>
+          <a:ext cx="0" cy="0"/>
+          <a:chOff x="0" y="0"/>
+          <a:chExt cx="0" cy="0"/>
+        </a:xfrm>
+      </p:grpSpPr>
+      <p:sp>
+        <p:nvSpPr>
+          <p:cNvPr id="2" name="Text 0"/>
+          <p:cNvSpPr/>
+          <p:nvPr/>
+        </p:nvSpPr>
+        <p:spPr>
+          <a:xfrm>
+            <a:off x="457200" y="713232"/>
+            <a:ext cx="11368735" cy="274320"/>
+          </a:xfrm>
+          <a:prstGeom prst="rect">
+            <a:avLst/>
+          </a:prstGeom>
+          <a:noFill/>
+          <a:ln/>
+        </p:spPr>
+        <p:txBody>
+          <a:bodyPr wrap="square" lIns="0" tIns="0" rIns="0" bIns="0" rtlCol="0" anchor="ctr"/>
+          <a:lstStyle/>
+          <a:p>
+            <a:pPr algn="r" indent="0" marL="0">
+              <a:buNone/>
+            </a:pPr>
+            <a:r>
+              <a:rPr lang="en-US" sz="1400" b="1" dirty="0">
+                <a:solidFill>
+                  <a:srgbClr val="1C3F6E"/>
+                </a:solidFill>
+                <a:latin typeface="Calibri" pitchFamily="34" charset="0"/>
+                <a:ea typeface="Calibri" pitchFamily="34" charset="-122"/>
+                <a:cs typeface="Calibri" pitchFamily="34" charset="-120"/>
+              </a:rPr>
+              <a:t>LESSON PLAN</a:t>
+            </a:r>
+            <a:endParaRPr lang="en-US" sz="1400" dirty="0"/>
+          </a:p>
+        </p:txBody>
+      </p:sp>
+      <p:pic>
+        <p:nvPicPr>
+          <p:cNvPr id="3" name="Image 0" descr="/home/claude/f4/img/minesec_sheet.png">    </p:cNvPr>
+          <p:cNvPicPr>
+            <a:picLocks noChangeAspect="1"/>
+          </p:cNvPicPr>
+          <p:nvPr/>
+        </p:nvPicPr>
+        <p:blipFill>
+          <a:blip r:embed="rId1"/>
+          <a:stretch>
+            <a:fillRect/>
+          </a:stretch>
+        </p:blipFill>
+        <p:spPr>
+          <a:xfrm>
+            <a:off x="0" y="658368"/>
+            <a:ext cx="2468880" cy="5833872"/>
+          </a:xfrm>
+          <a:prstGeom prst="rect">
+            <a:avLst/>
+          </a:prstGeom>
+        </p:spPr>
+      </p:pic>
+      <p:sp>
+        <p:nvSpPr>
+          <p:cNvPr id="4" name="Text 1"/>
+          <p:cNvSpPr/>
+          <p:nvPr/>
+        </p:nvSpPr>
+        <p:spPr>
+          <a:xfrm>
+            <a:off x="2697480" y="1005840"/>
+            <a:ext cx="9174175" cy="731520"/>
+          </a:xfrm>
+          <a:prstGeom prst="rect">
+            <a:avLst/>
+          </a:prstGeom>
+          <a:noFill/>
+          <a:ln/>
+        </p:spPr>
+        <p:txBody>
+          <a:bodyPr wrap="square" lIns="0" tIns="0" rIns="0" bIns="0" rtlCol="0" anchor="ctr">
+            <a:normAutofit/>
+          </a:bodyPr>
+          <a:lstStyle/>
+          <a:p>
+            <a:pPr algn="ctr" indent="0" marL="0">
+              <a:buNone/>
+            </a:pPr>
+            <a:r>
+              <a:rPr lang="en-US" sz="3600" b="1" dirty="0">
+                <a:solidFill>
+                  <a:srgbClr val="990011"/>
+                </a:solidFill>
+                <a:latin typeface="Times New Roman" pitchFamily="34" charset="0"/>
+                <a:ea typeface="Times New Roman" pitchFamily="34" charset="-122"/>
+                <a:cs typeface="Times New Roman" pitchFamily="34" charset="-120"/>
+              </a:rPr>
+              <a:t>Lesson Plan</a:t>
+            </a:r>
+            <a:endParaRPr lang="en-US" sz="3600" dirty="0"/>
+          </a:p>
+        </p:txBody>
+      </p:sp>
+      <p:sp>
+        <p:nvSpPr>
+          <p:cNvPr id="5" name="Text 2"/>
+          <p:cNvSpPr/>
+          <p:nvPr/>
+        </p:nvSpPr>
+        <p:spPr>
+          <a:xfrm>
+            <a:off x="2697480" y="1783080"/>
+            <a:ext cx="9174175" cy="4663440"/>
+          </a:xfrm>
+          <a:prstGeom prst="rect">
+            <a:avLst/>
+          </a:prstGeom>
+          <a:noFill/>
+          <a:ln/>
+        </p:spPr>
+        <p:txBody>
+          <a:bodyPr wrap="square" lIns="0" tIns="0" rIns="0" bIns="0" rtlCol="0" anchor="t"/>
+          <a:lstStyle/>
+          <a:p>
+            <a:pPr algn="l" marL="342900" indent="-342900">
+              <a:spcAft>
+                <a:spcPts val="800"/>
+              </a:spcAft>
+              <a:buSzPct val="100000"/>
+              <a:buFont typeface="+mj-lt"/>
+              <a:buAutoNum type="arabicPeriod" startAt="1"/>
+            </a:pPr>
+            <a:r>
+              <a:rPr lang="en-US" sz="4000" dirty="0">
+                <a:solidFill>
+                  <a:srgbClr val="111111"/>
+                </a:solidFill>
+                <a:latin typeface="Times New Roman" pitchFamily="34" charset="0"/>
+                <a:ea typeface="Times New Roman" pitchFamily="34" charset="-122"/>
+                <a:cs typeface="Times New Roman" pitchFamily="34" charset="-120"/>
+              </a:rPr>
+              <a:t>Correction of the homework</a:t>
+            </a:r>
+            <a:endParaRPr lang="en-US" sz="4000" dirty="0"/>
+          </a:p>
+          <a:p>
+            <a:pPr algn="l" marL="342900" indent="-342900">
+              <a:spcAft>
+                <a:spcPts val="800"/>
+              </a:spcAft>
+              <a:buSzPct val="100000"/>
+              <a:buFont typeface="+mj-lt"/>
+              <a:buAutoNum type="arabicPeriod" startAt="1"/>
+            </a:pPr>
+            <a:r>
+              <a:rPr lang="en-US" sz="4000" dirty="0">
+                <a:solidFill>
+                  <a:srgbClr val="111111"/>
+                </a:solidFill>
+                <a:latin typeface="Times New Roman" pitchFamily="34" charset="0"/>
+                <a:ea typeface="Times New Roman" pitchFamily="34" charset="-122"/>
+                <a:cs typeface="Times New Roman" pitchFamily="34" charset="-120"/>
+              </a:rPr>
+              <a:t>Objectives and recall</a:t>
+            </a:r>
+            <a:endParaRPr lang="en-US" sz="4000" dirty="0"/>
+          </a:p>
+          <a:p>
+            <a:pPr algn="l" marL="342900" indent="-342900">
+              <a:spcAft>
+                <a:spcPts val="800"/>
+              </a:spcAft>
+              <a:buSzPct val="100000"/>
+              <a:buFont typeface="+mj-lt"/>
+              <a:buAutoNum type="arabicPeriod" startAt="1"/>
+            </a:pPr>
+            <a:r>
+              <a:rPr lang="en-US" sz="4000" dirty="0">
+                <a:solidFill>
+                  <a:srgbClr val="111111"/>
+                </a:solidFill>
+                <a:latin typeface="Times New Roman" pitchFamily="34" charset="0"/>
+                <a:ea typeface="Times New Roman" pitchFamily="34" charset="-122"/>
+                <a:cs typeface="Times New Roman" pitchFamily="34" charset="-120"/>
+              </a:rPr>
+              <a:t>Real-life situation and action to take</a:t>
+            </a:r>
+            <a:endParaRPr lang="en-US" sz="4000" dirty="0"/>
+          </a:p>
+          <a:p>
+            <a:pPr algn="l" marL="342900" indent="-342900">
+              <a:spcAft>
+                <a:spcPts val="800"/>
+              </a:spcAft>
+              <a:buSzPct val="100000"/>
+              <a:buFont typeface="+mj-lt"/>
+              <a:buAutoNum type="arabicPeriod" startAt="1"/>
+            </a:pPr>
+            <a:r>
+              <a:rPr lang="en-US" sz="4000" dirty="0">
+                <a:solidFill>
+                  <a:srgbClr val="111111"/>
+                </a:solidFill>
+                <a:latin typeface="Times New Roman" pitchFamily="34" charset="0"/>
+                <a:ea typeface="Times New Roman" pitchFamily="34" charset="-122"/>
+                <a:cs typeface="Times New Roman" pitchFamily="34" charset="-120"/>
+              </a:rPr>
+              <a:t>Learning activities</a:t>
+            </a:r>
+            <a:endParaRPr lang="en-US" sz="4000" dirty="0"/>
+          </a:p>
+          <a:p>
+            <a:pPr algn="l" marL="342900" indent="-342900">
+              <a:spcAft>
+                <a:spcPts val="800"/>
+              </a:spcAft>
+              <a:buSzPct val="100000"/>
+              <a:buFont typeface="+mj-lt"/>
+              <a:buAutoNum type="arabicPeriod" startAt="1"/>
+            </a:pPr>
+            <a:r>
+              <a:rPr lang="en-US" sz="4000" dirty="0">
+                <a:solidFill>
+                  <a:srgbClr val="111111"/>
+                </a:solidFill>
+                <a:latin typeface="Times New Roman" pitchFamily="34" charset="0"/>
+                <a:ea typeface="Times New Roman" pitchFamily="34" charset="-122"/>
+                <a:cs typeface="Times New Roman" pitchFamily="34" charset="-120"/>
+              </a:rPr>
+              <a:t>Board summary</a:t>
+            </a:r>
+            <a:endParaRPr lang="en-US" sz="4000" dirty="0"/>
+          </a:p>
+          <a:p>
+            <a:pPr algn="l" marL="342900" indent="-342900">
+              <a:spcAft>
+                <a:spcPts val="800"/>
+              </a:spcAft>
+              <a:buSzPct val="100000"/>
+              <a:buFont typeface="+mj-lt"/>
+              <a:buAutoNum type="arabicPeriod" startAt="1"/>
+            </a:pPr>
+            <a:r>
+              <a:rPr lang="en-US" sz="4000" dirty="0">
+                <a:solidFill>
+                  <a:srgbClr val="111111"/>
+                </a:solidFill>
+                <a:latin typeface="Times New Roman" pitchFamily="34" charset="0"/>
+                <a:ea typeface="Times New Roman" pitchFamily="34" charset="-122"/>
+                <a:cs typeface="Times New Roman" pitchFamily="34" charset="-120"/>
+              </a:rPr>
+              <a:t>Evaluation, remediation and homework</a:t>
+            </a:r>
+            <a:endParaRPr lang="en-US" sz="4000" dirty="0"/>
+          </a:p>
+        </p:txBody>
+      </p:sp>
+      <p:sp>
+        <p:nvSpPr>
+          <p:cNvPr id="25" name="Slide Number Placeholder 0"/>
+          <p:cNvSpPr>
+            <a:spLocks noGrp="1"/>
+          </p:cNvSpPr>
+          <p:nvPr>
+            <p:ph type="sldNum" sz="quarter" idx="4294967295"/>
+          </p:nvPr>
+        </p:nvSpPr>
+        <p:spPr>
+          <a:xfrm>
+            <a:off x="27432" y="91440"/>
+            <a:ext cx="585216" cy="475488"/>
+          </a:xfrm>
+          <a:prstGeom prst="rect">
+            <a:avLst/>
+          </a:prstGeom>
+          <a:extLst>
+            <a:ext uri="{C572A759-6A51-4108-AA02-DFA0A04FC94B}">
+              <ma14:wrappingTextBoxFlag xmlns:ma14="http://schemas.microsoft.com/office/mac/drawingml/2011/main" val="0"/>
+            </a:ext>
+          </a:extLst>
+        </p:spPr>
+        <p:txBody>
+          <a:bodyPr/>
+          <a:lstStyle>
+            <a:lvl1pPr>
+              <a:defRPr sz="2000">
+                <a:solidFill>
+                  <a:srgbClr val="FFFFFF"/>
+                </a:solidFill>
+                <a:latin typeface="Calibri"/>
+                <a:ea typeface="Calibri"/>
+                <a:cs typeface="Calibri"/>
+              </a:defRPr>
+            </a:lvl1pPr>
+          </a:lstStyle>
+          <a:p>
+            <a:pPr algn="ctr"/>
+            <a:fld id="{F7021451-1387-4CA6-816F-3879F97B5CBC}" type="slidenum">
+              <a:rPr b="1" lang="en-US"/>
+              <a:t>6</a:t>
+            </a:fld>
+            <a:endParaRPr lang="en-US"/>
+          </a:p>
+        </p:txBody>
+      </p:sp>
+    </p:spTree>
+  </p:cSld>
+  <p:clrMapOvr>
+    <a:masterClrMapping/>
+  </p:clrMapOvr>
+</p:sld>
+</file>
+
+<file path=ppt/slides/slide60.xml><?xml version="1.0" encoding="utf-8"?>
+<p:sld xmlns:a="http://schemas.openxmlformats.org/drawingml/2006/main" xmlns:r="http://schemas.openxmlformats.org/officeDocument/2006/relationships" xmlns:p="http://schemas.openxmlformats.org/presentationml/2006/main">
+  <p:cSld name="Slide 60">
+    <p:spTree>
+      <p:nvGrpSpPr>
+        <p:cNvPr id="1" name=""/>
+        <p:cNvGrpSpPr/>
+        <p:nvPr/>
+      </p:nvGrpSpPr>
+      <p:grpSpPr>
+        <a:xfrm>
+          <a:off x="0" y="0"/>
+          <a:ext cx="0" cy="0"/>
+          <a:chOff x="0" y="0"/>
+          <a:chExt cx="0" cy="0"/>
+        </a:xfrm>
+      </p:grpSpPr>
+      <p:sp>
+        <p:nvSpPr>
+          <p:cNvPr id="2" name="Text 0"/>
+          <p:cNvSpPr/>
+          <p:nvPr/>
+        </p:nvSpPr>
+        <p:spPr>
+          <a:xfrm>
+            <a:off x="457200" y="713232"/>
+            <a:ext cx="11368735" cy="274320"/>
+          </a:xfrm>
+          <a:prstGeom prst="rect">
+            <a:avLst/>
+          </a:prstGeom>
+          <a:noFill/>
+          <a:ln/>
+        </p:spPr>
+        <p:txBody>
+          <a:bodyPr wrap="square" lIns="0" tIns="0" rIns="0" bIns="0" rtlCol="0" anchor="ctr"/>
+          <a:lstStyle/>
+          <a:p>
+            <a:pPr algn="r" indent="0" marL="0">
+              <a:buNone/>
+            </a:pPr>
+            <a:r>
+              <a:rPr lang="en-US" sz="1400" b="1" dirty="0">
+                <a:solidFill>
+                  <a:srgbClr val="1C3F6E"/>
+                </a:solidFill>
+                <a:latin typeface="Calibri" pitchFamily="34" charset="0"/>
+                <a:ea typeface="Calibri" pitchFamily="34" charset="-122"/>
+                <a:cs typeface="Calibri" pitchFamily="34" charset="-120"/>
+              </a:rPr>
+              <a:t>FORMATIVE EVALUATION</a:t>
+            </a:r>
+            <a:endParaRPr lang="en-US" sz="1400" dirty="0"/>
+          </a:p>
+        </p:txBody>
+      </p:sp>
+      <p:pic>
+        <p:nvPicPr>
+          <p:cNvPr id="3" name="Image 0" descr="/home/claude/f4/img/minesec_sheet.png">    </p:cNvPr>
+          <p:cNvPicPr>
+            <a:picLocks noChangeAspect="1"/>
+          </p:cNvPicPr>
+          <p:nvPr/>
+        </p:nvPicPr>
+        <p:blipFill>
+          <a:blip r:embed="rId1"/>
+          <a:stretch>
+            <a:fillRect/>
+          </a:stretch>
+        </p:blipFill>
+        <p:spPr>
+          <a:xfrm>
+            <a:off x="0" y="658368"/>
+            <a:ext cx="5120640" cy="5833872"/>
+          </a:xfrm>
+          <a:prstGeom prst="rect">
+            <a:avLst/>
+          </a:prstGeom>
+        </p:spPr>
+      </p:pic>
+      <p:sp>
+        <p:nvSpPr>
+          <p:cNvPr id="4" name="Text 1"/>
+          <p:cNvSpPr/>
+          <p:nvPr/>
+        </p:nvSpPr>
+        <p:spPr>
+          <a:xfrm>
+            <a:off x="5349240" y="1005840"/>
+            <a:ext cx="6522415" cy="731520"/>
+          </a:xfrm>
+          <a:prstGeom prst="rect">
+            <a:avLst/>
+          </a:prstGeom>
+          <a:noFill/>
+          <a:ln/>
+        </p:spPr>
+        <p:txBody>
+          <a:bodyPr wrap="square" lIns="0" tIns="0" rIns="0" bIns="0" rtlCol="0" anchor="ctr">
+            <a:normAutofit/>
+          </a:bodyPr>
+          <a:lstStyle/>
+          <a:p>
+            <a:pPr algn="ctr" indent="0" marL="0">
+              <a:buNone/>
+            </a:pPr>
+            <a:r>
+              <a:rPr lang="en-US" sz="3600" b="1" dirty="0">
+                <a:solidFill>
+                  <a:srgbClr val="990011"/>
+                </a:solidFill>
+                <a:latin typeface="Times New Roman" pitchFamily="34" charset="0"/>
+                <a:ea typeface="Times New Roman" pitchFamily="34" charset="-122"/>
+                <a:cs typeface="Times New Roman" pitchFamily="34" charset="-120"/>
+              </a:rPr>
+              <a:t>Expected Answer</a:t>
+            </a:r>
+            <a:endParaRPr lang="en-US" sz="3600" dirty="0"/>
+          </a:p>
+        </p:txBody>
+      </p:sp>
+      <p:sp>
+        <p:nvSpPr>
+          <p:cNvPr id="5" name="Text 2"/>
+          <p:cNvSpPr/>
+          <p:nvPr/>
+        </p:nvSpPr>
+        <p:spPr>
+          <a:xfrm>
+            <a:off x="5349240" y="1783080"/>
+            <a:ext cx="6522415" cy="4663440"/>
+          </a:xfrm>
+          <a:prstGeom prst="rect">
+            <a:avLst/>
+          </a:prstGeom>
+          <a:noFill/>
+          <a:ln/>
+        </p:spPr>
+        <p:txBody>
+          <a:bodyPr wrap="square" lIns="0" tIns="0" rIns="0" bIns="0" rtlCol="0" anchor="t"/>
+          <a:lstStyle/>
+          <a:p>
+            <a:pPr algn="l" indent="0" marL="0">
+              <a:spcAft>
+                <a:spcPts val="800"/>
+              </a:spcAft>
+              <a:buNone/>
+            </a:pPr>
+            <a:r>
+              <a:rPr lang="en-US" sz="4000" dirty="0">
+                <a:solidFill>
+                  <a:srgbClr val="111111"/>
+                </a:solidFill>
+                <a:latin typeface="Times New Roman" pitchFamily="34" charset="0"/>
+                <a:ea typeface="Times New Roman" pitchFamily="34" charset="-122"/>
+                <a:cs typeface="Times New Roman" pitchFamily="34" charset="-120"/>
+              </a:rPr>
+              <a:t>Dew is condensation on cool surfaces; drizzle is fine rain falling from clouds.</a:t>
+            </a:r>
+            <a:endParaRPr lang="en-US" sz="4000" dirty="0"/>
+          </a:p>
+        </p:txBody>
+      </p:sp>
+      <p:sp>
+        <p:nvSpPr>
+          <p:cNvPr id="25" name="Slide Number Placeholder 0"/>
+          <p:cNvSpPr>
+            <a:spLocks noGrp="1"/>
+          </p:cNvSpPr>
+          <p:nvPr>
+            <p:ph type="sldNum" sz="quarter" idx="4294967295"/>
+          </p:nvPr>
+        </p:nvSpPr>
+        <p:spPr>
+          <a:xfrm>
+            <a:off x="27432" y="91440"/>
+            <a:ext cx="585216" cy="475488"/>
+          </a:xfrm>
+          <a:prstGeom prst="rect">
+            <a:avLst/>
+          </a:prstGeom>
+          <a:extLst>
+            <a:ext uri="{C572A759-6A51-4108-AA02-DFA0A04FC94B}">
+              <ma14:wrappingTextBoxFlag xmlns:ma14="http://schemas.microsoft.com/office/mac/drawingml/2011/main" val="0"/>
+            </a:ext>
+          </a:extLst>
+        </p:spPr>
+        <p:txBody>
+          <a:bodyPr/>
+          <a:lstStyle>
+            <a:lvl1pPr>
+              <a:defRPr sz="2000">
+                <a:solidFill>
+                  <a:srgbClr val="FFFFFF"/>
+                </a:solidFill>
+                <a:latin typeface="Calibri"/>
+                <a:ea typeface="Calibri"/>
+                <a:cs typeface="Calibri"/>
+              </a:defRPr>
+            </a:lvl1pPr>
+          </a:lstStyle>
+          <a:p>
+            <a:pPr algn="ctr"/>
+            <a:fld id="{F7021451-1387-4CA6-816F-3879F97B5CBC}" type="slidenum">
+              <a:rPr b="1" lang="en-US"/>
+              <a:t>60</a:t>
+            </a:fld>
+            <a:endParaRPr lang="en-US"/>
+          </a:p>
+        </p:txBody>
+      </p:sp>
+    </p:spTree>
+  </p:cSld>
+  <p:clrMapOvr>
+    <a:masterClrMapping/>
+  </p:clrMapOvr>
+</p:sld>
+</file>
+
+<file path=ppt/slides/slide61.xml><?xml version="1.0" encoding="utf-8"?>
+<p:sld xmlns:a="http://schemas.openxmlformats.org/drawingml/2006/main" xmlns:r="http://schemas.openxmlformats.org/officeDocument/2006/relationships" xmlns:p="http://schemas.openxmlformats.org/presentationml/2006/main">
+  <p:cSld name="Slide 61">
+    <p:spTree>
+      <p:nvGrpSpPr>
+        <p:cNvPr id="1" name=""/>
+        <p:cNvGrpSpPr/>
+        <p:nvPr/>
+      </p:nvGrpSpPr>
+      <p:grpSpPr>
+        <a:xfrm>
+          <a:off x="0" y="0"/>
+          <a:ext cx="0" cy="0"/>
+          <a:chOff x="0" y="0"/>
+          <a:chExt cx="0" cy="0"/>
+        </a:xfrm>
+      </p:grpSpPr>
+      <p:sp>
+        <p:nvSpPr>
+          <p:cNvPr id="2" name="Text 0"/>
+          <p:cNvSpPr/>
+          <p:nvPr/>
+        </p:nvSpPr>
+        <p:spPr>
+          <a:xfrm>
+            <a:off x="457200" y="713232"/>
+            <a:ext cx="11368735" cy="274320"/>
+          </a:xfrm>
+          <a:prstGeom prst="rect">
+            <a:avLst/>
+          </a:prstGeom>
+          <a:noFill/>
+          <a:ln/>
+        </p:spPr>
+        <p:txBody>
+          <a:bodyPr wrap="square" lIns="0" tIns="0" rIns="0" bIns="0" rtlCol="0" anchor="ctr"/>
+          <a:lstStyle/>
+          <a:p>
+            <a:pPr algn="r" indent="0" marL="0">
+              <a:buNone/>
+            </a:pPr>
+            <a:r>
+              <a:rPr lang="en-US" sz="1400" b="1" dirty="0">
+                <a:solidFill>
+                  <a:srgbClr val="1C3F6E"/>
+                </a:solidFill>
+                <a:latin typeface="Calibri" pitchFamily="34" charset="0"/>
+                <a:ea typeface="Calibri" pitchFamily="34" charset="-122"/>
+                <a:cs typeface="Calibri" pitchFamily="34" charset="-120"/>
+              </a:rPr>
+              <a:t>REMEDIATION</a:t>
+            </a:r>
+            <a:endParaRPr lang="en-US" sz="1400" dirty="0"/>
+          </a:p>
+        </p:txBody>
+      </p:sp>
+      <p:pic>
+        <p:nvPicPr>
+          <p:cNvPr id="3" name="Image 0" descr="/home/claude/f4/img/minesec_sheet.png">    </p:cNvPr>
+          <p:cNvPicPr>
+            <a:picLocks noChangeAspect="1"/>
+          </p:cNvPicPr>
+          <p:nvPr/>
+        </p:nvPicPr>
+        <p:blipFill>
+          <a:blip r:embed="rId1"/>
+          <a:stretch>
+            <a:fillRect/>
+          </a:stretch>
+        </p:blipFill>
+        <p:spPr>
+          <a:xfrm>
+            <a:off x="0" y="658368"/>
+            <a:ext cx="3840480" cy="5833872"/>
+          </a:xfrm>
+          <a:prstGeom prst="rect">
+            <a:avLst/>
+          </a:prstGeom>
+        </p:spPr>
+      </p:pic>
+      <p:sp>
+        <p:nvSpPr>
+          <p:cNvPr id="4" name="Text 1"/>
+          <p:cNvSpPr/>
+          <p:nvPr/>
+        </p:nvSpPr>
+        <p:spPr>
+          <a:xfrm>
+            <a:off x="4069080" y="1005840"/>
+            <a:ext cx="7802575" cy="731520"/>
+          </a:xfrm>
+          <a:prstGeom prst="rect">
+            <a:avLst/>
+          </a:prstGeom>
+          <a:noFill/>
+          <a:ln/>
+        </p:spPr>
+        <p:txBody>
+          <a:bodyPr wrap="square" lIns="0" tIns="0" rIns="0" bIns="0" rtlCol="0" anchor="ctr">
+            <a:normAutofit/>
+          </a:bodyPr>
+          <a:lstStyle/>
+          <a:p>
+            <a:pPr algn="ctr" indent="0" marL="0">
+              <a:buNone/>
+            </a:pPr>
+            <a:r>
+              <a:rPr lang="en-US" sz="3600" b="1" dirty="0">
+                <a:solidFill>
+                  <a:srgbClr val="990011"/>
+                </a:solidFill>
+                <a:latin typeface="Times New Roman" pitchFamily="34" charset="0"/>
+                <a:ea typeface="Times New Roman" pitchFamily="34" charset="-122"/>
+                <a:cs typeface="Times New Roman" pitchFamily="34" charset="-120"/>
+              </a:rPr>
+              <a:t>Remediation</a:t>
+            </a:r>
+            <a:endParaRPr lang="en-US" sz="3600" dirty="0"/>
+          </a:p>
+        </p:txBody>
+      </p:sp>
+      <p:sp>
+        <p:nvSpPr>
+          <p:cNvPr id="5" name="Text 2"/>
+          <p:cNvSpPr/>
+          <p:nvPr/>
+        </p:nvSpPr>
+        <p:spPr>
+          <a:xfrm>
+            <a:off x="4069080" y="1783080"/>
+            <a:ext cx="7802575" cy="4663440"/>
+          </a:xfrm>
+          <a:prstGeom prst="rect">
+            <a:avLst/>
+          </a:prstGeom>
+          <a:noFill/>
+          <a:ln/>
+        </p:spPr>
+        <p:txBody>
+          <a:bodyPr wrap="square" lIns="0" tIns="0" rIns="0" bIns="0" rtlCol="0" anchor="t"/>
+          <a:lstStyle/>
+          <a:p>
+            <a:pPr algn="l" indent="0" marL="0">
+              <a:spcAft>
+                <a:spcPts val="800"/>
+              </a:spcAft>
+              <a:buNone/>
+            </a:pPr>
+            <a:r>
+              <a:rPr lang="en-US" sz="4000" b="1" dirty="0">
+                <a:solidFill>
+                  <a:srgbClr val="111111"/>
+                </a:solidFill>
+                <a:latin typeface="Times New Roman" pitchFamily="34" charset="0"/>
+                <a:ea typeface="Times New Roman" pitchFamily="34" charset="-122"/>
+                <a:cs typeface="Times New Roman" pitchFamily="34" charset="-120"/>
+              </a:rPr>
+              <a:t>Fill in the blanks:</a:t>
+            </a:r>
+            <a:endParaRPr lang="en-US" sz="4000" dirty="0"/>
+          </a:p>
+          <a:p>
+            <a:pPr algn="l" marL="342900" indent="-342900">
+              <a:spcAft>
+                <a:spcPts val="800"/>
+              </a:spcAft>
+              <a:buSzPct val="100000"/>
+              <a:buFont typeface="+mj-lt"/>
+              <a:buAutoNum type="arabicPeriod" startAt="1"/>
+            </a:pPr>
+            <a:r>
+              <a:rPr lang="en-US" sz="4000" dirty="0">
+                <a:solidFill>
+                  <a:srgbClr val="111111"/>
+                </a:solidFill>
+                <a:latin typeface="Times New Roman" pitchFamily="34" charset="0"/>
+                <a:ea typeface="Times New Roman" pitchFamily="34" charset="-122"/>
+                <a:cs typeface="Times New Roman" pitchFamily="34" charset="-120"/>
+              </a:rPr>
+              <a:t>Thunderstorm clouds are ______.</a:t>
+            </a:r>
+            <a:endParaRPr lang="en-US" sz="4000" dirty="0"/>
+          </a:p>
+          <a:p>
+            <a:pPr algn="l" marL="342900" indent="-342900">
+              <a:spcAft>
+                <a:spcPts val="800"/>
+              </a:spcAft>
+              <a:buSzPct val="100000"/>
+              <a:buFont typeface="+mj-lt"/>
+              <a:buAutoNum type="arabicPeriod" startAt="1"/>
+            </a:pPr>
+            <a:r>
+              <a:rPr lang="en-US" sz="4000" dirty="0">
+                <a:solidFill>
+                  <a:srgbClr val="111111"/>
+                </a:solidFill>
+                <a:latin typeface="Times New Roman" pitchFamily="34" charset="0"/>
+                <a:ea typeface="Times New Roman" pitchFamily="34" charset="-122"/>
+                <a:cs typeface="Times New Roman" pitchFamily="34" charset="-120"/>
+              </a:rPr>
+              <a:t>The dry side of a mountain is the rain ______.</a:t>
+            </a:r>
+            <a:endParaRPr lang="en-US" sz="4000" dirty="0"/>
+          </a:p>
+          <a:p>
+            <a:pPr algn="l" marL="342900" indent="-342900">
+              <a:spcAft>
+                <a:spcPts val="800"/>
+              </a:spcAft>
+              <a:buSzPct val="100000"/>
+              <a:buFont typeface="+mj-lt"/>
+              <a:buAutoNum type="arabicPeriod" startAt="1"/>
+            </a:pPr>
+            <a:r>
+              <a:rPr lang="en-US" sz="4000" dirty="0">
+                <a:solidFill>
+                  <a:srgbClr val="111111"/>
+                </a:solidFill>
+                <a:latin typeface="Times New Roman" pitchFamily="34" charset="0"/>
+                <a:ea typeface="Times New Roman" pitchFamily="34" charset="-122"/>
+                <a:cs typeface="Times New Roman" pitchFamily="34" charset="-120"/>
+              </a:rPr>
+              <a:t>Rain from warm air rising over cold air is ______ rain.</a:t>
+            </a:r>
+            <a:endParaRPr lang="en-US" sz="4000" dirty="0"/>
+          </a:p>
+        </p:txBody>
+      </p:sp>
+      <p:sp>
+        <p:nvSpPr>
+          <p:cNvPr id="25" name="Slide Number Placeholder 0"/>
+          <p:cNvSpPr>
+            <a:spLocks noGrp="1"/>
+          </p:cNvSpPr>
+          <p:nvPr>
+            <p:ph type="sldNum" sz="quarter" idx="4294967295"/>
+          </p:nvPr>
+        </p:nvSpPr>
+        <p:spPr>
+          <a:xfrm>
+            <a:off x="27432" y="91440"/>
+            <a:ext cx="585216" cy="475488"/>
+          </a:xfrm>
+          <a:prstGeom prst="rect">
+            <a:avLst/>
+          </a:prstGeom>
+          <a:extLst>
+            <a:ext uri="{C572A759-6A51-4108-AA02-DFA0A04FC94B}">
+              <ma14:wrappingTextBoxFlag xmlns:ma14="http://schemas.microsoft.com/office/mac/drawingml/2011/main" val="0"/>
+            </a:ext>
+          </a:extLst>
+        </p:spPr>
+        <p:txBody>
+          <a:bodyPr/>
+          <a:lstStyle>
+            <a:lvl1pPr>
+              <a:defRPr sz="2000">
+                <a:solidFill>
+                  <a:srgbClr val="FFFFFF"/>
+                </a:solidFill>
+                <a:latin typeface="Calibri"/>
+                <a:ea typeface="Calibri"/>
+                <a:cs typeface="Calibri"/>
+              </a:defRPr>
+            </a:lvl1pPr>
+          </a:lstStyle>
+          <a:p>
+            <a:pPr algn="ctr"/>
+            <a:fld id="{F7021451-1387-4CA6-816F-3879F97B5CBC}" type="slidenum">
+              <a:rPr b="1" lang="en-US"/>
+              <a:t>61</a:t>
+            </a:fld>
+            <a:endParaRPr lang="en-US"/>
+          </a:p>
+        </p:txBody>
+      </p:sp>
+    </p:spTree>
+  </p:cSld>
+  <p:clrMapOvr>
+    <a:masterClrMapping/>
+  </p:clrMapOvr>
+</p:sld>
+</file>
+
+<file path=ppt/slides/slide62.xml><?xml version="1.0" encoding="utf-8"?>
+<p:sld xmlns:a="http://schemas.openxmlformats.org/drawingml/2006/main" xmlns:r="http://schemas.openxmlformats.org/officeDocument/2006/relationships" xmlns:p="http://schemas.openxmlformats.org/presentationml/2006/main">
+  <p:cSld name="Slide 62">
+    <p:spTree>
+      <p:nvGrpSpPr>
+        <p:cNvPr id="1" name=""/>
+        <p:cNvGrpSpPr/>
+        <p:nvPr/>
+      </p:nvGrpSpPr>
+      <p:grpSpPr>
+        <a:xfrm>
+          <a:off x="0" y="0"/>
+          <a:ext cx="0" cy="0"/>
+          <a:chOff x="0" y="0"/>
+          <a:chExt cx="0" cy="0"/>
+        </a:xfrm>
+      </p:grpSpPr>
+      <p:sp>
+        <p:nvSpPr>
+          <p:cNvPr id="2" name="Text 0"/>
+          <p:cNvSpPr/>
+          <p:nvPr/>
+        </p:nvSpPr>
+        <p:spPr>
+          <a:xfrm>
+            <a:off x="457200" y="713232"/>
+            <a:ext cx="11368735" cy="274320"/>
+          </a:xfrm>
+          <a:prstGeom prst="rect">
+            <a:avLst/>
+          </a:prstGeom>
+          <a:noFill/>
+          <a:ln/>
+        </p:spPr>
+        <p:txBody>
+          <a:bodyPr wrap="square" lIns="0" tIns="0" rIns="0" bIns="0" rtlCol="0" anchor="ctr"/>
+          <a:lstStyle/>
+          <a:p>
+            <a:pPr algn="r" indent="0" marL="0">
+              <a:buNone/>
+            </a:pPr>
+            <a:r>
+              <a:rPr lang="en-US" sz="1400" b="1" dirty="0">
+                <a:solidFill>
+                  <a:srgbClr val="1C3F6E"/>
+                </a:solidFill>
+                <a:latin typeface="Calibri" pitchFamily="34" charset="0"/>
+                <a:ea typeface="Calibri" pitchFamily="34" charset="-122"/>
+                <a:cs typeface="Calibri" pitchFamily="34" charset="-120"/>
+              </a:rPr>
+              <a:t>HOMEWORK</a:t>
+            </a:r>
+            <a:endParaRPr lang="en-US" sz="1400" dirty="0"/>
+          </a:p>
+        </p:txBody>
+      </p:sp>
+      <p:pic>
+        <p:nvPicPr>
+          <p:cNvPr id="3" name="Image 0" descr="/home/claude/f4/img/minesec_sheet.png">    </p:cNvPr>
+          <p:cNvPicPr>
+            <a:picLocks noChangeAspect="1"/>
+          </p:cNvPicPr>
+          <p:nvPr/>
+        </p:nvPicPr>
+        <p:blipFill>
+          <a:blip r:embed="rId1"/>
+          <a:stretch>
+            <a:fillRect/>
+          </a:stretch>
+        </p:blipFill>
+        <p:spPr>
+          <a:xfrm>
+            <a:off x="0" y="658368"/>
+            <a:ext cx="5120640" cy="5833872"/>
+          </a:xfrm>
+          <a:prstGeom prst="rect">
+            <a:avLst/>
+          </a:prstGeom>
+        </p:spPr>
+      </p:pic>
+      <p:sp>
+        <p:nvSpPr>
+          <p:cNvPr id="4" name="Text 1"/>
+          <p:cNvSpPr/>
+          <p:nvPr/>
+        </p:nvSpPr>
+        <p:spPr>
+          <a:xfrm>
+            <a:off x="5349240" y="1005840"/>
+            <a:ext cx="6522415" cy="731520"/>
+          </a:xfrm>
+          <a:prstGeom prst="rect">
+            <a:avLst/>
+          </a:prstGeom>
+          <a:noFill/>
+          <a:ln/>
+        </p:spPr>
+        <p:txBody>
+          <a:bodyPr wrap="square" lIns="0" tIns="0" rIns="0" bIns="0" rtlCol="0" anchor="ctr">
+            <a:normAutofit/>
+          </a:bodyPr>
+          <a:lstStyle/>
+          <a:p>
+            <a:pPr algn="ctr" indent="0" marL="0">
+              <a:buNone/>
+            </a:pPr>
+            <a:r>
+              <a:rPr lang="en-US" sz="3600" b="1" dirty="0">
+                <a:solidFill>
+                  <a:srgbClr val="990011"/>
+                </a:solidFill>
+                <a:latin typeface="Times New Roman" pitchFamily="34" charset="0"/>
+                <a:ea typeface="Times New Roman" pitchFamily="34" charset="-122"/>
+                <a:cs typeface="Times New Roman" pitchFamily="34" charset="-120"/>
+              </a:rPr>
+              <a:t>Homework</a:t>
+            </a:r>
+            <a:endParaRPr lang="en-US" sz="3600" dirty="0"/>
+          </a:p>
+        </p:txBody>
+      </p:sp>
+      <p:sp>
+        <p:nvSpPr>
+          <p:cNvPr id="5" name="Text 2"/>
+          <p:cNvSpPr/>
+          <p:nvPr/>
+        </p:nvSpPr>
+        <p:spPr>
+          <a:xfrm>
+            <a:off x="5349240" y="1783080"/>
+            <a:ext cx="6522415" cy="4663440"/>
+          </a:xfrm>
+          <a:prstGeom prst="rect">
+            <a:avLst/>
+          </a:prstGeom>
+          <a:noFill/>
+          <a:ln/>
+        </p:spPr>
+        <p:txBody>
+          <a:bodyPr wrap="square" lIns="0" tIns="0" rIns="0" bIns="0" rtlCol="0" anchor="t"/>
+          <a:lstStyle/>
+          <a:p>
+            <a:pPr algn="l" indent="0" marL="0">
+              <a:spcAft>
+                <a:spcPts val="800"/>
+              </a:spcAft>
+              <a:buNone/>
+            </a:pPr>
+            <a:r>
+              <a:rPr lang="en-US" sz="4000" dirty="0">
+                <a:solidFill>
+                  <a:srgbClr val="111111"/>
+                </a:solidFill>
+                <a:latin typeface="Times New Roman" pitchFamily="34" charset="0"/>
+                <a:ea typeface="Times New Roman" pitchFamily="34" charset="-122"/>
+                <a:cs typeface="Times New Roman" pitchFamily="34" charset="-120"/>
+              </a:rPr>
+              <a:t>Name the world's wettest belt of latitude.</a:t>
+            </a:r>
+            <a:endParaRPr lang="en-US" sz="4000" dirty="0"/>
+          </a:p>
+        </p:txBody>
+      </p:sp>
+      <p:sp>
+        <p:nvSpPr>
+          <p:cNvPr id="25" name="Slide Number Placeholder 0"/>
+          <p:cNvSpPr>
+            <a:spLocks noGrp="1"/>
+          </p:cNvSpPr>
+          <p:nvPr>
+            <p:ph type="sldNum" sz="quarter" idx="4294967295"/>
+          </p:nvPr>
+        </p:nvSpPr>
+        <p:spPr>
+          <a:xfrm>
+            <a:off x="27432" y="91440"/>
+            <a:ext cx="585216" cy="475488"/>
+          </a:xfrm>
+          <a:prstGeom prst="rect">
+            <a:avLst/>
+          </a:prstGeom>
+          <a:extLst>
+            <a:ext uri="{C572A759-6A51-4108-AA02-DFA0A04FC94B}">
+              <ma14:wrappingTextBoxFlag xmlns:ma14="http://schemas.microsoft.com/office/mac/drawingml/2011/main" val="0"/>
+            </a:ext>
+          </a:extLst>
+        </p:spPr>
+        <p:txBody>
+          <a:bodyPr/>
+          <a:lstStyle>
+            <a:lvl1pPr>
+              <a:defRPr sz="2000">
+                <a:solidFill>
+                  <a:srgbClr val="FFFFFF"/>
+                </a:solidFill>
+                <a:latin typeface="Calibri"/>
+                <a:ea typeface="Calibri"/>
+                <a:cs typeface="Calibri"/>
+              </a:defRPr>
+            </a:lvl1pPr>
+          </a:lstStyle>
+          <a:p>
+            <a:pPr algn="ctr"/>
+            <a:fld id="{F7021451-1387-4CA6-816F-3879F97B5CBC}" type="slidenum">
+              <a:rPr b="1" lang="en-US"/>
+              <a:t>62</a:t>
+            </a:fld>
+            <a:endParaRPr lang="en-US"/>
+          </a:p>
+        </p:txBody>
+      </p:sp>
+    </p:spTree>
+  </p:cSld>
+  <p:clrMapOvr>
+    <a:masterClrMapping/>
+  </p:clrMapOvr>
+</p:sld>
+</file>
+
+<file path=ppt/slides/slide63.xml><?xml version="1.0" encoding="utf-8"?>
+<p:sld xmlns:a="http://schemas.openxmlformats.org/drawingml/2006/main" xmlns:r="http://schemas.openxmlformats.org/officeDocument/2006/relationships" xmlns:p="http://schemas.openxmlformats.org/presentationml/2006/main">
+  <p:cSld name="Slide 63">
+    <p:spTree>
+      <p:nvGrpSpPr>
+        <p:cNvPr id="1" name=""/>
+        <p:cNvGrpSpPr/>
+        <p:nvPr/>
+      </p:nvGrpSpPr>
+      <p:grpSpPr>
+        <a:xfrm>
+          <a:off x="0" y="0"/>
+          <a:ext cx="0" cy="0"/>
+          <a:chOff x="0" y="0"/>
+          <a:chExt cx="0" cy="0"/>
+        </a:xfrm>
+      </p:grpSpPr>
+      <p:sp>
+        <p:nvSpPr>
+          <p:cNvPr id="2" name="Text 0"/>
+          <p:cNvSpPr/>
+          <p:nvPr/>
+        </p:nvSpPr>
+        <p:spPr>
+          <a:xfrm>
+            <a:off x="457200" y="713232"/>
+            <a:ext cx="11368735" cy="274320"/>
+          </a:xfrm>
+          <a:prstGeom prst="rect">
+            <a:avLst/>
+          </a:prstGeom>
+          <a:noFill/>
+          <a:ln/>
+        </p:spPr>
+        <p:txBody>
+          <a:bodyPr wrap="square" lIns="0" tIns="0" rIns="0" bIns="0" rtlCol="0" anchor="ctr"/>
+          <a:lstStyle/>
+          <a:p>
+            <a:pPr algn="r" indent="0" marL="0">
+              <a:buNone/>
+            </a:pPr>
+            <a:r>
+              <a:rPr lang="en-US" sz="1400" b="1" dirty="0">
+                <a:solidFill>
+                  <a:srgbClr val="1C3F6E"/>
+                </a:solidFill>
+                <a:latin typeface="Calibri" pitchFamily="34" charset="0"/>
+                <a:ea typeface="Calibri" pitchFamily="34" charset="-122"/>
+                <a:cs typeface="Calibri" pitchFamily="34" charset="-120"/>
+              </a:rPr>
+              <a:t>NEXT LESSON</a:t>
+            </a:r>
+            <a:endParaRPr lang="en-US" sz="1400" dirty="0"/>
+          </a:p>
+        </p:txBody>
+      </p:sp>
+      <p:pic>
+        <p:nvPicPr>
+          <p:cNvPr id="3" name="Image 0" descr="/home/claude/f4/img/minesec_sheet.png">    </p:cNvPr>
+          <p:cNvPicPr>
+            <a:picLocks noChangeAspect="1"/>
+          </p:cNvPicPr>
+          <p:nvPr/>
+        </p:nvPicPr>
+        <p:blipFill>
+          <a:blip r:embed="rId1"/>
+          <a:stretch>
+            <a:fillRect/>
+          </a:stretch>
+        </p:blipFill>
+        <p:spPr>
+          <a:xfrm>
+            <a:off x="0" y="658368"/>
+            <a:ext cx="5120640" cy="5833872"/>
+          </a:xfrm>
+          <a:prstGeom prst="rect">
+            <a:avLst/>
+          </a:prstGeom>
+        </p:spPr>
+      </p:pic>
+      <p:sp>
+        <p:nvSpPr>
+          <p:cNvPr id="4" name="Text 1"/>
+          <p:cNvSpPr/>
+          <p:nvPr/>
+        </p:nvSpPr>
+        <p:spPr>
+          <a:xfrm>
+            <a:off x="5349240" y="1005840"/>
+            <a:ext cx="6522415" cy="731520"/>
+          </a:xfrm>
+          <a:prstGeom prst="rect">
+            <a:avLst/>
+          </a:prstGeom>
+          <a:noFill/>
+          <a:ln/>
+        </p:spPr>
+        <p:txBody>
+          <a:bodyPr wrap="square" lIns="0" tIns="0" rIns="0" bIns="0" rtlCol="0" anchor="ctr">
+            <a:normAutofit/>
+          </a:bodyPr>
+          <a:lstStyle/>
+          <a:p>
+            <a:pPr algn="ctr" indent="0" marL="0">
+              <a:buNone/>
+            </a:pPr>
+            <a:r>
+              <a:rPr lang="en-US" sz="3600" b="1" dirty="0">
+                <a:solidFill>
+                  <a:srgbClr val="990011"/>
+                </a:solidFill>
+                <a:latin typeface="Times New Roman" pitchFamily="34" charset="0"/>
+                <a:ea typeface="Times New Roman" pitchFamily="34" charset="-122"/>
+                <a:cs typeface="Times New Roman" pitchFamily="34" charset="-120"/>
+              </a:rPr>
+              <a:t>Next Lesson</a:t>
+            </a:r>
+            <a:endParaRPr lang="en-US" sz="3600" dirty="0"/>
+          </a:p>
+        </p:txBody>
+      </p:sp>
+      <p:sp>
+        <p:nvSpPr>
+          <p:cNvPr id="5" name="Text 2"/>
+          <p:cNvSpPr/>
+          <p:nvPr/>
+        </p:nvSpPr>
+        <p:spPr>
+          <a:xfrm>
+            <a:off x="5349240" y="1783080"/>
+            <a:ext cx="6522415" cy="4663440"/>
+          </a:xfrm>
+          <a:prstGeom prst="rect">
+            <a:avLst/>
+          </a:prstGeom>
+          <a:noFill/>
+          <a:ln/>
+        </p:spPr>
+        <p:txBody>
+          <a:bodyPr wrap="square" lIns="0" tIns="0" rIns="0" bIns="0" rtlCol="0" anchor="ctr"/>
+          <a:lstStyle/>
+          <a:p>
+            <a:pPr algn="ctr" indent="0" marL="0">
+              <a:spcAft>
+                <a:spcPts val="800"/>
+              </a:spcAft>
+              <a:buNone/>
+            </a:pPr>
+            <a:r>
+              <a:rPr lang="en-US" sz="4000" b="1" dirty="0">
+                <a:solidFill>
+                  <a:srgbClr val="111111"/>
+                </a:solidFill>
+                <a:latin typeface="Times New Roman" pitchFamily="34" charset="0"/>
+                <a:ea typeface="Times New Roman" pitchFamily="34" charset="-122"/>
+                <a:cs typeface="Times New Roman" pitchFamily="34" charset="-120"/>
+              </a:rPr>
+              <a:t>Our next lesson will be on:</a:t>
+            </a:r>
+            <a:endParaRPr lang="en-US" sz="4000" dirty="0"/>
+          </a:p>
+          <a:p>
+            <a:pPr algn="ctr" indent="0" marL="0">
+              <a:spcAft>
+                <a:spcPts val="800"/>
+              </a:spcAft>
+              <a:buNone/>
+            </a:pPr>
+            <a:r>
+              <a:rPr lang="en-US" sz="4000" b="1" dirty="0">
+                <a:solidFill>
+                  <a:srgbClr val="990011"/>
+                </a:solidFill>
+                <a:latin typeface="Times New Roman" pitchFamily="34" charset="0"/>
+                <a:ea typeface="Times New Roman" pitchFamily="34" charset="-122"/>
+                <a:cs typeface="Times New Roman" pitchFamily="34" charset="-120"/>
+              </a:rPr>
+              <a:t>Lesson 12: Global Distribution of Precipitation</a:t>
+            </a:r>
+            <a:endParaRPr lang="en-US" sz="4000" dirty="0"/>
+          </a:p>
+        </p:txBody>
+      </p:sp>
+      <p:sp>
+        <p:nvSpPr>
+          <p:cNvPr id="25" name="Slide Number Placeholder 0"/>
+          <p:cNvSpPr>
+            <a:spLocks noGrp="1"/>
+          </p:cNvSpPr>
+          <p:nvPr>
+            <p:ph type="sldNum" sz="quarter" idx="4294967295"/>
+          </p:nvPr>
+        </p:nvSpPr>
+        <p:spPr>
+          <a:xfrm>
+            <a:off x="27432" y="91440"/>
+            <a:ext cx="585216" cy="475488"/>
+          </a:xfrm>
+          <a:prstGeom prst="rect">
+            <a:avLst/>
+          </a:prstGeom>
+          <a:extLst>
+            <a:ext uri="{C572A759-6A51-4108-AA02-DFA0A04FC94B}">
+              <ma14:wrappingTextBoxFlag xmlns:ma14="http://schemas.microsoft.com/office/mac/drawingml/2011/main" val="0"/>
+            </a:ext>
+          </a:extLst>
+        </p:spPr>
+        <p:txBody>
+          <a:bodyPr/>
+          <a:lstStyle>
+            <a:lvl1pPr>
+              <a:defRPr sz="2000">
+                <a:solidFill>
+                  <a:srgbClr val="FFFFFF"/>
+                </a:solidFill>
+                <a:latin typeface="Calibri"/>
+                <a:ea typeface="Calibri"/>
+                <a:cs typeface="Calibri"/>
+              </a:defRPr>
+            </a:lvl1pPr>
+          </a:lstStyle>
+          <a:p>
+            <a:pPr algn="ctr"/>
+            <a:fld id="{F7021451-1387-4CA6-816F-3879F97B5CBC}" type="slidenum">
+              <a:rPr b="1" lang="en-US"/>
+              <a:t>63</a:t>
+            </a:fld>
+            <a:endParaRPr lang="en-US"/>
+          </a:p>
+        </p:txBody>
+      </p:sp>
+    </p:spTree>
+  </p:cSld>
+  <p:clrMapOvr>
+    <a:masterClrMapping/>
+  </p:clrMapOvr>
+</p:sld>
+</file>
+
+<file path=ppt/slides/slide64.xml><?xml version="1.0" encoding="utf-8"?>
+<p:sld xmlns:a="http://schemas.openxmlformats.org/drawingml/2006/main" xmlns:r="http://schemas.openxmlformats.org/officeDocument/2006/relationships" xmlns:p="http://schemas.openxmlformats.org/presentationml/2006/main">
+  <p:cSld name="Slide 64">
+    <p:spTree>
+      <p:nvGrpSpPr>
+        <p:cNvPr id="1" name=""/>
+        <p:cNvGrpSpPr/>
+        <p:nvPr/>
+      </p:nvGrpSpPr>
+      <p:grpSpPr>
+        <a:xfrm>
+          <a:off x="0" y="0"/>
+          <a:ext cx="0" cy="0"/>
+          <a:chOff x="0" y="0"/>
+          <a:chExt cx="0" cy="0"/>
+        </a:xfrm>
+      </p:grpSpPr>
+      <p:sp>
+        <p:nvSpPr>
+          <p:cNvPr id="2" name="Text 0"/>
+          <p:cNvSpPr/>
+          <p:nvPr/>
+        </p:nvSpPr>
+        <p:spPr>
+          <a:xfrm>
+            <a:off x="457200" y="713232"/>
+            <a:ext cx="11368735" cy="274320"/>
+          </a:xfrm>
+          <a:prstGeom prst="rect">
+            <a:avLst/>
+          </a:prstGeom>
+          <a:noFill/>
+          <a:ln/>
+        </p:spPr>
+        <p:txBody>
+          <a:bodyPr wrap="square" lIns="0" tIns="0" rIns="0" bIns="0" rtlCol="0" anchor="ctr"/>
+          <a:lstStyle/>
+          <a:p>
+            <a:pPr algn="r" indent="0" marL="0">
+              <a:buNone/>
+            </a:pPr>
+            <a:r>
+              <a:rPr lang="en-US" sz="1400" b="1" dirty="0">
+                <a:solidFill>
+                  <a:srgbClr val="1C3F6E"/>
+                </a:solidFill>
+                <a:latin typeface="Calibri" pitchFamily="34" charset="0"/>
+                <a:ea typeface="Calibri" pitchFamily="34" charset="-122"/>
+                <a:cs typeface="Calibri" pitchFamily="34" charset="-120"/>
+              </a:rPr>
+              <a:t>BILINGUAL GAME</a:t>
+            </a:r>
+            <a:endParaRPr lang="en-US" sz="1400" dirty="0"/>
+          </a:p>
+        </p:txBody>
+      </p:sp>
+      <p:sp>
+        <p:nvSpPr>
+          <p:cNvPr id="3" name="Text 1"/>
+          <p:cNvSpPr/>
+          <p:nvPr/>
+        </p:nvSpPr>
+        <p:spPr>
+          <a:xfrm>
+            <a:off x="457200" y="1005840"/>
+            <a:ext cx="11277295" cy="731520"/>
+          </a:xfrm>
+          <a:prstGeom prst="rect">
+            <a:avLst/>
+          </a:prstGeom>
+          <a:noFill/>
+          <a:ln/>
+        </p:spPr>
+        <p:txBody>
+          <a:bodyPr wrap="square" lIns="0" tIns="0" rIns="0" bIns="0" rtlCol="0" anchor="ctr"/>
+          <a:lstStyle/>
+          <a:p>
+            <a:pPr algn="ctr" indent="0" marL="0">
+              <a:buNone/>
+            </a:pPr>
+            <a:r>
+              <a:rPr lang="en-US" sz="3600" b="1" dirty="0">
+                <a:solidFill>
+                  <a:srgbClr val="990011"/>
+                </a:solidFill>
+                <a:latin typeface="Times New Roman" pitchFamily="34" charset="0"/>
+                <a:ea typeface="Times New Roman" pitchFamily="34" charset="-122"/>
+                <a:cs typeface="Times New Roman" pitchFamily="34" charset="-120"/>
+              </a:rPr>
               <a:t>Bilingual Game (Jeu Bilingue)</a:t>
             </a:r>
             <a:endParaRPr lang="en-US" sz="3600" dirty="0"/>
@@ -20518,7 +23724,7 @@
       </p:sp>
       <p:graphicFrame>
         <p:nvGraphicFramePr>
-          <p:cNvPr id="58" name="Table 0"/>
+          <p:cNvPr id="65" name="Table 0"/>
           <p:cNvGraphicFramePr>
             <a:graphicFrameLocks noGrp="1"/>
           </p:cNvGraphicFramePr>
@@ -21554,7 +24760,7 @@
             <a:pPr algn="ctr"/>
             <a:fld id="{F7021451-1387-4CA6-816F-3879F97B5CBC}" type="slidenum">
               <a:rPr b="1" lang="en-US"/>
-              <a:t>57</a:t>
+              <a:t>64</a:t>
             </a:fld>
             <a:endParaRPr lang="en-US"/>
           </a:p>
@@ -21568,9 +24774,9 @@
 </p:sld>
 </file>
 
-<file path=ppt/slides/slide58.xml><?xml version="1.0" encoding="utf-8"?>
+<file path=ppt/slides/slide65.xml><?xml version="1.0" encoding="utf-8"?>
 <p:sld xmlns:a="http://schemas.openxmlformats.org/drawingml/2006/main" xmlns:r="http://schemas.openxmlformats.org/officeDocument/2006/relationships" xmlns:p="http://schemas.openxmlformats.org/presentationml/2006/main">
-  <p:cSld name="Slide 58">
+  <p:cSld name="Slide 65">
     <p:spTree>
       <p:nvGrpSpPr>
         <p:cNvPr id="1" name=""/>
@@ -21665,7 +24871,7 @@
       </p:sp>
       <p:graphicFrame>
         <p:nvGraphicFramePr>
-          <p:cNvPr id="59" name="Table 0"/>
+          <p:cNvPr id="66" name="Table 0"/>
           <p:cNvGraphicFramePr>
             <a:graphicFrameLocks noGrp="1"/>
           </p:cNvGraphicFramePr>
@@ -22287,7 +25493,7 @@
             <a:pPr algn="ctr"/>
             <a:fld id="{F7021451-1387-4CA6-816F-3879F97B5CBC}" type="slidenum">
               <a:rPr b="1" lang="en-US"/>
-              <a:t>58</a:t>
+              <a:t>65</a:t>
             </a:fld>
             <a:endParaRPr lang="en-US"/>
           </a:p>
@@ -22301,9 +25507,9 @@
 </p:sld>
 </file>
 
-<file path=ppt/slides/slide59.xml><?xml version="1.0" encoding="utf-8"?>
+<file path=ppt/slides/slide66.xml><?xml version="1.0" encoding="utf-8"?>
 <p:sld xmlns:a="http://schemas.openxmlformats.org/drawingml/2006/main" xmlns:r="http://schemas.openxmlformats.org/officeDocument/2006/relationships" xmlns:p="http://schemas.openxmlformats.org/presentationml/2006/main">
-  <p:cSld name="Slide 59">
+  <p:cSld name="Slide 66">
     <p:spTree>
       <p:nvGrpSpPr>
         <p:cNvPr id="1" name=""/>
@@ -22398,7 +25604,7 @@
       </p:sp>
       <p:graphicFrame>
         <p:nvGraphicFramePr>
-          <p:cNvPr id="60" name="Table 0"/>
+          <p:cNvPr id="67" name="Table 0"/>
           <p:cNvGraphicFramePr>
             <a:graphicFrameLocks noGrp="1"/>
           </p:cNvGraphicFramePr>
@@ -22508,7 +25714,7 @@
                           <a:ea typeface="Calibri" pitchFamily="34" charset="-122"/>
                           <a:cs typeface="Calibri" pitchFamily="34" charset="-120"/>
                         </a:rPr>
-                        <a:t>DEFINITIONS; Forms of Condensation; Forms of Precipitation; Types of Rainfall.</a:t>
+                        <a:t>DEFINITIONS; How Clouds Form; Classification and Associated Weather; Fog and Mist; Solid Forms; Liquid Forms; Types of Rainfall.</a:t>
                       </a:r>
                       <a:endParaRPr lang="en-US" sz="1600" dirty="0">
                         <a:latin typeface="Calibri" charset="0"/>
@@ -23158,7 +26364,7 @@
             <a:pPr algn="ctr"/>
             <a:fld id="{F7021451-1387-4CA6-816F-3879F97B5CBC}" type="slidenum">
               <a:rPr b="1" lang="en-US"/>
-              <a:t>59</a:t>
+              <a:t>66</a:t>
             </a:fld>
             <a:endParaRPr lang="en-US"/>
           </a:p>
@@ -23172,9 +26378,9 @@
 </p:sld>
 </file>
 
-<file path=ppt/slides/slide6.xml><?xml version="1.0" encoding="utf-8"?>
+<file path=ppt/slides/slide67.xml><?xml version="1.0" encoding="utf-8"?>
 <p:sld xmlns:a="http://schemas.openxmlformats.org/drawingml/2006/main" xmlns:r="http://schemas.openxmlformats.org/officeDocument/2006/relationships" xmlns:p="http://schemas.openxmlformats.org/presentationml/2006/main">
-  <p:cSld name="Slide 6">
+  <p:cSld name="Slide 67">
     <p:spTree>
       <p:nvGrpSpPr>
         <p:cNvPr id="1" name=""/>
@@ -23222,7 +26428,7 @@
                 <a:ea typeface="Calibri" pitchFamily="34" charset="-122"/>
                 <a:cs typeface="Calibri" pitchFamily="34" charset="-120"/>
               </a:rPr>
-              <a:t>LESSON PLAN</a:t>
+              <a:t>TEACHER'S NOTE</a:t>
             </a:r>
             <a:endParaRPr lang="en-US" sz="1400" dirty="0"/>
           </a:p>
@@ -23245,7 +26451,7 @@
         <p:spPr>
           <a:xfrm>
             <a:off x="0" y="658368"/>
-            <a:ext cx="2468880" cy="5833872"/>
+            <a:ext cx="3840480" cy="5833872"/>
           </a:xfrm>
           <a:prstGeom prst="rect">
             <a:avLst/>
@@ -23260,8 +26466,8 @@
         </p:nvSpPr>
         <p:spPr>
           <a:xfrm>
-            <a:off x="2697480" y="1005840"/>
-            <a:ext cx="9174175" cy="731520"/>
+            <a:off x="4069080" y="1005840"/>
+            <a:ext cx="7802575" cy="731520"/>
           </a:xfrm>
           <a:prstGeom prst="rect">
             <a:avLst/>
@@ -23287,7 +26493,7 @@
                 <a:ea typeface="Times New Roman" pitchFamily="34" charset="-122"/>
                 <a:cs typeface="Times New Roman" pitchFamily="34" charset="-120"/>
               </a:rPr>
-              <a:t>Lesson Plan</a:t>
+              <a:t>Teacher's Note</a:t>
             </a:r>
             <a:endParaRPr lang="en-US" sz="3600" dirty="0"/>
           </a:p>
@@ -23301,8 +26507,8 @@
         </p:nvSpPr>
         <p:spPr>
           <a:xfrm>
-            <a:off x="2697480" y="1783080"/>
-            <a:ext cx="9174175" cy="4663440"/>
+            <a:off x="4069080" y="1783080"/>
+            <a:ext cx="7802575" cy="4663440"/>
           </a:xfrm>
           <a:prstGeom prst="rect">
             <a:avLst/>
@@ -23319,21 +26525,20 @@
                 <a:spcPts val="800"/>
               </a:spcAft>
               <a:buSzPct val="100000"/>
-              <a:buFont typeface="+mj-lt"/>
-              <a:buAutoNum type="arabicPeriod" startAt="1"/>
-            </a:pPr>
-            <a:r>
-              <a:rPr lang="en-US" sz="4000" dirty="0">
+              <a:buChar char="•"/>
+            </a:pPr>
+            <a:r>
+              <a:rPr lang="en-US" sz="2000" dirty="0">
                 <a:solidFill>
                   <a:srgbClr val="111111"/>
                 </a:solidFill>
-                <a:latin typeface="Times New Roman" pitchFamily="34" charset="0"/>
-                <a:ea typeface="Times New Roman" pitchFamily="34" charset="-122"/>
-                <a:cs typeface="Times New Roman" pitchFamily="34" charset="-120"/>
-              </a:rPr>
-              <a:t>Correction of the homework</a:t>
-            </a:r>
-            <a:endParaRPr lang="en-US" sz="4000" dirty="0"/>
+                <a:latin typeface="Calibri" pitchFamily="34" charset="0"/>
+                <a:ea typeface="Calibri" pitchFamily="34" charset="-122"/>
+                <a:cs typeface="Calibri" pitchFamily="34" charset="-120"/>
+              </a:rPr>
+              <a:t>Timing: Homework correction, plan, objectives 8 min | Recall, situation, action 10 min | 5 activities 30 min | Board summary (copying) 30 min | Evaluation, remediation 10 min | Homework, next lesson 5 min | Logbook 7 min</a:t>
+            </a:r>
+            <a:endParaRPr lang="en-US" sz="2000" dirty="0"/>
           </a:p>
           <a:p>
             <a:pPr algn="l" marL="342900" indent="-342900">
@@ -23341,21 +26546,20 @@
                 <a:spcPts val="800"/>
               </a:spcAft>
               <a:buSzPct val="100000"/>
-              <a:buFont typeface="+mj-lt"/>
-              <a:buAutoNum type="arabicPeriod" startAt="1"/>
-            </a:pPr>
-            <a:r>
-              <a:rPr lang="en-US" sz="4000" dirty="0">
+              <a:buChar char="•"/>
+            </a:pPr>
+            <a:r>
+              <a:rPr lang="en-US" sz="2000" dirty="0">
                 <a:solidFill>
                   <a:srgbClr val="111111"/>
                 </a:solidFill>
-                <a:latin typeface="Times New Roman" pitchFamily="34" charset="0"/>
-                <a:ea typeface="Times New Roman" pitchFamily="34" charset="-122"/>
-                <a:cs typeface="Times New Roman" pitchFamily="34" charset="-120"/>
-              </a:rPr>
-              <a:t>Objectives and recall</a:t>
-            </a:r>
-            <a:endParaRPr lang="en-US" sz="4000" dirty="0"/>
+                <a:latin typeface="Calibri" pitchFamily="34" charset="0"/>
+                <a:ea typeface="Calibri" pitchFamily="34" charset="-122"/>
+                <a:cs typeface="Calibri" pitchFamily="34" charset="-120"/>
+              </a:rPr>
+              <a:t>Without the projector (Activity 1): draw the four cloud types.</a:t>
+            </a:r>
+            <a:endParaRPr lang="en-US" sz="2000" dirty="0"/>
           </a:p>
           <a:p>
             <a:pPr algn="l" marL="342900" indent="-342900">
@@ -23363,21 +26567,20 @@
                 <a:spcPts val="800"/>
               </a:spcAft>
               <a:buSzPct val="100000"/>
-              <a:buFont typeface="+mj-lt"/>
-              <a:buAutoNum type="arabicPeriod" startAt="1"/>
-            </a:pPr>
-            <a:r>
-              <a:rPr lang="en-US" sz="4000" dirty="0">
+              <a:buChar char="•"/>
+            </a:pPr>
+            <a:r>
+              <a:rPr lang="en-US" sz="2000" dirty="0">
                 <a:solidFill>
                   <a:srgbClr val="111111"/>
                 </a:solidFill>
-                <a:latin typeface="Times New Roman" pitchFamily="34" charset="0"/>
-                <a:ea typeface="Times New Roman" pitchFamily="34" charset="-122"/>
-                <a:cs typeface="Times New Roman" pitchFamily="34" charset="-120"/>
-              </a:rPr>
-              <a:t>Real-life situation and action to take</a:t>
-            </a:r>
-            <a:endParaRPr lang="en-US" sz="4000" dirty="0"/>
+                <a:latin typeface="Calibri" pitchFamily="34" charset="0"/>
+                <a:ea typeface="Calibri" pitchFamily="34" charset="-122"/>
+                <a:cs typeface="Calibri" pitchFamily="34" charset="-120"/>
+              </a:rPr>
+              <a:t>Without the projector (Activity 2): look at today's sky.</a:t>
+            </a:r>
+            <a:endParaRPr lang="en-US" sz="2000" dirty="0"/>
           </a:p>
           <a:p>
             <a:pPr algn="l" marL="342900" indent="-342900">
@@ -23385,21 +26588,20 @@
                 <a:spcPts val="800"/>
               </a:spcAft>
               <a:buSzPct val="100000"/>
-              <a:buFont typeface="+mj-lt"/>
-              <a:buAutoNum type="arabicPeriod" startAt="1"/>
-            </a:pPr>
-            <a:r>
-              <a:rPr lang="en-US" sz="4000" dirty="0">
+              <a:buChar char="•"/>
+            </a:pPr>
+            <a:r>
+              <a:rPr lang="en-US" sz="2000" dirty="0">
                 <a:solidFill>
                   <a:srgbClr val="111111"/>
                 </a:solidFill>
-                <a:latin typeface="Times New Roman" pitchFamily="34" charset="0"/>
-                <a:ea typeface="Times New Roman" pitchFamily="34" charset="-122"/>
-                <a:cs typeface="Times New Roman" pitchFamily="34" charset="-120"/>
-              </a:rPr>
-              <a:t>Learning activities</a:t>
-            </a:r>
-            <a:endParaRPr lang="en-US" sz="4000" dirty="0"/>
+                <a:latin typeface="Calibri" pitchFamily="34" charset="0"/>
+                <a:ea typeface="Calibri" pitchFamily="34" charset="-122"/>
+                <a:cs typeface="Calibri" pitchFamily="34" charset="-120"/>
+              </a:rPr>
+              <a:t>Without the projector (Activity 3): look at grass at dawn.</a:t>
+            </a:r>
+            <a:endParaRPr lang="en-US" sz="2000" dirty="0"/>
           </a:p>
           <a:p>
             <a:pPr algn="l" marL="342900" indent="-342900">
@@ -23407,21 +26609,20 @@
                 <a:spcPts val="800"/>
               </a:spcAft>
               <a:buSzPct val="100000"/>
-              <a:buFont typeface="+mj-lt"/>
-              <a:buAutoNum type="arabicPeriod" startAt="1"/>
-            </a:pPr>
-            <a:r>
-              <a:rPr lang="en-US" sz="4000" dirty="0">
+              <a:buChar char="•"/>
+            </a:pPr>
+            <a:r>
+              <a:rPr lang="en-US" sz="2000" dirty="0">
                 <a:solidFill>
                   <a:srgbClr val="111111"/>
                 </a:solidFill>
-                <a:latin typeface="Times New Roman" pitchFamily="34" charset="0"/>
-                <a:ea typeface="Times New Roman" pitchFamily="34" charset="-122"/>
-                <a:cs typeface="Times New Roman" pitchFamily="34" charset="-120"/>
-              </a:rPr>
-              <a:t>Board summary</a:t>
-            </a:r>
-            <a:endParaRPr lang="en-US" sz="4000" dirty="0"/>
+                <a:latin typeface="Calibri" pitchFamily="34" charset="0"/>
+                <a:ea typeface="Calibri" pitchFamily="34" charset="-122"/>
+                <a:cs typeface="Calibri" pitchFamily="34" charset="-120"/>
+              </a:rPr>
+              <a:t>Without the projector (Activity 4): describe a hailstorm.</a:t>
+            </a:r>
+            <a:endParaRPr lang="en-US" sz="2000" dirty="0"/>
           </a:p>
           <a:p>
             <a:pPr algn="l" marL="342900" indent="-342900">
@@ -23429,21 +26630,20 @@
                 <a:spcPts val="800"/>
               </a:spcAft>
               <a:buSzPct val="100000"/>
-              <a:buFont typeface="+mj-lt"/>
-              <a:buAutoNum type="arabicPeriod" startAt="1"/>
-            </a:pPr>
-            <a:r>
-              <a:rPr lang="en-US" sz="4000" dirty="0">
+              <a:buChar char="•"/>
+            </a:pPr>
+            <a:r>
+              <a:rPr lang="en-US" sz="2000" dirty="0">
                 <a:solidFill>
                   <a:srgbClr val="111111"/>
                 </a:solidFill>
-                <a:latin typeface="Times New Roman" pitchFamily="34" charset="0"/>
-                <a:ea typeface="Times New Roman" pitchFamily="34" charset="-122"/>
-                <a:cs typeface="Times New Roman" pitchFamily="34" charset="-120"/>
-              </a:rPr>
-              <a:t>Evaluation, remediation and homework</a:t>
-            </a:r>
-            <a:endParaRPr lang="en-US" sz="4000" dirty="0"/>
+                <a:latin typeface="Calibri" pitchFamily="34" charset="0"/>
+                <a:ea typeface="Calibri" pitchFamily="34" charset="-122"/>
+                <a:cs typeface="Calibri" pitchFamily="34" charset="-120"/>
+              </a:rPr>
+              <a:t>Without the projector (Activity 5): draw orographic rainfall.</a:t>
+            </a:r>
+            <a:endParaRPr lang="en-US" sz="2000" dirty="0"/>
           </a:p>
         </p:txBody>
       </p:sp>
@@ -23489,7 +26689,7 @@
             <a:pPr algn="ctr"/>
             <a:fld id="{F7021451-1387-4CA6-816F-3879F97B5CBC}" type="slidenum">
               <a:rPr b="1" lang="en-US"/>
-              <a:t>6</a:t>
+              <a:t>67</a:t>
             </a:fld>
             <a:endParaRPr lang="en-US"/>
           </a:p>
@@ -23503,9 +26703,9 @@
 </p:sld>
 </file>
 
-<file path=ppt/slides/slide60.xml><?xml version="1.0" encoding="utf-8"?>
+<file path=ppt/slides/slide68.xml><?xml version="1.0" encoding="utf-8"?>
 <p:sld xmlns:a="http://schemas.openxmlformats.org/drawingml/2006/main" xmlns:r="http://schemas.openxmlformats.org/officeDocument/2006/relationships" xmlns:p="http://schemas.openxmlformats.org/presentationml/2006/main">
-  <p:cSld name="Slide 60">
+  <p:cSld name="Slide 68">
     <p:spTree>
       <p:nvGrpSpPr>
         <p:cNvPr id="1" name=""/>
@@ -23553,7 +26753,7 @@
                 <a:ea typeface="Calibri" pitchFamily="34" charset="-122"/>
                 <a:cs typeface="Calibri" pitchFamily="34" charset="-120"/>
               </a:rPr>
-              <a:t>TEACHER'S NOTE</a:t>
+              <a:t>REFERENCES</a:t>
             </a:r>
             <a:endParaRPr lang="en-US" sz="1400" dirty="0"/>
           </a:p>
@@ -23576,7 +26776,7 @@
         <p:spPr>
           <a:xfrm>
             <a:off x="0" y="658368"/>
-            <a:ext cx="3840480" cy="5833872"/>
+            <a:ext cx="1463040" cy="5833872"/>
           </a:xfrm>
           <a:prstGeom prst="rect">
             <a:avLst/>
@@ -23591,8 +26791,8 @@
         </p:nvSpPr>
         <p:spPr>
           <a:xfrm>
-            <a:off x="4069080" y="1005840"/>
-            <a:ext cx="7802575" cy="731520"/>
+            <a:off x="1691640" y="1005840"/>
+            <a:ext cx="10180015" cy="731520"/>
           </a:xfrm>
           <a:prstGeom prst="rect">
             <a:avLst/>
@@ -23618,7 +26818,7 @@
                 <a:ea typeface="Times New Roman" pitchFamily="34" charset="-122"/>
                 <a:cs typeface="Times New Roman" pitchFamily="34" charset="-120"/>
               </a:rPr>
-              <a:t>Teacher's Note</a:t>
+              <a:t>References</a:t>
             </a:r>
             <a:endParaRPr lang="en-US" sz="3600" dirty="0"/>
           </a:p>
@@ -23632,8 +26832,8 @@
         </p:nvSpPr>
         <p:spPr>
           <a:xfrm>
-            <a:off x="4069080" y="1783080"/>
-            <a:ext cx="7802575" cy="4663440"/>
+            <a:off x="1691640" y="1783080"/>
+            <a:ext cx="10180015" cy="4663440"/>
           </a:xfrm>
           <a:prstGeom prst="rect">
             <a:avLst/>
@@ -23653,7 +26853,7 @@
               <a:buChar char="•"/>
             </a:pPr>
             <a:r>
-              <a:rPr lang="en-US" sz="2000" dirty="0">
+              <a:rPr lang="en-US" sz="1800" dirty="0">
                 <a:solidFill>
                   <a:srgbClr val="111111"/>
                 </a:solidFill>
@@ -23661,9 +26861,9 @@
                 <a:ea typeface="Calibri" pitchFamily="34" charset="-122"/>
                 <a:cs typeface="Calibri" pitchFamily="34" charset="-120"/>
               </a:rPr>
-              <a:t>Timing: Homework correction, plan, objectives 8 min | Recall, situation, action 10 min | 5 activities 30 min | Board summary (copying) 30 min | Evaluation, remediation 10 min | Homework, next lesson 5 min | Logbook 7 min</a:t>
-            </a:r>
-            <a:endParaRPr lang="en-US" sz="2000" dirty="0"/>
+              <a:t>Geography Syllabus for Sixth Forms (Lower and Upper Sixth), MINESEC, 2019 — Module 1 (Meteorology, Climatology &amp; Hydrology).</a:t>
+            </a:r>
+            <a:endParaRPr lang="en-US" sz="1800" dirty="0"/>
           </a:p>
           <a:p>
             <a:pPr algn="l" marL="342900" indent="-342900">
@@ -23674,7 +26874,7 @@
               <a:buChar char="•"/>
             </a:pPr>
             <a:r>
-              <a:rPr lang="en-US" sz="2000" dirty="0">
+              <a:rPr lang="en-US" sz="1800" dirty="0">
                 <a:solidFill>
                   <a:srgbClr val="111111"/>
                 </a:solidFill>
@@ -23682,9 +26882,9 @@
                 <a:ea typeface="Calibri" pitchFamily="34" charset="-122"/>
                 <a:cs typeface="Calibri" pitchFamily="34" charset="-120"/>
               </a:rPr>
-              <a:t>Without the projector (Activity 1): draw the four cloud types.</a:t>
-            </a:r>
-            <a:endParaRPr lang="en-US" sz="2000" dirty="0"/>
+              <a:t>Teacher's course notes: Mr KAMDEM E., Meteorology (LSA), GBHS Garoua, 2026.</a:t>
+            </a:r>
+            <a:endParaRPr lang="en-US" sz="1800" dirty="0"/>
           </a:p>
           <a:p>
             <a:pPr algn="l" marL="342900" indent="-342900">
@@ -23695,7 +26895,7 @@
               <a:buChar char="•"/>
             </a:pPr>
             <a:r>
-              <a:rPr lang="en-US" sz="2000" dirty="0">
+              <a:rPr lang="en-US" sz="1800" dirty="0">
                 <a:solidFill>
                   <a:srgbClr val="111111"/>
                 </a:solidFill>
@@ -23703,9 +26903,9 @@
                 <a:ea typeface="Calibri" pitchFamily="34" charset="-122"/>
                 <a:cs typeface="Calibri" pitchFamily="34" charset="-120"/>
               </a:rPr>
-              <a:t>Without the projector (Activity 2): look at today's sky.</a:t>
-            </a:r>
-            <a:endParaRPr lang="en-US" sz="2000" dirty="0"/>
+              <a:t>Photo, Activity 2: “Epic Cloud (Explored)” by Christina Ann VanMeter, CC BY-NC 2.0, via Flickr (https://www.flickr.com/photos/54129831@N02/6984912657)</a:t>
+            </a:r>
+            <a:endParaRPr lang="en-US" sz="1800" dirty="0"/>
           </a:p>
           <a:p>
             <a:pPr algn="l" marL="342900" indent="-342900">
@@ -23716,7 +26916,7 @@
               <a:buChar char="•"/>
             </a:pPr>
             <a:r>
-              <a:rPr lang="en-US" sz="2000" dirty="0">
+              <a:rPr lang="en-US" sz="1800" dirty="0">
                 <a:solidFill>
                   <a:srgbClr val="111111"/>
                 </a:solidFill>
@@ -23724,9 +26924,9 @@
                 <a:ea typeface="Calibri" pitchFamily="34" charset="-122"/>
                 <a:cs typeface="Calibri" pitchFamily="34" charset="-120"/>
               </a:rPr>
-              <a:t>Without the projector (Activity 3): look at grass at dawn.</a:t>
-            </a:r>
-            <a:endParaRPr lang="en-US" sz="2000" dirty="0"/>
+              <a:t>Photo, Activity 3: “Dew drops on grass” by Ervins Strauhmanis, CC BY 2.0, via Flickr (https://www.flickr.com/photos/76523360@N03/9537409567)</a:t>
+            </a:r>
+            <a:endParaRPr lang="en-US" sz="1800" dirty="0"/>
           </a:p>
           <a:p>
             <a:pPr algn="l" marL="342900" indent="-342900">
@@ -23737,7 +26937,7 @@
               <a:buChar char="•"/>
             </a:pPr>
             <a:r>
-              <a:rPr lang="en-US" sz="2000" dirty="0">
+              <a:rPr lang="en-US" sz="1800" dirty="0">
                 <a:solidFill>
                   <a:srgbClr val="111111"/>
                 </a:solidFill>
@@ -23745,9 +26945,9 @@
                 <a:ea typeface="Calibri" pitchFamily="34" charset="-122"/>
                 <a:cs typeface="Calibri" pitchFamily="34" charset="-120"/>
               </a:rPr>
-              <a:t>Without the projector (Activity 4): describe a hailstorm.</a:t>
-            </a:r>
-            <a:endParaRPr lang="en-US" sz="2000" dirty="0"/>
+              <a:t>Photo, Activity 4: “Hailstones (4 July 2010) (Limon, eastern Colorado, USA) 3” by James St. John, CC BY 2.0, via Flickr (https://www.flickr.com/photos/47445767@N05/15148092311)</a:t>
+            </a:r>
+            <a:endParaRPr lang="en-US" sz="1800" dirty="0"/>
           </a:p>
           <a:p>
             <a:pPr algn="l" marL="342900" indent="-342900">
@@ -23758,7 +26958,7 @@
               <a:buChar char="•"/>
             </a:pPr>
             <a:r>
-              <a:rPr lang="en-US" sz="2000" dirty="0">
+              <a:rPr lang="en-US" sz="1800" dirty="0">
                 <a:solidFill>
                   <a:srgbClr val="111111"/>
                 </a:solidFill>
@@ -23766,9 +26966,30 @@
                 <a:ea typeface="Calibri" pitchFamily="34" charset="-122"/>
                 <a:cs typeface="Calibri" pitchFamily="34" charset="-120"/>
               </a:rPr>
-              <a:t>Without the projector (Activity 5): draw orographic rainfall.</a:t>
-            </a:r>
-            <a:endParaRPr lang="en-US" sz="2000" dirty="0"/>
+              <a:t>Photo, board summary (Clouds of vertical development): “06172012 Sunday evening pulse storms/cumulonimbi” by StormRider93 | Into the Storm, CC BY-NC-ND 2.0, via Flickr (https://www.flickr.com/photos/65232104@N04/7395715628)</a:t>
+            </a:r>
+            <a:endParaRPr lang="en-US" sz="1800" dirty="0"/>
+          </a:p>
+          <a:p>
+            <a:pPr algn="l" marL="342900" indent="-342900">
+              <a:spcAft>
+                <a:spcPts val="800"/>
+              </a:spcAft>
+              <a:buSzPct val="100000"/>
+              <a:buChar char="•"/>
+            </a:pPr>
+            <a:r>
+              <a:rPr lang="en-US" sz="1800" dirty="0">
+                <a:solidFill>
+                  <a:srgbClr val="111111"/>
+                </a:solidFill>
+                <a:latin typeface="Calibri" pitchFamily="34" charset="0"/>
+                <a:ea typeface="Calibri" pitchFamily="34" charset="-122"/>
+                <a:cs typeface="Calibri" pitchFamily="34" charset="-120"/>
+              </a:rPr>
+              <a:t>Photo, board summary (Fog): “Mist” by Art by MarkAC, CC BY-SA 2.0, via Flickr (https://www.flickr.com/photos/60580775@N08/40783321332)</a:t>
+            </a:r>
+            <a:endParaRPr lang="en-US" sz="1800" dirty="0"/>
           </a:p>
         </p:txBody>
       </p:sp>
@@ -23814,7 +27035,7 @@
             <a:pPr algn="ctr"/>
             <a:fld id="{F7021451-1387-4CA6-816F-3879F97B5CBC}" type="slidenum">
               <a:rPr b="1" lang="en-US"/>
-              <a:t>60</a:t>
+              <a:t>68</a:t>
             </a:fld>
             <a:endParaRPr lang="en-US"/>
           </a:p>
@@ -23828,9 +27049,9 @@
 </p:sld>
 </file>
 
-<file path=ppt/slides/slide61.xml><?xml version="1.0" encoding="utf-8"?>
+<file path=ppt/slides/slide69.xml><?xml version="1.0" encoding="utf-8"?>
 <p:sld xmlns:a="http://schemas.openxmlformats.org/drawingml/2006/main" xmlns:r="http://schemas.openxmlformats.org/officeDocument/2006/relationships" xmlns:p="http://schemas.openxmlformats.org/presentationml/2006/main">
-  <p:cSld name="Slide 61">
+  <p:cSld name="Slide 69">
     <p:spTree>
       <p:nvGrpSpPr>
         <p:cNvPr id="1" name=""/>
@@ -23901,7 +27122,7 @@
         <p:spPr>
           <a:xfrm>
             <a:off x="0" y="658368"/>
-            <a:ext cx="2468880" cy="5833872"/>
+            <a:ext cx="5120640" cy="5833872"/>
           </a:xfrm>
           <a:prstGeom prst="rect">
             <a:avLst/>
@@ -23916,8 +27137,8 @@
         </p:nvSpPr>
         <p:spPr>
           <a:xfrm>
-            <a:off x="2697480" y="1005840"/>
-            <a:ext cx="9174175" cy="731520"/>
+            <a:off x="5349240" y="1005840"/>
+            <a:ext cx="6522415" cy="731520"/>
           </a:xfrm>
           <a:prstGeom prst="rect">
             <a:avLst/>
@@ -23943,7 +27164,7 @@
                 <a:ea typeface="Times New Roman" pitchFamily="34" charset="-122"/>
                 <a:cs typeface="Times New Roman" pitchFamily="34" charset="-120"/>
               </a:rPr>
-              <a:t>References</a:t>
+              <a:t>References (continued)</a:t>
             </a:r>
             <a:endParaRPr lang="en-US" sz="3600" dirty="0"/>
           </a:p>
@@ -23957,8 +27178,8 @@
         </p:nvSpPr>
         <p:spPr>
           <a:xfrm>
-            <a:off x="2697480" y="1783080"/>
-            <a:ext cx="9174175" cy="4663440"/>
+            <a:off x="5349240" y="1783080"/>
+            <a:ext cx="6522415" cy="4663440"/>
           </a:xfrm>
           <a:prstGeom prst="rect">
             <a:avLst/>
@@ -23986,7 +27207,7 @@
                 <a:ea typeface="Calibri" pitchFamily="34" charset="-122"/>
                 <a:cs typeface="Calibri" pitchFamily="34" charset="-120"/>
               </a:rPr>
-              <a:t>Geography Syllabus for Sixth Forms (Lower and Upper Sixth), MINESEC, 2019 — Module 1 (Meteorology, Climatology &amp; Hydrology).</a:t>
+              <a:t>Photo, board summary (Snow): “Peaceful Winter” by `James Wheeler, CC BY-NC-SA 2.0, via Flickr (https://www.flickr.com/photos/24128704@N08/25673217581)</a:t>
             </a:r>
             <a:endParaRPr lang="en-US" sz="1800" dirty="0"/>
           </a:p>
@@ -24007,7 +27228,7 @@
                 <a:ea typeface="Calibri" pitchFamily="34" charset="-122"/>
                 <a:cs typeface="Calibri" pitchFamily="34" charset="-120"/>
               </a:rPr>
-              <a:t>Teacher's course notes: Mr KAMDEM E., Meteorology (LSA), GBHS Garoua, 2026.</a:t>
+              <a:t>Photo, board summary (Frost and rime): “Frosty Morning” by Tom Gill., CC BY-NC-ND 2.0, via Flickr (https://www.flickr.com/photos/10199807@N00/4283143427)</a:t>
             </a:r>
             <a:endParaRPr lang="en-US" sz="1800" dirty="0"/>
           </a:p>
@@ -24028,7 +27249,7 @@
                 <a:ea typeface="Calibri" pitchFamily="34" charset="-122"/>
                 <a:cs typeface="Calibri" pitchFamily="34" charset="-120"/>
               </a:rPr>
-              <a:t>Photo, Activity 2: “Epic Cloud (Explored)” by Christina Ann VanMeter, CC BY-NC 2.0, via Flickr (https://www.flickr.com/photos/54129831@N02/6984912657)</a:t>
+              <a:t>Photo, board summary (Rainfall (formation process)): “Heavy rain. Johannesburg, South Africa” by varfolomeev, CC BY-NC 2.0, via Flickr (https://www.flickr.com/photos/45427632@N02/49745935146)</a:t>
             </a:r>
             <a:endParaRPr lang="en-US" sz="1800" dirty="0"/>
           </a:p>
@@ -24049,69 +27270,6 @@
                 <a:ea typeface="Calibri" pitchFamily="34" charset="-122"/>
                 <a:cs typeface="Calibri" pitchFamily="34" charset="-120"/>
               </a:rPr>
-              <a:t>Photo, Activity 3: “Dew drops on grass” by Ervins Strauhmanis, CC BY 2.0, via Flickr (https://www.flickr.com/photos/76523360@N03/9537409567)</a:t>
-            </a:r>
-            <a:endParaRPr lang="en-US" sz="1800" dirty="0"/>
-          </a:p>
-          <a:p>
-            <a:pPr algn="l" marL="342900" indent="-342900">
-              <a:spcAft>
-                <a:spcPts val="800"/>
-              </a:spcAft>
-              <a:buSzPct val="100000"/>
-              <a:buChar char="•"/>
-            </a:pPr>
-            <a:r>
-              <a:rPr lang="en-US" sz="1800" dirty="0">
-                <a:solidFill>
-                  <a:srgbClr val="111111"/>
-                </a:solidFill>
-                <a:latin typeface="Calibri" pitchFamily="34" charset="0"/>
-                <a:ea typeface="Calibri" pitchFamily="34" charset="-122"/>
-                <a:cs typeface="Calibri" pitchFamily="34" charset="-120"/>
-              </a:rPr>
-              <a:t>Photo, Activity 4: “Hailstones (4 July 2010) (Limon, eastern Colorado, USA) 3” by James St. John, CC BY 2.0, via Flickr (https://www.flickr.com/photos/47445767@N05/15148092311)</a:t>
-            </a:r>
-            <a:endParaRPr lang="en-US" sz="1800" dirty="0"/>
-          </a:p>
-          <a:p>
-            <a:pPr algn="l" marL="342900" indent="-342900">
-              <a:spcAft>
-                <a:spcPts val="800"/>
-              </a:spcAft>
-              <a:buSzPct val="100000"/>
-              <a:buChar char="•"/>
-            </a:pPr>
-            <a:r>
-              <a:rPr lang="en-US" sz="1800" dirty="0">
-                <a:solidFill>
-                  <a:srgbClr val="111111"/>
-                </a:solidFill>
-                <a:latin typeface="Calibri" pitchFamily="34" charset="0"/>
-                <a:ea typeface="Calibri" pitchFamily="34" charset="-122"/>
-                <a:cs typeface="Calibri" pitchFamily="34" charset="-120"/>
-              </a:rPr>
-              <a:t>Photo, board summary (Cumulonimbus): “06172012 Sunday evening pulse storms/cumulonimbi” by StormRider93 | Into the Storm, CC BY-NC-ND 2.0, via Flickr (https://www.flickr.com/photos/65232104@N04/7395715628)</a:t>
-            </a:r>
-            <a:endParaRPr lang="en-US" sz="1800" dirty="0"/>
-          </a:p>
-          <a:p>
-            <a:pPr algn="l" marL="342900" indent="-342900">
-              <a:spcAft>
-                <a:spcPts val="800"/>
-              </a:spcAft>
-              <a:buSzPct val="100000"/>
-              <a:buChar char="•"/>
-            </a:pPr>
-            <a:r>
-              <a:rPr lang="en-US" sz="1800" dirty="0">
-                <a:solidFill>
-                  <a:srgbClr val="111111"/>
-                </a:solidFill>
-                <a:latin typeface="Calibri" pitchFamily="34" charset="0"/>
-                <a:ea typeface="Calibri" pitchFamily="34" charset="-122"/>
-                <a:cs typeface="Calibri" pitchFamily="34" charset="-120"/>
-              </a:rPr>
               <a:t>Diagrams and animations: drawn for this lesson (Geography Department).</a:t>
             </a:r>
             <a:endParaRPr lang="en-US" sz="1800" dirty="0"/>
@@ -24160,7 +27318,7 @@
             <a:pPr algn="ctr"/>
             <a:fld id="{F7021451-1387-4CA6-816F-3879F97B5CBC}" type="slidenum">
               <a:rPr b="1" lang="en-US"/>
-              <a:t>61</a:t>
+              <a:t>69</a:t>
             </a:fld>
             <a:endParaRPr lang="en-US"/>
           </a:p>

--- a/lecons/LSA/Meteorology/11_LSA_MET_L11_Forms_of_Condensation_and_Precipitation.pptx
+++ b/lecons/LSA/Meteorology/11_LSA_MET_L11_Forms_of_Condensation_and_Precipitation.pptx
@@ -4178,7 +4178,7 @@
           <a:p>
             <a:r>
               <a:rPr lang="en-US" dirty="0"/>
-              <a:t>Let us copy Solid Forms. The solid forms of precipitation are the following. Copy the point on Snow on the left, then draw the diagram on the right: snow. Give it a title and label it clearly.</a:t>
+              <a:t>Let us copy Liquid Forms. The liquid forms of precipitation are the following. Copy the point on Dew on the left, then draw the diagram on the right: dew. Give it a title and label it clearly.</a:t>
             </a:r>
             <a:endParaRPr lang="en-US" dirty="0"/>
           </a:p>
@@ -4266,7 +4266,7 @@
           <a:p>
             <a:r>
               <a:rPr lang="en-US" dirty="0"/>
-              <a:t>We continue with Solid Forms. Copy the point on Sleet: write the key term first, then its explanation.</a:t>
+              <a:t>We continue with Liquid Forms. Copy the point on Drizzle: write the key term first, then its explanation.</a:t>
             </a:r>
             <a:endParaRPr lang="en-US" dirty="0"/>
           </a:p>
@@ -4354,7 +4354,7 @@
           <a:p>
             <a:r>
               <a:rPr lang="en-US" dirty="0"/>
-              <a:t>Copy the point on Hail on the left, then draw the diagram on the right: hailstones. Give it a title and label it clearly.</a:t>
+              <a:t>Copy the point on Rainfall (formation process) on the left, then draw the diagram on the right: heavy rain. Give it a title and label it clearly.</a:t>
             </a:r>
             <a:endParaRPr lang="en-US" dirty="0"/>
           </a:p>
@@ -4530,7 +4530,7 @@
           <a:p>
             <a:r>
               <a:rPr lang="en-US" dirty="0"/>
-              <a:t>Copy the point on Frost and rime on the left, then draw the diagram on the right: frost. Give it a title and label it clearly.</a:t>
+              <a:t>Let us copy Types of Rainfall. Rainfall is classified into the following three types according to how the air is made to rise. Copy the point on Convectional rainfall on the left, then draw the diagram on the right: the three types of rainfall. Give it a title and label it clearly.</a:t>
             </a:r>
             <a:endParaRPr lang="en-US" dirty="0"/>
           </a:p>
@@ -4618,7 +4618,7 @@
           <a:p>
             <a:r>
               <a:rPr lang="en-US" dirty="0"/>
-              <a:t>Let us copy Liquid Forms. The liquid forms of precipitation are the following. Copy the point on Dew on the left, then draw the diagram on the right: dew. Give it a title and label it clearly.</a:t>
+              <a:t>We continue with Types of Rainfall. Copy the point on Orographic (relief) rainfall: write the key term first, then its explanation.</a:t>
             </a:r>
             <a:endParaRPr lang="en-US" dirty="0"/>
           </a:p>
@@ -4706,7 +4706,7 @@
           <a:p>
             <a:r>
               <a:rPr lang="en-US" dirty="0"/>
-              <a:t>We continue with Liquid Forms. Copy the point on Drizzle: write the key term first, then its explanation.</a:t>
+              <a:t>We continue with Types of Rainfall. Copy the point on Cyclonic (frontal) rainfall: write the key term first, then its explanation.</a:t>
             </a:r>
             <a:endParaRPr lang="en-US" dirty="0"/>
           </a:p>
@@ -4794,7 +4794,7 @@
           <a:p>
             <a:r>
               <a:rPr lang="en-US" dirty="0"/>
-              <a:t>Copy the point on Rainfall (formation process) on the left, then draw the diagram on the right: heavy rain. Give it a title and label it clearly.</a:t>
+              <a:t>Let us copy Solid Forms. The solid forms of precipitation are the following. Copy the point on Snow on the left, then draw the diagram on the right: snow. Give it a title and label it clearly.</a:t>
             </a:r>
             <a:endParaRPr lang="en-US" dirty="0"/>
           </a:p>
@@ -4882,7 +4882,7 @@
           <a:p>
             <a:r>
               <a:rPr lang="en-US" dirty="0"/>
-              <a:t>Let us copy Types of Rainfall. Rainfall is classified into the following three types according to how the air is made to rise. Copy the point on Convectional rainfall on the left, then draw the diagram on the right: the three types of rainfall. Give it a title and label it clearly.</a:t>
+              <a:t>We continue with Solid Forms. Copy the point on Sleet: write the key term first, then its explanation.</a:t>
             </a:r>
             <a:endParaRPr lang="en-US" dirty="0"/>
           </a:p>
@@ -4970,7 +4970,7 @@
           <a:p>
             <a:r>
               <a:rPr lang="en-US" dirty="0"/>
-              <a:t>We continue with Types of Rainfall. Copy the point on Orographic (relief) rainfall: write the key term first, then its explanation.</a:t>
+              <a:t>Copy the point on Hail on the left, then draw the diagram on the right: hailstones. Give it a title and label it clearly.</a:t>
             </a:r>
             <a:endParaRPr lang="en-US" dirty="0"/>
           </a:p>
@@ -5058,7 +5058,7 @@
           <a:p>
             <a:r>
               <a:rPr lang="en-US" dirty="0"/>
-              <a:t>We continue with Types of Rainfall. Copy the point on Cyclonic (frontal) rainfall: write the key term first, then its explanation.</a:t>
+              <a:t>Copy the point on Frost and rime on the left, then draw the diagram on the right: frost. Give it a title and label it clearly.</a:t>
             </a:r>
             <a:endParaRPr lang="en-US" dirty="0"/>
           </a:p>
@@ -18653,7 +18653,7 @@
                 <a:ea typeface="Times New Roman" pitchFamily="34" charset="-122"/>
                 <a:cs typeface="Times New Roman" pitchFamily="34" charset="-120"/>
               </a:rPr>
-              <a:t>A) Solid Forms</a:t>
+              <a:t>A) Liquid Forms</a:t>
             </a:r>
             <a:endParaRPr lang="en-US" sz="3000" dirty="0"/>
           </a:p>
@@ -18687,7 +18687,7 @@
               <a:buNone/>
             </a:pPr>
             <a:r>
-              <a:rPr lang="en-US" sz="3000" i="1" dirty="0">
+              <a:rPr lang="en-US" sz="2800" i="1" dirty="0">
                 <a:solidFill>
                   <a:srgbClr val="111111"/>
                 </a:solidFill>
@@ -18695,9 +18695,9 @@
                 <a:ea typeface="Times New Roman" pitchFamily="34" charset="-122"/>
                 <a:cs typeface="Times New Roman" pitchFamily="34" charset="-120"/>
               </a:rPr>
-              <a:t>The solid forms of precipitation are the following:</a:t>
-            </a:r>
-            <a:endParaRPr lang="en-US" sz="3000" dirty="0"/>
+              <a:t>The liquid forms of precipitation are the following:</a:t>
+            </a:r>
+            <a:endParaRPr lang="en-US" sz="2800" dirty="0"/>
           </a:p>
           <a:p>
             <a:pPr algn="l" indent="0" marL="0">
@@ -18707,7 +18707,7 @@
               <a:buNone/>
             </a:pPr>
             <a:r>
-              <a:rPr lang="en-US" sz="3000" b="1" dirty="0">
+              <a:rPr lang="en-US" sz="2800" b="1" dirty="0">
                 <a:solidFill>
                   <a:srgbClr val="111111"/>
                 </a:solidFill>
@@ -18715,7 +18715,7 @@
                 <a:ea typeface="Times New Roman" pitchFamily="34" charset="-122"/>
                 <a:cs typeface="Times New Roman" pitchFamily="34" charset="-120"/>
               </a:rPr>
-              <a:t>Snow: </a:t>
+              <a:t>Dew: </a:t>
             </a:r>
             <a:pPr algn="l" indent="0" marL="0">
               <a:spcAft>
@@ -18724,7 +18724,7 @@
               <a:buNone/>
             </a:pPr>
             <a:r>
-              <a:rPr lang="en-US" sz="3000" dirty="0">
+              <a:rPr lang="en-US" sz="2800" dirty="0">
                 <a:solidFill>
                   <a:srgbClr val="111111"/>
                 </a:solidFill>
@@ -18732,15 +18732,15 @@
                 <a:ea typeface="Times New Roman" pitchFamily="34" charset="-122"/>
                 <a:cs typeface="Times New Roman" pitchFamily="34" charset="-120"/>
               </a:rPr>
-              <a:t>Snow is made of ice crystals that grow in very cold clouds and join to form flakes. It falls when the air is below 0 °C down to the ground, in temperate and polar regions and on high mountains.</a:t>
-            </a:r>
-            <a:endParaRPr lang="en-US" sz="3000" dirty="0"/>
+              <a:t>Dew is made of droplets that form on cool surfaces such as grass and leaves on clear, calm nights. The air touching them is cooled to its dew point, so strictly speaking dew is condensation and not falling precipitation.</a:t>
+            </a:r>
+            <a:endParaRPr lang="en-US" sz="2800" dirty="0"/>
           </a:p>
         </p:txBody>
       </p:sp>
       <p:pic>
         <p:nvPicPr>
-          <p:cNvPr id="6" name="Image 0" descr="/home/claude/f4/img/v2/lsa_snow.jpg">    </p:cNvPr>
+          <p:cNvPr id="6" name="Image 0" descr="/home/claude/f4/img/v2/lsa_dew.jpg">    </p:cNvPr>
           <p:cNvPicPr>
             <a:picLocks noChangeAspect="1"/>
           </p:cNvPicPr>
@@ -18795,7 +18795,7 @@
                 <a:ea typeface="Times New Roman" pitchFamily="34" charset="-122"/>
                 <a:cs typeface="Times New Roman" pitchFamily="34" charset="-120"/>
               </a:rPr>
-              <a:t>Illustration: snow</a:t>
+              <a:t>Illustration: dew</a:t>
             </a:r>
             <a:endParaRPr lang="en-US" sz="1600" dirty="0"/>
           </a:p>
@@ -18930,7 +18930,7 @@
         <p:spPr>
           <a:xfrm>
             <a:off x="0" y="658368"/>
-            <a:ext cx="2468880" cy="5833872"/>
+            <a:ext cx="3840480" cy="5833872"/>
           </a:xfrm>
           <a:prstGeom prst="rect">
             <a:avLst/>
@@ -18945,8 +18945,8 @@
         </p:nvSpPr>
         <p:spPr>
           <a:xfrm>
-            <a:off x="2697480" y="1005840"/>
-            <a:ext cx="9174175" cy="731520"/>
+            <a:off x="4069080" y="1005840"/>
+            <a:ext cx="7802575" cy="731520"/>
           </a:xfrm>
           <a:prstGeom prst="rect">
             <a:avLst/>
@@ -18986,8 +18986,8 @@
         </p:nvSpPr>
         <p:spPr>
           <a:xfrm>
-            <a:off x="2697480" y="1737360"/>
-            <a:ext cx="9174175" cy="457200"/>
+            <a:off x="4069080" y="1737360"/>
+            <a:ext cx="7802575" cy="457200"/>
           </a:xfrm>
           <a:prstGeom prst="rect">
             <a:avLst/>
@@ -19011,7 +19011,7 @@
                 <a:ea typeface="Times New Roman" pitchFamily="34" charset="-122"/>
                 <a:cs typeface="Times New Roman" pitchFamily="34" charset="-120"/>
               </a:rPr>
-              <a:t>A) Solid Forms</a:t>
+              <a:t>A) Liquid Forms</a:t>
             </a:r>
             <a:endParaRPr lang="en-US" sz="3200" dirty="0"/>
           </a:p>
@@ -19025,8 +19025,8 @@
         </p:nvSpPr>
         <p:spPr>
           <a:xfrm>
-            <a:off x="2697480" y="2240280"/>
-            <a:ext cx="9174175" cy="4206240"/>
+            <a:off x="4069080" y="2240280"/>
+            <a:ext cx="7802575" cy="4206240"/>
           </a:xfrm>
           <a:prstGeom prst="rect">
             <a:avLst/>
@@ -19053,7 +19053,7 @@
                 <a:ea typeface="Times New Roman" pitchFamily="34" charset="-122"/>
                 <a:cs typeface="Times New Roman" pitchFamily="34" charset="-120"/>
               </a:rPr>
-              <a:t>Sleet: </a:t>
+              <a:t>Drizzle: </a:t>
             </a:r>
             <a:pPr algn="l" indent="0" marL="0">
               <a:spcAft>
@@ -19070,7 +19070,7 @@
                 <a:ea typeface="Times New Roman" pitchFamily="34" charset="-122"/>
                 <a:cs typeface="Times New Roman" pitchFamily="34" charset="-120"/>
               </a:rPr>
-              <a:t>Sleet is made of small pellets of ice formed when raindrops freeze as they fall through a cold layer of air near the ground. In Britain, the word also means a mixture of rain and snow.</a:t>
+              <a:t>Drizzle is made of very small drops, less than 0.5 mm wide, that fall slowly from low stratus clouds. It gives only small amounts of water but can last for hours.</a:t>
             </a:r>
             <a:endParaRPr lang="en-US" sz="4000" dirty="0"/>
           </a:p>
@@ -19264,7 +19264,7 @@
                 <a:ea typeface="Times New Roman" pitchFamily="34" charset="-122"/>
                 <a:cs typeface="Times New Roman" pitchFamily="34" charset="-120"/>
               </a:rPr>
-              <a:t>A) Solid Forms</a:t>
+              <a:t>A) Liquid Forms</a:t>
             </a:r>
             <a:endParaRPr lang="en-US" sz="3000" dirty="0"/>
           </a:p>
@@ -19298,7 +19298,7 @@
               <a:buNone/>
             </a:pPr>
             <a:r>
-              <a:rPr lang="en-US" sz="3200" b="1" dirty="0">
+              <a:rPr lang="en-US" sz="3000" b="1" dirty="0">
                 <a:solidFill>
                   <a:srgbClr val="111111"/>
                 </a:solidFill>
@@ -19306,7 +19306,7 @@
                 <a:ea typeface="Times New Roman" pitchFamily="34" charset="-122"/>
                 <a:cs typeface="Times New Roman" pitchFamily="34" charset="-120"/>
               </a:rPr>
-              <a:t>Hail: </a:t>
+              <a:t>Rainfall (formation process): </a:t>
             </a:r>
             <a:pPr algn="l" indent="0" marL="0">
               <a:spcAft>
@@ -19315,7 +19315,7 @@
               <a:buNone/>
             </a:pPr>
             <a:r>
-              <a:rPr lang="en-US" sz="3200" dirty="0">
+              <a:rPr lang="en-US" sz="3000" dirty="0">
                 <a:solidFill>
                   <a:srgbClr val="111111"/>
                 </a:solidFill>
@@ -19323,15 +19323,15 @@
                 <a:ea typeface="Times New Roman" pitchFamily="34" charset="-122"/>
                 <a:cs typeface="Times New Roman" pitchFamily="34" charset="-120"/>
               </a:rPr>
-              <a:t>Hailstones are balls of ice formed in cumulonimbus clouds, where strong up-currents carry drops up and down through freezing air. Each trip adds a layer of ice until the stone is too heavy and falls, damaging crops and roofs.</a:t>
-            </a:r>
-            <a:endParaRPr lang="en-US" sz="3200" dirty="0"/>
+              <a:t>Rain forms when cloud droplets grow large enough to fall, either by colliding and joining together in warm clouds, or by the growth of ice crystals that melt as they fall. Raindrops are larger than 0.5 mm and fall faster than drizzle.</a:t>
+            </a:r>
+            <a:endParaRPr lang="en-US" sz="3000" dirty="0"/>
           </a:p>
         </p:txBody>
       </p:sp>
       <p:pic>
         <p:nvPicPr>
-          <p:cNvPr id="6" name="Image 0" descr="/home/claude/f4/img/v2/lsa_hail.jpg">    </p:cNvPr>
+          <p:cNvPr id="6" name="Image 0" descr="/home/claude/f4/img/v2/f4_heavyrain.jpg">    </p:cNvPr>
           <p:cNvPicPr>
             <a:picLocks noChangeAspect="1"/>
           </p:cNvPicPr>
@@ -19386,7 +19386,7 @@
                 <a:ea typeface="Times New Roman" pitchFamily="34" charset="-122"/>
                 <a:cs typeface="Times New Roman" pitchFamily="34" charset="-120"/>
               </a:rPr>
-              <a:t>Illustration: hailstones</a:t>
+              <a:t>Illustration: heavy rain</a:t>
             </a:r>
             <a:endParaRPr lang="en-US" sz="1600" dirty="0"/>
           </a:p>
@@ -19799,7 +19799,7 @@
                 <a:ea typeface="Times New Roman" pitchFamily="34" charset="-122"/>
                 <a:cs typeface="Times New Roman" pitchFamily="34" charset="-120"/>
               </a:rPr>
-              <a:t>A) Solid Forms</a:t>
+              <a:t>B) Types of Rainfall</a:t>
             </a:r>
             <a:endParaRPr lang="en-US" sz="3000" dirty="0"/>
           </a:p>
@@ -19833,7 +19833,7 @@
               <a:buNone/>
             </a:pPr>
             <a:r>
-              <a:rPr lang="en-US" sz="3200" b="1" dirty="0">
+              <a:rPr lang="en-US" sz="2600" i="1" dirty="0">
                 <a:solidFill>
                   <a:srgbClr val="111111"/>
                 </a:solidFill>
@@ -19841,8 +19841,11 @@
                 <a:ea typeface="Times New Roman" pitchFamily="34" charset="-122"/>
                 <a:cs typeface="Times New Roman" pitchFamily="34" charset="-120"/>
               </a:rPr>
-              <a:t>Frost and rime: </a:t>
-            </a:r>
+              <a:t>Rainfall is classified into the following three types according to how the air is made to rise:</a:t>
+            </a:r>
+            <a:endParaRPr lang="en-US" sz="2600" dirty="0"/>
+          </a:p>
+          <a:p>
             <a:pPr algn="l" indent="0" marL="0">
               <a:spcAft>
                 <a:spcPts val="800"/>
@@ -19850,7 +19853,7 @@
               <a:buNone/>
             </a:pPr>
             <a:r>
-              <a:rPr lang="en-US" sz="3200" dirty="0">
+              <a:rPr lang="en-US" sz="2600" b="1" dirty="0">
                 <a:solidFill>
                   <a:srgbClr val="111111"/>
                 </a:solidFill>
@@ -19858,15 +19861,32 @@
                 <a:ea typeface="Times New Roman" pitchFamily="34" charset="-122"/>
                 <a:cs typeface="Times New Roman" pitchFamily="34" charset="-120"/>
               </a:rPr>
-              <a:t>Frost is a white layer of ice crystals formed when water vapour changes directly into ice on surfaces below 0 °C. Rime forms when fog droplets freeze on contact with cold trees, wires and rocks.</a:t>
-            </a:r>
-            <a:endParaRPr lang="en-US" sz="3200" dirty="0"/>
+              <a:t>Convectional rainfall: </a:t>
+            </a:r>
+            <a:pPr algn="l" indent="0" marL="0">
+              <a:spcAft>
+                <a:spcPts val="800"/>
+              </a:spcAft>
+              <a:buNone/>
+            </a:pPr>
+            <a:r>
+              <a:rPr lang="en-US" sz="2600" dirty="0">
+                <a:solidFill>
+                  <a:srgbClr val="111111"/>
+                </a:solidFill>
+                <a:latin typeface="Times New Roman" pitchFamily="34" charset="0"/>
+                <a:ea typeface="Times New Roman" pitchFamily="34" charset="-122"/>
+                <a:cs typeface="Times New Roman" pitchFamily="34" charset="-120"/>
+              </a:rPr>
+              <a:t>Strong heating of the ground makes moist air rise quickly and form cumulonimbus clouds. It gives short, heavy afternoon storms with thunder, as in the equatorial regions and in Garoua in the rainy season.</a:t>
+            </a:r>
+            <a:endParaRPr lang="en-US" sz="2600" dirty="0"/>
           </a:p>
         </p:txBody>
       </p:sp>
       <p:pic>
         <p:nvPicPr>
-          <p:cNvPr id="6" name="Image 0" descr="/home/claude/f4/img/v2/lsa_frost.jpg">    </p:cNvPr>
+          <p:cNvPr id="6" name="Image 0" descr="/home/claude/f4/img/v2/rainfall_types_big.png">    </p:cNvPr>
           <p:cNvPicPr>
             <a:picLocks noChangeAspect="1"/>
           </p:cNvPicPr>
@@ -19880,8 +19900,8 @@
         </p:blipFill>
         <p:spPr>
           <a:xfrm>
-            <a:off x="6537960" y="2400897"/>
-            <a:ext cx="5470855" cy="3034615"/>
+            <a:off x="6537960" y="2849678"/>
+            <a:ext cx="5470855" cy="2137053"/>
           </a:xfrm>
           <a:prstGeom prst="rect">
             <a:avLst/>
@@ -19921,7 +19941,7 @@
                 <a:ea typeface="Times New Roman" pitchFamily="34" charset="-122"/>
                 <a:cs typeface="Times New Roman" pitchFamily="34" charset="-120"/>
               </a:rPr>
-              <a:t>Illustration: frost</a:t>
+              <a:t>Illustration: the three types of rainfall</a:t>
             </a:r>
             <a:endParaRPr lang="en-US" sz="1600" dirty="0"/>
           </a:p>
@@ -20039,170 +20059,9 @@
           </a:p>
         </p:txBody>
       </p:sp>
-      <p:sp>
-        <p:nvSpPr>
-          <p:cNvPr id="3" name="Text 1"/>
-          <p:cNvSpPr/>
-          <p:nvPr/>
-        </p:nvSpPr>
-        <p:spPr>
-          <a:xfrm>
-            <a:off x="365760" y="1005840"/>
-            <a:ext cx="11460175" cy="731520"/>
-          </a:xfrm>
-          <a:prstGeom prst="rect">
-            <a:avLst/>
-          </a:prstGeom>
-          <a:noFill/>
-          <a:ln/>
-        </p:spPr>
-        <p:txBody>
-          <a:bodyPr wrap="square" lIns="0" tIns="0" rIns="0" bIns="0" rtlCol="0" anchor="ctr">
-            <a:normAutofit/>
-          </a:bodyPr>
-          <a:lstStyle/>
-          <a:p>
-            <a:pPr algn="ctr" indent="0" marL="0">
-              <a:buNone/>
-            </a:pPr>
-            <a:r>
-              <a:rPr lang="en-US" sz="3600" b="1" dirty="0">
-                <a:solidFill>
-                  <a:srgbClr val="990011"/>
-                </a:solidFill>
-                <a:latin typeface="Times New Roman" pitchFamily="34" charset="0"/>
-                <a:ea typeface="Times New Roman" pitchFamily="34" charset="-122"/>
-                <a:cs typeface="Times New Roman" pitchFamily="34" charset="-120"/>
-              </a:rPr>
-              <a:t>3. Forms of Precipitation</a:t>
-            </a:r>
-            <a:endParaRPr lang="en-US" sz="3600" dirty="0"/>
-          </a:p>
-        </p:txBody>
-      </p:sp>
-      <p:sp>
-        <p:nvSpPr>
-          <p:cNvPr id="4" name="Text 2"/>
-          <p:cNvSpPr/>
-          <p:nvPr/>
-        </p:nvSpPr>
-        <p:spPr>
-          <a:xfrm>
-            <a:off x="365760" y="1737360"/>
-            <a:ext cx="6035040" cy="457200"/>
-          </a:xfrm>
-          <a:prstGeom prst="rect">
-            <a:avLst/>
-          </a:prstGeom>
-          <a:noFill/>
-          <a:ln/>
-        </p:spPr>
-        <p:txBody>
-          <a:bodyPr wrap="square" lIns="0" tIns="0" rIns="0" bIns="0" rtlCol="0" anchor="ctr">
-            <a:normAutofit/>
-          </a:bodyPr>
-          <a:lstStyle/>
-          <a:p>
-            <a:pPr algn="l" indent="0" marL="0">
-              <a:buNone/>
-            </a:pPr>
-            <a:r>
-              <a:rPr lang="en-US" sz="3000" b="1" dirty="0">
-                <a:solidFill>
-                  <a:srgbClr val="990011"/>
-                </a:solidFill>
-                <a:latin typeface="Times New Roman" pitchFamily="34" charset="0"/>
-                <a:ea typeface="Times New Roman" pitchFamily="34" charset="-122"/>
-                <a:cs typeface="Times New Roman" pitchFamily="34" charset="-120"/>
-              </a:rPr>
-              <a:t>B) Liquid Forms</a:t>
-            </a:r>
-            <a:endParaRPr lang="en-US" sz="3000" dirty="0"/>
-          </a:p>
-        </p:txBody>
-      </p:sp>
-      <p:sp>
-        <p:nvSpPr>
-          <p:cNvPr id="5" name="Text 3"/>
-          <p:cNvSpPr/>
-          <p:nvPr/>
-        </p:nvSpPr>
-        <p:spPr>
-          <a:xfrm>
-            <a:off x="365760" y="2240280"/>
-            <a:ext cx="6035040" cy="4160520"/>
-          </a:xfrm>
-          <a:prstGeom prst="rect">
-            <a:avLst/>
-          </a:prstGeom>
-          <a:noFill/>
-          <a:ln/>
-        </p:spPr>
-        <p:txBody>
-          <a:bodyPr wrap="square" lIns="0" tIns="0" rIns="0" bIns="0" rtlCol="0" anchor="t"/>
-          <a:lstStyle/>
-          <a:p>
-            <a:pPr algn="l" indent="0" marL="0">
-              <a:spcAft>
-                <a:spcPts val="800"/>
-              </a:spcAft>
-              <a:buNone/>
-            </a:pPr>
-            <a:r>
-              <a:rPr lang="en-US" sz="2800" i="1" dirty="0">
-                <a:solidFill>
-                  <a:srgbClr val="111111"/>
-                </a:solidFill>
-                <a:latin typeface="Times New Roman" pitchFamily="34" charset="0"/>
-                <a:ea typeface="Times New Roman" pitchFamily="34" charset="-122"/>
-                <a:cs typeface="Times New Roman" pitchFamily="34" charset="-120"/>
-              </a:rPr>
-              <a:t>The liquid forms of precipitation are the following:</a:t>
-            </a:r>
-            <a:endParaRPr lang="en-US" sz="2800" dirty="0"/>
-          </a:p>
-          <a:p>
-            <a:pPr algn="l" indent="0" marL="0">
-              <a:spcAft>
-                <a:spcPts val="800"/>
-              </a:spcAft>
-              <a:buNone/>
-            </a:pPr>
-            <a:r>
-              <a:rPr lang="en-US" sz="2800" b="1" dirty="0">
-                <a:solidFill>
-                  <a:srgbClr val="111111"/>
-                </a:solidFill>
-                <a:latin typeface="Times New Roman" pitchFamily="34" charset="0"/>
-                <a:ea typeface="Times New Roman" pitchFamily="34" charset="-122"/>
-                <a:cs typeface="Times New Roman" pitchFamily="34" charset="-120"/>
-              </a:rPr>
-              <a:t>Dew: </a:t>
-            </a:r>
-            <a:pPr algn="l" indent="0" marL="0">
-              <a:spcAft>
-                <a:spcPts val="800"/>
-              </a:spcAft>
-              <a:buNone/>
-            </a:pPr>
-            <a:r>
-              <a:rPr lang="en-US" sz="2800" dirty="0">
-                <a:solidFill>
-                  <a:srgbClr val="111111"/>
-                </a:solidFill>
-                <a:latin typeface="Times New Roman" pitchFamily="34" charset="0"/>
-                <a:ea typeface="Times New Roman" pitchFamily="34" charset="-122"/>
-                <a:cs typeface="Times New Roman" pitchFamily="34" charset="-120"/>
-              </a:rPr>
-              <a:t>Dew is made of droplets that form on cool surfaces such as grass and leaves on clear, calm nights. The air touching them is cooled to its dew point, so strictly speaking dew is condensation and not falling precipitation.</a:t>
-            </a:r>
-            <a:endParaRPr lang="en-US" sz="2800" dirty="0"/>
-          </a:p>
-        </p:txBody>
-      </p:sp>
       <p:pic>
         <p:nvPicPr>
-          <p:cNvPr id="6" name="Image 0" descr="/home/claude/f4/img/v2/lsa_dew.jpg">    </p:cNvPr>
+          <p:cNvPr id="3" name="Image 0" descr="/home/claude/f4/img/minesec_sheet.png">    </p:cNvPr>
           <p:cNvPicPr>
             <a:picLocks noChangeAspect="1"/>
           </p:cNvPicPr>
@@ -20216,8 +20075,8 @@
         </p:blipFill>
         <p:spPr>
           <a:xfrm>
-            <a:off x="6537960" y="2400897"/>
-            <a:ext cx="5470855" cy="3034615"/>
+            <a:off x="0" y="658368"/>
+            <a:ext cx="1463040" cy="5833872"/>
           </a:xfrm>
           <a:prstGeom prst="rect">
             <a:avLst/>
@@ -20226,14 +20085,14 @@
       </p:pic>
       <p:sp>
         <p:nvSpPr>
-          <p:cNvPr id="7" name="Text 4"/>
+          <p:cNvPr id="4" name="Text 1"/>
           <p:cNvSpPr/>
           <p:nvPr/>
         </p:nvSpPr>
         <p:spPr>
           <a:xfrm>
-            <a:off x="6537960" y="6089904"/>
-            <a:ext cx="5470855" cy="347472"/>
+            <a:off x="1691640" y="1005840"/>
+            <a:ext cx="10180015" cy="731520"/>
           </a:xfrm>
           <a:prstGeom prst="rect">
             <a:avLst/>
@@ -20242,24 +20101,124 @@
           <a:ln/>
         </p:spPr>
         <p:txBody>
-          <a:bodyPr wrap="square" lIns="0" tIns="0" rIns="0" bIns="0" rtlCol="0" anchor="ctr"/>
+          <a:bodyPr wrap="square" lIns="0" tIns="0" rIns="0" bIns="0" rtlCol="0" anchor="ctr">
+            <a:normAutofit/>
+          </a:bodyPr>
           <a:lstStyle/>
           <a:p>
             <a:pPr algn="ctr" indent="0" marL="0">
               <a:buNone/>
             </a:pPr>
             <a:r>
-              <a:rPr lang="en-US" sz="1600" i="1" dirty="0">
-                <a:solidFill>
-                  <a:srgbClr val="555555"/>
+              <a:rPr lang="en-US" sz="3600" b="1" dirty="0">
+                <a:solidFill>
+                  <a:srgbClr val="990011"/>
                 </a:solidFill>
                 <a:latin typeface="Times New Roman" pitchFamily="34" charset="0"/>
                 <a:ea typeface="Times New Roman" pitchFamily="34" charset="-122"/>
                 <a:cs typeface="Times New Roman" pitchFamily="34" charset="-120"/>
               </a:rPr>
-              <a:t>Illustration: dew</a:t>
-            </a:r>
-            <a:endParaRPr lang="en-US" sz="1600" dirty="0"/>
+              <a:t>3. Forms of Precipitation</a:t>
+            </a:r>
+            <a:endParaRPr lang="en-US" sz="3600" dirty="0"/>
+          </a:p>
+        </p:txBody>
+      </p:sp>
+      <p:sp>
+        <p:nvSpPr>
+          <p:cNvPr id="5" name="Text 2"/>
+          <p:cNvSpPr/>
+          <p:nvPr/>
+        </p:nvSpPr>
+        <p:spPr>
+          <a:xfrm>
+            <a:off x="1691640" y="1737360"/>
+            <a:ext cx="10180015" cy="457200"/>
+          </a:xfrm>
+          <a:prstGeom prst="rect">
+            <a:avLst/>
+          </a:prstGeom>
+          <a:noFill/>
+          <a:ln/>
+        </p:spPr>
+        <p:txBody>
+          <a:bodyPr wrap="square" lIns="0" tIns="0" rIns="0" bIns="0" rtlCol="0" anchor="ctr"/>
+          <a:lstStyle/>
+          <a:p>
+            <a:pPr algn="l" indent="0" marL="0">
+              <a:buNone/>
+            </a:pPr>
+            <a:r>
+              <a:rPr lang="en-US" sz="3200" b="1" dirty="0">
+                <a:solidFill>
+                  <a:srgbClr val="990011"/>
+                </a:solidFill>
+                <a:latin typeface="Times New Roman" pitchFamily="34" charset="0"/>
+                <a:ea typeface="Times New Roman" pitchFamily="34" charset="-122"/>
+                <a:cs typeface="Times New Roman" pitchFamily="34" charset="-120"/>
+              </a:rPr>
+              <a:t>B) Types of Rainfall</a:t>
+            </a:r>
+            <a:endParaRPr lang="en-US" sz="3200" dirty="0"/>
+          </a:p>
+        </p:txBody>
+      </p:sp>
+      <p:sp>
+        <p:nvSpPr>
+          <p:cNvPr id="6" name="Text 3"/>
+          <p:cNvSpPr/>
+          <p:nvPr/>
+        </p:nvSpPr>
+        <p:spPr>
+          <a:xfrm>
+            <a:off x="1691640" y="2240280"/>
+            <a:ext cx="10180015" cy="4206240"/>
+          </a:xfrm>
+          <a:prstGeom prst="rect">
+            <a:avLst/>
+          </a:prstGeom>
+          <a:noFill/>
+          <a:ln/>
+        </p:spPr>
+        <p:txBody>
+          <a:bodyPr wrap="square" lIns="0" tIns="0" rIns="0" bIns="0" rtlCol="0" anchor="t"/>
+          <a:lstStyle/>
+          <a:p>
+            <a:pPr algn="l" indent="0" marL="0">
+              <a:spcAft>
+                <a:spcPts val="800"/>
+              </a:spcAft>
+              <a:buNone/>
+            </a:pPr>
+            <a:r>
+              <a:rPr lang="en-US" sz="4000" b="1" dirty="0">
+                <a:solidFill>
+                  <a:srgbClr val="111111"/>
+                </a:solidFill>
+                <a:latin typeface="Times New Roman" pitchFamily="34" charset="0"/>
+                <a:ea typeface="Times New Roman" pitchFamily="34" charset="-122"/>
+                <a:cs typeface="Times New Roman" pitchFamily="34" charset="-120"/>
+              </a:rPr>
+              <a:t>Orographic (relief) rainfall: </a:t>
+            </a:r>
+            <a:pPr algn="l" indent="0" marL="0">
+              <a:spcAft>
+                <a:spcPts val="800"/>
+              </a:spcAft>
+              <a:buNone/>
+            </a:pPr>
+            <a:r>
+              <a:rPr lang="en-US" sz="4000" dirty="0">
+                <a:solidFill>
+                  <a:srgbClr val="111111"/>
+                </a:solidFill>
+                <a:latin typeface="Times New Roman" pitchFamily="34" charset="0"/>
+                <a:ea typeface="Times New Roman" pitchFamily="34" charset="-122"/>
+                <a:cs typeface="Times New Roman" pitchFamily="34" charset="-120"/>
+              </a:rPr>
+              <a:t>Moist winds from the sea are forced to rise over mountains, cool and give heavy rain on the windward side. The leeward side receives little rain and is called a rain shadow, as on the eastern side of Mount Cameroon.</a:t>
+            </a:r>
+            <a:endParaRPr lang="en-US" sz="4000" dirty="0"/>
           </a:p>
         </p:txBody>
       </p:sp>
@@ -20392,7 +20351,7 @@
         <p:spPr>
           <a:xfrm>
             <a:off x="0" y="658368"/>
-            <a:ext cx="3840480" cy="5833872"/>
+            <a:ext cx="2468880" cy="5833872"/>
           </a:xfrm>
           <a:prstGeom prst="rect">
             <a:avLst/>
@@ -20407,8 +20366,8 @@
         </p:nvSpPr>
         <p:spPr>
           <a:xfrm>
-            <a:off x="4069080" y="1005840"/>
-            <a:ext cx="7802575" cy="731520"/>
+            <a:off x="2697480" y="1005840"/>
+            <a:ext cx="9174175" cy="731520"/>
           </a:xfrm>
           <a:prstGeom prst="rect">
             <a:avLst/>
@@ -20448,8 +20407,8 @@
         </p:nvSpPr>
         <p:spPr>
           <a:xfrm>
-            <a:off x="4069080" y="1737360"/>
-            <a:ext cx="7802575" cy="457200"/>
+            <a:off x="2697480" y="1737360"/>
+            <a:ext cx="9174175" cy="457200"/>
           </a:xfrm>
           <a:prstGeom prst="rect">
             <a:avLst/>
@@ -20473,7 +20432,7 @@
                 <a:ea typeface="Times New Roman" pitchFamily="34" charset="-122"/>
                 <a:cs typeface="Times New Roman" pitchFamily="34" charset="-120"/>
               </a:rPr>
-              <a:t>B) Liquid Forms</a:t>
+              <a:t>B) Types of Rainfall</a:t>
             </a:r>
             <a:endParaRPr lang="en-US" sz="3200" dirty="0"/>
           </a:p>
@@ -20487,8 +20446,8 @@
         </p:nvSpPr>
         <p:spPr>
           <a:xfrm>
-            <a:off x="4069080" y="2240280"/>
-            <a:ext cx="7802575" cy="4206240"/>
+            <a:off x="2697480" y="2240280"/>
+            <a:ext cx="9174175" cy="4206240"/>
           </a:xfrm>
           <a:prstGeom prst="rect">
             <a:avLst/>
@@ -20515,7 +20474,7 @@
                 <a:ea typeface="Times New Roman" pitchFamily="34" charset="-122"/>
                 <a:cs typeface="Times New Roman" pitchFamily="34" charset="-120"/>
               </a:rPr>
-              <a:t>Drizzle: </a:t>
+              <a:t>Cyclonic (frontal) rainfall: </a:t>
             </a:r>
             <a:pPr algn="l" indent="0" marL="0">
               <a:spcAft>
@@ -20532,7 +20491,7 @@
                 <a:ea typeface="Times New Roman" pitchFamily="34" charset="-122"/>
                 <a:cs typeface="Times New Roman" pitchFamily="34" charset="-120"/>
               </a:rPr>
-              <a:t>Drizzle is made of very small drops, less than 0.5 mm wide, that fall slowly from low stratus clouds. It gives only small amounts of water but can last for hours.</a:t>
+              <a:t>Where a warm air mass meets a cold one, the lighter warm air rises slowly over the cold air along a front. It gives long periods of steady rain, as in the temperate regions of Europe.</a:t>
             </a:r>
             <a:endParaRPr lang="en-US" sz="4000" dirty="0"/>
           </a:p>
@@ -20726,7 +20685,7 @@
                 <a:ea typeface="Times New Roman" pitchFamily="34" charset="-122"/>
                 <a:cs typeface="Times New Roman" pitchFamily="34" charset="-120"/>
               </a:rPr>
-              <a:t>B) Liquid Forms</a:t>
+              <a:t>C) Solid Forms</a:t>
             </a:r>
             <a:endParaRPr lang="en-US" sz="3000" dirty="0"/>
           </a:p>
@@ -20760,7 +20719,7 @@
               <a:buNone/>
             </a:pPr>
             <a:r>
-              <a:rPr lang="en-US" sz="3000" b="1" dirty="0">
+              <a:rPr lang="en-US" sz="3000" i="1" dirty="0">
                 <a:solidFill>
                   <a:srgbClr val="111111"/>
                 </a:solidFill>
@@ -20768,8 +20727,11 @@
                 <a:ea typeface="Times New Roman" pitchFamily="34" charset="-122"/>
                 <a:cs typeface="Times New Roman" pitchFamily="34" charset="-120"/>
               </a:rPr>
-              <a:t>Rainfall (formation process): </a:t>
-            </a:r>
+              <a:t>The solid forms of precipitation are the following:</a:t>
+            </a:r>
+            <a:endParaRPr lang="en-US" sz="3000" dirty="0"/>
+          </a:p>
+          <a:p>
             <a:pPr algn="l" indent="0" marL="0">
               <a:spcAft>
                 <a:spcPts val="800"/>
@@ -20777,7 +20739,7 @@
               <a:buNone/>
             </a:pPr>
             <a:r>
-              <a:rPr lang="en-US" sz="3000" dirty="0">
+              <a:rPr lang="en-US" sz="3000" b="1" dirty="0">
                 <a:solidFill>
                   <a:srgbClr val="111111"/>
                 </a:solidFill>
@@ -20785,7 +20747,24 @@
                 <a:ea typeface="Times New Roman" pitchFamily="34" charset="-122"/>
                 <a:cs typeface="Times New Roman" pitchFamily="34" charset="-120"/>
               </a:rPr>
-              <a:t>Rain forms when cloud droplets grow large enough to fall, either by colliding and joining together in warm clouds, or by the growth of ice crystals that melt as they fall. Raindrops are larger than 0.5 mm and fall faster than drizzle.</a:t>
+              <a:t>Snow: </a:t>
+            </a:r>
+            <a:pPr algn="l" indent="0" marL="0">
+              <a:spcAft>
+                <a:spcPts val="800"/>
+              </a:spcAft>
+              <a:buNone/>
+            </a:pPr>
+            <a:r>
+              <a:rPr lang="en-US" sz="3000" dirty="0">
+                <a:solidFill>
+                  <a:srgbClr val="111111"/>
+                </a:solidFill>
+                <a:latin typeface="Times New Roman" pitchFamily="34" charset="0"/>
+                <a:ea typeface="Times New Roman" pitchFamily="34" charset="-122"/>
+                <a:cs typeface="Times New Roman" pitchFamily="34" charset="-120"/>
+              </a:rPr>
+              <a:t>Snow is made of ice crystals that grow in very cold clouds and join to form flakes. It falls when the air is below 0 °C down to the ground, in temperate and polar regions and on high mountains.</a:t>
             </a:r>
             <a:endParaRPr lang="en-US" sz="3000" dirty="0"/>
           </a:p>
@@ -20793,7 +20772,7 @@
       </p:sp>
       <p:pic>
         <p:nvPicPr>
-          <p:cNvPr id="6" name="Image 0" descr="/home/claude/f4/img/v2/f4_heavyrain.jpg">    </p:cNvPr>
+          <p:cNvPr id="6" name="Image 0" descr="/home/claude/f4/img/v2/lsa_snow.jpg">    </p:cNvPr>
           <p:cNvPicPr>
             <a:picLocks noChangeAspect="1"/>
           </p:cNvPicPr>
@@ -20848,7 +20827,7 @@
                 <a:ea typeface="Times New Roman" pitchFamily="34" charset="-122"/>
                 <a:cs typeface="Times New Roman" pitchFamily="34" charset="-120"/>
               </a:rPr>
-              <a:t>Illustration: heavy rain</a:t>
+              <a:t>Illustration: snow</a:t>
             </a:r>
             <a:endParaRPr lang="en-US" sz="1600" dirty="0"/>
           </a:p>
@@ -20966,129 +20945,9 @@
           </a:p>
         </p:txBody>
       </p:sp>
-      <p:sp>
-        <p:nvSpPr>
-          <p:cNvPr id="3" name="Text 1"/>
-          <p:cNvSpPr/>
-          <p:nvPr/>
-        </p:nvSpPr>
-        <p:spPr>
-          <a:xfrm>
-            <a:off x="365760" y="1005840"/>
-            <a:ext cx="11460175" cy="731520"/>
-          </a:xfrm>
-          <a:prstGeom prst="rect">
-            <a:avLst/>
-          </a:prstGeom>
-          <a:noFill/>
-          <a:ln/>
-        </p:spPr>
-        <p:txBody>
-          <a:bodyPr wrap="square" lIns="0" tIns="0" rIns="0" bIns="0" rtlCol="0" anchor="ctr">
-            <a:normAutofit/>
-          </a:bodyPr>
-          <a:lstStyle/>
-          <a:p>
-            <a:pPr algn="ctr" indent="0" marL="0">
-              <a:buNone/>
-            </a:pPr>
-            <a:r>
-              <a:rPr lang="en-US" sz="3600" b="1" dirty="0">
-                <a:solidFill>
-                  <a:srgbClr val="990011"/>
-                </a:solidFill>
-                <a:latin typeface="Times New Roman" pitchFamily="34" charset="0"/>
-                <a:ea typeface="Times New Roman" pitchFamily="34" charset="-122"/>
-                <a:cs typeface="Times New Roman" pitchFamily="34" charset="-120"/>
-              </a:rPr>
-              <a:t>4. Types of Rainfall</a:t>
-            </a:r>
-            <a:endParaRPr lang="en-US" sz="3600" dirty="0"/>
-          </a:p>
-        </p:txBody>
-      </p:sp>
-      <p:sp>
-        <p:nvSpPr>
-          <p:cNvPr id="4" name="Text 2"/>
-          <p:cNvSpPr/>
-          <p:nvPr/>
-        </p:nvSpPr>
-        <p:spPr>
-          <a:xfrm>
-            <a:off x="365760" y="1783080"/>
-            <a:ext cx="6035040" cy="4617720"/>
-          </a:xfrm>
-          <a:prstGeom prst="rect">
-            <a:avLst/>
-          </a:prstGeom>
-          <a:noFill/>
-          <a:ln/>
-        </p:spPr>
-        <p:txBody>
-          <a:bodyPr wrap="square" lIns="0" tIns="0" rIns="0" bIns="0" rtlCol="0" anchor="t"/>
-          <a:lstStyle/>
-          <a:p>
-            <a:pPr algn="l" indent="0" marL="0">
-              <a:spcAft>
-                <a:spcPts val="800"/>
-              </a:spcAft>
-              <a:buNone/>
-            </a:pPr>
-            <a:r>
-              <a:rPr lang="en-US" sz="2800" i="1" dirty="0">
-                <a:solidFill>
-                  <a:srgbClr val="111111"/>
-                </a:solidFill>
-                <a:latin typeface="Times New Roman" pitchFamily="34" charset="0"/>
-                <a:ea typeface="Times New Roman" pitchFamily="34" charset="-122"/>
-                <a:cs typeface="Times New Roman" pitchFamily="34" charset="-120"/>
-              </a:rPr>
-              <a:t>Rainfall is classified into the following three types according to how the air is made to rise:</a:t>
-            </a:r>
-            <a:endParaRPr lang="en-US" sz="2800" dirty="0"/>
-          </a:p>
-          <a:p>
-            <a:pPr algn="l" indent="0" marL="0">
-              <a:spcAft>
-                <a:spcPts val="800"/>
-              </a:spcAft>
-              <a:buNone/>
-            </a:pPr>
-            <a:r>
-              <a:rPr lang="en-US" sz="2800" b="1" dirty="0">
-                <a:solidFill>
-                  <a:srgbClr val="111111"/>
-                </a:solidFill>
-                <a:latin typeface="Times New Roman" pitchFamily="34" charset="0"/>
-                <a:ea typeface="Times New Roman" pitchFamily="34" charset="-122"/>
-                <a:cs typeface="Times New Roman" pitchFamily="34" charset="-120"/>
-              </a:rPr>
-              <a:t>Convectional rainfall: </a:t>
-            </a:r>
-            <a:pPr algn="l" indent="0" marL="0">
-              <a:spcAft>
-                <a:spcPts val="800"/>
-              </a:spcAft>
-              <a:buNone/>
-            </a:pPr>
-            <a:r>
-              <a:rPr lang="en-US" sz="2800" dirty="0">
-                <a:solidFill>
-                  <a:srgbClr val="111111"/>
-                </a:solidFill>
-                <a:latin typeface="Times New Roman" pitchFamily="34" charset="0"/>
-                <a:ea typeface="Times New Roman" pitchFamily="34" charset="-122"/>
-                <a:cs typeface="Times New Roman" pitchFamily="34" charset="-120"/>
-              </a:rPr>
-              <a:t>Strong heating of the ground makes moist air rise quickly and form cumulonimbus clouds. It gives short, heavy afternoon storms with thunder, as in the equatorial regions and in Garoua in the rainy season.</a:t>
-            </a:r>
-            <a:endParaRPr lang="en-US" sz="2800" dirty="0"/>
-          </a:p>
-        </p:txBody>
-      </p:sp>
       <p:pic>
         <p:nvPicPr>
-          <p:cNvPr id="5" name="Image 0" descr="/home/claude/f4/img/v2/rainfall_types_big.png">    </p:cNvPr>
+          <p:cNvPr id="3" name="Image 0" descr="/home/claude/f4/img/minesec_sheet.png">    </p:cNvPr>
           <p:cNvPicPr>
             <a:picLocks noChangeAspect="1"/>
           </p:cNvPicPr>
@@ -21102,8 +20961,8 @@
         </p:blipFill>
         <p:spPr>
           <a:xfrm>
-            <a:off x="6537960" y="2849678"/>
-            <a:ext cx="5470855" cy="2137053"/>
+            <a:off x="0" y="658368"/>
+            <a:ext cx="2468880" cy="5833872"/>
           </a:xfrm>
           <a:prstGeom prst="rect">
             <a:avLst/>
@@ -21112,14 +20971,14 @@
       </p:pic>
       <p:sp>
         <p:nvSpPr>
-          <p:cNvPr id="6" name="Text 3"/>
+          <p:cNvPr id="4" name="Text 1"/>
           <p:cNvSpPr/>
           <p:nvPr/>
         </p:nvSpPr>
         <p:spPr>
           <a:xfrm>
-            <a:off x="6537960" y="6089904"/>
-            <a:ext cx="5470855" cy="347472"/>
+            <a:off x="2697480" y="1005840"/>
+            <a:ext cx="9174175" cy="731520"/>
           </a:xfrm>
           <a:prstGeom prst="rect">
             <a:avLst/>
@@ -21128,24 +20987,124 @@
           <a:ln/>
         </p:spPr>
         <p:txBody>
-          <a:bodyPr wrap="square" lIns="0" tIns="0" rIns="0" bIns="0" rtlCol="0" anchor="ctr"/>
+          <a:bodyPr wrap="square" lIns="0" tIns="0" rIns="0" bIns="0" rtlCol="0" anchor="ctr">
+            <a:normAutofit/>
+          </a:bodyPr>
           <a:lstStyle/>
           <a:p>
             <a:pPr algn="ctr" indent="0" marL="0">
               <a:buNone/>
             </a:pPr>
             <a:r>
-              <a:rPr lang="en-US" sz="1600" i="1" dirty="0">
-                <a:solidFill>
-                  <a:srgbClr val="555555"/>
+              <a:rPr lang="en-US" sz="3600" b="1" dirty="0">
+                <a:solidFill>
+                  <a:srgbClr val="990011"/>
                 </a:solidFill>
                 <a:latin typeface="Times New Roman" pitchFamily="34" charset="0"/>
                 <a:ea typeface="Times New Roman" pitchFamily="34" charset="-122"/>
                 <a:cs typeface="Times New Roman" pitchFamily="34" charset="-120"/>
               </a:rPr>
-              <a:t>Illustration: the three types of rainfall</a:t>
-            </a:r>
-            <a:endParaRPr lang="en-US" sz="1600" dirty="0"/>
+              <a:t>3. Forms of Precipitation</a:t>
+            </a:r>
+            <a:endParaRPr lang="en-US" sz="3600" dirty="0"/>
+          </a:p>
+        </p:txBody>
+      </p:sp>
+      <p:sp>
+        <p:nvSpPr>
+          <p:cNvPr id="5" name="Text 2"/>
+          <p:cNvSpPr/>
+          <p:nvPr/>
+        </p:nvSpPr>
+        <p:spPr>
+          <a:xfrm>
+            <a:off x="2697480" y="1737360"/>
+            <a:ext cx="9174175" cy="457200"/>
+          </a:xfrm>
+          <a:prstGeom prst="rect">
+            <a:avLst/>
+          </a:prstGeom>
+          <a:noFill/>
+          <a:ln/>
+        </p:spPr>
+        <p:txBody>
+          <a:bodyPr wrap="square" lIns="0" tIns="0" rIns="0" bIns="0" rtlCol="0" anchor="ctr"/>
+          <a:lstStyle/>
+          <a:p>
+            <a:pPr algn="l" indent="0" marL="0">
+              <a:buNone/>
+            </a:pPr>
+            <a:r>
+              <a:rPr lang="en-US" sz="3200" b="1" dirty="0">
+                <a:solidFill>
+                  <a:srgbClr val="990011"/>
+                </a:solidFill>
+                <a:latin typeface="Times New Roman" pitchFamily="34" charset="0"/>
+                <a:ea typeface="Times New Roman" pitchFamily="34" charset="-122"/>
+                <a:cs typeface="Times New Roman" pitchFamily="34" charset="-120"/>
+              </a:rPr>
+              <a:t>C) Solid Forms</a:t>
+            </a:r>
+            <a:endParaRPr lang="en-US" sz="3200" dirty="0"/>
+          </a:p>
+        </p:txBody>
+      </p:sp>
+      <p:sp>
+        <p:nvSpPr>
+          <p:cNvPr id="6" name="Text 3"/>
+          <p:cNvSpPr/>
+          <p:nvPr/>
+        </p:nvSpPr>
+        <p:spPr>
+          <a:xfrm>
+            <a:off x="2697480" y="2240280"/>
+            <a:ext cx="9174175" cy="4206240"/>
+          </a:xfrm>
+          <a:prstGeom prst="rect">
+            <a:avLst/>
+          </a:prstGeom>
+          <a:noFill/>
+          <a:ln/>
+        </p:spPr>
+        <p:txBody>
+          <a:bodyPr wrap="square" lIns="0" tIns="0" rIns="0" bIns="0" rtlCol="0" anchor="t"/>
+          <a:lstStyle/>
+          <a:p>
+            <a:pPr algn="l" indent="0" marL="0">
+              <a:spcAft>
+                <a:spcPts val="800"/>
+              </a:spcAft>
+              <a:buNone/>
+            </a:pPr>
+            <a:r>
+              <a:rPr lang="en-US" sz="4000" b="1" dirty="0">
+                <a:solidFill>
+                  <a:srgbClr val="111111"/>
+                </a:solidFill>
+                <a:latin typeface="Times New Roman" pitchFamily="34" charset="0"/>
+                <a:ea typeface="Times New Roman" pitchFamily="34" charset="-122"/>
+                <a:cs typeface="Times New Roman" pitchFamily="34" charset="-120"/>
+              </a:rPr>
+              <a:t>Sleet: </a:t>
+            </a:r>
+            <a:pPr algn="l" indent="0" marL="0">
+              <a:spcAft>
+                <a:spcPts val="800"/>
+              </a:spcAft>
+              <a:buNone/>
+            </a:pPr>
+            <a:r>
+              <a:rPr lang="en-US" sz="4000" dirty="0">
+                <a:solidFill>
+                  <a:srgbClr val="111111"/>
+                </a:solidFill>
+                <a:latin typeface="Times New Roman" pitchFamily="34" charset="0"/>
+                <a:ea typeface="Times New Roman" pitchFamily="34" charset="-122"/>
+                <a:cs typeface="Times New Roman" pitchFamily="34" charset="-120"/>
+              </a:rPr>
+              <a:t>Sleet is made of small pellets of ice formed when raindrops freeze as they fall through a cold layer of air near the ground. In Britain, the word also means a mixture of rain and snow.</a:t>
+            </a:r>
+            <a:endParaRPr lang="en-US" sz="4000" dirty="0"/>
           </a:p>
         </p:txBody>
       </p:sp>
@@ -21261,9 +21220,150 @@
           </a:p>
         </p:txBody>
       </p:sp>
+      <p:sp>
+        <p:nvSpPr>
+          <p:cNvPr id="3" name="Text 1"/>
+          <p:cNvSpPr/>
+          <p:nvPr/>
+        </p:nvSpPr>
+        <p:spPr>
+          <a:xfrm>
+            <a:off x="365760" y="1005840"/>
+            <a:ext cx="11460175" cy="731520"/>
+          </a:xfrm>
+          <a:prstGeom prst="rect">
+            <a:avLst/>
+          </a:prstGeom>
+          <a:noFill/>
+          <a:ln/>
+        </p:spPr>
+        <p:txBody>
+          <a:bodyPr wrap="square" lIns="0" tIns="0" rIns="0" bIns="0" rtlCol="0" anchor="ctr">
+            <a:normAutofit/>
+          </a:bodyPr>
+          <a:lstStyle/>
+          <a:p>
+            <a:pPr algn="ctr" indent="0" marL="0">
+              <a:buNone/>
+            </a:pPr>
+            <a:r>
+              <a:rPr lang="en-US" sz="3600" b="1" dirty="0">
+                <a:solidFill>
+                  <a:srgbClr val="990011"/>
+                </a:solidFill>
+                <a:latin typeface="Times New Roman" pitchFamily="34" charset="0"/>
+                <a:ea typeface="Times New Roman" pitchFamily="34" charset="-122"/>
+                <a:cs typeface="Times New Roman" pitchFamily="34" charset="-120"/>
+              </a:rPr>
+              <a:t>3. Forms of Precipitation</a:t>
+            </a:r>
+            <a:endParaRPr lang="en-US" sz="3600" dirty="0"/>
+          </a:p>
+        </p:txBody>
+      </p:sp>
+      <p:sp>
+        <p:nvSpPr>
+          <p:cNvPr id="4" name="Text 2"/>
+          <p:cNvSpPr/>
+          <p:nvPr/>
+        </p:nvSpPr>
+        <p:spPr>
+          <a:xfrm>
+            <a:off x="365760" y="1737360"/>
+            <a:ext cx="6035040" cy="457200"/>
+          </a:xfrm>
+          <a:prstGeom prst="rect">
+            <a:avLst/>
+          </a:prstGeom>
+          <a:noFill/>
+          <a:ln/>
+        </p:spPr>
+        <p:txBody>
+          <a:bodyPr wrap="square" lIns="0" tIns="0" rIns="0" bIns="0" rtlCol="0" anchor="ctr">
+            <a:normAutofit/>
+          </a:bodyPr>
+          <a:lstStyle/>
+          <a:p>
+            <a:pPr algn="l" indent="0" marL="0">
+              <a:buNone/>
+            </a:pPr>
+            <a:r>
+              <a:rPr lang="en-US" sz="3000" b="1" dirty="0">
+                <a:solidFill>
+                  <a:srgbClr val="990011"/>
+                </a:solidFill>
+                <a:latin typeface="Times New Roman" pitchFamily="34" charset="0"/>
+                <a:ea typeface="Times New Roman" pitchFamily="34" charset="-122"/>
+                <a:cs typeface="Times New Roman" pitchFamily="34" charset="-120"/>
+              </a:rPr>
+              <a:t>C) Solid Forms</a:t>
+            </a:r>
+            <a:endParaRPr lang="en-US" sz="3000" dirty="0"/>
+          </a:p>
+        </p:txBody>
+      </p:sp>
+      <p:sp>
+        <p:nvSpPr>
+          <p:cNvPr id="5" name="Text 3"/>
+          <p:cNvSpPr/>
+          <p:nvPr/>
+        </p:nvSpPr>
+        <p:spPr>
+          <a:xfrm>
+            <a:off x="365760" y="2240280"/>
+            <a:ext cx="6035040" cy="4160520"/>
+          </a:xfrm>
+          <a:prstGeom prst="rect">
+            <a:avLst/>
+          </a:prstGeom>
+          <a:noFill/>
+          <a:ln/>
+        </p:spPr>
+        <p:txBody>
+          <a:bodyPr wrap="square" lIns="0" tIns="0" rIns="0" bIns="0" rtlCol="0" anchor="t"/>
+          <a:lstStyle/>
+          <a:p>
+            <a:pPr algn="l" indent="0" marL="0">
+              <a:spcAft>
+                <a:spcPts val="800"/>
+              </a:spcAft>
+              <a:buNone/>
+            </a:pPr>
+            <a:r>
+              <a:rPr lang="en-US" sz="3200" b="1" dirty="0">
+                <a:solidFill>
+                  <a:srgbClr val="111111"/>
+                </a:solidFill>
+                <a:latin typeface="Times New Roman" pitchFamily="34" charset="0"/>
+                <a:ea typeface="Times New Roman" pitchFamily="34" charset="-122"/>
+                <a:cs typeface="Times New Roman" pitchFamily="34" charset="-120"/>
+              </a:rPr>
+              <a:t>Hail: </a:t>
+            </a:r>
+            <a:pPr algn="l" indent="0" marL="0">
+              <a:spcAft>
+                <a:spcPts val="800"/>
+              </a:spcAft>
+              <a:buNone/>
+            </a:pPr>
+            <a:r>
+              <a:rPr lang="en-US" sz="3200" dirty="0">
+                <a:solidFill>
+                  <a:srgbClr val="111111"/>
+                </a:solidFill>
+                <a:latin typeface="Times New Roman" pitchFamily="34" charset="0"/>
+                <a:ea typeface="Times New Roman" pitchFamily="34" charset="-122"/>
+                <a:cs typeface="Times New Roman" pitchFamily="34" charset="-120"/>
+              </a:rPr>
+              <a:t>Hailstones are balls of ice formed in cumulonimbus clouds, where strong up-currents carry drops up and down through freezing air. Each trip adds a layer of ice until the stone is too heavy and falls, damaging crops and roofs.</a:t>
+            </a:r>
+            <a:endParaRPr lang="en-US" sz="3200" dirty="0"/>
+          </a:p>
+        </p:txBody>
+      </p:sp>
       <p:pic>
         <p:nvPicPr>
-          <p:cNvPr id="3" name="Image 0" descr="/home/claude/f4/img/minesec_sheet.png">    </p:cNvPr>
+          <p:cNvPr id="6" name="Image 0" descr="/home/claude/f4/img/v2/lsa_hail.jpg">    </p:cNvPr>
           <p:cNvPicPr>
             <a:picLocks noChangeAspect="1"/>
           </p:cNvPicPr>
@@ -21277,8 +21377,8 @@
         </p:blipFill>
         <p:spPr>
           <a:xfrm>
-            <a:off x="0" y="658368"/>
-            <a:ext cx="2468880" cy="5833872"/>
+            <a:off x="6537960" y="2400897"/>
+            <a:ext cx="5470855" cy="3034615"/>
           </a:xfrm>
           <a:prstGeom prst="rect">
             <a:avLst/>
@@ -21287,14 +21387,14 @@
       </p:pic>
       <p:sp>
         <p:nvSpPr>
-          <p:cNvPr id="4" name="Text 1"/>
+          <p:cNvPr id="7" name="Text 4"/>
           <p:cNvSpPr/>
           <p:nvPr/>
         </p:nvSpPr>
         <p:spPr>
           <a:xfrm>
-            <a:off x="2697480" y="1005840"/>
-            <a:ext cx="9174175" cy="731520"/>
+            <a:off x="6537960" y="6089904"/>
+            <a:ext cx="5470855" cy="347472"/>
           </a:xfrm>
           <a:prstGeom prst="rect">
             <a:avLst/>
@@ -21303,85 +21403,24 @@
           <a:ln/>
         </p:spPr>
         <p:txBody>
-          <a:bodyPr wrap="square" lIns="0" tIns="0" rIns="0" bIns="0" rtlCol="0" anchor="ctr">
-            <a:normAutofit/>
-          </a:bodyPr>
+          <a:bodyPr wrap="square" lIns="0" tIns="0" rIns="0" bIns="0" rtlCol="0" anchor="ctr"/>
           <a:lstStyle/>
           <a:p>
             <a:pPr algn="ctr" indent="0" marL="0">
               <a:buNone/>
             </a:pPr>
             <a:r>
-              <a:rPr lang="en-US" sz="3600" b="1" dirty="0">
-                <a:solidFill>
-                  <a:srgbClr val="990011"/>
+              <a:rPr lang="en-US" sz="1600" i="1" dirty="0">
+                <a:solidFill>
+                  <a:srgbClr val="555555"/>
                 </a:solidFill>
                 <a:latin typeface="Times New Roman" pitchFamily="34" charset="0"/>
                 <a:ea typeface="Times New Roman" pitchFamily="34" charset="-122"/>
                 <a:cs typeface="Times New Roman" pitchFamily="34" charset="-120"/>
               </a:rPr>
-              <a:t>4. Types of Rainfall</a:t>
-            </a:r>
-            <a:endParaRPr lang="en-US" sz="3600" dirty="0"/>
-          </a:p>
-        </p:txBody>
-      </p:sp>
-      <p:sp>
-        <p:nvSpPr>
-          <p:cNvPr id="5" name="Text 2"/>
-          <p:cNvSpPr/>
-          <p:nvPr/>
-        </p:nvSpPr>
-        <p:spPr>
-          <a:xfrm>
-            <a:off x="2697480" y="1783080"/>
-            <a:ext cx="9174175" cy="4663440"/>
-          </a:xfrm>
-          <a:prstGeom prst="rect">
-            <a:avLst/>
-          </a:prstGeom>
-          <a:noFill/>
-          <a:ln/>
-        </p:spPr>
-        <p:txBody>
-          <a:bodyPr wrap="square" lIns="0" tIns="0" rIns="0" bIns="0" rtlCol="0" anchor="t"/>
-          <a:lstStyle/>
-          <a:p>
-            <a:pPr algn="l" indent="0" marL="0">
-              <a:spcAft>
-                <a:spcPts val="800"/>
-              </a:spcAft>
-              <a:buNone/>
-            </a:pPr>
-            <a:r>
-              <a:rPr lang="en-US" sz="4000" b="1" dirty="0">
-                <a:solidFill>
-                  <a:srgbClr val="111111"/>
-                </a:solidFill>
-                <a:latin typeface="Times New Roman" pitchFamily="34" charset="0"/>
-                <a:ea typeface="Times New Roman" pitchFamily="34" charset="-122"/>
-                <a:cs typeface="Times New Roman" pitchFamily="34" charset="-120"/>
-              </a:rPr>
-              <a:t>Orographic (relief) rainfall: </a:t>
-            </a:r>
-            <a:pPr algn="l" indent="0" marL="0">
-              <a:spcAft>
-                <a:spcPts val="800"/>
-              </a:spcAft>
-              <a:buNone/>
-            </a:pPr>
-            <a:r>
-              <a:rPr lang="en-US" sz="4000" dirty="0">
-                <a:solidFill>
-                  <a:srgbClr val="111111"/>
-                </a:solidFill>
-                <a:latin typeface="Times New Roman" pitchFamily="34" charset="0"/>
-                <a:ea typeface="Times New Roman" pitchFamily="34" charset="-122"/>
-                <a:cs typeface="Times New Roman" pitchFamily="34" charset="-120"/>
-              </a:rPr>
-              <a:t>Moist winds from the sea are forced to rise over mountains, cool and give heavy rain on the windward side. The leeward side receives little rain and is called a rain shadow, as on the eastern side of Mount Cameroon.</a:t>
-            </a:r>
-            <a:endParaRPr lang="en-US" sz="4000" dirty="0"/>
+              <a:t>Illustration: hailstones</a:t>
+            </a:r>
+            <a:endParaRPr lang="en-US" sz="1600" dirty="0"/>
           </a:p>
         </p:txBody>
       </p:sp>
@@ -21497,9 +21536,150 @@
           </a:p>
         </p:txBody>
       </p:sp>
+      <p:sp>
+        <p:nvSpPr>
+          <p:cNvPr id="3" name="Text 1"/>
+          <p:cNvSpPr/>
+          <p:nvPr/>
+        </p:nvSpPr>
+        <p:spPr>
+          <a:xfrm>
+            <a:off x="365760" y="1005840"/>
+            <a:ext cx="11460175" cy="731520"/>
+          </a:xfrm>
+          <a:prstGeom prst="rect">
+            <a:avLst/>
+          </a:prstGeom>
+          <a:noFill/>
+          <a:ln/>
+        </p:spPr>
+        <p:txBody>
+          <a:bodyPr wrap="square" lIns="0" tIns="0" rIns="0" bIns="0" rtlCol="0" anchor="ctr">
+            <a:normAutofit/>
+          </a:bodyPr>
+          <a:lstStyle/>
+          <a:p>
+            <a:pPr algn="ctr" indent="0" marL="0">
+              <a:buNone/>
+            </a:pPr>
+            <a:r>
+              <a:rPr lang="en-US" sz="3600" b="1" dirty="0">
+                <a:solidFill>
+                  <a:srgbClr val="990011"/>
+                </a:solidFill>
+                <a:latin typeface="Times New Roman" pitchFamily="34" charset="0"/>
+                <a:ea typeface="Times New Roman" pitchFamily="34" charset="-122"/>
+                <a:cs typeface="Times New Roman" pitchFamily="34" charset="-120"/>
+              </a:rPr>
+              <a:t>3. Forms of Precipitation</a:t>
+            </a:r>
+            <a:endParaRPr lang="en-US" sz="3600" dirty="0"/>
+          </a:p>
+        </p:txBody>
+      </p:sp>
+      <p:sp>
+        <p:nvSpPr>
+          <p:cNvPr id="4" name="Text 2"/>
+          <p:cNvSpPr/>
+          <p:nvPr/>
+        </p:nvSpPr>
+        <p:spPr>
+          <a:xfrm>
+            <a:off x="365760" y="1737360"/>
+            <a:ext cx="6035040" cy="457200"/>
+          </a:xfrm>
+          <a:prstGeom prst="rect">
+            <a:avLst/>
+          </a:prstGeom>
+          <a:noFill/>
+          <a:ln/>
+        </p:spPr>
+        <p:txBody>
+          <a:bodyPr wrap="square" lIns="0" tIns="0" rIns="0" bIns="0" rtlCol="0" anchor="ctr">
+            <a:normAutofit/>
+          </a:bodyPr>
+          <a:lstStyle/>
+          <a:p>
+            <a:pPr algn="l" indent="0" marL="0">
+              <a:buNone/>
+            </a:pPr>
+            <a:r>
+              <a:rPr lang="en-US" sz="3000" b="1" dirty="0">
+                <a:solidFill>
+                  <a:srgbClr val="990011"/>
+                </a:solidFill>
+                <a:latin typeface="Times New Roman" pitchFamily="34" charset="0"/>
+                <a:ea typeface="Times New Roman" pitchFamily="34" charset="-122"/>
+                <a:cs typeface="Times New Roman" pitchFamily="34" charset="-120"/>
+              </a:rPr>
+              <a:t>C) Solid Forms</a:t>
+            </a:r>
+            <a:endParaRPr lang="en-US" sz="3000" dirty="0"/>
+          </a:p>
+        </p:txBody>
+      </p:sp>
+      <p:sp>
+        <p:nvSpPr>
+          <p:cNvPr id="5" name="Text 3"/>
+          <p:cNvSpPr/>
+          <p:nvPr/>
+        </p:nvSpPr>
+        <p:spPr>
+          <a:xfrm>
+            <a:off x="365760" y="2240280"/>
+            <a:ext cx="6035040" cy="4160520"/>
+          </a:xfrm>
+          <a:prstGeom prst="rect">
+            <a:avLst/>
+          </a:prstGeom>
+          <a:noFill/>
+          <a:ln/>
+        </p:spPr>
+        <p:txBody>
+          <a:bodyPr wrap="square" lIns="0" tIns="0" rIns="0" bIns="0" rtlCol="0" anchor="t"/>
+          <a:lstStyle/>
+          <a:p>
+            <a:pPr algn="l" indent="0" marL="0">
+              <a:spcAft>
+                <a:spcPts val="800"/>
+              </a:spcAft>
+              <a:buNone/>
+            </a:pPr>
+            <a:r>
+              <a:rPr lang="en-US" sz="3200" b="1" dirty="0">
+                <a:solidFill>
+                  <a:srgbClr val="111111"/>
+                </a:solidFill>
+                <a:latin typeface="Times New Roman" pitchFamily="34" charset="0"/>
+                <a:ea typeface="Times New Roman" pitchFamily="34" charset="-122"/>
+                <a:cs typeface="Times New Roman" pitchFamily="34" charset="-120"/>
+              </a:rPr>
+              <a:t>Frost and rime: </a:t>
+            </a:r>
+            <a:pPr algn="l" indent="0" marL="0">
+              <a:spcAft>
+                <a:spcPts val="800"/>
+              </a:spcAft>
+              <a:buNone/>
+            </a:pPr>
+            <a:r>
+              <a:rPr lang="en-US" sz="3200" dirty="0">
+                <a:solidFill>
+                  <a:srgbClr val="111111"/>
+                </a:solidFill>
+                <a:latin typeface="Times New Roman" pitchFamily="34" charset="0"/>
+                <a:ea typeface="Times New Roman" pitchFamily="34" charset="-122"/>
+                <a:cs typeface="Times New Roman" pitchFamily="34" charset="-120"/>
+              </a:rPr>
+              <a:t>Frost is a white layer of ice crystals formed when water vapour changes directly into ice on surfaces below 0 °C. Rime forms when fog droplets freeze on contact with cold trees, wires and rocks.</a:t>
+            </a:r>
+            <a:endParaRPr lang="en-US" sz="3200" dirty="0"/>
+          </a:p>
+        </p:txBody>
+      </p:sp>
       <p:pic>
         <p:nvPicPr>
-          <p:cNvPr id="3" name="Image 0" descr="/home/claude/f4/img/minesec_sheet.png">    </p:cNvPr>
+          <p:cNvPr id="6" name="Image 0" descr="/home/claude/f4/img/v2/lsa_frost.jpg">    </p:cNvPr>
           <p:cNvPicPr>
             <a:picLocks noChangeAspect="1"/>
           </p:cNvPicPr>
@@ -21513,8 +21693,8 @@
         </p:blipFill>
         <p:spPr>
           <a:xfrm>
-            <a:off x="0" y="658368"/>
-            <a:ext cx="3840480" cy="5833872"/>
+            <a:off x="6537960" y="2400897"/>
+            <a:ext cx="5470855" cy="3034615"/>
           </a:xfrm>
           <a:prstGeom prst="rect">
             <a:avLst/>
@@ -21523,14 +21703,14 @@
       </p:pic>
       <p:sp>
         <p:nvSpPr>
-          <p:cNvPr id="4" name="Text 1"/>
+          <p:cNvPr id="7" name="Text 4"/>
           <p:cNvSpPr/>
           <p:nvPr/>
         </p:nvSpPr>
         <p:spPr>
           <a:xfrm>
-            <a:off x="4069080" y="1005840"/>
-            <a:ext cx="7802575" cy="731520"/>
+            <a:off x="6537960" y="6089904"/>
+            <a:ext cx="5470855" cy="347472"/>
           </a:xfrm>
           <a:prstGeom prst="rect">
             <a:avLst/>
@@ -21539,85 +21719,24 @@
           <a:ln/>
         </p:spPr>
         <p:txBody>
-          <a:bodyPr wrap="square" lIns="0" tIns="0" rIns="0" bIns="0" rtlCol="0" anchor="ctr">
-            <a:normAutofit/>
-          </a:bodyPr>
+          <a:bodyPr wrap="square" lIns="0" tIns="0" rIns="0" bIns="0" rtlCol="0" anchor="ctr"/>
           <a:lstStyle/>
           <a:p>
             <a:pPr algn="ctr" indent="0" marL="0">
               <a:buNone/>
             </a:pPr>
             <a:r>
-              <a:rPr lang="en-US" sz="3600" b="1" dirty="0">
-                <a:solidFill>
-                  <a:srgbClr val="990011"/>
+              <a:rPr lang="en-US" sz="1600" i="1" dirty="0">
+                <a:solidFill>
+                  <a:srgbClr val="555555"/>
                 </a:solidFill>
                 <a:latin typeface="Times New Roman" pitchFamily="34" charset="0"/>
                 <a:ea typeface="Times New Roman" pitchFamily="34" charset="-122"/>
                 <a:cs typeface="Times New Roman" pitchFamily="34" charset="-120"/>
               </a:rPr>
-              <a:t>4. Types of Rainfall</a:t>
-            </a:r>
-            <a:endParaRPr lang="en-US" sz="3600" dirty="0"/>
-          </a:p>
-        </p:txBody>
-      </p:sp>
-      <p:sp>
-        <p:nvSpPr>
-          <p:cNvPr id="5" name="Text 2"/>
-          <p:cNvSpPr/>
-          <p:nvPr/>
-        </p:nvSpPr>
-        <p:spPr>
-          <a:xfrm>
-            <a:off x="4069080" y="1783080"/>
-            <a:ext cx="7802575" cy="4663440"/>
-          </a:xfrm>
-          <a:prstGeom prst="rect">
-            <a:avLst/>
-          </a:prstGeom>
-          <a:noFill/>
-          <a:ln/>
-        </p:spPr>
-        <p:txBody>
-          <a:bodyPr wrap="square" lIns="0" tIns="0" rIns="0" bIns="0" rtlCol="0" anchor="t"/>
-          <a:lstStyle/>
-          <a:p>
-            <a:pPr algn="l" indent="0" marL="0">
-              <a:spcAft>
-                <a:spcPts val="800"/>
-              </a:spcAft>
-              <a:buNone/>
-            </a:pPr>
-            <a:r>
-              <a:rPr lang="en-US" sz="4000" b="1" dirty="0">
-                <a:solidFill>
-                  <a:srgbClr val="111111"/>
-                </a:solidFill>
-                <a:latin typeface="Times New Roman" pitchFamily="34" charset="0"/>
-                <a:ea typeface="Times New Roman" pitchFamily="34" charset="-122"/>
-                <a:cs typeface="Times New Roman" pitchFamily="34" charset="-120"/>
-              </a:rPr>
-              <a:t>Cyclonic (frontal) rainfall: </a:t>
-            </a:r>
-            <a:pPr algn="l" indent="0" marL="0">
-              <a:spcAft>
-                <a:spcPts val="800"/>
-              </a:spcAft>
-              <a:buNone/>
-            </a:pPr>
-            <a:r>
-              <a:rPr lang="en-US" sz="4000" dirty="0">
-                <a:solidFill>
-                  <a:srgbClr val="111111"/>
-                </a:solidFill>
-                <a:latin typeface="Times New Roman" pitchFamily="34" charset="0"/>
-                <a:ea typeface="Times New Roman" pitchFamily="34" charset="-122"/>
-                <a:cs typeface="Times New Roman" pitchFamily="34" charset="-120"/>
-              </a:rPr>
-              <a:t>Where a warm air mass meets a cold one, the lighter warm air rises slowly over the cold air along a front. It gives long periods of steady rain, as in the temperate regions of Europe.</a:t>
-            </a:r>
-            <a:endParaRPr lang="en-US" sz="4000" dirty="0"/>
+              <a:t>Illustration: frost</a:t>
+            </a:r>
+            <a:endParaRPr lang="en-US" sz="1600" dirty="0"/>
           </a:p>
         </p:txBody>
       </p:sp>
@@ -25714,7 +25833,7 @@
                           <a:ea typeface="Calibri" pitchFamily="34" charset="-122"/>
                           <a:cs typeface="Calibri" pitchFamily="34" charset="-120"/>
                         </a:rPr>
-                        <a:t>DEFINITIONS; How Clouds Form; Classification and Associated Weather; Fog and Mist; Solid Forms; Liquid Forms; Types of Rainfall.</a:t>
+                        <a:t>DEFINITIONS; How Clouds Form; Classification and Associated Weather; Fog and Mist; Liquid Forms; Types of Rainfall; Solid Forms.</a:t>
                       </a:r>
                       <a:endParaRPr lang="en-US" sz="1600" dirty="0">
                         <a:latin typeface="Calibri" charset="0"/>
@@ -27207,7 +27326,7 @@
                 <a:ea typeface="Calibri" pitchFamily="34" charset="-122"/>
                 <a:cs typeface="Calibri" pitchFamily="34" charset="-120"/>
               </a:rPr>
-              <a:t>Photo, board summary (Snow): “Peaceful Winter” by `James Wheeler, CC BY-NC-SA 2.0, via Flickr (https://www.flickr.com/photos/24128704@N08/25673217581)</a:t>
+              <a:t>Photo, board summary (Rainfall (formation process)): “Heavy rain. Johannesburg, South Africa” by varfolomeev, CC BY-NC 2.0, via Flickr (https://www.flickr.com/photos/45427632@N02/49745935146)</a:t>
             </a:r>
             <a:endParaRPr lang="en-US" sz="1800" dirty="0"/>
           </a:p>
@@ -27228,7 +27347,7 @@
                 <a:ea typeface="Calibri" pitchFamily="34" charset="-122"/>
                 <a:cs typeface="Calibri" pitchFamily="34" charset="-120"/>
               </a:rPr>
-              <a:t>Photo, board summary (Frost and rime): “Frosty Morning” by Tom Gill., CC BY-NC-ND 2.0, via Flickr (https://www.flickr.com/photos/10199807@N00/4283143427)</a:t>
+              <a:t>Photo, board summary (Snow): “Peaceful Winter” by `James Wheeler, CC BY-NC-SA 2.0, via Flickr (https://www.flickr.com/photos/24128704@N08/25673217581)</a:t>
             </a:r>
             <a:endParaRPr lang="en-US" sz="1800" dirty="0"/>
           </a:p>
@@ -27249,7 +27368,7 @@
                 <a:ea typeface="Calibri" pitchFamily="34" charset="-122"/>
                 <a:cs typeface="Calibri" pitchFamily="34" charset="-120"/>
               </a:rPr>
-              <a:t>Photo, board summary (Rainfall (formation process)): “Heavy rain. Johannesburg, South Africa” by varfolomeev, CC BY-NC 2.0, via Flickr (https://www.flickr.com/photos/45427632@N02/49745935146)</a:t>
+              <a:t>Photo, board summary (Frost and rime): “Frosty Morning” by Tom Gill., CC BY-NC-ND 2.0, via Flickr (https://www.flickr.com/photos/10199807@N00/4283143427)</a:t>
             </a:r>
             <a:endParaRPr lang="en-US" sz="1800" dirty="0"/>
           </a:p>
